--- a/notebooks/Model_varying_mixing/Schematic.pptx
+++ b/notebooks/Model_varying_mixing/Schematic.pptx
@@ -131,7 +131,7 @@
 <file path=ppt/revisionInfo.xml><?xml version="1.0" encoding="utf-8"?>
 <p1510:revInfo xmlns:a="http://schemas.openxmlformats.org/drawingml/2006/main" xmlns:r="http://schemas.openxmlformats.org/officeDocument/2006/relationships" xmlns:p1510="http://schemas.microsoft.com/office/powerpoint/2015/10/main">
   <p1510:revLst>
-    <p1510:client id="{F9FD2602-ACE2-404E-B12E-A4182221B4C9}" v="315" dt="2026-08-06T09:25:08.951"/>
+    <p1510:client id="{F9FD2602-ACE2-404E-B12E-A4182221B4C9}" v="333" dt="2026-08-06T14:29:43.674"/>
   </p1510:revLst>
 </p1510:revInfo>
 </file>
@@ -141,12 +141,12 @@
   <pc:docChgLst>
     <pc:chgData name="Tomy Doda" userId="023a5e24-f089-4e82-9406-b78528d4275d" providerId="ADAL" clId="{46B57ECA-90EE-4DEE-B7FC-CF6B2BB407ED}"/>
     <pc:docChg chg="modSld">
-      <pc:chgData name="Tomy Doda" userId="023a5e24-f089-4e82-9406-b78528d4275d" providerId="ADAL" clId="{46B57ECA-90EE-4DEE-B7FC-CF6B2BB407ED}" dt="2026-08-06T09:25:08.951" v="314" actId="165"/>
+      <pc:chgData name="Tomy Doda" userId="023a5e24-f089-4e82-9406-b78528d4275d" providerId="ADAL" clId="{46B57ECA-90EE-4DEE-B7FC-CF6B2BB407ED}" dt="2026-08-06T14:29:52.385" v="334" actId="1076"/>
       <pc:docMkLst>
         <pc:docMk/>
       </pc:docMkLst>
-      <pc:sldChg chg="delSp modSp">
-        <pc:chgData name="Tomy Doda" userId="023a5e24-f089-4e82-9406-b78528d4275d" providerId="ADAL" clId="{46B57ECA-90EE-4DEE-B7FC-CF6B2BB407ED}" dt="2026-08-06T09:25:08.951" v="314" actId="165"/>
+      <pc:sldChg chg="delSp modSp mod">
+        <pc:chgData name="Tomy Doda" userId="023a5e24-f089-4e82-9406-b78528d4275d" providerId="ADAL" clId="{46B57ECA-90EE-4DEE-B7FC-CF6B2BB407ED}" dt="2026-08-06T14:29:52.385" v="334" actId="1076"/>
         <pc:sldMkLst>
           <pc:docMk/>
           <pc:sldMk cId="983911713" sldId="421"/>
@@ -208,7 +208,7 @@
           </ac:spMkLst>
         </pc:spChg>
         <pc:spChg chg="mod">
-          <ac:chgData name="Tomy Doda" userId="023a5e24-f089-4e82-9406-b78528d4275d" providerId="ADAL" clId="{46B57ECA-90EE-4DEE-B7FC-CF6B2BB407ED}" dt="2026-08-06T09:23:58.527" v="311" actId="255"/>
+          <ac:chgData name="Tomy Doda" userId="023a5e24-f089-4e82-9406-b78528d4275d" providerId="ADAL" clId="{46B57ECA-90EE-4DEE-B7FC-CF6B2BB407ED}" dt="2026-08-06T14:29:52.385" v="334" actId="1076"/>
           <ac:spMkLst>
             <pc:docMk/>
             <pc:sldMk cId="983911713" sldId="421"/>
@@ -7175,8 +7175,8 @@
           </a:p>
         </p:txBody>
       </p:sp>
-      <mc:AlternateContent xmlns:mc="http://schemas.openxmlformats.org/markup-compatibility/2006">
-        <mc:Choice xmlns:a14="http://schemas.microsoft.com/office/drawing/2010/main" Requires="a14">
+      <mc:AlternateContent xmlns:mc="http://schemas.openxmlformats.org/markup-compatibility/2006" xmlns:a14="http://schemas.microsoft.com/office/drawing/2010/main">
+        <mc:Choice Requires="a14">
           <p:sp>
             <p:nvSpPr>
               <p:cNvPr id="16" name="TextBox 15">
@@ -7355,7 +7355,7 @@
             </p:txBody>
           </p:sp>
         </mc:Choice>
-        <mc:Fallback>
+        <mc:Fallback xmlns="">
           <p:sp>
             <p:nvSpPr>
               <p:cNvPr id="16" name="TextBox 15">
@@ -7416,8 +7416,8 @@
             </p:nvSpPr>
             <p:spPr>
               <a:xfrm>
-                <a:off x="-428812" y="467296"/>
-                <a:ext cx="1970363" cy="423770"/>
+                <a:off x="753759" y="570475"/>
+                <a:ext cx="2950570" cy="423770"/>
               </a:xfrm>
               <a:prstGeom prst="rect">
                 <a:avLst/>
@@ -7437,17 +7437,59 @@
                       <m:jc m:val="centerGroup"/>
                     </m:oMathParaPr>
                     <m:oMath xmlns:m="http://schemas.openxmlformats.org/officeDocument/2006/math">
+                      <m:sSub>
+                        <m:sSubPr>
+                          <m:ctrlPr>
+                            <a:rPr lang="fr-CH" sz="2000" b="0" i="1" smtClean="0">
+                              <a:latin typeface="Cambria Math" panose="02040503050406030204" pitchFamily="18" charset="0"/>
+                            </a:rPr>
+                          </m:ctrlPr>
+                        </m:sSubPr>
+                        <m:e>
+                          <m:r>
+                            <a:rPr lang="fr-CH" sz="2000" b="0" i="1" smtClean="0">
+                              <a:latin typeface="Cambria Math" panose="02040503050406030204" pitchFamily="18" charset="0"/>
+                            </a:rPr>
+                            <m:t>𝑀</m:t>
+                          </m:r>
+                        </m:e>
+                        <m:sub>
+                          <m:r>
+                            <a:rPr lang="fr-CH" sz="2000" b="0" i="1" smtClean="0">
+                              <a:latin typeface="Cambria Math" panose="02040503050406030204" pitchFamily="18" charset="0"/>
+                            </a:rPr>
+                            <m:t>𝑜𝑢𝑡</m:t>
+                          </m:r>
+                        </m:sub>
+                      </m:sSub>
+                      <m:d>
+                        <m:dPr>
+                          <m:ctrlPr>
+                            <a:rPr lang="fr-CH" sz="2000" b="0" i="1" smtClean="0">
+                              <a:latin typeface="Cambria Math" panose="02040503050406030204" pitchFamily="18" charset="0"/>
+                            </a:rPr>
+                          </m:ctrlPr>
+                        </m:dPr>
+                        <m:e>
+                          <m:r>
+                            <a:rPr lang="fr-CH" sz="2000" b="0" i="1" smtClean="0">
+                              <a:latin typeface="Cambria Math" panose="02040503050406030204" pitchFamily="18" charset="0"/>
+                            </a:rPr>
+                            <m:t>𝑡</m:t>
+                          </m:r>
+                        </m:e>
+                      </m:d>
+                      <m:r>
+                        <a:rPr lang="fr-CH" sz="2000" b="0" i="1" smtClean="0">
+                          <a:latin typeface="Cambria Math" panose="02040503050406030204" pitchFamily="18" charset="0"/>
+                        </a:rPr>
+                        <m:t>=</m:t>
+                      </m:r>
                       <m:r>
                         <a:rPr lang="fr-CH" sz="2000" b="0" i="1" smtClean="0">
                           <a:latin typeface="Cambria Math" panose="02040503050406030204" pitchFamily="18" charset="0"/>
                         </a:rPr>
                         <m:t>𝑄</m:t>
-                      </m:r>
-                      <m:r>
-                        <a:rPr lang="fr-CH" sz="2000" b="0" i="1" smtClean="0">
-                          <a:latin typeface="Cambria Math" panose="02040503050406030204" pitchFamily="18" charset="0"/>
-                        </a:rPr>
-                        <m:t>, </m:t>
                       </m:r>
                       <m:sSub>
                         <m:sSubPr>
@@ -7517,8 +7559,8 @@
             </p:nvSpPr>
             <p:spPr>
               <a:xfrm>
-                <a:off x="-428812" y="467296"/>
-                <a:ext cx="1970363" cy="423770"/>
+                <a:off x="753759" y="570475"/>
+                <a:ext cx="2950570" cy="423770"/>
               </a:xfrm>
               <a:prstGeom prst="rect">
                 <a:avLst/>
@@ -7545,8 +7587,8 @@
           </p:sp>
         </mc:Fallback>
       </mc:AlternateContent>
-      <mc:AlternateContent xmlns:mc="http://schemas.openxmlformats.org/markup-compatibility/2006">
-        <mc:Choice xmlns:a14="http://schemas.microsoft.com/office/drawing/2010/main" Requires="a14">
+      <mc:AlternateContent xmlns:mc="http://schemas.openxmlformats.org/markup-compatibility/2006" xmlns:a14="http://schemas.microsoft.com/office/drawing/2010/main">
+        <mc:Choice Requires="a14">
           <p:sp>
             <p:nvSpPr>
               <p:cNvPr id="19" name="TextBox 18">
@@ -7632,7 +7674,7 @@
             </p:txBody>
           </p:sp>
         </mc:Choice>
-        <mc:Fallback>
+        <mc:Fallback xmlns="">
           <p:sp>
             <p:nvSpPr>
               <p:cNvPr id="19" name="TextBox 18">
@@ -7677,8 +7719,8 @@
           </p:sp>
         </mc:Fallback>
       </mc:AlternateContent>
-      <mc:AlternateContent xmlns:mc="http://schemas.openxmlformats.org/markup-compatibility/2006">
-        <mc:Choice xmlns:a14="http://schemas.microsoft.com/office/drawing/2010/main" Requires="a14">
+      <mc:AlternateContent xmlns:mc="http://schemas.openxmlformats.org/markup-compatibility/2006" xmlns:a14="http://schemas.microsoft.com/office/drawing/2010/main">
+        <mc:Choice Requires="a14">
           <p:sp>
             <p:nvSpPr>
               <p:cNvPr id="20" name="TextBox 19">
@@ -7764,7 +7806,7 @@
             </p:txBody>
           </p:sp>
         </mc:Choice>
-        <mc:Fallback>
+        <mc:Fallback xmlns="">
           <p:sp>
             <p:nvSpPr>
               <p:cNvPr id="20" name="TextBox 19">
@@ -7851,8 +7893,8 @@
           </a:fontRef>
         </p:style>
       </p:cxnSp>
-      <mc:AlternateContent xmlns:mc="http://schemas.openxmlformats.org/markup-compatibility/2006">
-        <mc:Choice xmlns:a14="http://schemas.microsoft.com/office/drawing/2010/main" Requires="a14">
+      <mc:AlternateContent xmlns:mc="http://schemas.openxmlformats.org/markup-compatibility/2006" xmlns:a14="http://schemas.microsoft.com/office/drawing/2010/main">
+        <mc:Choice Requires="a14">
           <p:sp>
             <p:nvSpPr>
               <p:cNvPr id="22" name="TextBox 21">
@@ -7939,7 +7981,7 @@
             </p:txBody>
           </p:sp>
         </mc:Choice>
-        <mc:Fallback>
+        <mc:Fallback xmlns="">
           <p:sp>
             <p:nvSpPr>
               <p:cNvPr id="22" name="TextBox 21">
@@ -8030,8 +8072,8 @@
           </a:p>
         </p:txBody>
       </p:sp>
-      <mc:AlternateContent xmlns:mc="http://schemas.openxmlformats.org/markup-compatibility/2006">
-        <mc:Choice xmlns:a14="http://schemas.microsoft.com/office/drawing/2010/main" Requires="a14">
+      <mc:AlternateContent xmlns:mc="http://schemas.openxmlformats.org/markup-compatibility/2006" xmlns:a14="http://schemas.microsoft.com/office/drawing/2010/main">
+        <mc:Choice Requires="a14">
           <p:sp>
             <p:nvSpPr>
               <p:cNvPr id="28" name="TextBox 27">
@@ -8233,7 +8275,7 @@
             </p:txBody>
           </p:sp>
         </mc:Choice>
-        <mc:Fallback>
+        <mc:Fallback xmlns="">
           <p:sp>
             <p:nvSpPr>
               <p:cNvPr id="28" name="TextBox 27">
@@ -8332,8 +8374,8 @@
           </a:p>
         </p:txBody>
       </p:sp>
-      <mc:AlternateContent xmlns:mc="http://schemas.openxmlformats.org/markup-compatibility/2006">
-        <mc:Choice xmlns:a14="http://schemas.microsoft.com/office/drawing/2010/main" Requires="a14">
+      <mc:AlternateContent xmlns:mc="http://schemas.openxmlformats.org/markup-compatibility/2006" xmlns:a14="http://schemas.microsoft.com/office/drawing/2010/main">
+        <mc:Choice Requires="a14">
           <p:sp>
             <p:nvSpPr>
               <p:cNvPr id="32" name="TextBox 31">
@@ -8565,7 +8607,7 @@
             </p:txBody>
           </p:sp>
         </mc:Choice>
-        <mc:Fallback>
+        <mc:Fallback xmlns="">
           <p:sp>
             <p:nvSpPr>
               <p:cNvPr id="32" name="TextBox 31">
@@ -8610,8 +8652,8 @@
           </p:sp>
         </mc:Fallback>
       </mc:AlternateContent>
-      <mc:AlternateContent xmlns:mc="http://schemas.openxmlformats.org/markup-compatibility/2006">
-        <mc:Choice xmlns:a14="http://schemas.microsoft.com/office/drawing/2010/main" Requires="a14">
+      <mc:AlternateContent xmlns:mc="http://schemas.openxmlformats.org/markup-compatibility/2006" xmlns:a14="http://schemas.microsoft.com/office/drawing/2010/main">
+        <mc:Choice Requires="a14">
           <p:sp>
             <p:nvSpPr>
               <p:cNvPr id="34" name="TextBox 33">
@@ -9230,7 +9272,7 @@
             </p:txBody>
           </p:sp>
         </mc:Choice>
-        <mc:Fallback>
+        <mc:Fallback xmlns="">
           <p:sp>
             <p:nvSpPr>
               <p:cNvPr id="34" name="TextBox 33">
@@ -9275,8 +9317,8 @@
           </p:sp>
         </mc:Fallback>
       </mc:AlternateContent>
-      <mc:AlternateContent xmlns:mc="http://schemas.openxmlformats.org/markup-compatibility/2006">
-        <mc:Choice xmlns:a14="http://schemas.microsoft.com/office/drawing/2010/main" Requires="a14">
+      <mc:AlternateContent xmlns:mc="http://schemas.openxmlformats.org/markup-compatibility/2006" xmlns:a14="http://schemas.microsoft.com/office/drawing/2010/main">
+        <mc:Choice Requires="a14">
           <p:sp>
             <p:nvSpPr>
               <p:cNvPr id="36" name="TextBox 35">
@@ -9496,7 +9538,7 @@
             </p:txBody>
           </p:sp>
         </mc:Choice>
-        <mc:Fallback>
+        <mc:Fallback xmlns="">
           <p:sp>
             <p:nvSpPr>
               <p:cNvPr id="36" name="TextBox 35">

--- a/notebooks/Model_varying_mixing/Schematic.pptx
+++ b/notebooks/Model_varying_mixing/Schematic.pptx
@@ -6,10 +6,11 @@
     <p:sldMasterId id="2147483720" r:id="rId2"/>
   </p:sldMasterIdLst>
   <p:notesMasterIdLst>
-    <p:notesMasterId r:id="rId4"/>
+    <p:notesMasterId r:id="rId5"/>
   </p:notesMasterIdLst>
   <p:sldIdLst>
     <p:sldId id="421" r:id="rId3"/>
+    <p:sldId id="422" r:id="rId4"/>
   </p:sldIdLst>
   <p:sldSz cx="12192000" cy="6858000"/>
   <p:notesSz cx="6858000" cy="9144000"/>
@@ -131,7 +132,7 @@
 <file path=ppt/revisionInfo.xml><?xml version="1.0" encoding="utf-8"?>
 <p1510:revInfo xmlns:a="http://schemas.openxmlformats.org/drawingml/2006/main" xmlns:r="http://schemas.openxmlformats.org/officeDocument/2006/relationships" xmlns:p1510="http://schemas.microsoft.com/office/powerpoint/2015/10/main">
   <p1510:revLst>
-    <p1510:client id="{F9FD2602-ACE2-404E-B12E-A4182221B4C9}" v="333" dt="2026-08-06T14:29:43.674"/>
+    <p1510:client id="{F9FD2602-ACE2-404E-B12E-A4182221B4C9}" v="393" dt="2026-08-10T15:32:30.322"/>
   </p1510:revLst>
 </p1510:revInfo>
 </file>
@@ -140,19 +141,19 @@
 <pc:chgInfo xmlns:a="http://schemas.openxmlformats.org/drawingml/2006/main" xmlns:r="http://schemas.openxmlformats.org/officeDocument/2006/relationships" xmlns:ac="http://schemas.microsoft.com/office/drawing/2013/main/command" xmlns:pc="http://schemas.microsoft.com/office/powerpoint/2013/main/command">
   <pc:docChgLst>
     <pc:chgData name="Tomy Doda" userId="023a5e24-f089-4e82-9406-b78528d4275d" providerId="ADAL" clId="{46B57ECA-90EE-4DEE-B7FC-CF6B2BB407ED}"/>
-    <pc:docChg chg="modSld">
-      <pc:chgData name="Tomy Doda" userId="023a5e24-f089-4e82-9406-b78528d4275d" providerId="ADAL" clId="{46B57ECA-90EE-4DEE-B7FC-CF6B2BB407ED}" dt="2026-08-06T14:29:52.385" v="334" actId="1076"/>
+    <pc:docChg chg="undo custSel addSld modSld">
+      <pc:chgData name="Tomy Doda" userId="023a5e24-f089-4e82-9406-b78528d4275d" providerId="ADAL" clId="{46B57ECA-90EE-4DEE-B7FC-CF6B2BB407ED}" dt="2026-08-10T15:32:30.322" v="438" actId="20577"/>
       <pc:docMkLst>
         <pc:docMk/>
       </pc:docMkLst>
-      <pc:sldChg chg="delSp modSp mod">
-        <pc:chgData name="Tomy Doda" userId="023a5e24-f089-4e82-9406-b78528d4275d" providerId="ADAL" clId="{46B57ECA-90EE-4DEE-B7FC-CF6B2BB407ED}" dt="2026-08-06T14:29:52.385" v="334" actId="1076"/>
+      <pc:sldChg chg="addSp delSp modSp mod">
+        <pc:chgData name="Tomy Doda" userId="023a5e24-f089-4e82-9406-b78528d4275d" providerId="ADAL" clId="{46B57ECA-90EE-4DEE-B7FC-CF6B2BB407ED}" dt="2026-08-10T15:32:26.897" v="436" actId="20577"/>
         <pc:sldMkLst>
           <pc:docMk/>
           <pc:sldMk cId="983911713" sldId="421"/>
         </pc:sldMkLst>
         <pc:spChg chg="mod topLvl">
-          <ac:chgData name="Tomy Doda" userId="023a5e24-f089-4e82-9406-b78528d4275d" providerId="ADAL" clId="{46B57ECA-90EE-4DEE-B7FC-CF6B2BB407ED}" dt="2026-08-06T09:25:08.951" v="314" actId="165"/>
+          <ac:chgData name="Tomy Doda" userId="023a5e24-f089-4e82-9406-b78528d4275d" providerId="ADAL" clId="{46B57ECA-90EE-4DEE-B7FC-CF6B2BB407ED}" dt="2026-08-10T15:25:59.382" v="383" actId="14100"/>
           <ac:spMkLst>
             <pc:docMk/>
             <pc:sldMk cId="983911713" sldId="421"/>
@@ -168,7 +169,7 @@
           </ac:spMkLst>
         </pc:spChg>
         <pc:spChg chg="mod topLvl">
-          <ac:chgData name="Tomy Doda" userId="023a5e24-f089-4e82-9406-b78528d4275d" providerId="ADAL" clId="{46B57ECA-90EE-4DEE-B7FC-CF6B2BB407ED}" dt="2026-08-06T09:25:08.951" v="314" actId="165"/>
+          <ac:chgData name="Tomy Doda" userId="023a5e24-f089-4e82-9406-b78528d4275d" providerId="ADAL" clId="{46B57ECA-90EE-4DEE-B7FC-CF6B2BB407ED}" dt="2026-08-10T15:25:59.507" v="384" actId="14100"/>
           <ac:spMkLst>
             <pc:docMk/>
             <pc:sldMk cId="983911713" sldId="421"/>
@@ -176,23 +177,31 @@
           </ac:spMkLst>
         </pc:spChg>
         <pc:spChg chg="mod topLvl">
-          <ac:chgData name="Tomy Doda" userId="023a5e24-f089-4e82-9406-b78528d4275d" providerId="ADAL" clId="{46B57ECA-90EE-4DEE-B7FC-CF6B2BB407ED}" dt="2026-08-06T09:25:08.951" v="314" actId="165"/>
+          <ac:chgData name="Tomy Doda" userId="023a5e24-f089-4e82-9406-b78528d4275d" providerId="ADAL" clId="{46B57ECA-90EE-4DEE-B7FC-CF6B2BB407ED}" dt="2026-08-10T15:25:33.804" v="375" actId="1076"/>
           <ac:spMkLst>
             <pc:docMk/>
             <pc:sldMk cId="983911713" sldId="421"/>
             <ac:spMk id="6" creationId="{0E157C3B-8AD3-147A-F83A-5CF1C5A4FA03}"/>
           </ac:spMkLst>
         </pc:spChg>
-        <pc:spChg chg="mod">
-          <ac:chgData name="Tomy Doda" userId="023a5e24-f089-4e82-9406-b78528d4275d" providerId="ADAL" clId="{46B57ECA-90EE-4DEE-B7FC-CF6B2BB407ED}" dt="2026-08-06T09:11:41.125" v="85" actId="1076"/>
+        <pc:spChg chg="add mod">
+          <ac:chgData name="Tomy Doda" userId="023a5e24-f089-4e82-9406-b78528d4275d" providerId="ADAL" clId="{46B57ECA-90EE-4DEE-B7FC-CF6B2BB407ED}" dt="2026-08-10T15:32:11.741" v="429"/>
           <ac:spMkLst>
             <pc:docMk/>
             <pc:sldMk cId="983911713" sldId="421"/>
-            <ac:spMk id="9" creationId="{0CF3EAD8-08CE-C407-B8B6-D1850E1AF9CE}"/>
+            <ac:spMk id="9" creationId="{57C3FD58-40D9-8A9F-7934-AA17ACC4FDFD}"/>
+          </ac:spMkLst>
+        </pc:spChg>
+        <pc:spChg chg="add mod">
+          <ac:chgData name="Tomy Doda" userId="023a5e24-f089-4e82-9406-b78528d4275d" providerId="ADAL" clId="{46B57ECA-90EE-4DEE-B7FC-CF6B2BB407ED}" dt="2026-08-10T15:32:26.897" v="436" actId="20577"/>
+          <ac:spMkLst>
+            <pc:docMk/>
+            <pc:sldMk cId="983911713" sldId="421"/>
+            <ac:spMk id="11" creationId="{20618B63-DF31-4F30-FDFD-1D879E91495D}"/>
           </ac:spMkLst>
         </pc:spChg>
         <pc:spChg chg="mod topLvl">
-          <ac:chgData name="Tomy Doda" userId="023a5e24-f089-4e82-9406-b78528d4275d" providerId="ADAL" clId="{46B57ECA-90EE-4DEE-B7FC-CF6B2BB407ED}" dt="2026-08-06T09:25:08.951" v="314" actId="165"/>
+          <ac:chgData name="Tomy Doda" userId="023a5e24-f089-4e82-9406-b78528d4275d" providerId="ADAL" clId="{46B57ECA-90EE-4DEE-B7FC-CF6B2BB407ED}" dt="2026-08-10T15:24:30.440" v="367" actId="404"/>
           <ac:spMkLst>
             <pc:docMk/>
             <pc:sldMk cId="983911713" sldId="421"/>
@@ -200,7 +209,7 @@
           </ac:spMkLst>
         </pc:spChg>
         <pc:spChg chg="mod">
-          <ac:chgData name="Tomy Doda" userId="023a5e24-f089-4e82-9406-b78528d4275d" providerId="ADAL" clId="{46B57ECA-90EE-4DEE-B7FC-CF6B2BB407ED}" dt="2026-08-06T09:23:58.527" v="311" actId="255"/>
+          <ac:chgData name="Tomy Doda" userId="023a5e24-f089-4e82-9406-b78528d4275d" providerId="ADAL" clId="{46B57ECA-90EE-4DEE-B7FC-CF6B2BB407ED}" dt="2026-08-10T15:25:42.759" v="377" actId="1076"/>
           <ac:spMkLst>
             <pc:docMk/>
             <pc:sldMk cId="983911713" sldId="421"/>
@@ -208,7 +217,7 @@
           </ac:spMkLst>
         </pc:spChg>
         <pc:spChg chg="mod">
-          <ac:chgData name="Tomy Doda" userId="023a5e24-f089-4e82-9406-b78528d4275d" providerId="ADAL" clId="{46B57ECA-90EE-4DEE-B7FC-CF6B2BB407ED}" dt="2026-08-06T14:29:52.385" v="334" actId="1076"/>
+          <ac:chgData name="Tomy Doda" userId="023a5e24-f089-4e82-9406-b78528d4275d" providerId="ADAL" clId="{46B57ECA-90EE-4DEE-B7FC-CF6B2BB407ED}" dt="2026-08-10T15:27:26.015" v="415" actId="14100"/>
           <ac:spMkLst>
             <pc:docMk/>
             <pc:sldMk cId="983911713" sldId="421"/>
@@ -216,15 +225,7 @@
           </ac:spMkLst>
         </pc:spChg>
         <pc:spChg chg="mod">
-          <ac:chgData name="Tomy Doda" userId="023a5e24-f089-4e82-9406-b78528d4275d" providerId="ADAL" clId="{46B57ECA-90EE-4DEE-B7FC-CF6B2BB407ED}" dt="2026-08-06T07:57:18.731" v="26" actId="20577"/>
-          <ac:spMkLst>
-            <pc:docMk/>
-            <pc:sldMk cId="983911713" sldId="421"/>
-            <ac:spMk id="18" creationId="{E27ECA34-1AD6-94DE-9B52-60F43B85C510}"/>
-          </ac:spMkLst>
-        </pc:spChg>
-        <pc:spChg chg="mod">
-          <ac:chgData name="Tomy Doda" userId="023a5e24-f089-4e82-9406-b78528d4275d" providerId="ADAL" clId="{46B57ECA-90EE-4DEE-B7FC-CF6B2BB407ED}" dt="2026-08-06T09:24:04.050" v="312" actId="113"/>
+          <ac:chgData name="Tomy Doda" userId="023a5e24-f089-4e82-9406-b78528d4275d" providerId="ADAL" clId="{46B57ECA-90EE-4DEE-B7FC-CF6B2BB407ED}" dt="2026-08-10T15:24:59.141" v="371" actId="12788"/>
           <ac:spMkLst>
             <pc:docMk/>
             <pc:sldMk cId="983911713" sldId="421"/>
@@ -232,15 +233,15 @@
           </ac:spMkLst>
         </pc:spChg>
         <pc:spChg chg="mod">
-          <ac:chgData name="Tomy Doda" userId="023a5e24-f089-4e82-9406-b78528d4275d" providerId="ADAL" clId="{46B57ECA-90EE-4DEE-B7FC-CF6B2BB407ED}" dt="2026-08-06T09:24:06.316" v="313" actId="113"/>
+          <ac:chgData name="Tomy Doda" userId="023a5e24-f089-4e82-9406-b78528d4275d" providerId="ADAL" clId="{46B57ECA-90EE-4DEE-B7FC-CF6B2BB407ED}" dt="2026-08-10T15:25:33.804" v="375" actId="1076"/>
           <ac:spMkLst>
             <pc:docMk/>
             <pc:sldMk cId="983911713" sldId="421"/>
             <ac:spMk id="20" creationId="{36AFB73E-E3E7-E2E7-34BD-1242A993AF91}"/>
           </ac:spMkLst>
         </pc:spChg>
-        <pc:spChg chg="mod">
-          <ac:chgData name="Tomy Doda" userId="023a5e24-f089-4e82-9406-b78528d4275d" providerId="ADAL" clId="{46B57ECA-90EE-4DEE-B7FC-CF6B2BB407ED}" dt="2026-08-06T09:11:41.125" v="85" actId="1076"/>
+        <pc:spChg chg="del mod">
+          <ac:chgData name="Tomy Doda" userId="023a5e24-f089-4e82-9406-b78528d4275d" providerId="ADAL" clId="{46B57ECA-90EE-4DEE-B7FC-CF6B2BB407ED}" dt="2026-08-10T15:32:08.990" v="426" actId="478"/>
           <ac:spMkLst>
             <pc:docMk/>
             <pc:sldMk cId="983911713" sldId="421"/>
@@ -248,7 +249,7 @@
           </ac:spMkLst>
         </pc:spChg>
         <pc:spChg chg="mod">
-          <ac:chgData name="Tomy Doda" userId="023a5e24-f089-4e82-9406-b78528d4275d" providerId="ADAL" clId="{46B57ECA-90EE-4DEE-B7FC-CF6B2BB407ED}" dt="2026-08-06T09:23:58.527" v="311" actId="255"/>
+          <ac:chgData name="Tomy Doda" userId="023a5e24-f089-4e82-9406-b78528d4275d" providerId="ADAL" clId="{46B57ECA-90EE-4DEE-B7FC-CF6B2BB407ED}" dt="2026-08-10T15:25:33.804" v="375" actId="1076"/>
           <ac:spMkLst>
             <pc:docMk/>
             <pc:sldMk cId="983911713" sldId="421"/>
@@ -256,7 +257,7 @@
           </ac:spMkLst>
         </pc:spChg>
         <pc:spChg chg="mod">
-          <ac:chgData name="Tomy Doda" userId="023a5e24-f089-4e82-9406-b78528d4275d" providerId="ADAL" clId="{46B57ECA-90EE-4DEE-B7FC-CF6B2BB407ED}" dt="2026-08-06T09:23:58.527" v="311" actId="255"/>
+          <ac:chgData name="Tomy Doda" userId="023a5e24-f089-4e82-9406-b78528d4275d" providerId="ADAL" clId="{46B57ECA-90EE-4DEE-B7FC-CF6B2BB407ED}" dt="2026-08-10T15:25:40.556" v="376" actId="1076"/>
           <ac:spMkLst>
             <pc:docMk/>
             <pc:sldMk cId="983911713" sldId="421"/>
@@ -264,15 +265,23 @@
           </ac:spMkLst>
         </pc:spChg>
         <pc:spChg chg="mod">
-          <ac:chgData name="Tomy Doda" userId="023a5e24-f089-4e82-9406-b78528d4275d" providerId="ADAL" clId="{46B57ECA-90EE-4DEE-B7FC-CF6B2BB407ED}" dt="2026-08-06T09:23:53.325" v="310" actId="255"/>
+          <ac:chgData name="Tomy Doda" userId="023a5e24-f089-4e82-9406-b78528d4275d" providerId="ADAL" clId="{46B57ECA-90EE-4DEE-B7FC-CF6B2BB407ED}" dt="2026-08-10T15:26:20.848" v="387" actId="555"/>
+          <ac:spMkLst>
+            <pc:docMk/>
+            <pc:sldMk cId="983911713" sldId="421"/>
+            <ac:spMk id="30" creationId="{B1D5945A-3C95-0A5C-C7B7-BE4551652C77}"/>
+          </ac:spMkLst>
+        </pc:spChg>
+        <pc:spChg chg="mod">
+          <ac:chgData name="Tomy Doda" userId="023a5e24-f089-4e82-9406-b78528d4275d" providerId="ADAL" clId="{46B57ECA-90EE-4DEE-B7FC-CF6B2BB407ED}" dt="2026-08-10T15:26:13.442" v="386" actId="1076"/>
           <ac:spMkLst>
             <pc:docMk/>
             <pc:sldMk cId="983911713" sldId="421"/>
             <ac:spMk id="32" creationId="{64CE0356-183B-D86F-AFB0-030273B0FBB8}"/>
           </ac:spMkLst>
         </pc:spChg>
-        <pc:spChg chg="mod">
-          <ac:chgData name="Tomy Doda" userId="023a5e24-f089-4e82-9406-b78528d4275d" providerId="ADAL" clId="{46B57ECA-90EE-4DEE-B7FC-CF6B2BB407ED}" dt="2026-08-06T09:23:58.527" v="311" actId="255"/>
+        <pc:spChg chg="del mod">
+          <ac:chgData name="Tomy Doda" userId="023a5e24-f089-4e82-9406-b78528d4275d" providerId="ADAL" clId="{46B57ECA-90EE-4DEE-B7FC-CF6B2BB407ED}" dt="2026-08-10T15:32:09.652" v="427" actId="478"/>
           <ac:spMkLst>
             <pc:docMk/>
             <pc:sldMk cId="983911713" sldId="421"/>
@@ -280,7 +289,7 @@
           </ac:spMkLst>
         </pc:spChg>
         <pc:spChg chg="mod">
-          <ac:chgData name="Tomy Doda" userId="023a5e24-f089-4e82-9406-b78528d4275d" providerId="ADAL" clId="{46B57ECA-90EE-4DEE-B7FC-CF6B2BB407ED}" dt="2026-08-06T09:23:58.527" v="311" actId="255"/>
+          <ac:chgData name="Tomy Doda" userId="023a5e24-f089-4e82-9406-b78528d4275d" providerId="ADAL" clId="{46B57ECA-90EE-4DEE-B7FC-CF6B2BB407ED}" dt="2026-08-10T15:26:13.442" v="386" actId="1076"/>
           <ac:spMkLst>
             <pc:docMk/>
             <pc:sldMk cId="983911713" sldId="421"/>
@@ -288,21 +297,76 @@
           </ac:spMkLst>
         </pc:spChg>
         <pc:spChg chg="mod">
-          <ac:chgData name="Tomy Doda" userId="023a5e24-f089-4e82-9406-b78528d4275d" providerId="ADAL" clId="{46B57ECA-90EE-4DEE-B7FC-CF6B2BB407ED}" dt="2026-08-06T09:23:58.527" v="311" actId="255"/>
+          <ac:chgData name="Tomy Doda" userId="023a5e24-f089-4e82-9406-b78528d4275d" providerId="ADAL" clId="{46B57ECA-90EE-4DEE-B7FC-CF6B2BB407ED}" dt="2026-08-10T15:26:20.848" v="387" actId="555"/>
+          <ac:spMkLst>
+            <pc:docMk/>
+            <pc:sldMk cId="983911713" sldId="421"/>
+            <ac:spMk id="38" creationId="{80CC70EA-6B10-A142-98A9-F65AF51CBE98}"/>
+          </ac:spMkLst>
+        </pc:spChg>
+        <pc:spChg chg="mod">
+          <ac:chgData name="Tomy Doda" userId="023a5e24-f089-4e82-9406-b78528d4275d" providerId="ADAL" clId="{46B57ECA-90EE-4DEE-B7FC-CF6B2BB407ED}" dt="2026-08-10T15:26:20.848" v="387" actId="555"/>
           <ac:spMkLst>
             <pc:docMk/>
             <pc:sldMk cId="983911713" sldId="421"/>
             <ac:spMk id="40" creationId="{B5CB3F5B-59CB-1C00-1D50-4DB53FE7AA6C}"/>
           </ac:spMkLst>
         </pc:spChg>
-        <pc:grpChg chg="del">
-          <ac:chgData name="Tomy Doda" userId="023a5e24-f089-4e82-9406-b78528d4275d" providerId="ADAL" clId="{46B57ECA-90EE-4DEE-B7FC-CF6B2BB407ED}" dt="2026-08-06T09:25:08.951" v="314" actId="165"/>
-          <ac:grpSpMkLst>
+        <pc:cxnChg chg="add mod">
+          <ac:chgData name="Tomy Doda" userId="023a5e24-f089-4e82-9406-b78528d4275d" providerId="ADAL" clId="{46B57ECA-90EE-4DEE-B7FC-CF6B2BB407ED}" dt="2026-08-10T15:32:11.741" v="429"/>
+          <ac:cxnSpMkLst>
             <pc:docMk/>
             <pc:sldMk cId="983911713" sldId="421"/>
-            <ac:grpSpMk id="14" creationId="{DA13B47E-3EE9-682A-8148-69C4455D73BF}"/>
-          </ac:grpSpMkLst>
-        </pc:grpChg>
+            <ac:cxnSpMk id="7" creationId="{3C214019-2AA2-7A0C-C791-079A6380053F}"/>
+          </ac:cxnSpMkLst>
+        </pc:cxnChg>
+        <pc:cxnChg chg="del mod">
+          <ac:chgData name="Tomy Doda" userId="023a5e24-f089-4e82-9406-b78528d4275d" providerId="ADAL" clId="{46B57ECA-90EE-4DEE-B7FC-CF6B2BB407ED}" dt="2026-08-10T15:32:10.660" v="428" actId="478"/>
+          <ac:cxnSpMkLst>
+            <pc:docMk/>
+            <pc:sldMk cId="983911713" sldId="421"/>
+            <ac:cxnSpMk id="8" creationId="{C9991C8C-9303-5B2A-E812-7BA9029404BE}"/>
+          </ac:cxnSpMkLst>
+        </pc:cxnChg>
+      </pc:sldChg>
+      <pc:sldChg chg="modSp add mod">
+        <pc:chgData name="Tomy Doda" userId="023a5e24-f089-4e82-9406-b78528d4275d" providerId="ADAL" clId="{46B57ECA-90EE-4DEE-B7FC-CF6B2BB407ED}" dt="2026-08-10T15:32:30.322" v="438" actId="20577"/>
+        <pc:sldMkLst>
+          <pc:docMk/>
+          <pc:sldMk cId="651748214" sldId="422"/>
+        </pc:sldMkLst>
+        <pc:spChg chg="mod">
+          <ac:chgData name="Tomy Doda" userId="023a5e24-f089-4e82-9406-b78528d4275d" providerId="ADAL" clId="{46B57ECA-90EE-4DEE-B7FC-CF6B2BB407ED}" dt="2026-08-10T15:27:56.740" v="419" actId="1038"/>
+          <ac:spMkLst>
+            <pc:docMk/>
+            <pc:sldMk cId="651748214" sldId="422"/>
+            <ac:spMk id="13" creationId="{B551CE49-2FEC-3F5C-6B8F-D24ED8FDF3E1}"/>
+          </ac:spMkLst>
+        </pc:spChg>
+        <pc:spChg chg="mod">
+          <ac:chgData name="Tomy Doda" userId="023a5e24-f089-4e82-9406-b78528d4275d" providerId="ADAL" clId="{46B57ECA-90EE-4DEE-B7FC-CF6B2BB407ED}" dt="2026-08-10T15:27:20.718" v="409" actId="14100"/>
+          <ac:spMkLst>
+            <pc:docMk/>
+            <pc:sldMk cId="651748214" sldId="422"/>
+            <ac:spMk id="17" creationId="{A5F54D80-17BA-665E-117D-8F45AE5850D8}"/>
+          </ac:spMkLst>
+        </pc:spChg>
+        <pc:spChg chg="mod">
+          <ac:chgData name="Tomy Doda" userId="023a5e24-f089-4e82-9406-b78528d4275d" providerId="ADAL" clId="{46B57ECA-90EE-4DEE-B7FC-CF6B2BB407ED}" dt="2026-08-10T15:32:01.598" v="425" actId="1076"/>
+          <ac:spMkLst>
+            <pc:docMk/>
+            <pc:sldMk cId="651748214" sldId="422"/>
+            <ac:spMk id="22" creationId="{4CF577EA-AB38-374D-2A3A-0CC9CCE90789}"/>
+          </ac:spMkLst>
+        </pc:spChg>
+        <pc:spChg chg="mod">
+          <ac:chgData name="Tomy Doda" userId="023a5e24-f089-4e82-9406-b78528d4275d" providerId="ADAL" clId="{46B57ECA-90EE-4DEE-B7FC-CF6B2BB407ED}" dt="2026-08-10T15:32:30.322" v="438" actId="20577"/>
+          <ac:spMkLst>
+            <pc:docMk/>
+            <pc:sldMk cId="651748214" sldId="422"/>
+            <ac:spMk id="34" creationId="{77FDC1F1-37FB-50F0-377E-B173D856DD42}"/>
+          </ac:spMkLst>
+        </pc:spChg>
       </pc:sldChg>
     </pc:docChg>
   </pc:docChgLst>
@@ -391,7 +455,7 @@
           <a:p>
             <a:fld id="{FB241A62-A1C5-4611-9AB2-09CF3AB05F02}" type="datetimeFigureOut">
               <a:rPr lang="de-DE" smtClean="0"/>
-              <a:t>06.08.2026</a:t>
+              <a:t>10.08.2026</a:t>
             </a:fld>
             <a:endParaRPr lang="de-DE"/>
           </a:p>
@@ -767,6 +831,114 @@
 </p:notes>
 </file>
 
+<file path=ppt/notesSlides/notesSlide2.xml><?xml version="1.0" encoding="utf-8"?>
+<p:notes xmlns:a="http://schemas.openxmlformats.org/drawingml/2006/main" xmlns:r="http://schemas.openxmlformats.org/officeDocument/2006/relationships" xmlns:p="http://schemas.openxmlformats.org/presentationml/2006/main">
+  <p:cSld>
+    <p:spTree>
+      <p:nvGrpSpPr>
+        <p:cNvPr id="1" name="">
+          <a:extLst>
+            <a:ext uri="{FF2B5EF4-FFF2-40B4-BE49-F238E27FC236}">
+              <a16:creationId xmlns:a16="http://schemas.microsoft.com/office/drawing/2014/main" id="{67DC7B59-60B2-17D8-D02E-D35DDB624F0E}"/>
+            </a:ext>
+          </a:extLst>
+        </p:cNvPr>
+        <p:cNvGrpSpPr/>
+        <p:nvPr/>
+      </p:nvGrpSpPr>
+      <p:grpSpPr>
+        <a:xfrm>
+          <a:off x="0" y="0"/>
+          <a:ext cx="0" cy="0"/>
+          <a:chOff x="0" y="0"/>
+          <a:chExt cx="0" cy="0"/>
+        </a:xfrm>
+      </p:grpSpPr>
+      <p:sp>
+        <p:nvSpPr>
+          <p:cNvPr id="2" name="Slide Image Placeholder 1">
+            <a:extLst>
+              <a:ext uri="{FF2B5EF4-FFF2-40B4-BE49-F238E27FC236}">
+                <a16:creationId xmlns:a16="http://schemas.microsoft.com/office/drawing/2014/main" id="{D3BEB6C3-AEF9-098F-E4EC-99E6604AACC1}"/>
+              </a:ext>
+            </a:extLst>
+          </p:cNvPr>
+          <p:cNvSpPr>
+            <a:spLocks noGrp="1" noRot="1" noChangeAspect="1"/>
+          </p:cNvSpPr>
+          <p:nvPr>
+            <p:ph type="sldImg"/>
+          </p:nvPr>
+        </p:nvSpPr>
+        <p:spPr/>
+      </p:sp>
+      <p:sp>
+        <p:nvSpPr>
+          <p:cNvPr id="3" name="Notes Placeholder 2">
+            <a:extLst>
+              <a:ext uri="{FF2B5EF4-FFF2-40B4-BE49-F238E27FC236}">
+                <a16:creationId xmlns:a16="http://schemas.microsoft.com/office/drawing/2014/main" id="{F5036D6C-1488-33A5-08F5-76015212B1B9}"/>
+              </a:ext>
+            </a:extLst>
+          </p:cNvPr>
+          <p:cNvSpPr>
+            <a:spLocks noGrp="1"/>
+          </p:cNvSpPr>
+          <p:nvPr>
+            <p:ph type="body" idx="1"/>
+          </p:nvPr>
+        </p:nvSpPr>
+        <p:spPr/>
+        <p:txBody>
+          <a:bodyPr/>
+          <a:lstStyle/>
+          <a:p>
+            <a:endParaRPr lang="en-US" dirty="0"/>
+          </a:p>
+        </p:txBody>
+      </p:sp>
+      <p:sp>
+        <p:nvSpPr>
+          <p:cNvPr id="4" name="Slide Number Placeholder 3">
+            <a:extLst>
+              <a:ext uri="{FF2B5EF4-FFF2-40B4-BE49-F238E27FC236}">
+                <a16:creationId xmlns:a16="http://schemas.microsoft.com/office/drawing/2014/main" id="{100B2CA6-4F16-DEF9-F482-7FDE9DEC72DF}"/>
+              </a:ext>
+            </a:extLst>
+          </p:cNvPr>
+          <p:cNvSpPr>
+            <a:spLocks noGrp="1"/>
+          </p:cNvSpPr>
+          <p:nvPr>
+            <p:ph type="sldNum" sz="quarter" idx="5"/>
+          </p:nvPr>
+        </p:nvSpPr>
+        <p:spPr/>
+        <p:txBody>
+          <a:bodyPr/>
+          <a:lstStyle/>
+          <a:p>
+            <a:fld id="{6D7F65CB-D416-4D08-A970-3879DDF354C1}" type="slidenum">
+              <a:rPr lang="de-DE" smtClean="0"/>
+              <a:t>2</a:t>
+            </a:fld>
+            <a:endParaRPr lang="de-DE"/>
+          </a:p>
+        </p:txBody>
+      </p:sp>
+    </p:spTree>
+    <p:extLst>
+      <p:ext uri="{BB962C8B-B14F-4D97-AF65-F5344CB8AC3E}">
+        <p14:creationId xmlns:p14="http://schemas.microsoft.com/office/powerpoint/2010/main" val="4138824052"/>
+      </p:ext>
+    </p:extLst>
+  </p:cSld>
+  <p:clrMapOvr>
+    <a:masterClrMapping/>
+  </p:clrMapOvr>
+</p:notes>
+</file>
+
 <file path=ppt/slideLayouts/slideLayout1.xml><?xml version="1.0" encoding="utf-8"?>
 <p:sldLayout xmlns:a="http://schemas.openxmlformats.org/drawingml/2006/main" xmlns:r="http://schemas.openxmlformats.org/officeDocument/2006/relationships" xmlns:p="http://schemas.openxmlformats.org/presentationml/2006/main" type="title" preserve="1">
   <p:cSld name="Title Slide">
@@ -909,7 +1081,7 @@
           <a:p>
             <a:fld id="{C5ECA247-FE2A-47EF-8DB9-999FBE78D1F7}" type="datetime1">
               <a:rPr lang="de-DE" smtClean="0"/>
-              <a:t>06.08.2026</a:t>
+              <a:t>10.08.2026</a:t>
             </a:fld>
             <a:endParaRPr lang="de-DE"/>
           </a:p>
@@ -1080,7 +1252,7 @@
           <a:p>
             <a:fld id="{E1EA6552-2A29-438B-A2CC-4FF471838D25}" type="datetime1">
               <a:rPr lang="de-DE" smtClean="0"/>
-              <a:t>06.08.2026</a:t>
+              <a:t>10.08.2026</a:t>
             </a:fld>
             <a:endParaRPr lang="de-DE"/>
           </a:p>
@@ -1287,7 +1459,7 @@
           <a:p>
             <a:fld id="{5AFFA005-B143-456C-B43F-4928703E1224}" type="datetime1">
               <a:rPr lang="de-DE" smtClean="0"/>
-              <a:t>06.08.2026</a:t>
+              <a:t>10.08.2026</a:t>
             </a:fld>
             <a:endParaRPr lang="de-DE"/>
           </a:p>
@@ -1506,7 +1678,7 @@
           <a:p>
             <a:fld id="{DD73CA2E-C4EA-4AB7-B564-38A486611F54}" type="datetime1">
               <a:rPr lang="de-DE" smtClean="0"/>
-              <a:t>06.08.2026</a:t>
+              <a:t>10.08.2026</a:t>
             </a:fld>
             <a:endParaRPr lang="de-DE"/>
           </a:p>
@@ -1722,7 +1894,7 @@
           <a:p>
             <a:fld id="{7A934844-F214-4698-8F76-9CE72359EF87}" type="datetime1">
               <a:rPr lang="de-DE" smtClean="0"/>
-              <a:t>06.08.2026</a:t>
+              <a:t>10.08.2026</a:t>
             </a:fld>
             <a:endParaRPr lang="de-DE"/>
           </a:p>
@@ -1999,7 +2171,7 @@
           <a:p>
             <a:fld id="{52B431FC-A9F2-4517-8F6E-C837182E6D38}" type="datetime1">
               <a:rPr lang="de-DE" smtClean="0"/>
-              <a:t>06.08.2026</a:t>
+              <a:t>10.08.2026</a:t>
             </a:fld>
             <a:endParaRPr lang="de-DE"/>
           </a:p>
@@ -2261,7 +2433,7 @@
           <a:p>
             <a:fld id="{47772584-EF26-4D9D-AF97-F592E4AD9E3C}" type="datetime1">
               <a:rPr lang="de-DE" smtClean="0"/>
-              <a:t>06.08.2026</a:t>
+              <a:t>10.08.2026</a:t>
             </a:fld>
             <a:endParaRPr lang="de-DE"/>
           </a:p>
@@ -2664,7 +2836,7 @@
           <a:p>
             <a:fld id="{9D0F93FE-C6FD-4201-A9D9-1B6F0940F469}" type="datetime1">
               <a:rPr lang="de-DE" smtClean="0"/>
-              <a:t>06.08.2026</a:t>
+              <a:t>10.08.2026</a:t>
             </a:fld>
             <a:endParaRPr lang="de-DE"/>
           </a:p>
@@ -2806,7 +2978,7 @@
           <a:p>
             <a:fld id="{11E140BE-9A30-428F-9875-53FA37102F3D}" type="datetime1">
               <a:rPr lang="de-DE" smtClean="0"/>
-              <a:t>06.08.2026</a:t>
+              <a:t>10.08.2026</a:t>
             </a:fld>
             <a:endParaRPr lang="de-DE"/>
           </a:p>
@@ -2925,7 +3097,7 @@
           <a:p>
             <a:fld id="{73ED589F-B4E2-4A4E-A226-7401BDE44768}" type="datetime1">
               <a:rPr lang="de-DE" smtClean="0"/>
-              <a:t>06.08.2026</a:t>
+              <a:t>10.08.2026</a:t>
             </a:fld>
             <a:endParaRPr lang="de-DE"/>
           </a:p>
@@ -3232,7 +3404,7 @@
           <a:p>
             <a:fld id="{028414A4-D98A-43BA-9863-A2EF121B96F9}" type="datetime1">
               <a:rPr lang="de-DE" smtClean="0"/>
-              <a:t>06.08.2026</a:t>
+              <a:t>10.08.2026</a:t>
             </a:fld>
             <a:endParaRPr lang="de-DE"/>
           </a:p>
@@ -3433,7 +3605,7 @@
           <a:p>
             <a:fld id="{C10E3B16-34CF-4AC7-98ED-B1422B31FFB6}" type="datetime1">
               <a:rPr lang="de-DE" smtClean="0"/>
-              <a:t>06.08.2026</a:t>
+              <a:t>10.08.2026</a:t>
             </a:fld>
             <a:endParaRPr lang="de-DE"/>
           </a:p>
@@ -3720,7 +3892,7 @@
           <a:p>
             <a:fld id="{D058E760-9A20-4071-815D-645CCCCC2D83}" type="datetime1">
               <a:rPr lang="de-DE" smtClean="0"/>
-              <a:t>06.08.2026</a:t>
+              <a:t>10.08.2026</a:t>
             </a:fld>
             <a:endParaRPr lang="de-DE"/>
           </a:p>
@@ -3922,7 +4094,7 @@
           <a:p>
             <a:fld id="{8B3EF7F4-A883-4B18-9552-F3C3223DEF14}" type="datetime1">
               <a:rPr lang="de-DE" smtClean="0"/>
-              <a:t>06.08.2026</a:t>
+              <a:t>10.08.2026</a:t>
             </a:fld>
             <a:endParaRPr lang="de-DE"/>
           </a:p>
@@ -4129,7 +4301,7 @@
           <a:p>
             <a:fld id="{F664108E-EA3B-4E54-AEAB-69A79F6B8899}" type="datetime1">
               <a:rPr lang="de-DE" smtClean="0"/>
-              <a:t>06.08.2026</a:t>
+              <a:t>10.08.2026</a:t>
             </a:fld>
             <a:endParaRPr lang="de-DE"/>
           </a:p>
@@ -4402,7 +4574,7 @@
           <a:p>
             <a:fld id="{6DD8A520-B1B0-4EF4-9A43-67432A834EC2}" type="datetime1">
               <a:rPr lang="de-DE" smtClean="0"/>
-              <a:t>06.08.2026</a:t>
+              <a:t>10.08.2026</a:t>
             </a:fld>
             <a:endParaRPr lang="de-DE"/>
           </a:p>
@@ -4664,7 +4836,7 @@
           <a:p>
             <a:fld id="{8AB35BDD-2E7A-4534-A0E5-E526C1F6A616}" type="datetime1">
               <a:rPr lang="de-DE" smtClean="0"/>
-              <a:t>06.08.2026</a:t>
+              <a:t>10.08.2026</a:t>
             </a:fld>
             <a:endParaRPr lang="de-DE"/>
           </a:p>
@@ -5067,7 +5239,7 @@
           <a:p>
             <a:fld id="{600DB9EB-2057-4AD9-A90C-C9132243CB3F}" type="datetime1">
               <a:rPr lang="de-DE" smtClean="0"/>
-              <a:t>06.08.2026</a:t>
+              <a:t>10.08.2026</a:t>
             </a:fld>
             <a:endParaRPr lang="de-DE"/>
           </a:p>
@@ -5209,7 +5381,7 @@
           <a:p>
             <a:fld id="{CE14AEF0-EDF0-4BEB-9ED1-40A762B86015}" type="datetime1">
               <a:rPr lang="de-DE" smtClean="0"/>
-              <a:t>06.08.2026</a:t>
+              <a:t>10.08.2026</a:t>
             </a:fld>
             <a:endParaRPr lang="de-DE"/>
           </a:p>
@@ -5328,7 +5500,7 @@
           <a:p>
             <a:fld id="{1BB8B5A9-28CE-4FED-AA21-DBCD3DE06A78}" type="datetime1">
               <a:rPr lang="de-DE" smtClean="0"/>
-              <a:t>06.08.2026</a:t>
+              <a:t>10.08.2026</a:t>
             </a:fld>
             <a:endParaRPr lang="de-DE"/>
           </a:p>
@@ -5635,7 +5807,7 @@
           <a:p>
             <a:fld id="{F11D34DF-07E7-4DD8-B3FB-908782C071D4}" type="datetime1">
               <a:rPr lang="de-DE" smtClean="0"/>
-              <a:t>06.08.2026</a:t>
+              <a:t>10.08.2026</a:t>
             </a:fld>
             <a:endParaRPr lang="de-DE"/>
           </a:p>
@@ -5918,7 +6090,7 @@
           <a:p>
             <a:fld id="{F1CFE722-D1B0-4086-81BB-7FAE4E573927}" type="datetime1">
               <a:rPr lang="de-DE" smtClean="0"/>
-              <a:t>06.08.2026</a:t>
+              <a:t>10.08.2026</a:t>
             </a:fld>
             <a:endParaRPr lang="de-DE"/>
           </a:p>
@@ -6803,8 +6975,8 @@
         </p:nvSpPr>
         <p:spPr bwMode="auto">
           <a:xfrm>
-            <a:off x="-884185" y="1222374"/>
-            <a:ext cx="184731" cy="400110"/>
+            <a:off x="-884185" y="1191597"/>
+            <a:ext cx="184731" cy="461665"/>
           </a:xfrm>
           <a:prstGeom prst="rect">
             <a:avLst/>
@@ -6869,7 +7041,7 @@
               <a:tabLst/>
               <a:defRPr/>
             </a:pPr>
-            <a:endParaRPr kumimoji="0" lang="en-US" sz="2000" b="0" i="0" u="none" strike="noStrike" kern="1200" cap="none" spc="0" normalizeH="0" baseline="0" noProof="0">
+            <a:endParaRPr kumimoji="0" lang="en-US" sz="2400" b="0" i="0" u="none" strike="noStrike" kern="1200" cap="none" spc="0" normalizeH="0" baseline="0" noProof="0">
               <a:ln>
                 <a:noFill/>
               </a:ln>
@@ -6902,8 +7074,8 @@
         </p:nvSpPr>
         <p:spPr bwMode="auto">
           <a:xfrm>
-            <a:off x="131815" y="10524298"/>
-            <a:ext cx="184731" cy="400110"/>
+            <a:off x="131815" y="10493521"/>
+            <a:ext cx="184731" cy="461665"/>
           </a:xfrm>
           <a:prstGeom prst="rect">
             <a:avLst/>
@@ -6968,7 +7140,7 @@
               <a:tabLst/>
               <a:defRPr/>
             </a:pPr>
-            <a:endParaRPr kumimoji="0" lang="en-US" sz="2000" b="0" i="0" u="none" strike="noStrike" kern="1200" cap="none" spc="0" normalizeH="0" baseline="0" noProof="0">
+            <a:endParaRPr kumimoji="0" lang="en-US" sz="2400" b="0" i="0" u="none" strike="noStrike" kern="1200" cap="none" spc="0" normalizeH="0" baseline="0" noProof="0">
               <a:ln>
                 <a:noFill/>
               </a:ln>
@@ -6999,7 +7171,7 @@
         </p:nvSpPr>
         <p:spPr>
           <a:xfrm>
-            <a:off x="1082417" y="3546271"/>
+            <a:off x="435634" y="3540722"/>
             <a:ext cx="8284867" cy="2520126"/>
           </a:xfrm>
           <a:prstGeom prst="rect">
@@ -7027,7 +7199,7 @@
           <a:lstStyle/>
           <a:p>
             <a:pPr algn="ctr"/>
-            <a:endParaRPr lang="en-US" sz="2000"/>
+            <a:endParaRPr lang="en-US" sz="2400"/>
           </a:p>
         </p:txBody>
       </p:sp>
@@ -7045,7 +7217,7 @@
         </p:nvSpPr>
         <p:spPr>
           <a:xfrm>
-            <a:off x="1082417" y="213774"/>
+            <a:off x="435634" y="208225"/>
             <a:ext cx="8284867" cy="3382844"/>
           </a:xfrm>
           <a:prstGeom prst="rect">
@@ -7079,7 +7251,7 @@
           <a:lstStyle/>
           <a:p>
             <a:pPr algn="ctr"/>
-            <a:endParaRPr lang="en-US" sz="2000"/>
+            <a:endParaRPr lang="en-US" sz="2400"/>
           </a:p>
         </p:txBody>
       </p:sp>
@@ -7097,7 +7269,7 @@
         </p:nvSpPr>
         <p:spPr>
           <a:xfrm>
-            <a:off x="8751677" y="5188462"/>
+            <a:off x="8104894" y="5182913"/>
             <a:ext cx="1283287" cy="581822"/>
           </a:xfrm>
           <a:prstGeom prst="leftArrow">
@@ -7125,7 +7297,7 @@
           <a:lstStyle/>
           <a:p>
             <a:pPr algn="ctr"/>
-            <a:endParaRPr lang="en-US" sz="2000"/>
+            <a:endParaRPr lang="en-US" sz="2400"/>
           </a:p>
         </p:txBody>
       </p:sp>
@@ -7143,12 +7315,15 @@
         </p:nvSpPr>
         <p:spPr>
           <a:xfrm>
-            <a:off x="130746" y="938551"/>
+            <a:off x="0" y="953784"/>
             <a:ext cx="1268098" cy="581822"/>
           </a:xfrm>
           <a:prstGeom prst="leftArrow">
             <a:avLst/>
           </a:prstGeom>
+          <a:solidFill>
+            <a:schemeClr val="tx1"/>
+          </a:solidFill>
         </p:spPr>
         <p:style>
           <a:lnRef idx="2">
@@ -7171,12 +7346,12 @@
           <a:lstStyle/>
           <a:p>
             <a:pPr algn="ctr"/>
-            <a:endParaRPr lang="en-US" sz="2000"/>
-          </a:p>
-        </p:txBody>
-      </p:sp>
-      <mc:AlternateContent xmlns:mc="http://schemas.openxmlformats.org/markup-compatibility/2006" xmlns:a14="http://schemas.microsoft.com/office/drawing/2010/main">
-        <mc:Choice Requires="a14">
+            <a:endParaRPr lang="en-US" sz="2400"/>
+          </a:p>
+        </p:txBody>
+      </p:sp>
+      <mc:AlternateContent xmlns:mc="http://schemas.openxmlformats.org/markup-compatibility/2006">
+        <mc:Choice xmlns:a14="http://schemas.microsoft.com/office/drawing/2010/main" Requires="a14">
           <p:sp>
             <p:nvSpPr>
               <p:cNvPr id="16" name="TextBox 15">
@@ -7191,8 +7366,8 @@
             </p:nvSpPr>
             <p:spPr>
               <a:xfrm>
-                <a:off x="9355626" y="1053423"/>
-                <a:ext cx="3272525" cy="755207"/>
+                <a:off x="9054246" y="1124777"/>
+                <a:ext cx="3272525" cy="888064"/>
               </a:xfrm>
               <a:prstGeom prst="rect">
                 <a:avLst/>
@@ -7208,21 +7383,18 @@
                 <a:pPr/>
                 <a14:m>
                   <m:oMathPara xmlns:m="http://schemas.openxmlformats.org/officeDocument/2006/math">
-                    <m:oMathParaPr>
-                      <m:jc m:val="centerGroup"/>
-                    </m:oMathParaPr>
-                    <m:oMath xmlns:m="http://schemas.openxmlformats.org/officeDocument/2006/math">
+                    <m:oMath>
                       <m:sSub>
                         <m:sSubPr>
                           <m:ctrlPr>
-                            <a:rPr lang="fr-CH" sz="2000" b="0" i="1" smtClean="0">
+                            <a:rPr lang="fr-CH" sz="2400" b="0" i="1" smtClean="0">
                               <a:latin typeface="Cambria Math" panose="02040503050406030204" pitchFamily="18" charset="0"/>
                             </a:rPr>
                           </m:ctrlPr>
                         </m:sSubPr>
                         <m:e>
                           <m:r>
-                            <a:rPr lang="fr-CH" sz="2000" b="0" i="1" smtClean="0">
+                            <a:rPr lang="fr-CH" sz="2400" b="0" i="1" smtClean="0">
                               <a:latin typeface="Cambria Math" panose="02040503050406030204" pitchFamily="18" charset="0"/>
                             </a:rPr>
                             <m:t>𝑄</m:t>
@@ -7230,7 +7402,7 @@
                         </m:e>
                         <m:sub>
                           <m:r>
-                            <a:rPr lang="fr-CH" sz="2000" b="0" i="1" smtClean="0">
+                            <a:rPr lang="fr-CH" sz="2400" b="0" i="1" smtClean="0">
                               <a:latin typeface="Cambria Math" panose="02040503050406030204" pitchFamily="18" charset="0"/>
                             </a:rPr>
                             <m:t>𝑒𝑝𝑖</m:t>
@@ -7240,14 +7412,14 @@
                       <m:d>
                         <m:dPr>
                           <m:ctrlPr>
-                            <a:rPr lang="fr-CH" sz="2000" b="0" i="1" smtClean="0">
+                            <a:rPr lang="fr-CH" sz="2400" b="0" i="1" smtClean="0">
                               <a:latin typeface="Cambria Math" panose="02040503050406030204" pitchFamily="18" charset="0"/>
                             </a:rPr>
                           </m:ctrlPr>
                         </m:dPr>
                         <m:e>
                           <m:r>
-                            <a:rPr lang="fr-CH" sz="2000" b="0" i="1" smtClean="0">
+                            <a:rPr lang="fr-CH" sz="2400" b="0" i="1" smtClean="0">
                               <a:latin typeface="Cambria Math" panose="02040503050406030204" pitchFamily="18" charset="0"/>
                             </a:rPr>
                             <m:t>𝑡</m:t>
@@ -7255,13 +7427,13 @@
                         </m:e>
                       </m:d>
                       <m:r>
-                        <a:rPr lang="fr-CH" sz="2000" b="0" i="1" smtClean="0">
+                        <a:rPr lang="fr-CH" sz="2400" b="0" i="1" smtClean="0">
                           <a:latin typeface="Cambria Math" panose="02040503050406030204" pitchFamily="18" charset="0"/>
                         </a:rPr>
                         <m:t>=</m:t>
                       </m:r>
                       <m:r>
-                        <a:rPr lang="fr-CH" sz="2000" b="0" i="1" smtClean="0">
+                        <a:rPr lang="fr-CH" sz="2400" b="0" i="1" smtClean="0">
                           <a:latin typeface="Cambria Math" panose="02040503050406030204" pitchFamily="18" charset="0"/>
                         </a:rPr>
                         <m:t>𝛼</m:t>
@@ -7269,30 +7441,49 @@
                       <m:d>
                         <m:dPr>
                           <m:ctrlPr>
-                            <a:rPr lang="fr-CH" sz="2000" b="0" i="1" smtClean="0">
+                            <a:rPr lang="fr-CH" sz="2400" b="0" i="1" smtClean="0">
                               <a:latin typeface="Cambria Math" panose="02040503050406030204" pitchFamily="18" charset="0"/>
                             </a:rPr>
                           </m:ctrlPr>
                         </m:dPr>
                         <m:e>
                           <m:r>
-                            <a:rPr lang="fr-CH" sz="2000" b="0" i="1" smtClean="0">
+                            <a:rPr lang="fr-CH" sz="2400" b="0" i="1" smtClean="0">
                               <a:latin typeface="Cambria Math" panose="02040503050406030204" pitchFamily="18" charset="0"/>
                             </a:rPr>
                             <m:t>𝑡</m:t>
                           </m:r>
                         </m:e>
                       </m:d>
-                      <m:r>
-                        <a:rPr lang="fr-CH" sz="2000" b="0" i="1" smtClean="0">
-                          <a:latin typeface="Cambria Math" panose="02040503050406030204" pitchFamily="18" charset="0"/>
-                        </a:rPr>
-                        <m:t>𝑄</m:t>
-                      </m:r>
+                      <m:sSub>
+                        <m:sSubPr>
+                          <m:ctrlPr>
+                            <a:rPr lang="fr-CH" sz="2400" b="0" i="1" smtClean="0">
+                              <a:latin typeface="Cambria Math" panose="02040503050406030204" pitchFamily="18" charset="0"/>
+                            </a:rPr>
+                          </m:ctrlPr>
+                        </m:sSubPr>
+                        <m:e>
+                          <m:r>
+                            <a:rPr lang="fr-CH" sz="2400" b="0" i="1" smtClean="0">
+                              <a:latin typeface="Cambria Math" panose="02040503050406030204" pitchFamily="18" charset="0"/>
+                            </a:rPr>
+                            <m:t>𝑄</m:t>
+                          </m:r>
+                        </m:e>
+                        <m:sub>
+                          <m:r>
+                            <a:rPr lang="fr-CH" sz="2400" b="0" i="1" smtClean="0">
+                              <a:latin typeface="Cambria Math" panose="02040503050406030204" pitchFamily="18" charset="0"/>
+                            </a:rPr>
+                            <m:t>𝑡𝑜𝑡</m:t>
+                          </m:r>
+                        </m:sub>
+                      </m:sSub>
                     </m:oMath>
                   </m:oMathPara>
                 </a14:m>
-                <a:endParaRPr lang="fr-CH" sz="2000" b="0" i="1" dirty="0">
+                <a:endParaRPr lang="fr-CH" sz="2400" b="0" i="1" dirty="0">
                   <a:latin typeface="Cambria Math" panose="02040503050406030204" pitchFamily="18" charset="0"/>
                 </a:endParaRPr>
               </a:p>
@@ -7300,21 +7491,18 @@
                 <a:pPr/>
                 <a14:m>
                   <m:oMathPara xmlns:m="http://schemas.openxmlformats.org/officeDocument/2006/math">
-                    <m:oMathParaPr>
-                      <m:jc m:val="centerGroup"/>
-                    </m:oMathParaPr>
-                    <m:oMath xmlns:m="http://schemas.openxmlformats.org/officeDocument/2006/math">
+                    <m:oMath>
                       <m:sSub>
                         <m:sSubPr>
                           <m:ctrlPr>
-                            <a:rPr lang="fr-CH" sz="2000" b="0" i="1" smtClean="0">
+                            <a:rPr lang="fr-CH" sz="2400" b="0" i="1" smtClean="0">
                               <a:latin typeface="Cambria Math" panose="02040503050406030204" pitchFamily="18" charset="0"/>
                             </a:rPr>
                           </m:ctrlPr>
                         </m:sSubPr>
                         <m:e>
                           <m:r>
-                            <a:rPr lang="fr-CH" sz="2000" b="0" i="1" smtClean="0">
+                            <a:rPr lang="fr-CH" sz="2400" b="0" i="1" smtClean="0">
                               <a:latin typeface="Cambria Math" panose="02040503050406030204" pitchFamily="18" charset="0"/>
                             </a:rPr>
                             <m:t>𝐶</m:t>
@@ -7322,19 +7510,19 @@
                         </m:e>
                         <m:sub>
                           <m:r>
-                            <a:rPr lang="fr-CH" sz="2000" b="0" i="1" smtClean="0">
+                            <a:rPr lang="fr-CH" sz="2400" b="0" i="1" smtClean="0">
                               <a:latin typeface="Cambria Math" panose="02040503050406030204" pitchFamily="18" charset="0"/>
                             </a:rPr>
                             <m:t>𝑖𝑛</m:t>
                           </m:r>
                           <m:r>
-                            <a:rPr lang="fr-CH" sz="2000" b="0" i="1" smtClean="0">
+                            <a:rPr lang="fr-CH" sz="2400" b="0" i="1" smtClean="0">
                               <a:latin typeface="Cambria Math" panose="02040503050406030204" pitchFamily="18" charset="0"/>
                             </a:rPr>
                             <m:t>,</m:t>
                           </m:r>
                           <m:r>
-                            <a:rPr lang="fr-CH" sz="2000" b="0" i="1" smtClean="0">
+                            <a:rPr lang="fr-CH" sz="2400" b="0" i="1" smtClean="0">
                               <a:latin typeface="Cambria Math" panose="02040503050406030204" pitchFamily="18" charset="0"/>
                             </a:rPr>
                             <m:t>𝑒𝑝𝑖</m:t>
@@ -7342,7 +7530,7 @@
                         </m:sub>
                       </m:sSub>
                       <m:r>
-                        <a:rPr lang="fr-CH" sz="2000" b="0" i="0" smtClean="0">
+                        <a:rPr lang="fr-CH" sz="2400" b="0" i="0" smtClean="0">
                           <a:latin typeface="Cambria Math" panose="02040503050406030204" pitchFamily="18" charset="0"/>
                         </a:rPr>
                         <m:t>=0</m:t>
@@ -7350,12 +7538,12 @@
                     </m:oMath>
                   </m:oMathPara>
                 </a14:m>
-                <a:endParaRPr lang="en-US" sz="2000" dirty="0"/>
+                <a:endParaRPr lang="en-US" sz="2400" dirty="0"/>
               </a:p>
             </p:txBody>
           </p:sp>
         </mc:Choice>
-        <mc:Fallback xmlns="">
+        <mc:Fallback>
           <p:sp>
             <p:nvSpPr>
               <p:cNvPr id="16" name="TextBox 15">
@@ -7372,8 +7560,8 @@
             </p:nvSpPr>
             <p:spPr>
               <a:xfrm>
-                <a:off x="9355626" y="1053423"/>
-                <a:ext cx="3272525" cy="755207"/>
+                <a:off x="9054246" y="1124777"/>
+                <a:ext cx="3272525" cy="888064"/>
               </a:xfrm>
               <a:prstGeom prst="rect">
                 <a:avLst/>
@@ -7381,7 +7569,7 @@
               <a:blipFill>
                 <a:blip r:embed="rId3"/>
                 <a:stretch>
-                  <a:fillRect b="-4032"/>
+                  <a:fillRect b="-5517"/>
                 </a:stretch>
               </a:blipFill>
             </p:spPr>
@@ -7416,8 +7604,8 @@
             </p:nvSpPr>
             <p:spPr>
               <a:xfrm>
-                <a:off x="753759" y="570475"/>
-                <a:ext cx="2950570" cy="423770"/>
+                <a:off x="316546" y="575886"/>
+                <a:ext cx="3261006" cy="490199"/>
               </a:xfrm>
               <a:prstGeom prst="rect">
                 <a:avLst/>
@@ -7433,21 +7621,24 @@
                 <a:pPr/>
                 <a14:m>
                   <m:oMathPara xmlns:m="http://schemas.openxmlformats.org/officeDocument/2006/math">
-                    <m:oMathParaPr>
-                      <m:jc m:val="centerGroup"/>
-                    </m:oMathParaPr>
-                    <m:oMath xmlns:m="http://schemas.openxmlformats.org/officeDocument/2006/math">
+                    <m:oMath>
                       <m:sSub>
                         <m:sSubPr>
                           <m:ctrlPr>
-                            <a:rPr lang="fr-CH" sz="2000" b="0" i="1" smtClean="0">
+                            <a:rPr lang="fr-CH" sz="2400" b="0" i="1" smtClean="0">
+                              <a:solidFill>
+                                <a:schemeClr val="tx1"/>
+                              </a:solidFill>
                               <a:latin typeface="Cambria Math" panose="02040503050406030204" pitchFamily="18" charset="0"/>
                             </a:rPr>
                           </m:ctrlPr>
                         </m:sSubPr>
                         <m:e>
                           <m:r>
-                            <a:rPr lang="fr-CH" sz="2000" b="0" i="1" smtClean="0">
+                            <a:rPr lang="fr-CH" sz="2400" b="0" i="1" smtClean="0">
+                              <a:solidFill>
+                                <a:schemeClr val="tx1"/>
+                              </a:solidFill>
                               <a:latin typeface="Cambria Math" panose="02040503050406030204" pitchFamily="18" charset="0"/>
                             </a:rPr>
                             <m:t>𝑀</m:t>
@@ -7455,7 +7646,10 @@
                         </m:e>
                         <m:sub>
                           <m:r>
-                            <a:rPr lang="fr-CH" sz="2000" b="0" i="1" smtClean="0">
+                            <a:rPr lang="fr-CH" sz="2400" b="0" i="1" smtClean="0">
+                              <a:solidFill>
+                                <a:schemeClr val="tx1"/>
+                              </a:solidFill>
                               <a:latin typeface="Cambria Math" panose="02040503050406030204" pitchFamily="18" charset="0"/>
                             </a:rPr>
                             <m:t>𝑜𝑢𝑡</m:t>
@@ -7465,14 +7659,20 @@
                       <m:d>
                         <m:dPr>
                           <m:ctrlPr>
-                            <a:rPr lang="fr-CH" sz="2000" b="0" i="1" smtClean="0">
+                            <a:rPr lang="fr-CH" sz="2400" b="0" i="1" smtClean="0">
+                              <a:solidFill>
+                                <a:schemeClr val="tx1"/>
+                              </a:solidFill>
                               <a:latin typeface="Cambria Math" panose="02040503050406030204" pitchFamily="18" charset="0"/>
                             </a:rPr>
                           </m:ctrlPr>
                         </m:dPr>
                         <m:e>
                           <m:r>
-                            <a:rPr lang="fr-CH" sz="2000" b="0" i="1" smtClean="0">
+                            <a:rPr lang="fr-CH" sz="2400" b="0" i="1" smtClean="0">
+                              <a:solidFill>
+                                <a:schemeClr val="tx1"/>
+                              </a:solidFill>
                               <a:latin typeface="Cambria Math" panose="02040503050406030204" pitchFamily="18" charset="0"/>
                             </a:rPr>
                             <m:t>𝑡</m:t>
@@ -7480,28 +7680,65 @@
                         </m:e>
                       </m:d>
                       <m:r>
-                        <a:rPr lang="fr-CH" sz="2000" b="0" i="1" smtClean="0">
+                        <a:rPr lang="fr-CH" sz="2400" b="0" i="1" smtClean="0">
+                          <a:solidFill>
+                            <a:schemeClr val="tx1"/>
+                          </a:solidFill>
                           <a:latin typeface="Cambria Math" panose="02040503050406030204" pitchFamily="18" charset="0"/>
                         </a:rPr>
                         <m:t>=</m:t>
                       </m:r>
-                      <m:r>
-                        <a:rPr lang="fr-CH" sz="2000" b="0" i="1" smtClean="0">
-                          <a:latin typeface="Cambria Math" panose="02040503050406030204" pitchFamily="18" charset="0"/>
-                        </a:rPr>
-                        <m:t>𝑄</m:t>
-                      </m:r>
                       <m:sSub>
                         <m:sSubPr>
                           <m:ctrlPr>
-                            <a:rPr lang="fr-CH" sz="2000" b="0" i="1" smtClean="0">
+                            <a:rPr lang="fr-CH" sz="2400" b="0" i="1" smtClean="0">
+                              <a:solidFill>
+                                <a:schemeClr val="tx1"/>
+                              </a:solidFill>
                               <a:latin typeface="Cambria Math" panose="02040503050406030204" pitchFamily="18" charset="0"/>
                             </a:rPr>
                           </m:ctrlPr>
                         </m:sSubPr>
                         <m:e>
                           <m:r>
-                            <a:rPr lang="fr-CH" sz="2000" b="0" i="1" smtClean="0">
+                            <a:rPr lang="fr-CH" sz="2400" b="0" i="1" smtClean="0">
+                              <a:solidFill>
+                                <a:schemeClr val="tx1"/>
+                              </a:solidFill>
+                              <a:latin typeface="Cambria Math" panose="02040503050406030204" pitchFamily="18" charset="0"/>
+                            </a:rPr>
+                            <m:t>𝑄</m:t>
+                          </m:r>
+                        </m:e>
+                        <m:sub>
+                          <m:r>
+                            <a:rPr lang="fr-CH" sz="2400" b="0" i="1" smtClean="0">
+                              <a:solidFill>
+                                <a:schemeClr val="tx1"/>
+                              </a:solidFill>
+                              <a:latin typeface="Cambria Math" panose="02040503050406030204" pitchFamily="18" charset="0"/>
+                            </a:rPr>
+                            <m:t>𝑡𝑜𝑡</m:t>
+                          </m:r>
+                        </m:sub>
+                      </m:sSub>
+                      <m:sSub>
+                        <m:sSubPr>
+                          <m:ctrlPr>
+                            <a:rPr lang="fr-CH" sz="2400" b="0" i="1" smtClean="0">
+                              <a:solidFill>
+                                <a:schemeClr val="tx1"/>
+                              </a:solidFill>
+                              <a:latin typeface="Cambria Math" panose="02040503050406030204" pitchFamily="18" charset="0"/>
+                            </a:rPr>
+                          </m:ctrlPr>
+                        </m:sSubPr>
+                        <m:e>
+                          <m:r>
+                            <a:rPr lang="fr-CH" sz="2400" b="0" i="1" smtClean="0">
+                              <a:solidFill>
+                                <a:schemeClr val="tx1"/>
+                              </a:solidFill>
                               <a:latin typeface="Cambria Math" panose="02040503050406030204" pitchFamily="18" charset="0"/>
                             </a:rPr>
                             <m:t>𝐶</m:t>
@@ -7509,7 +7746,10 @@
                         </m:e>
                         <m:sub>
                           <m:r>
-                            <a:rPr lang="fr-CH" sz="2000" b="0" i="1" smtClean="0">
+                            <a:rPr lang="fr-CH" sz="2400" b="0" i="1" smtClean="0">
+                              <a:solidFill>
+                                <a:schemeClr val="tx1"/>
+                              </a:solidFill>
                               <a:latin typeface="Cambria Math" panose="02040503050406030204" pitchFamily="18" charset="0"/>
                             </a:rPr>
                             <m:t>𝑒𝑝𝑖</m:t>
@@ -7517,19 +7757,28 @@
                         </m:sub>
                       </m:sSub>
                       <m:r>
-                        <a:rPr lang="fr-CH" sz="2000" b="0" i="1" smtClean="0">
+                        <a:rPr lang="fr-CH" sz="2400" b="0" i="1" smtClean="0">
+                          <a:solidFill>
+                            <a:schemeClr val="tx1"/>
+                          </a:solidFill>
                           <a:latin typeface="Cambria Math" panose="02040503050406030204" pitchFamily="18" charset="0"/>
                         </a:rPr>
                         <m:t>(</m:t>
                       </m:r>
                       <m:r>
-                        <a:rPr lang="fr-CH" sz="2000" b="0" i="1" smtClean="0">
+                        <a:rPr lang="fr-CH" sz="2400" b="0" i="1" smtClean="0">
+                          <a:solidFill>
+                            <a:schemeClr val="tx1"/>
+                          </a:solidFill>
                           <a:latin typeface="Cambria Math" panose="02040503050406030204" pitchFamily="18" charset="0"/>
                         </a:rPr>
                         <m:t>𝑡</m:t>
                       </m:r>
                       <m:r>
-                        <a:rPr lang="fr-CH" sz="2000" b="0" i="1" smtClean="0">
+                        <a:rPr lang="fr-CH" sz="2400" b="0" i="1" smtClean="0">
+                          <a:solidFill>
+                            <a:schemeClr val="tx1"/>
+                          </a:solidFill>
                           <a:latin typeface="Cambria Math" panose="02040503050406030204" pitchFamily="18" charset="0"/>
                         </a:rPr>
                         <m:t>)</m:t>
@@ -7537,7 +7786,11 @@
                     </m:oMath>
                   </m:oMathPara>
                 </a14:m>
-                <a:endParaRPr lang="en-US" sz="2000" i="1" dirty="0"/>
+                <a:endParaRPr lang="en-US" sz="2400" i="1" dirty="0">
+                  <a:solidFill>
+                    <a:schemeClr val="tx1"/>
+                  </a:solidFill>
+                </a:endParaRPr>
               </a:p>
             </p:txBody>
           </p:sp>
@@ -7559,8 +7812,8 @@
             </p:nvSpPr>
             <p:spPr>
               <a:xfrm>
-                <a:off x="753759" y="570475"/>
-                <a:ext cx="2950570" cy="423770"/>
+                <a:off x="316546" y="575886"/>
+                <a:ext cx="3261006" cy="490199"/>
               </a:xfrm>
               <a:prstGeom prst="rect">
                 <a:avLst/>
@@ -7568,7 +7821,7 @@
               <a:blipFill>
                 <a:blip r:embed="rId4"/>
                 <a:stretch>
-                  <a:fillRect b="-10145"/>
+                  <a:fillRect b="-11111"/>
                 </a:stretch>
               </a:blipFill>
             </p:spPr>
@@ -7587,8 +7840,8 @@
           </p:sp>
         </mc:Fallback>
       </mc:AlternateContent>
-      <mc:AlternateContent xmlns:mc="http://schemas.openxmlformats.org/markup-compatibility/2006" xmlns:a14="http://schemas.microsoft.com/office/drawing/2010/main">
-        <mc:Choice Requires="a14">
+      <mc:AlternateContent xmlns:mc="http://schemas.openxmlformats.org/markup-compatibility/2006">
+        <mc:Choice xmlns:a14="http://schemas.microsoft.com/office/drawing/2010/main" Requires="a14">
           <p:sp>
             <p:nvSpPr>
               <p:cNvPr id="19" name="TextBox 18">
@@ -7603,8 +7856,8 @@
             </p:nvSpPr>
             <p:spPr>
               <a:xfrm>
-                <a:off x="3685634" y="286182"/>
-                <a:ext cx="3665959" cy="423770"/>
+                <a:off x="2745088" y="280633"/>
+                <a:ext cx="3665959" cy="494751"/>
               </a:xfrm>
               <a:prstGeom prst="rect">
                 <a:avLst/>
@@ -7619,7 +7872,7 @@
               <a:p>
                 <a:pPr algn="ctr"/>
                 <a:r>
-                  <a:rPr lang="fr-CH" sz="2000" b="1" dirty="0"/>
+                  <a:rPr lang="fr-CH" sz="2400" b="1" dirty="0"/>
                   <a:t>Epilimnion </a:t>
                 </a:r>
                 <a14:m>
@@ -7627,14 +7880,14 @@
                     <m:sSub>
                       <m:sSubPr>
                         <m:ctrlPr>
-                          <a:rPr lang="fr-CH" sz="2000" b="1" i="1" smtClean="0">
+                          <a:rPr lang="fr-CH" sz="2400" b="1" i="1" smtClean="0">
                             <a:latin typeface="Cambria Math" panose="02040503050406030204" pitchFamily="18" charset="0"/>
                           </a:rPr>
                         </m:ctrlPr>
                       </m:sSubPr>
                       <m:e>
                         <m:r>
-                          <a:rPr lang="fr-CH" sz="2000" b="1" i="1" smtClean="0">
+                          <a:rPr lang="fr-CH" sz="2400" b="1" i="1" smtClean="0">
                             <a:latin typeface="Cambria Math" panose="02040503050406030204" pitchFamily="18" charset="0"/>
                           </a:rPr>
                           <m:t>𝑪</m:t>
@@ -7642,7 +7895,7 @@
                       </m:e>
                       <m:sub>
                         <m:r>
-                          <a:rPr lang="fr-CH" sz="2000" b="1" i="1" smtClean="0">
+                          <a:rPr lang="fr-CH" sz="2400" b="1" i="1" smtClean="0">
                             <a:latin typeface="Cambria Math" panose="02040503050406030204" pitchFamily="18" charset="0"/>
                           </a:rPr>
                           <m:t>𝒆𝒑𝒊</m:t>
@@ -7650,31 +7903,31 @@
                       </m:sub>
                     </m:sSub>
                     <m:r>
-                      <a:rPr lang="fr-CH" sz="2000" b="1" i="1" smtClean="0">
+                      <a:rPr lang="fr-CH" sz="2400" b="1" i="1" smtClean="0">
                         <a:latin typeface="Cambria Math" panose="02040503050406030204" pitchFamily="18" charset="0"/>
                       </a:rPr>
                       <m:t>(</m:t>
                     </m:r>
                     <m:r>
-                      <a:rPr lang="fr-CH" sz="2000" b="1" i="1" smtClean="0">
+                      <a:rPr lang="fr-CH" sz="2400" b="1" i="1" smtClean="0">
                         <a:latin typeface="Cambria Math" panose="02040503050406030204" pitchFamily="18" charset="0"/>
                       </a:rPr>
                       <m:t>𝒕</m:t>
                     </m:r>
                     <m:r>
-                      <a:rPr lang="fr-CH" sz="2000" b="1" i="1" smtClean="0">
+                      <a:rPr lang="fr-CH" sz="2400" b="1" i="1" smtClean="0">
                         <a:latin typeface="Cambria Math" panose="02040503050406030204" pitchFamily="18" charset="0"/>
                       </a:rPr>
                       <m:t>)</m:t>
                     </m:r>
                   </m:oMath>
                 </a14:m>
-                <a:endParaRPr lang="en-US" sz="2000" b="1" i="1" dirty="0"/>
+                <a:endParaRPr lang="en-US" sz="2400" b="1" i="1" dirty="0"/>
               </a:p>
             </p:txBody>
           </p:sp>
         </mc:Choice>
-        <mc:Fallback xmlns="">
+        <mc:Fallback>
           <p:sp>
             <p:nvSpPr>
               <p:cNvPr id="19" name="TextBox 18">
@@ -7691,8 +7944,8 @@
             </p:nvSpPr>
             <p:spPr>
               <a:xfrm>
-                <a:off x="3685634" y="286182"/>
-                <a:ext cx="3665959" cy="423770"/>
+                <a:off x="2745088" y="280633"/>
+                <a:ext cx="3665959" cy="494751"/>
               </a:xfrm>
               <a:prstGeom prst="rect">
                 <a:avLst/>
@@ -7700,7 +7953,7 @@
               <a:blipFill>
                 <a:blip r:embed="rId5"/>
                 <a:stretch>
-                  <a:fillRect t="-7246" b="-21739"/>
+                  <a:fillRect t="-8642" b="-22222"/>
                 </a:stretch>
               </a:blipFill>
             </p:spPr>
@@ -7719,8 +7972,8 @@
           </p:sp>
         </mc:Fallback>
       </mc:AlternateContent>
-      <mc:AlternateContent xmlns:mc="http://schemas.openxmlformats.org/markup-compatibility/2006" xmlns:a14="http://schemas.microsoft.com/office/drawing/2010/main">
-        <mc:Choice Requires="a14">
+      <mc:AlternateContent xmlns:mc="http://schemas.openxmlformats.org/markup-compatibility/2006">
+        <mc:Choice xmlns:a14="http://schemas.microsoft.com/office/drawing/2010/main" Requires="a14">
           <p:sp>
             <p:nvSpPr>
               <p:cNvPr id="20" name="TextBox 19">
@@ -7735,8 +7988,8 @@
             </p:nvSpPr>
             <p:spPr>
               <a:xfrm>
-                <a:off x="3268406" y="5595821"/>
-                <a:ext cx="4287851" cy="424283"/>
+                <a:off x="2434142" y="5393851"/>
+                <a:ext cx="4287851" cy="495520"/>
               </a:xfrm>
               <a:prstGeom prst="rect">
                 <a:avLst/>
@@ -7751,7 +8004,7 @@
               <a:p>
                 <a:pPr algn="ctr"/>
                 <a:r>
-                  <a:rPr lang="fr-CH" sz="2000" b="1" dirty="0"/>
+                  <a:rPr lang="fr-CH" sz="2400" b="1" dirty="0"/>
                   <a:t>Hypolimnion </a:t>
                 </a:r>
                 <a14:m>
@@ -7759,14 +8012,14 @@
                     <m:sSub>
                       <m:sSubPr>
                         <m:ctrlPr>
-                          <a:rPr lang="fr-CH" sz="2000" b="1" i="1" smtClean="0">
+                          <a:rPr lang="fr-CH" sz="2400" b="1" i="1" smtClean="0">
                             <a:latin typeface="Cambria Math" panose="02040503050406030204" pitchFamily="18" charset="0"/>
                           </a:rPr>
                         </m:ctrlPr>
                       </m:sSubPr>
                       <m:e>
                         <m:r>
-                          <a:rPr lang="fr-CH" sz="2000" b="1" i="1" smtClean="0">
+                          <a:rPr lang="fr-CH" sz="2400" b="1" i="1" smtClean="0">
                             <a:latin typeface="Cambria Math" panose="02040503050406030204" pitchFamily="18" charset="0"/>
                           </a:rPr>
                           <m:t>𝑪</m:t>
@@ -7774,7 +8027,7 @@
                       </m:e>
                       <m:sub>
                         <m:r>
-                          <a:rPr lang="fr-CH" sz="2000" b="1" i="1" smtClean="0">
+                          <a:rPr lang="fr-CH" sz="2400" b="1" i="1" smtClean="0">
                             <a:latin typeface="Cambria Math" panose="02040503050406030204" pitchFamily="18" charset="0"/>
                           </a:rPr>
                           <m:t>𝒉𝒚𝒑𝒐</m:t>
@@ -7782,31 +8035,31 @@
                       </m:sub>
                     </m:sSub>
                     <m:r>
-                      <a:rPr lang="fr-CH" sz="2000" b="1" i="1" smtClean="0">
+                      <a:rPr lang="fr-CH" sz="2400" b="1" i="1" smtClean="0">
                         <a:latin typeface="Cambria Math" panose="02040503050406030204" pitchFamily="18" charset="0"/>
                       </a:rPr>
                       <m:t>(</m:t>
                     </m:r>
                     <m:r>
-                      <a:rPr lang="fr-CH" sz="2000" b="1" i="1" smtClean="0">
+                      <a:rPr lang="fr-CH" sz="2400" b="1" i="1" smtClean="0">
                         <a:latin typeface="Cambria Math" panose="02040503050406030204" pitchFamily="18" charset="0"/>
                       </a:rPr>
                       <m:t>𝒕</m:t>
                     </m:r>
                     <m:r>
-                      <a:rPr lang="fr-CH" sz="2000" b="1" i="1" smtClean="0">
+                      <a:rPr lang="fr-CH" sz="2400" b="1" i="1" smtClean="0">
                         <a:latin typeface="Cambria Math" panose="02040503050406030204" pitchFamily="18" charset="0"/>
                       </a:rPr>
                       <m:t>)</m:t>
                     </m:r>
                   </m:oMath>
                 </a14:m>
-                <a:endParaRPr lang="en-US" sz="2000" b="1" dirty="0"/>
+                <a:endParaRPr lang="en-US" sz="2400" b="1" dirty="0"/>
               </a:p>
             </p:txBody>
           </p:sp>
         </mc:Choice>
-        <mc:Fallback xmlns="">
+        <mc:Fallback>
           <p:sp>
             <p:nvSpPr>
               <p:cNvPr id="20" name="TextBox 19">
@@ -7823,8 +8076,8 @@
             </p:nvSpPr>
             <p:spPr>
               <a:xfrm>
-                <a:off x="3268406" y="5595821"/>
-                <a:ext cx="4287851" cy="424283"/>
+                <a:off x="2434142" y="5393851"/>
+                <a:ext cx="4287851" cy="495520"/>
               </a:xfrm>
               <a:prstGeom prst="rect">
                 <a:avLst/>
@@ -7832,7 +8085,7 @@
               <a:blipFill>
                 <a:blip r:embed="rId6"/>
                 <a:stretch>
-                  <a:fillRect t="-7143" b="-20000"/>
+                  <a:fillRect t="-8642" b="-22222"/>
                 </a:stretch>
               </a:blipFill>
             </p:spPr>
@@ -7851,181 +8104,6 @@
           </p:sp>
         </mc:Fallback>
       </mc:AlternateContent>
-      <p:cxnSp>
-        <p:nvCxnSpPr>
-          <p:cNvPr id="8" name="Straight Arrow Connector 7">
-            <a:extLst>
-              <a:ext uri="{FF2B5EF4-FFF2-40B4-BE49-F238E27FC236}">
-                <a16:creationId xmlns:a16="http://schemas.microsoft.com/office/drawing/2014/main" id="{C9991C8C-9303-5B2A-E812-7BA9029404BE}"/>
-              </a:ext>
-            </a:extLst>
-          </p:cNvPr>
-          <p:cNvCxnSpPr>
-            <a:cxnSpLocks/>
-          </p:cNvCxnSpPr>
-          <p:nvPr/>
-        </p:nvCxnSpPr>
-        <p:spPr>
-          <a:xfrm>
-            <a:off x="8515469" y="213774"/>
-            <a:ext cx="0" cy="3402723"/>
-          </a:xfrm>
-          <a:prstGeom prst="straightConnector1">
-            <a:avLst/>
-          </a:prstGeom>
-          <a:ln w="38100">
-            <a:headEnd type="triangle"/>
-            <a:tailEnd type="triangle"/>
-          </a:ln>
-        </p:spPr>
-        <p:style>
-          <a:lnRef idx="1">
-            <a:schemeClr val="dk1"/>
-          </a:lnRef>
-          <a:fillRef idx="0">
-            <a:schemeClr val="dk1"/>
-          </a:fillRef>
-          <a:effectRef idx="0">
-            <a:schemeClr val="dk1"/>
-          </a:effectRef>
-          <a:fontRef idx="minor">
-            <a:schemeClr val="tx1"/>
-          </a:fontRef>
-        </p:style>
-      </p:cxnSp>
-      <mc:AlternateContent xmlns:mc="http://schemas.openxmlformats.org/markup-compatibility/2006" xmlns:a14="http://schemas.microsoft.com/office/drawing/2010/main">
-        <mc:Choice Requires="a14">
-          <p:sp>
-            <p:nvSpPr>
-              <p:cNvPr id="22" name="TextBox 21">
-                <a:extLst>
-                  <a:ext uri="{FF2B5EF4-FFF2-40B4-BE49-F238E27FC236}">
-                    <a16:creationId xmlns:a16="http://schemas.microsoft.com/office/drawing/2014/main" id="{64133125-805E-853D-8D7D-9C1E4DF9E30E}"/>
-                  </a:ext>
-                </a:extLst>
-              </p:cNvPr>
-              <p:cNvSpPr txBox="1"/>
-              <p:nvPr/>
-            </p:nvSpPr>
-            <p:spPr>
-              <a:xfrm>
-                <a:off x="7351593" y="380289"/>
-                <a:ext cx="3272527" cy="423770"/>
-              </a:xfrm>
-              <a:prstGeom prst="rect">
-                <a:avLst/>
-              </a:prstGeom>
-              <a:noFill/>
-            </p:spPr>
-            <p:txBody>
-              <a:bodyPr wrap="square" rtlCol="0">
-                <a:spAutoFit/>
-              </a:bodyPr>
-              <a:lstStyle/>
-              <a:p>
-                <a:pPr/>
-                <a14:m>
-                  <m:oMathPara xmlns:m="http://schemas.openxmlformats.org/officeDocument/2006/math">
-                    <m:oMathParaPr>
-                      <m:jc m:val="centerGroup"/>
-                    </m:oMathParaPr>
-                    <m:oMath xmlns:m="http://schemas.openxmlformats.org/officeDocument/2006/math">
-                      <m:sSub>
-                        <m:sSubPr>
-                          <m:ctrlPr>
-                            <a:rPr lang="fr-CH" sz="2000" b="0" i="1" smtClean="0">
-                              <a:latin typeface="Cambria Math" panose="02040503050406030204" pitchFamily="18" charset="0"/>
-                            </a:rPr>
-                          </m:ctrlPr>
-                        </m:sSubPr>
-                        <m:e>
-                          <m:r>
-                            <a:rPr lang="fr-CH" sz="2000" b="0" i="1" smtClean="0">
-                              <a:latin typeface="Cambria Math" panose="02040503050406030204" pitchFamily="18" charset="0"/>
-                            </a:rPr>
-                            <m:t>h</m:t>
-                          </m:r>
-                        </m:e>
-                        <m:sub>
-                          <m:r>
-                            <a:rPr lang="fr-CH" sz="2000" b="0" i="1" smtClean="0">
-                              <a:latin typeface="Cambria Math" panose="02040503050406030204" pitchFamily="18" charset="0"/>
-                            </a:rPr>
-                            <m:t>𝑒𝑝𝑖</m:t>
-                          </m:r>
-                        </m:sub>
-                      </m:sSub>
-                      <m:r>
-                        <a:rPr lang="fr-CH" sz="2000" b="0" i="1" smtClean="0">
-                          <a:latin typeface="Cambria Math" panose="02040503050406030204" pitchFamily="18" charset="0"/>
-                        </a:rPr>
-                        <m:t>(</m:t>
-                      </m:r>
-                      <m:r>
-                        <a:rPr lang="fr-CH" sz="2000" b="0" i="1" smtClean="0">
-                          <a:latin typeface="Cambria Math" panose="02040503050406030204" pitchFamily="18" charset="0"/>
-                        </a:rPr>
-                        <m:t>𝑡</m:t>
-                      </m:r>
-                      <m:r>
-                        <a:rPr lang="fr-CH" sz="2000" b="0" i="1" smtClean="0">
-                          <a:latin typeface="Cambria Math" panose="02040503050406030204" pitchFamily="18" charset="0"/>
-                        </a:rPr>
-                        <m:t>)</m:t>
-                      </m:r>
-                    </m:oMath>
-                  </m:oMathPara>
-                </a14:m>
-                <a:endParaRPr lang="en-US" sz="2000" dirty="0"/>
-              </a:p>
-            </p:txBody>
-          </p:sp>
-        </mc:Choice>
-        <mc:Fallback xmlns="">
-          <p:sp>
-            <p:nvSpPr>
-              <p:cNvPr id="22" name="TextBox 21">
-                <a:extLst>
-                  <a:ext uri="{FF2B5EF4-FFF2-40B4-BE49-F238E27FC236}">
-                    <a16:creationId xmlns:a16="http://schemas.microsoft.com/office/drawing/2014/main" id="{64133125-805E-853D-8D7D-9C1E4DF9E30E}"/>
-                  </a:ext>
-                </a:extLst>
-              </p:cNvPr>
-              <p:cNvSpPr txBox="1">
-                <a:spLocks noRot="1" noChangeAspect="1" noMove="1" noResize="1" noEditPoints="1" noAdjustHandles="1" noChangeArrowheads="1" noChangeShapeType="1" noTextEdit="1"/>
-              </p:cNvSpPr>
-              <p:nvPr/>
-            </p:nvSpPr>
-            <p:spPr>
-              <a:xfrm>
-                <a:off x="7351593" y="380289"/>
-                <a:ext cx="3272527" cy="423770"/>
-              </a:xfrm>
-              <a:prstGeom prst="rect">
-                <a:avLst/>
-              </a:prstGeom>
-              <a:blipFill>
-                <a:blip r:embed="rId7"/>
-                <a:stretch>
-                  <a:fillRect b="-10000"/>
-                </a:stretch>
-              </a:blipFill>
-            </p:spPr>
-            <p:txBody>
-              <a:bodyPr/>
-              <a:lstStyle/>
-              <a:p>
-                <a:r>
-                  <a:rPr lang="en-US">
-                    <a:noFill/>
-                  </a:rPr>
-                  <a:t> </a:t>
-                </a:r>
-              </a:p>
-            </p:txBody>
-          </p:sp>
-        </mc:Fallback>
-      </mc:AlternateContent>
       <p:sp>
         <p:nvSpPr>
           <p:cNvPr id="26" name="Arrow: Left 25">
@@ -8040,7 +8118,7 @@
         </p:nvSpPr>
         <p:spPr>
           <a:xfrm>
-            <a:off x="8662054" y="1359046"/>
+            <a:off x="8015271" y="1353497"/>
             <a:ext cx="1341844" cy="581822"/>
           </a:xfrm>
           <a:prstGeom prst="leftArrow">
@@ -8068,12 +8146,12 @@
           <a:lstStyle/>
           <a:p>
             <a:pPr algn="ctr"/>
-            <a:endParaRPr lang="en-US" sz="2000"/>
-          </a:p>
-        </p:txBody>
-      </p:sp>
-      <mc:AlternateContent xmlns:mc="http://schemas.openxmlformats.org/markup-compatibility/2006" xmlns:a14="http://schemas.microsoft.com/office/drawing/2010/main">
-        <mc:Choice Requires="a14">
+            <a:endParaRPr lang="en-US" sz="2400"/>
+          </a:p>
+        </p:txBody>
+      </p:sp>
+      <mc:AlternateContent xmlns:mc="http://schemas.openxmlformats.org/markup-compatibility/2006">
+        <mc:Choice xmlns:a14="http://schemas.microsoft.com/office/drawing/2010/main" Requires="a14">
           <p:sp>
             <p:nvSpPr>
               <p:cNvPr id="28" name="TextBox 27">
@@ -8088,8 +8166,8 @@
             </p:nvSpPr>
             <p:spPr>
               <a:xfrm>
-                <a:off x="8627979" y="4610427"/>
-                <a:ext cx="4307799" cy="778355"/>
+                <a:off x="8321951" y="4798010"/>
+                <a:ext cx="4307799" cy="915764"/>
               </a:xfrm>
               <a:prstGeom prst="rect">
                 <a:avLst/>
@@ -8105,21 +8183,18 @@
                 <a:pPr/>
                 <a14:m>
                   <m:oMathPara xmlns:m="http://schemas.openxmlformats.org/officeDocument/2006/math">
-                    <m:oMathParaPr>
-                      <m:jc m:val="centerGroup"/>
-                    </m:oMathParaPr>
-                    <m:oMath xmlns:m="http://schemas.openxmlformats.org/officeDocument/2006/math">
+                    <m:oMath>
                       <m:sSub>
                         <m:sSubPr>
                           <m:ctrlPr>
-                            <a:rPr lang="fr-CH" sz="2000" b="0" i="1" smtClean="0">
+                            <a:rPr lang="fr-CH" sz="2400" b="0" i="1" smtClean="0">
                               <a:latin typeface="Cambria Math" panose="02040503050406030204" pitchFamily="18" charset="0"/>
                             </a:rPr>
                           </m:ctrlPr>
                         </m:sSubPr>
                         <m:e>
                           <m:r>
-                            <a:rPr lang="fr-CH" sz="2000" b="0" i="1" smtClean="0">
+                            <a:rPr lang="fr-CH" sz="2400" b="0" i="1" smtClean="0">
                               <a:latin typeface="Cambria Math" panose="02040503050406030204" pitchFamily="18" charset="0"/>
                             </a:rPr>
                             <m:t>𝑄</m:t>
@@ -8127,24 +8202,24 @@
                         </m:e>
                         <m:sub>
                           <m:r>
-                            <a:rPr lang="fr-CH" sz="2000" b="0" i="1" smtClean="0">
-                              <a:latin typeface="Cambria Math" panose="02040503050406030204" pitchFamily="18" charset="0"/>
-                            </a:rPr>
-                            <m:t>h𝑦𝑝𝑜</m:t>
+                            <a:rPr lang="fr-CH" sz="2400" b="0" i="1" smtClean="0">
+                              <a:latin typeface="Cambria Math" panose="02040503050406030204" pitchFamily="18" charset="0"/>
+                            </a:rPr>
+                            <m:t>ℎ𝑦𝑝𝑜</m:t>
                           </m:r>
                         </m:sub>
                       </m:sSub>
                       <m:d>
                         <m:dPr>
                           <m:ctrlPr>
-                            <a:rPr lang="fr-CH" sz="2000" b="0" i="1" smtClean="0">
+                            <a:rPr lang="fr-CH" sz="2400" b="0" i="1" smtClean="0">
                               <a:latin typeface="Cambria Math" panose="02040503050406030204" pitchFamily="18" charset="0"/>
                             </a:rPr>
                           </m:ctrlPr>
                         </m:dPr>
                         <m:e>
                           <m:r>
-                            <a:rPr lang="fr-CH" sz="2000" b="0" i="1" smtClean="0">
+                            <a:rPr lang="fr-CH" sz="2400" b="0" i="1" smtClean="0">
                               <a:latin typeface="Cambria Math" panose="02040503050406030204" pitchFamily="18" charset="0"/>
                             </a:rPr>
                             <m:t>𝑡</m:t>
@@ -8152,7 +8227,7 @@
                         </m:e>
                       </m:d>
                       <m:r>
-                        <a:rPr lang="fr-CH" sz="2000" b="0" i="1" smtClean="0">
+                        <a:rPr lang="fr-CH" sz="2400" b="0" i="1" smtClean="0">
                           <a:latin typeface="Cambria Math" panose="02040503050406030204" pitchFamily="18" charset="0"/>
                         </a:rPr>
                         <m:t>=</m:t>
@@ -8160,20 +8235,20 @@
                       <m:d>
                         <m:dPr>
                           <m:ctrlPr>
-                            <a:rPr lang="fr-CH" sz="2000" b="0" i="1" smtClean="0">
+                            <a:rPr lang="fr-CH" sz="2400" b="0" i="1" smtClean="0">
                               <a:latin typeface="Cambria Math" panose="02040503050406030204" pitchFamily="18" charset="0"/>
                             </a:rPr>
                           </m:ctrlPr>
                         </m:dPr>
                         <m:e>
                           <m:r>
-                            <a:rPr lang="fr-CH" sz="2000" b="0" i="1" smtClean="0">
+                            <a:rPr lang="fr-CH" sz="2400" b="0" i="1" smtClean="0">
                               <a:latin typeface="Cambria Math" panose="02040503050406030204" pitchFamily="18" charset="0"/>
                             </a:rPr>
                             <m:t>1−</m:t>
                           </m:r>
                           <m:r>
-                            <a:rPr lang="fr-CH" sz="2000" b="0" i="1" smtClean="0">
+                            <a:rPr lang="fr-CH" sz="2400" b="0" i="1" smtClean="0">
                               <a:latin typeface="Cambria Math" panose="02040503050406030204" pitchFamily="18" charset="0"/>
                             </a:rPr>
                             <m:t>𝛼</m:t>
@@ -8181,14 +8256,14 @@
                           <m:d>
                             <m:dPr>
                               <m:ctrlPr>
-                                <a:rPr lang="fr-CH" sz="2000" b="0" i="1" smtClean="0">
+                                <a:rPr lang="fr-CH" sz="2400" b="0" i="1" smtClean="0">
                                   <a:latin typeface="Cambria Math" panose="02040503050406030204" pitchFamily="18" charset="0"/>
                                 </a:rPr>
                               </m:ctrlPr>
                             </m:dPr>
                             <m:e>
                               <m:r>
-                                <a:rPr lang="fr-CH" sz="2000" b="0" i="1" smtClean="0">
+                                <a:rPr lang="fr-CH" sz="2400" b="0" i="1" smtClean="0">
                                   <a:latin typeface="Cambria Math" panose="02040503050406030204" pitchFamily="18" charset="0"/>
                                 </a:rPr>
                                 <m:t>𝑡</m:t>
@@ -8197,16 +8272,35 @@
                           </m:d>
                         </m:e>
                       </m:d>
-                      <m:r>
-                        <a:rPr lang="fr-CH" sz="2000" b="0" i="1" smtClean="0">
-                          <a:latin typeface="Cambria Math" panose="02040503050406030204" pitchFamily="18" charset="0"/>
-                        </a:rPr>
-                        <m:t>𝑄</m:t>
-                      </m:r>
+                      <m:sSub>
+                        <m:sSubPr>
+                          <m:ctrlPr>
+                            <a:rPr lang="fr-CH" sz="2400" b="0" i="1" smtClean="0">
+                              <a:latin typeface="Cambria Math" panose="02040503050406030204" pitchFamily="18" charset="0"/>
+                            </a:rPr>
+                          </m:ctrlPr>
+                        </m:sSubPr>
+                        <m:e>
+                          <m:r>
+                            <a:rPr lang="fr-CH" sz="2400" b="0" i="1" smtClean="0">
+                              <a:latin typeface="Cambria Math" panose="02040503050406030204" pitchFamily="18" charset="0"/>
+                            </a:rPr>
+                            <m:t>𝑄</m:t>
+                          </m:r>
+                        </m:e>
+                        <m:sub>
+                          <m:r>
+                            <a:rPr lang="fr-CH" sz="2400" b="0" i="1" smtClean="0">
+                              <a:latin typeface="Cambria Math" panose="02040503050406030204" pitchFamily="18" charset="0"/>
+                            </a:rPr>
+                            <m:t>𝑡𝑜𝑡</m:t>
+                          </m:r>
+                        </m:sub>
+                      </m:sSub>
                     </m:oMath>
                   </m:oMathPara>
                 </a14:m>
-                <a:endParaRPr lang="fr-CH" sz="2000" b="0" i="1" dirty="0">
+                <a:endParaRPr lang="fr-CH" sz="2400" b="0" i="1" dirty="0">
                   <a:latin typeface="Cambria Math" panose="02040503050406030204" pitchFamily="18" charset="0"/>
                 </a:endParaRPr>
               </a:p>
@@ -8214,12 +8308,9 @@
                 <a:pPr/>
                 <a14:m>
                   <m:oMathPara xmlns:m="http://schemas.openxmlformats.org/officeDocument/2006/math">
-                    <m:oMathParaPr>
-                      <m:jc m:val="centerGroup"/>
-                    </m:oMathParaPr>
-                    <m:oMath xmlns:m="http://schemas.openxmlformats.org/officeDocument/2006/math">
+                    <m:oMath>
                       <m:r>
-                        <a:rPr lang="fr-CH" sz="2000" b="0" i="1" smtClean="0">
+                        <a:rPr lang="fr-CH" sz="2400" b="0" i="1" smtClean="0">
                           <a:latin typeface="Cambria Math" panose="02040503050406030204" pitchFamily="18" charset="0"/>
                         </a:rPr>
                         <m:t> </m:t>
@@ -8227,14 +8318,14 @@
                       <m:sSub>
                         <m:sSubPr>
                           <m:ctrlPr>
-                            <a:rPr lang="fr-CH" sz="2000" b="0" i="1" smtClean="0">
+                            <a:rPr lang="fr-CH" sz="2400" b="0" i="1" smtClean="0">
                               <a:latin typeface="Cambria Math" panose="02040503050406030204" pitchFamily="18" charset="0"/>
                             </a:rPr>
                           </m:ctrlPr>
                         </m:sSubPr>
                         <m:e>
                           <m:r>
-                            <a:rPr lang="fr-CH" sz="2000" b="0" i="1" smtClean="0">
+                            <a:rPr lang="fr-CH" sz="2400" b="0" i="1" smtClean="0">
                               <a:latin typeface="Cambria Math" panose="02040503050406030204" pitchFamily="18" charset="0"/>
                             </a:rPr>
                             <m:t>𝐶</m:t>
@@ -8242,27 +8333,27 @@
                         </m:e>
                         <m:sub>
                           <m:r>
-                            <a:rPr lang="fr-CH" sz="2000" b="0" i="1" smtClean="0">
+                            <a:rPr lang="fr-CH" sz="2400" b="0" i="1" smtClean="0">
                               <a:latin typeface="Cambria Math" panose="02040503050406030204" pitchFamily="18" charset="0"/>
                             </a:rPr>
                             <m:t>𝑖𝑛</m:t>
                           </m:r>
                           <m:r>
-                            <a:rPr lang="fr-CH" sz="2000" b="0" i="1" smtClean="0">
+                            <a:rPr lang="fr-CH" sz="2400" b="0" i="1" smtClean="0">
                               <a:latin typeface="Cambria Math" panose="02040503050406030204" pitchFamily="18" charset="0"/>
                             </a:rPr>
                             <m:t>,</m:t>
                           </m:r>
                           <m:r>
-                            <a:rPr lang="fr-CH" sz="2000" b="0" i="1" smtClean="0">
-                              <a:latin typeface="Cambria Math" panose="02040503050406030204" pitchFamily="18" charset="0"/>
-                            </a:rPr>
-                            <m:t>h𝑦𝑝𝑜</m:t>
+                            <a:rPr lang="fr-CH" sz="2400" b="0" i="1" smtClean="0">
+                              <a:latin typeface="Cambria Math" panose="02040503050406030204" pitchFamily="18" charset="0"/>
+                            </a:rPr>
+                            <m:t>ℎ𝑦𝑝𝑜</m:t>
                           </m:r>
                         </m:sub>
                       </m:sSub>
                       <m:r>
-                        <a:rPr lang="fr-CH" sz="2000" b="0" i="0" smtClean="0">
+                        <a:rPr lang="fr-CH" sz="2400" b="0" i="0" smtClean="0">
                           <a:latin typeface="Cambria Math" panose="02040503050406030204" pitchFamily="18" charset="0"/>
                         </a:rPr>
                         <m:t>=0</m:t>
@@ -8270,12 +8361,12 @@
                     </m:oMath>
                   </m:oMathPara>
                 </a14:m>
-                <a:endParaRPr lang="en-US" sz="2000" dirty="0"/>
+                <a:endParaRPr lang="en-US" sz="2400" dirty="0"/>
               </a:p>
             </p:txBody>
           </p:sp>
         </mc:Choice>
-        <mc:Fallback xmlns="">
+        <mc:Fallback>
           <p:sp>
             <p:nvSpPr>
               <p:cNvPr id="28" name="TextBox 27">
@@ -8292,16 +8383,16 @@
             </p:nvSpPr>
             <p:spPr>
               <a:xfrm>
-                <a:off x="8627979" y="4610427"/>
-                <a:ext cx="4307799" cy="778355"/>
+                <a:off x="8321951" y="4798010"/>
+                <a:ext cx="4307799" cy="915764"/>
               </a:xfrm>
               <a:prstGeom prst="rect">
                 <a:avLst/>
               </a:prstGeom>
               <a:blipFill>
-                <a:blip r:embed="rId8"/>
+                <a:blip r:embed="rId7"/>
                 <a:stretch>
-                  <a:fillRect b="-3906"/>
+                  <a:fillRect b="-5333"/>
                 </a:stretch>
               </a:blipFill>
             </p:spPr>
@@ -8334,7 +8425,7 @@
         </p:nvSpPr>
         <p:spPr>
           <a:xfrm rot="5400000">
-            <a:off x="1734901" y="3170468"/>
+            <a:off x="1088118" y="3463721"/>
             <a:ext cx="1283287" cy="581822"/>
           </a:xfrm>
           <a:prstGeom prst="leftArrow">
@@ -8370,12 +8461,12 @@
           <a:lstStyle/>
           <a:p>
             <a:pPr algn="ctr"/>
-            <a:endParaRPr lang="en-US" sz="2000"/>
-          </a:p>
-        </p:txBody>
-      </p:sp>
-      <mc:AlternateContent xmlns:mc="http://schemas.openxmlformats.org/markup-compatibility/2006" xmlns:a14="http://schemas.microsoft.com/office/drawing/2010/main">
-        <mc:Choice Requires="a14">
+            <a:endParaRPr lang="en-US" sz="2400"/>
+          </a:p>
+        </p:txBody>
+      </p:sp>
+      <mc:AlternateContent xmlns:mc="http://schemas.openxmlformats.org/markup-compatibility/2006">
+        <mc:Choice xmlns:a14="http://schemas.microsoft.com/office/drawing/2010/main" Requires="a14">
           <p:sp>
             <p:nvSpPr>
               <p:cNvPr id="32" name="TextBox 31">
@@ -8390,8 +8481,8 @@
             </p:nvSpPr>
             <p:spPr>
               <a:xfrm>
-                <a:off x="708823" y="4194226"/>
-                <a:ext cx="4307799" cy="424732"/>
+                <a:off x="316546" y="4392811"/>
+                <a:ext cx="4307799" cy="491288"/>
               </a:xfrm>
               <a:prstGeom prst="rect">
                 <a:avLst/>
@@ -8407,14 +8498,11 @@
                 <a:pPr/>
                 <a14:m>
                   <m:oMathPara xmlns:m="http://schemas.openxmlformats.org/officeDocument/2006/math">
-                    <m:oMathParaPr>
-                      <m:jc m:val="centerGroup"/>
-                    </m:oMathParaPr>
-                    <m:oMath xmlns:m="http://schemas.openxmlformats.org/officeDocument/2006/math">
+                    <m:oMath>
                       <m:sSub>
                         <m:sSubPr>
                           <m:ctrlPr>
-                            <a:rPr lang="fr-CH" sz="2000" b="0" i="1" smtClean="0">
+                            <a:rPr lang="fr-CH" sz="2400" b="0" i="1" smtClean="0">
                               <a:solidFill>
                                 <a:schemeClr val="accent2"/>
                               </a:solidFill>
@@ -8426,7 +8514,7 @@
                           <m:sSub>
                             <m:sSubPr>
                               <m:ctrlPr>
-                                <a:rPr lang="fr-CH" sz="2000" b="0" i="1" smtClean="0">
+                                <a:rPr lang="fr-CH" sz="2400" b="0" i="1" smtClean="0">
                                   <a:solidFill>
                                     <a:schemeClr val="accent2"/>
                                   </a:solidFill>
@@ -8436,7 +8524,7 @@
                             </m:sSubPr>
                             <m:e>
                               <m:r>
-                                <a:rPr lang="fr-CH" sz="2000" b="0" i="1" smtClean="0">
+                                <a:rPr lang="fr-CH" sz="2400" b="0" i="1" smtClean="0">
                                   <a:solidFill>
                                     <a:schemeClr val="accent2"/>
                                   </a:solidFill>
@@ -8447,7 +8535,7 @@
                             </m:e>
                             <m:sub>
                               <m:r>
-                                <a:rPr lang="fr-CH" sz="2000" b="0" i="1" smtClean="0">
+                                <a:rPr lang="fr-CH" sz="2400" b="0" i="1" smtClean="0">
                                   <a:solidFill>
                                     <a:schemeClr val="accent2"/>
                                   </a:solidFill>
@@ -8460,7 +8548,7 @@
                           <m:d>
                             <m:dPr>
                               <m:ctrlPr>
-                                <a:rPr lang="fr-CH" sz="2000" b="0" i="1" smtClean="0">
+                                <a:rPr lang="fr-CH" sz="2400" b="0" i="1" smtClean="0">
                                   <a:solidFill>
                                     <a:schemeClr val="accent2"/>
                                   </a:solidFill>
@@ -8470,7 +8558,7 @@
                             </m:dPr>
                             <m:e>
                               <m:r>
-                                <a:rPr lang="fr-CH" sz="2000" b="0" i="1" smtClean="0">
+                                <a:rPr lang="fr-CH" sz="2400" b="0" i="1" smtClean="0">
                                   <a:solidFill>
                                     <a:schemeClr val="accent2"/>
                                   </a:solidFill>
@@ -8481,7 +8569,7 @@
                             </m:e>
                           </m:d>
                           <m:r>
-                            <a:rPr lang="fr-CH" sz="2000" b="0" i="1" smtClean="0">
+                            <a:rPr lang="fr-CH" sz="2400" b="0" i="1" smtClean="0">
                               <a:solidFill>
                                 <a:schemeClr val="accent2"/>
                               </a:solidFill>
@@ -8490,7 +8578,7 @@
                             <m:t>=</m:t>
                           </m:r>
                           <m:r>
-                            <a:rPr lang="fr-CH" sz="2000" b="0" i="1" smtClean="0">
+                            <a:rPr lang="fr-CH" sz="2400" b="0" i="1" smtClean="0">
                               <a:solidFill>
                                 <a:schemeClr val="accent2"/>
                               </a:solidFill>
@@ -8501,20 +8589,20 @@
                         </m:e>
                         <m:sub>
                           <m:r>
-                            <a:rPr lang="fr-CH" sz="2000" b="0" i="1" smtClean="0">
+                            <a:rPr lang="fr-CH" sz="2400" b="0" i="1" smtClean="0">
                               <a:solidFill>
                                 <a:schemeClr val="accent2"/>
                               </a:solidFill>
                               <a:latin typeface="Cambria Math" panose="02040503050406030204" pitchFamily="18" charset="0"/>
                             </a:rPr>
-                            <m:t>h𝑦𝑝𝑜</m:t>
+                            <m:t>ℎ𝑦𝑝𝑜</m:t>
                           </m:r>
                         </m:sub>
                       </m:sSub>
                       <m:d>
                         <m:dPr>
                           <m:ctrlPr>
-                            <a:rPr lang="fr-CH" sz="2000" b="0" i="1" smtClean="0">
+                            <a:rPr lang="fr-CH" sz="2400" b="0" i="1" smtClean="0">
                               <a:solidFill>
                                 <a:schemeClr val="accent2"/>
                               </a:solidFill>
@@ -8524,7 +8612,7 @@
                         </m:dPr>
                         <m:e>
                           <m:r>
-                            <a:rPr lang="fr-CH" sz="2000" b="0" i="1" smtClean="0">
+                            <a:rPr lang="fr-CH" sz="2400" b="0" i="1" smtClean="0">
                               <a:solidFill>
                                 <a:schemeClr val="accent2"/>
                               </a:solidFill>
@@ -8537,7 +8625,7 @@
                       <m:sSub>
                         <m:sSubPr>
                           <m:ctrlPr>
-                            <a:rPr lang="fr-CH" sz="2000" b="0" i="1" smtClean="0">
+                            <a:rPr lang="fr-CH" sz="2400" b="0" i="1" smtClean="0">
                               <a:solidFill>
                                 <a:schemeClr val="accent2"/>
                               </a:solidFill>
@@ -8547,7 +8635,7 @@
                         </m:sSubPr>
                         <m:e>
                           <m:r>
-                            <a:rPr lang="fr-CH" sz="2000" b="0" i="1" smtClean="0">
+                            <a:rPr lang="fr-CH" sz="2400" b="0" i="1" smtClean="0">
                               <a:solidFill>
                                 <a:schemeClr val="accent2"/>
                               </a:solidFill>
@@ -8558,18 +8646,18 @@
                         </m:e>
                         <m:sub>
                           <m:r>
-                            <a:rPr lang="fr-CH" sz="2000" b="0" i="1" smtClean="0">
+                            <a:rPr lang="fr-CH" sz="2400" b="0" i="1" smtClean="0">
                               <a:solidFill>
                                 <a:schemeClr val="accent2"/>
                               </a:solidFill>
                               <a:latin typeface="Cambria Math" panose="02040503050406030204" pitchFamily="18" charset="0"/>
                             </a:rPr>
-                            <m:t>h𝑦𝑝𝑜</m:t>
+                            <m:t>ℎ𝑦𝑝𝑜</m:t>
                           </m:r>
                         </m:sub>
                       </m:sSub>
                       <m:r>
-                        <a:rPr lang="fr-CH" sz="2000" b="0" i="1" smtClean="0">
+                        <a:rPr lang="fr-CH" sz="2400" b="0" i="1" smtClean="0">
                           <a:solidFill>
                             <a:schemeClr val="accent2"/>
                           </a:solidFill>
@@ -8578,7 +8666,7 @@
                         <m:t>(</m:t>
                       </m:r>
                       <m:r>
-                        <a:rPr lang="fr-CH" sz="2000" b="0" i="1" smtClean="0">
+                        <a:rPr lang="fr-CH" sz="2400" b="0" i="1" smtClean="0">
                           <a:solidFill>
                             <a:schemeClr val="accent2"/>
                           </a:solidFill>
@@ -8587,7 +8675,7 @@
                         <m:t>𝑡</m:t>
                       </m:r>
                       <m:r>
-                        <a:rPr lang="fr-CH" sz="2000" b="0" i="1" smtClean="0">
+                        <a:rPr lang="fr-CH" sz="2400" b="0" i="1" smtClean="0">
                           <a:solidFill>
                             <a:schemeClr val="accent2"/>
                           </a:solidFill>
@@ -8598,7 +8686,7 @@
                     </m:oMath>
                   </m:oMathPara>
                 </a14:m>
-                <a:endParaRPr lang="en-US" sz="2000" dirty="0">
+                <a:endParaRPr lang="en-US" sz="2400" dirty="0">
                   <a:solidFill>
                     <a:schemeClr val="accent2"/>
                   </a:solidFill>
@@ -8607,7 +8695,7 @@
             </p:txBody>
           </p:sp>
         </mc:Choice>
-        <mc:Fallback xmlns="">
+        <mc:Fallback>
           <p:sp>
             <p:nvSpPr>
               <p:cNvPr id="32" name="TextBox 31">
@@ -8624,16 +8712,16 @@
             </p:nvSpPr>
             <p:spPr>
               <a:xfrm>
-                <a:off x="708823" y="4194226"/>
-                <a:ext cx="4307799" cy="424732"/>
+                <a:off x="316546" y="4392811"/>
+                <a:ext cx="4307799" cy="491288"/>
               </a:xfrm>
               <a:prstGeom prst="rect">
                 <a:avLst/>
               </a:prstGeom>
               <a:blipFill>
-                <a:blip r:embed="rId9"/>
+                <a:blip r:embed="rId8"/>
                 <a:stretch>
-                  <a:fillRect b="-10000"/>
+                  <a:fillRect b="-12500"/>
                 </a:stretch>
               </a:blipFill>
             </p:spPr>
@@ -8652,14 +8740,14 @@
           </p:sp>
         </mc:Fallback>
       </mc:AlternateContent>
-      <mc:AlternateContent xmlns:mc="http://schemas.openxmlformats.org/markup-compatibility/2006" xmlns:a14="http://schemas.microsoft.com/office/drawing/2010/main">
-        <mc:Choice Requires="a14">
+      <mc:AlternateContent xmlns:mc="http://schemas.openxmlformats.org/markup-compatibility/2006">
+        <mc:Choice xmlns:a14="http://schemas.microsoft.com/office/drawing/2010/main" Requires="a14">
           <p:sp>
             <p:nvSpPr>
-              <p:cNvPr id="34" name="TextBox 33">
+              <p:cNvPr id="36" name="TextBox 35">
                 <a:extLst>
                   <a:ext uri="{FF2B5EF4-FFF2-40B4-BE49-F238E27FC236}">
-                    <a16:creationId xmlns:a16="http://schemas.microsoft.com/office/drawing/2014/main" id="{41733A3A-7594-7495-B38A-4AC7179145E4}"/>
+                    <a16:creationId xmlns:a16="http://schemas.microsoft.com/office/drawing/2014/main" id="{FC3940A4-D933-D6FF-8EB9-DA8BFEE12831}"/>
                   </a:ext>
                 </a:extLst>
               </p:cNvPr>
@@ -8668,8 +8756,8 @@
             </p:nvSpPr>
             <p:spPr>
               <a:xfrm>
-                <a:off x="2610615" y="1366171"/>
-                <a:ext cx="6269175" cy="1479764"/>
+                <a:off x="3708162" y="4393035"/>
+                <a:ext cx="6269175" cy="490840"/>
               </a:xfrm>
               <a:prstGeom prst="rect">
                 <a:avLst/>
@@ -8685,14 +8773,11 @@
                 <a:pPr/>
                 <a14:m>
                   <m:oMathPara xmlns:m="http://schemas.openxmlformats.org/officeDocument/2006/math">
-                    <m:oMathParaPr>
-                      <m:jc m:val="centerGroup"/>
-                    </m:oMathParaPr>
-                    <m:oMath xmlns:m="http://schemas.openxmlformats.org/officeDocument/2006/math">
+                    <m:oMath>
                       <m:sSub>
                         <m:sSubPr>
                           <m:ctrlPr>
-                            <a:rPr lang="fr-CH" sz="2000" i="1" smtClean="0">
+                            <a:rPr lang="fr-CH" sz="2400" i="1">
                               <a:solidFill>
                                 <a:schemeClr val="accent4"/>
                               </a:solidFill>
@@ -8702,7 +8787,7 @@
                         </m:sSubPr>
                         <m:e>
                           <m:r>
-                            <a:rPr lang="fr-CH" sz="2000" i="1">
+                            <a:rPr lang="fr-CH" sz="2400" i="1">
                               <a:solidFill>
                                 <a:schemeClr val="accent4"/>
                               </a:solidFill>
@@ -8713,7 +8798,7 @@
                         </m:e>
                         <m:sub>
                           <m:r>
-                            <a:rPr lang="fr-CH" sz="2000" i="1">
+                            <a:rPr lang="fr-CH" sz="2400" i="1">
                               <a:solidFill>
                                 <a:schemeClr val="accent4"/>
                               </a:solidFill>
@@ -8722,7 +8807,7 @@
                             <m:t>𝑚𝑖𝑥</m:t>
                           </m:r>
                           <m:r>
-                            <a:rPr lang="fr-CH" sz="2000" b="0" i="1" smtClean="0">
+                            <a:rPr lang="fr-CH" sz="2400" b="0" i="1" smtClean="0">
                               <a:solidFill>
                                 <a:schemeClr val="accent4"/>
                               </a:solidFill>
@@ -8731,20 +8816,20 @@
                             <m:t>,</m:t>
                           </m:r>
                           <m:r>
-                            <a:rPr lang="fr-CH" sz="2000" b="0" i="1" smtClean="0">
+                            <a:rPr lang="fr-CH" sz="2400" b="0" i="1" smtClean="0">
                               <a:solidFill>
                                 <a:schemeClr val="accent4"/>
                               </a:solidFill>
                               <a:latin typeface="Cambria Math" panose="02040503050406030204" pitchFamily="18" charset="0"/>
                             </a:rPr>
-                            <m:t>𝑒𝑝𝑖</m:t>
+                            <m:t>ℎ𝑦𝑝𝑜</m:t>
                           </m:r>
                         </m:sub>
                       </m:sSub>
                       <m:d>
                         <m:dPr>
                           <m:ctrlPr>
-                            <a:rPr lang="fr-CH" sz="2000" i="1">
+                            <a:rPr lang="fr-CH" sz="2400" i="1">
                               <a:solidFill>
                                 <a:schemeClr val="accent4"/>
                               </a:solidFill>
@@ -8754,7 +8839,7 @@
                         </m:dPr>
                         <m:e>
                           <m:r>
-                            <a:rPr lang="fr-CH" sz="2000" i="1">
+                            <a:rPr lang="fr-CH" sz="2400" i="1">
                               <a:solidFill>
                                 <a:schemeClr val="accent4"/>
                               </a:solidFill>
@@ -8765,7 +8850,7 @@
                         </m:e>
                       </m:d>
                       <m:r>
-                        <a:rPr lang="fr-CH" sz="2000" i="1">
+                        <a:rPr lang="fr-CH" sz="2400" i="1">
                           <a:solidFill>
                             <a:schemeClr val="accent4"/>
                           </a:solidFill>
@@ -8773,512 +8858,113 @@
                         </a:rPr>
                         <m:t>=</m:t>
                       </m:r>
-                      <m:d>
-                        <m:dPr>
-                          <m:begChr m:val="{"/>
-                          <m:endChr m:val=""/>
+                      <m:r>
+                        <a:rPr lang="fr-CH" sz="2400" b="0" i="1" smtClean="0">
+                          <a:solidFill>
+                            <a:schemeClr val="accent4"/>
+                          </a:solidFill>
+                          <a:latin typeface="Cambria Math" panose="02040503050406030204" pitchFamily="18" charset="0"/>
+                        </a:rPr>
+                        <m:t>−</m:t>
+                      </m:r>
+                      <m:sSub>
+                        <m:sSubPr>
                           <m:ctrlPr>
-                            <a:rPr lang="en-US" sz="2000" i="1" smtClean="0">
+                            <a:rPr lang="fr-CH" sz="2400" b="0" i="1" smtClean="0">
                               <a:solidFill>
                                 <a:schemeClr val="accent4"/>
                               </a:solidFill>
                               <a:latin typeface="Cambria Math" panose="02040503050406030204" pitchFamily="18" charset="0"/>
                             </a:rPr>
                           </m:ctrlPr>
-                        </m:dPr>
+                        </m:sSubPr>
                         <m:e>
-                          <m:eqArr>
-                            <m:eqArrPr>
-                              <m:ctrlPr>
-                                <a:rPr lang="en-US" sz="2000" i="1" smtClean="0">
-                                  <a:solidFill>
-                                    <a:schemeClr val="accent4"/>
-                                  </a:solidFill>
-                                  <a:latin typeface="Cambria Math" panose="02040503050406030204" pitchFamily="18" charset="0"/>
-                                </a:rPr>
-                              </m:ctrlPr>
-                            </m:eqArrPr>
-                            <m:e>
-                              <m:f>
-                                <m:fPr>
-                                  <m:ctrlPr>
-                                    <a:rPr lang="fr-CH" sz="2000" b="0" i="1" smtClean="0">
-                                      <a:solidFill>
-                                        <a:schemeClr val="accent4"/>
-                                      </a:solidFill>
-                                      <a:latin typeface="Cambria Math" panose="02040503050406030204" pitchFamily="18" charset="0"/>
-                                    </a:rPr>
-                                  </m:ctrlPr>
-                                </m:fPr>
-                                <m:num>
-                                  <m:r>
-                                    <a:rPr lang="fr-CH" sz="2000" b="0" i="1" smtClean="0">
-                                      <a:solidFill>
-                                        <a:schemeClr val="accent4"/>
-                                      </a:solidFill>
-                                      <a:latin typeface="Cambria Math" panose="02040503050406030204" pitchFamily="18" charset="0"/>
-                                    </a:rPr>
-                                    <m:t>𝑑</m:t>
-                                  </m:r>
-                                  <m:sSub>
-                                    <m:sSubPr>
-                                      <m:ctrlPr>
-                                        <a:rPr lang="fr-CH" sz="2000" b="0" i="1" smtClean="0">
-                                          <a:solidFill>
-                                            <a:schemeClr val="accent4"/>
-                                          </a:solidFill>
-                                          <a:latin typeface="Cambria Math" panose="02040503050406030204" pitchFamily="18" charset="0"/>
-                                        </a:rPr>
-                                      </m:ctrlPr>
-                                    </m:sSubPr>
-                                    <m:e>
-                                      <m:r>
-                                        <a:rPr lang="fr-CH" sz="2000" b="0" i="1" smtClean="0">
-                                          <a:solidFill>
-                                            <a:schemeClr val="accent4"/>
-                                          </a:solidFill>
-                                          <a:latin typeface="Cambria Math" panose="02040503050406030204" pitchFamily="18" charset="0"/>
-                                        </a:rPr>
-                                        <m:t>𝑉</m:t>
-                                      </m:r>
-                                    </m:e>
-                                    <m:sub>
-                                      <m:r>
-                                        <a:rPr lang="fr-CH" sz="2000" b="0" i="1" smtClean="0">
-                                          <a:solidFill>
-                                            <a:schemeClr val="accent4"/>
-                                          </a:solidFill>
-                                          <a:latin typeface="Cambria Math" panose="02040503050406030204" pitchFamily="18" charset="0"/>
-                                        </a:rPr>
-                                        <m:t>𝑒𝑝𝑖</m:t>
-                                      </m:r>
-                                    </m:sub>
-                                  </m:sSub>
-                                </m:num>
-                                <m:den>
-                                  <m:r>
-                                    <a:rPr lang="fr-CH" sz="2000" b="0" i="1" smtClean="0">
-                                      <a:solidFill>
-                                        <a:schemeClr val="accent4"/>
-                                      </a:solidFill>
-                                      <a:latin typeface="Cambria Math" panose="02040503050406030204" pitchFamily="18" charset="0"/>
-                                    </a:rPr>
-                                    <m:t>𝑑𝑡</m:t>
-                                  </m:r>
-                                </m:den>
-                              </m:f>
-                              <m:sSub>
-                                <m:sSubPr>
-                                  <m:ctrlPr>
-                                    <a:rPr lang="fr-CH" sz="2000" b="0" i="1" smtClean="0">
-                                      <a:solidFill>
-                                        <a:schemeClr val="accent4"/>
-                                      </a:solidFill>
-                                      <a:latin typeface="Cambria Math" panose="02040503050406030204" pitchFamily="18" charset="0"/>
-                                    </a:rPr>
-                                  </m:ctrlPr>
-                                </m:sSubPr>
-                                <m:e>
-                                  <m:r>
-                                    <a:rPr lang="fr-CH" sz="2000" b="0" i="1" smtClean="0">
-                                      <a:solidFill>
-                                        <a:schemeClr val="accent4"/>
-                                      </a:solidFill>
-                                      <a:latin typeface="Cambria Math" panose="02040503050406030204" pitchFamily="18" charset="0"/>
-                                    </a:rPr>
-                                    <m:t>𝐶</m:t>
-                                  </m:r>
-                                </m:e>
-                                <m:sub>
-                                  <m:r>
-                                    <a:rPr lang="fr-CH" sz="2000" b="0" i="1" smtClean="0">
-                                      <a:solidFill>
-                                        <a:schemeClr val="accent4"/>
-                                      </a:solidFill>
-                                      <a:latin typeface="Cambria Math" panose="02040503050406030204" pitchFamily="18" charset="0"/>
-                                    </a:rPr>
-                                    <m:t>h𝑦𝑝𝑜</m:t>
-                                  </m:r>
-                                </m:sub>
-                              </m:sSub>
-                              <m:d>
-                                <m:dPr>
-                                  <m:ctrlPr>
-                                    <a:rPr lang="fr-CH" sz="2000" b="0" i="1" smtClean="0">
-                                      <a:solidFill>
-                                        <a:schemeClr val="accent4"/>
-                                      </a:solidFill>
-                                      <a:latin typeface="Cambria Math" panose="02040503050406030204" pitchFamily="18" charset="0"/>
-                                    </a:rPr>
-                                  </m:ctrlPr>
-                                </m:dPr>
-                                <m:e>
-                                  <m:r>
-                                    <a:rPr lang="fr-CH" sz="2000" b="0" i="1" smtClean="0">
-                                      <a:solidFill>
-                                        <a:schemeClr val="accent4"/>
-                                      </a:solidFill>
-                                      <a:latin typeface="Cambria Math" panose="02040503050406030204" pitchFamily="18" charset="0"/>
-                                    </a:rPr>
-                                    <m:t>𝑡</m:t>
-                                  </m:r>
-                                </m:e>
-                              </m:d>
-                              <m:r>
-                                <a:rPr lang="fr-CH" sz="2000" b="0" i="0" smtClean="0">
-                                  <a:solidFill>
-                                    <a:schemeClr val="accent4"/>
-                                  </a:solidFill>
-                                  <a:latin typeface="Cambria Math" panose="02040503050406030204" pitchFamily="18" charset="0"/>
-                                </a:rPr>
-                                <m:t>, </m:t>
-                              </m:r>
-                              <m:r>
-                                <m:rPr>
-                                  <m:sty m:val="p"/>
-                                </m:rPr>
-                                <a:rPr lang="fr-CH" sz="2000" b="0" i="0" smtClean="0">
-                                  <a:solidFill>
-                                    <a:schemeClr val="accent4"/>
-                                  </a:solidFill>
-                                  <a:latin typeface="Cambria Math" panose="02040503050406030204" pitchFamily="18" charset="0"/>
-                                </a:rPr>
-                                <m:t>if</m:t>
-                              </m:r>
-                              <m:f>
-                                <m:fPr>
-                                  <m:ctrlPr>
-                                    <a:rPr lang="fr-CH" sz="2000" b="0" i="1" smtClean="0">
-                                      <a:solidFill>
-                                        <a:schemeClr val="accent4"/>
-                                      </a:solidFill>
-                                      <a:latin typeface="Cambria Math" panose="02040503050406030204" pitchFamily="18" charset="0"/>
-                                    </a:rPr>
-                                  </m:ctrlPr>
-                                </m:fPr>
-                                <m:num>
-                                  <m:r>
-                                    <a:rPr lang="fr-CH" sz="2000" b="0" i="1" smtClean="0">
-                                      <a:solidFill>
-                                        <a:schemeClr val="accent4"/>
-                                      </a:solidFill>
-                                      <a:latin typeface="Cambria Math" panose="02040503050406030204" pitchFamily="18" charset="0"/>
-                                    </a:rPr>
-                                    <m:t>𝑑</m:t>
-                                  </m:r>
-                                  <m:sSub>
-                                    <m:sSubPr>
-                                      <m:ctrlPr>
-                                        <a:rPr lang="fr-CH" sz="2000" b="0" i="1" smtClean="0">
-                                          <a:solidFill>
-                                            <a:schemeClr val="accent4"/>
-                                          </a:solidFill>
-                                          <a:latin typeface="Cambria Math" panose="02040503050406030204" pitchFamily="18" charset="0"/>
-                                        </a:rPr>
-                                      </m:ctrlPr>
-                                    </m:sSubPr>
-                                    <m:e>
-                                      <m:r>
-                                        <a:rPr lang="fr-CH" sz="2000" b="0" i="1" smtClean="0">
-                                          <a:solidFill>
-                                            <a:schemeClr val="accent4"/>
-                                          </a:solidFill>
-                                          <a:latin typeface="Cambria Math" panose="02040503050406030204" pitchFamily="18" charset="0"/>
-                                        </a:rPr>
-                                        <m:t>h</m:t>
-                                      </m:r>
-                                    </m:e>
-                                    <m:sub>
-                                      <m:r>
-                                        <a:rPr lang="fr-CH" sz="2000" b="0" i="1" smtClean="0">
-                                          <a:solidFill>
-                                            <a:schemeClr val="accent4"/>
-                                          </a:solidFill>
-                                          <a:latin typeface="Cambria Math" panose="02040503050406030204" pitchFamily="18" charset="0"/>
-                                        </a:rPr>
-                                        <m:t>𝑒𝑝𝑖</m:t>
-                                      </m:r>
-                                    </m:sub>
-                                  </m:sSub>
-                                </m:num>
-                                <m:den>
-                                  <m:r>
-                                    <a:rPr lang="fr-CH" sz="2000" b="0" i="1" smtClean="0">
-                                      <a:solidFill>
-                                        <a:schemeClr val="accent4"/>
-                                      </a:solidFill>
-                                      <a:latin typeface="Cambria Math" panose="02040503050406030204" pitchFamily="18" charset="0"/>
-                                    </a:rPr>
-                                    <m:t>𝑑𝑡</m:t>
-                                  </m:r>
-                                </m:den>
-                              </m:f>
-                              <m:r>
-                                <a:rPr lang="fr-CH" sz="2000" b="0" i="1" smtClean="0">
-                                  <a:solidFill>
-                                    <a:schemeClr val="accent4"/>
-                                  </a:solidFill>
-                                  <a:latin typeface="Cambria Math" panose="02040503050406030204" pitchFamily="18" charset="0"/>
-                                </a:rPr>
-                                <m:t>&gt;0</m:t>
-                              </m:r>
-                            </m:e>
-                            <m:e>
-                              <m:f>
-                                <m:fPr>
-                                  <m:ctrlPr>
-                                    <a:rPr lang="fr-CH" sz="2000" i="1">
-                                      <a:solidFill>
-                                        <a:schemeClr val="accent4"/>
-                                      </a:solidFill>
-                                      <a:latin typeface="Cambria Math" panose="02040503050406030204" pitchFamily="18" charset="0"/>
-                                    </a:rPr>
-                                  </m:ctrlPr>
-                                </m:fPr>
-                                <m:num>
-                                  <m:r>
-                                    <a:rPr lang="fr-CH" sz="2000" i="1">
-                                      <a:solidFill>
-                                        <a:schemeClr val="accent4"/>
-                                      </a:solidFill>
-                                      <a:latin typeface="Cambria Math" panose="02040503050406030204" pitchFamily="18" charset="0"/>
-                                    </a:rPr>
-                                    <m:t>𝑑</m:t>
-                                  </m:r>
-                                  <m:sSub>
-                                    <m:sSubPr>
-                                      <m:ctrlPr>
-                                        <a:rPr lang="fr-CH" sz="2000" i="1">
-                                          <a:solidFill>
-                                            <a:schemeClr val="accent4"/>
-                                          </a:solidFill>
-                                          <a:latin typeface="Cambria Math" panose="02040503050406030204" pitchFamily="18" charset="0"/>
-                                        </a:rPr>
-                                      </m:ctrlPr>
-                                    </m:sSubPr>
-                                    <m:e>
-                                      <m:r>
-                                        <a:rPr lang="fr-CH" sz="2000" i="1">
-                                          <a:solidFill>
-                                            <a:schemeClr val="accent4"/>
-                                          </a:solidFill>
-                                          <a:latin typeface="Cambria Math" panose="02040503050406030204" pitchFamily="18" charset="0"/>
-                                        </a:rPr>
-                                        <m:t>𝑉</m:t>
-                                      </m:r>
-                                    </m:e>
-                                    <m:sub>
-                                      <m:r>
-                                        <a:rPr lang="fr-CH" sz="2000" i="1">
-                                          <a:solidFill>
-                                            <a:schemeClr val="accent4"/>
-                                          </a:solidFill>
-                                          <a:latin typeface="Cambria Math" panose="02040503050406030204" pitchFamily="18" charset="0"/>
-                                        </a:rPr>
-                                        <m:t>𝑒𝑝𝑖</m:t>
-                                      </m:r>
-                                    </m:sub>
-                                  </m:sSub>
-                                </m:num>
-                                <m:den>
-                                  <m:r>
-                                    <a:rPr lang="fr-CH" sz="2000" i="1">
-                                      <a:solidFill>
-                                        <a:schemeClr val="accent4"/>
-                                      </a:solidFill>
-                                      <a:latin typeface="Cambria Math" panose="02040503050406030204" pitchFamily="18" charset="0"/>
-                                    </a:rPr>
-                                    <m:t>𝑑𝑡</m:t>
-                                  </m:r>
-                                </m:den>
-                              </m:f>
-                              <m:sSub>
-                                <m:sSubPr>
-                                  <m:ctrlPr>
-                                    <a:rPr lang="fr-CH" sz="2000" i="1">
-                                      <a:solidFill>
-                                        <a:schemeClr val="accent4"/>
-                                      </a:solidFill>
-                                      <a:latin typeface="Cambria Math" panose="02040503050406030204" pitchFamily="18" charset="0"/>
-                                    </a:rPr>
-                                  </m:ctrlPr>
-                                </m:sSubPr>
-                                <m:e>
-                                  <m:r>
-                                    <a:rPr lang="fr-CH" sz="2000" i="1">
-                                      <a:solidFill>
-                                        <a:schemeClr val="accent4"/>
-                                      </a:solidFill>
-                                      <a:latin typeface="Cambria Math" panose="02040503050406030204" pitchFamily="18" charset="0"/>
-                                    </a:rPr>
-                                    <m:t>𝐶</m:t>
-                                  </m:r>
-                                </m:e>
-                                <m:sub>
-                                  <m:r>
-                                    <a:rPr lang="fr-CH" sz="2000" b="0" i="1" smtClean="0">
-                                      <a:solidFill>
-                                        <a:schemeClr val="accent4"/>
-                                      </a:solidFill>
-                                      <a:latin typeface="Cambria Math" panose="02040503050406030204" pitchFamily="18" charset="0"/>
-                                    </a:rPr>
-                                    <m:t>𝑒𝑝𝑖</m:t>
-                                  </m:r>
-                                </m:sub>
-                              </m:sSub>
-                              <m:d>
-                                <m:dPr>
-                                  <m:ctrlPr>
-                                    <a:rPr lang="fr-CH" sz="2000" i="1">
-                                      <a:solidFill>
-                                        <a:schemeClr val="accent4"/>
-                                      </a:solidFill>
-                                      <a:latin typeface="Cambria Math" panose="02040503050406030204" pitchFamily="18" charset="0"/>
-                                    </a:rPr>
-                                  </m:ctrlPr>
-                                </m:dPr>
-                                <m:e>
-                                  <m:r>
-                                    <a:rPr lang="fr-CH" sz="2000" i="1">
-                                      <a:solidFill>
-                                        <a:schemeClr val="accent4"/>
-                                      </a:solidFill>
-                                      <a:latin typeface="Cambria Math" panose="02040503050406030204" pitchFamily="18" charset="0"/>
-                                    </a:rPr>
-                                    <m:t>𝑡</m:t>
-                                  </m:r>
-                                </m:e>
-                              </m:d>
-                              <m:r>
-                                <a:rPr lang="fr-CH" sz="2000" b="0" i="1" smtClean="0">
-                                  <a:solidFill>
-                                    <a:schemeClr val="accent4"/>
-                                  </a:solidFill>
-                                  <a:latin typeface="Cambria Math" panose="02040503050406030204" pitchFamily="18" charset="0"/>
-                                </a:rPr>
-                                <m:t>,</m:t>
-                              </m:r>
-                              <m:r>
-                                <a:rPr lang="fr-CH" sz="2000" b="0" i="0" smtClean="0">
-                                  <a:solidFill>
-                                    <a:schemeClr val="accent4"/>
-                                  </a:solidFill>
-                                  <a:latin typeface="Cambria Math" panose="02040503050406030204" pitchFamily="18" charset="0"/>
-                                </a:rPr>
-                                <m:t> </m:t>
-                              </m:r>
-                              <m:r>
-                                <m:rPr>
-                                  <m:sty m:val="p"/>
-                                </m:rPr>
-                                <a:rPr lang="fr-CH" sz="2000" b="0" i="0" smtClean="0">
-                                  <a:solidFill>
-                                    <a:schemeClr val="accent4"/>
-                                  </a:solidFill>
-                                  <a:latin typeface="Cambria Math" panose="02040503050406030204" pitchFamily="18" charset="0"/>
-                                </a:rPr>
-                                <m:t>if</m:t>
-                              </m:r>
-                              <m:f>
-                                <m:fPr>
-                                  <m:ctrlPr>
-                                    <a:rPr lang="fr-CH" sz="2000" b="0" i="1" smtClean="0">
-                                      <a:solidFill>
-                                        <a:schemeClr val="accent4"/>
-                                      </a:solidFill>
-                                      <a:latin typeface="Cambria Math" panose="02040503050406030204" pitchFamily="18" charset="0"/>
-                                    </a:rPr>
-                                  </m:ctrlPr>
-                                </m:fPr>
-                                <m:num>
-                                  <m:r>
-                                    <a:rPr lang="fr-CH" sz="2000" b="0" i="1" smtClean="0">
-                                      <a:solidFill>
-                                        <a:schemeClr val="accent4"/>
-                                      </a:solidFill>
-                                      <a:latin typeface="Cambria Math" panose="02040503050406030204" pitchFamily="18" charset="0"/>
-                                    </a:rPr>
-                                    <m:t>𝑑</m:t>
-                                  </m:r>
-                                  <m:sSub>
-                                    <m:sSubPr>
-                                      <m:ctrlPr>
-                                        <a:rPr lang="fr-CH" sz="2000" b="0" i="1" smtClean="0">
-                                          <a:solidFill>
-                                            <a:schemeClr val="accent4"/>
-                                          </a:solidFill>
-                                          <a:latin typeface="Cambria Math" panose="02040503050406030204" pitchFamily="18" charset="0"/>
-                                        </a:rPr>
-                                      </m:ctrlPr>
-                                    </m:sSubPr>
-                                    <m:e>
-                                      <m:r>
-                                        <a:rPr lang="fr-CH" sz="2000" b="0" i="1" smtClean="0">
-                                          <a:solidFill>
-                                            <a:schemeClr val="accent4"/>
-                                          </a:solidFill>
-                                          <a:latin typeface="Cambria Math" panose="02040503050406030204" pitchFamily="18" charset="0"/>
-                                        </a:rPr>
-                                        <m:t>h</m:t>
-                                      </m:r>
-                                    </m:e>
-                                    <m:sub>
-                                      <m:r>
-                                        <a:rPr lang="fr-CH" sz="2000" b="0" i="1" smtClean="0">
-                                          <a:solidFill>
-                                            <a:schemeClr val="accent4"/>
-                                          </a:solidFill>
-                                          <a:latin typeface="Cambria Math" panose="02040503050406030204" pitchFamily="18" charset="0"/>
-                                        </a:rPr>
-                                        <m:t>𝑒𝑝𝑖</m:t>
-                                      </m:r>
-                                    </m:sub>
-                                  </m:sSub>
-                                </m:num>
-                                <m:den>
-                                  <m:r>
-                                    <a:rPr lang="fr-CH" sz="2000" b="0" i="1" smtClean="0">
-                                      <a:solidFill>
-                                        <a:schemeClr val="accent4"/>
-                                      </a:solidFill>
-                                      <a:latin typeface="Cambria Math" panose="02040503050406030204" pitchFamily="18" charset="0"/>
-                                    </a:rPr>
-                                    <m:t>𝑑𝑡</m:t>
-                                  </m:r>
-                                </m:den>
-                              </m:f>
-                              <m:r>
-                                <a:rPr lang="fr-CH" sz="2000" b="0" i="1" smtClean="0">
-                                  <a:solidFill>
-                                    <a:schemeClr val="accent4"/>
-                                  </a:solidFill>
-                                  <a:latin typeface="Cambria Math" panose="02040503050406030204" pitchFamily="18" charset="0"/>
-                                </a:rPr>
-                                <m:t>&lt;0</m:t>
-                              </m:r>
-                            </m:e>
-                          </m:eqArr>
+                          <m:r>
+                            <a:rPr lang="fr-CH" sz="2400" b="0" i="1" smtClean="0">
+                              <a:solidFill>
+                                <a:schemeClr val="accent4"/>
+                              </a:solidFill>
+                              <a:latin typeface="Cambria Math" panose="02040503050406030204" pitchFamily="18" charset="0"/>
+                            </a:rPr>
+                            <m:t>𝑀</m:t>
+                          </m:r>
                         </m:e>
-                      </m:d>
+                        <m:sub>
+                          <m:r>
+                            <a:rPr lang="fr-CH" sz="2400" b="0" i="1" smtClean="0">
+                              <a:solidFill>
+                                <a:schemeClr val="accent4"/>
+                              </a:solidFill>
+                              <a:latin typeface="Cambria Math" panose="02040503050406030204" pitchFamily="18" charset="0"/>
+                            </a:rPr>
+                            <m:t>𝑚𝑖𝑥</m:t>
+                          </m:r>
+                          <m:r>
+                            <a:rPr lang="fr-CH" sz="2400" b="0" i="1" smtClean="0">
+                              <a:solidFill>
+                                <a:schemeClr val="accent4"/>
+                              </a:solidFill>
+                              <a:latin typeface="Cambria Math" panose="02040503050406030204" pitchFamily="18" charset="0"/>
+                            </a:rPr>
+                            <m:t>,</m:t>
+                          </m:r>
+                          <m:r>
+                            <a:rPr lang="fr-CH" sz="2400" b="0" i="1" smtClean="0">
+                              <a:solidFill>
+                                <a:schemeClr val="accent4"/>
+                              </a:solidFill>
+                              <a:latin typeface="Cambria Math" panose="02040503050406030204" pitchFamily="18" charset="0"/>
+                            </a:rPr>
+                            <m:t>𝑒𝑝𝑖</m:t>
+                          </m:r>
+                        </m:sub>
+                      </m:sSub>
+                      <m:r>
+                        <a:rPr lang="fr-CH" sz="2400" b="0" i="1" smtClean="0">
+                          <a:solidFill>
+                            <a:schemeClr val="accent4"/>
+                          </a:solidFill>
+                          <a:latin typeface="Cambria Math" panose="02040503050406030204" pitchFamily="18" charset="0"/>
+                        </a:rPr>
+                        <m:t>(</m:t>
+                      </m:r>
+                      <m:r>
+                        <a:rPr lang="fr-CH" sz="2400" b="0" i="1" smtClean="0">
+                          <a:solidFill>
+                            <a:schemeClr val="accent4"/>
+                          </a:solidFill>
+                          <a:latin typeface="Cambria Math" panose="02040503050406030204" pitchFamily="18" charset="0"/>
+                        </a:rPr>
+                        <m:t>𝑡</m:t>
+                      </m:r>
+                      <m:r>
+                        <a:rPr lang="fr-CH" sz="2400" b="0" i="1" smtClean="0">
+                          <a:solidFill>
+                            <a:schemeClr val="accent4"/>
+                          </a:solidFill>
+                          <a:latin typeface="Cambria Math" panose="02040503050406030204" pitchFamily="18" charset="0"/>
+                        </a:rPr>
+                        <m:t>)</m:t>
+                      </m:r>
                     </m:oMath>
                   </m:oMathPara>
                 </a14:m>
-                <a:endParaRPr lang="en-US" sz="2000" dirty="0">
+                <a:endParaRPr lang="en-US" sz="2400" dirty="0">
                   <a:solidFill>
-                    <a:schemeClr val="accent2"/>
+                    <a:schemeClr val="accent4"/>
                   </a:solidFill>
                 </a:endParaRPr>
               </a:p>
             </p:txBody>
           </p:sp>
         </mc:Choice>
-        <mc:Fallback xmlns="">
+        <mc:Fallback>
           <p:sp>
             <p:nvSpPr>
-              <p:cNvPr id="34" name="TextBox 33">
+              <p:cNvPr id="36" name="TextBox 35">
                 <a:extLst>
                   <a:ext uri="{FF2B5EF4-FFF2-40B4-BE49-F238E27FC236}">
-                    <a16:creationId xmlns:a16="http://schemas.microsoft.com/office/drawing/2014/main" id="{41733A3A-7594-7495-B38A-4AC7179145E4}"/>
+                    <a16:creationId xmlns:a16="http://schemas.microsoft.com/office/drawing/2014/main" id="{FC3940A4-D933-D6FF-8EB9-DA8BFEE12831}"/>
                   </a:ext>
                 </a:extLst>
               </p:cNvPr>
@@ -9289,16 +8975,16 @@
             </p:nvSpPr>
             <p:spPr>
               <a:xfrm>
-                <a:off x="2610615" y="1366171"/>
-                <a:ext cx="6269175" cy="1479764"/>
+                <a:off x="3708162" y="4393035"/>
+                <a:ext cx="6269175" cy="490840"/>
               </a:xfrm>
               <a:prstGeom prst="rect">
                 <a:avLst/>
               </a:prstGeom>
               <a:blipFill>
-                <a:blip r:embed="rId10"/>
+                <a:blip r:embed="rId9"/>
                 <a:stretch>
-                  <a:fillRect/>
+                  <a:fillRect b="-12500"/>
                 </a:stretch>
               </a:blipFill>
             </p:spPr>
@@ -9317,272 +9003,6 @@
           </p:sp>
         </mc:Fallback>
       </mc:AlternateContent>
-      <mc:AlternateContent xmlns:mc="http://schemas.openxmlformats.org/markup-compatibility/2006" xmlns:a14="http://schemas.microsoft.com/office/drawing/2010/main">
-        <mc:Choice Requires="a14">
-          <p:sp>
-            <p:nvSpPr>
-              <p:cNvPr id="36" name="TextBox 35">
-                <a:extLst>
-                  <a:ext uri="{FF2B5EF4-FFF2-40B4-BE49-F238E27FC236}">
-                    <a16:creationId xmlns:a16="http://schemas.microsoft.com/office/drawing/2014/main" id="{FC3940A4-D933-D6FF-8EB9-DA8BFEE12831}"/>
-                  </a:ext>
-                </a:extLst>
-              </p:cNvPr>
-              <p:cNvSpPr txBox="1"/>
-              <p:nvPr/>
-            </p:nvSpPr>
-            <p:spPr>
-              <a:xfrm>
-                <a:off x="4532758" y="4609426"/>
-                <a:ext cx="6269175" cy="424283"/>
-              </a:xfrm>
-              <a:prstGeom prst="rect">
-                <a:avLst/>
-              </a:prstGeom>
-              <a:noFill/>
-            </p:spPr>
-            <p:txBody>
-              <a:bodyPr wrap="square" rtlCol="0">
-                <a:spAutoFit/>
-              </a:bodyPr>
-              <a:lstStyle/>
-              <a:p>
-                <a:pPr/>
-                <a14:m>
-                  <m:oMathPara xmlns:m="http://schemas.openxmlformats.org/officeDocument/2006/math">
-                    <m:oMathParaPr>
-                      <m:jc m:val="centerGroup"/>
-                    </m:oMathParaPr>
-                    <m:oMath xmlns:m="http://schemas.openxmlformats.org/officeDocument/2006/math">
-                      <m:sSub>
-                        <m:sSubPr>
-                          <m:ctrlPr>
-                            <a:rPr lang="fr-CH" sz="2000" i="1" smtClean="0">
-                              <a:solidFill>
-                                <a:schemeClr val="accent4"/>
-                              </a:solidFill>
-                              <a:latin typeface="Cambria Math" panose="02040503050406030204" pitchFamily="18" charset="0"/>
-                            </a:rPr>
-                          </m:ctrlPr>
-                        </m:sSubPr>
-                        <m:e>
-                          <m:r>
-                            <a:rPr lang="fr-CH" sz="2000" i="1">
-                              <a:solidFill>
-                                <a:schemeClr val="accent4"/>
-                              </a:solidFill>
-                              <a:latin typeface="Cambria Math" panose="02040503050406030204" pitchFamily="18" charset="0"/>
-                            </a:rPr>
-                            <m:t>𝑀</m:t>
-                          </m:r>
-                        </m:e>
-                        <m:sub>
-                          <m:r>
-                            <a:rPr lang="fr-CH" sz="2000" i="1">
-                              <a:solidFill>
-                                <a:schemeClr val="accent4"/>
-                              </a:solidFill>
-                              <a:latin typeface="Cambria Math" panose="02040503050406030204" pitchFamily="18" charset="0"/>
-                            </a:rPr>
-                            <m:t>𝑚𝑖𝑥</m:t>
-                          </m:r>
-                          <m:r>
-                            <a:rPr lang="fr-CH" sz="2000" b="0" i="1" smtClean="0">
-                              <a:solidFill>
-                                <a:schemeClr val="accent4"/>
-                              </a:solidFill>
-                              <a:latin typeface="Cambria Math" panose="02040503050406030204" pitchFamily="18" charset="0"/>
-                            </a:rPr>
-                            <m:t>,</m:t>
-                          </m:r>
-                          <m:r>
-                            <a:rPr lang="fr-CH" sz="2000" b="0" i="1" smtClean="0">
-                              <a:solidFill>
-                                <a:schemeClr val="accent4"/>
-                              </a:solidFill>
-                              <a:latin typeface="Cambria Math" panose="02040503050406030204" pitchFamily="18" charset="0"/>
-                            </a:rPr>
-                            <m:t>h𝑦𝑝𝑜</m:t>
-                          </m:r>
-                        </m:sub>
-                      </m:sSub>
-                      <m:d>
-                        <m:dPr>
-                          <m:ctrlPr>
-                            <a:rPr lang="fr-CH" sz="2000" i="1">
-                              <a:solidFill>
-                                <a:schemeClr val="accent4"/>
-                              </a:solidFill>
-                              <a:latin typeface="Cambria Math" panose="02040503050406030204" pitchFamily="18" charset="0"/>
-                            </a:rPr>
-                          </m:ctrlPr>
-                        </m:dPr>
-                        <m:e>
-                          <m:r>
-                            <a:rPr lang="fr-CH" sz="2000" i="1">
-                              <a:solidFill>
-                                <a:schemeClr val="accent4"/>
-                              </a:solidFill>
-                              <a:latin typeface="Cambria Math" panose="02040503050406030204" pitchFamily="18" charset="0"/>
-                            </a:rPr>
-                            <m:t>𝑡</m:t>
-                          </m:r>
-                        </m:e>
-                      </m:d>
-                      <m:r>
-                        <a:rPr lang="fr-CH" sz="2000" i="1">
-                          <a:solidFill>
-                            <a:schemeClr val="accent4"/>
-                          </a:solidFill>
-                          <a:latin typeface="Cambria Math" panose="02040503050406030204" pitchFamily="18" charset="0"/>
-                        </a:rPr>
-                        <m:t>=</m:t>
-                      </m:r>
-                      <m:r>
-                        <a:rPr lang="fr-CH" sz="2000" b="0" i="1" smtClean="0">
-                          <a:solidFill>
-                            <a:schemeClr val="accent4"/>
-                          </a:solidFill>
-                          <a:latin typeface="Cambria Math" panose="02040503050406030204" pitchFamily="18" charset="0"/>
-                        </a:rPr>
-                        <m:t>−</m:t>
-                      </m:r>
-                      <m:sSub>
-                        <m:sSubPr>
-                          <m:ctrlPr>
-                            <a:rPr lang="fr-CH" sz="2000" b="0" i="1" smtClean="0">
-                              <a:solidFill>
-                                <a:schemeClr val="accent4"/>
-                              </a:solidFill>
-                              <a:latin typeface="Cambria Math" panose="02040503050406030204" pitchFamily="18" charset="0"/>
-                            </a:rPr>
-                          </m:ctrlPr>
-                        </m:sSubPr>
-                        <m:e>
-                          <m:r>
-                            <a:rPr lang="fr-CH" sz="2000" b="0" i="1" smtClean="0">
-                              <a:solidFill>
-                                <a:schemeClr val="accent4"/>
-                              </a:solidFill>
-                              <a:latin typeface="Cambria Math" panose="02040503050406030204" pitchFamily="18" charset="0"/>
-                            </a:rPr>
-                            <m:t>𝑀</m:t>
-                          </m:r>
-                        </m:e>
-                        <m:sub>
-                          <m:r>
-                            <a:rPr lang="fr-CH" sz="2000" b="0" i="1" smtClean="0">
-                              <a:solidFill>
-                                <a:schemeClr val="accent4"/>
-                              </a:solidFill>
-                              <a:latin typeface="Cambria Math" panose="02040503050406030204" pitchFamily="18" charset="0"/>
-                            </a:rPr>
-                            <m:t>𝑚𝑖𝑥</m:t>
-                          </m:r>
-                          <m:r>
-                            <a:rPr lang="fr-CH" sz="2000" b="0" i="1" smtClean="0">
-                              <a:solidFill>
-                                <a:schemeClr val="accent4"/>
-                              </a:solidFill>
-                              <a:latin typeface="Cambria Math" panose="02040503050406030204" pitchFamily="18" charset="0"/>
-                            </a:rPr>
-                            <m:t>,</m:t>
-                          </m:r>
-                          <m:r>
-                            <a:rPr lang="fr-CH" sz="2000" b="0" i="1" smtClean="0">
-                              <a:solidFill>
-                                <a:schemeClr val="accent4"/>
-                              </a:solidFill>
-                              <a:latin typeface="Cambria Math" panose="02040503050406030204" pitchFamily="18" charset="0"/>
-                            </a:rPr>
-                            <m:t>𝑒𝑝𝑖</m:t>
-                          </m:r>
-                        </m:sub>
-                      </m:sSub>
-                      <m:r>
-                        <a:rPr lang="fr-CH" sz="2000" b="0" i="1" smtClean="0">
-                          <a:solidFill>
-                            <a:schemeClr val="accent4"/>
-                          </a:solidFill>
-                          <a:latin typeface="Cambria Math" panose="02040503050406030204" pitchFamily="18" charset="0"/>
-                        </a:rPr>
-                        <m:t>(</m:t>
-                      </m:r>
-                      <m:r>
-                        <a:rPr lang="fr-CH" sz="2000" b="0" i="1" smtClean="0">
-                          <a:solidFill>
-                            <a:schemeClr val="accent4"/>
-                          </a:solidFill>
-                          <a:latin typeface="Cambria Math" panose="02040503050406030204" pitchFamily="18" charset="0"/>
-                        </a:rPr>
-                        <m:t>𝑡</m:t>
-                      </m:r>
-                      <m:r>
-                        <a:rPr lang="fr-CH" sz="2000" b="0" i="1" smtClean="0">
-                          <a:solidFill>
-                            <a:schemeClr val="accent4"/>
-                          </a:solidFill>
-                          <a:latin typeface="Cambria Math" panose="02040503050406030204" pitchFamily="18" charset="0"/>
-                        </a:rPr>
-                        <m:t>)</m:t>
-                      </m:r>
-                    </m:oMath>
-                  </m:oMathPara>
-                </a14:m>
-                <a:endParaRPr lang="en-US" sz="2000" dirty="0">
-                  <a:solidFill>
-                    <a:schemeClr val="accent4"/>
-                  </a:solidFill>
-                </a:endParaRPr>
-              </a:p>
-            </p:txBody>
-          </p:sp>
-        </mc:Choice>
-        <mc:Fallback xmlns="">
-          <p:sp>
-            <p:nvSpPr>
-              <p:cNvPr id="36" name="TextBox 35">
-                <a:extLst>
-                  <a:ext uri="{FF2B5EF4-FFF2-40B4-BE49-F238E27FC236}">
-                    <a16:creationId xmlns:a16="http://schemas.microsoft.com/office/drawing/2014/main" id="{FC3940A4-D933-D6FF-8EB9-DA8BFEE12831}"/>
-                  </a:ext>
-                </a:extLst>
-              </p:cNvPr>
-              <p:cNvSpPr txBox="1">
-                <a:spLocks noRot="1" noChangeAspect="1" noMove="1" noResize="1" noEditPoints="1" noAdjustHandles="1" noChangeArrowheads="1" noChangeShapeType="1" noTextEdit="1"/>
-              </p:cNvSpPr>
-              <p:nvPr/>
-            </p:nvSpPr>
-            <p:spPr>
-              <a:xfrm>
-                <a:off x="4532758" y="4609426"/>
-                <a:ext cx="6269175" cy="424283"/>
-              </a:xfrm>
-              <a:prstGeom prst="rect">
-                <a:avLst/>
-              </a:prstGeom>
-              <a:blipFill>
-                <a:blip r:embed="rId11"/>
-                <a:stretch>
-                  <a:fillRect b="-10000"/>
-                </a:stretch>
-              </a:blipFill>
-            </p:spPr>
-            <p:txBody>
-              <a:bodyPr/>
-              <a:lstStyle/>
-              <a:p>
-                <a:r>
-                  <a:rPr lang="en-US">
-                    <a:noFill/>
-                  </a:rPr>
-                  <a:t> </a:t>
-                </a:r>
-              </a:p>
-            </p:txBody>
-          </p:sp>
-        </mc:Fallback>
-      </mc:AlternateContent>
       <p:sp>
         <p:nvSpPr>
           <p:cNvPr id="38" name="Arrow: Left 37">
@@ -9597,7 +9017,7 @@
         </p:nvSpPr>
         <p:spPr>
           <a:xfrm rot="5400000">
-            <a:off x="4292295" y="3294974"/>
+            <a:off x="3645512" y="3463721"/>
             <a:ext cx="1283287" cy="581822"/>
           </a:xfrm>
           <a:prstGeom prst="leftArrow">
@@ -9633,7 +9053,7 @@
           <a:lstStyle/>
           <a:p>
             <a:pPr algn="ctr"/>
-            <a:endParaRPr lang="en-US" sz="2000"/>
+            <a:endParaRPr lang="en-US" sz="2400"/>
           </a:p>
         </p:txBody>
       </p:sp>
@@ -9651,7 +9071,7 @@
         </p:nvSpPr>
         <p:spPr>
           <a:xfrm rot="16200000">
-            <a:off x="7205525" y="3469270"/>
+            <a:off x="6558742" y="3463721"/>
             <a:ext cx="1283287" cy="581822"/>
           </a:xfrm>
           <a:prstGeom prst="leftArrow">
@@ -9687,14 +9107,3906 @@
           <a:lstStyle/>
           <a:p>
             <a:pPr algn="ctr"/>
-            <a:endParaRPr lang="en-US" sz="2000"/>
-          </a:p>
-        </p:txBody>
-      </p:sp>
+            <a:endParaRPr lang="en-US" sz="2400"/>
+          </a:p>
+        </p:txBody>
+      </p:sp>
+      <p:cxnSp>
+        <p:nvCxnSpPr>
+          <p:cNvPr id="7" name="Straight Arrow Connector 6">
+            <a:extLst>
+              <a:ext uri="{FF2B5EF4-FFF2-40B4-BE49-F238E27FC236}">
+                <a16:creationId xmlns:a16="http://schemas.microsoft.com/office/drawing/2014/main" id="{3C214019-2AA2-7A0C-C791-079A6380053F}"/>
+              </a:ext>
+            </a:extLst>
+          </p:cNvPr>
+          <p:cNvCxnSpPr>
+            <a:cxnSpLocks/>
+          </p:cNvCxnSpPr>
+          <p:nvPr/>
+        </p:nvCxnSpPr>
+        <p:spPr>
+          <a:xfrm>
+            <a:off x="7795950" y="208225"/>
+            <a:ext cx="0" cy="3402723"/>
+          </a:xfrm>
+          <a:prstGeom prst="straightConnector1">
+            <a:avLst/>
+          </a:prstGeom>
+          <a:ln w="38100">
+            <a:headEnd type="triangle"/>
+            <a:tailEnd type="triangle"/>
+          </a:ln>
+        </p:spPr>
+        <p:style>
+          <a:lnRef idx="1">
+            <a:schemeClr val="dk1"/>
+          </a:lnRef>
+          <a:fillRef idx="0">
+            <a:schemeClr val="dk1"/>
+          </a:fillRef>
+          <a:effectRef idx="0">
+            <a:schemeClr val="dk1"/>
+          </a:effectRef>
+          <a:fontRef idx="minor">
+            <a:schemeClr val="tx1"/>
+          </a:fontRef>
+        </p:style>
+      </p:cxnSp>
+      <mc:AlternateContent xmlns:mc="http://schemas.openxmlformats.org/markup-compatibility/2006">
+        <mc:Choice xmlns:a14="http://schemas.microsoft.com/office/drawing/2010/main" Requires="a14">
+          <p:sp>
+            <p:nvSpPr>
+              <p:cNvPr id="9" name="TextBox 8">
+                <a:extLst>
+                  <a:ext uri="{FF2B5EF4-FFF2-40B4-BE49-F238E27FC236}">
+                    <a16:creationId xmlns:a16="http://schemas.microsoft.com/office/drawing/2014/main" id="{57C3FD58-40D9-8A9F-7934-AA17ACC4FDFD}"/>
+                  </a:ext>
+                </a:extLst>
+              </p:cNvPr>
+              <p:cNvSpPr txBox="1"/>
+              <p:nvPr/>
+            </p:nvSpPr>
+            <p:spPr>
+              <a:xfrm rot="16200000">
+                <a:off x="5827109" y="1659135"/>
+                <a:ext cx="3272527" cy="490199"/>
+              </a:xfrm>
+              <a:prstGeom prst="rect">
+                <a:avLst/>
+              </a:prstGeom>
+              <a:noFill/>
+            </p:spPr>
+            <p:txBody>
+              <a:bodyPr wrap="square" rtlCol="0">
+                <a:spAutoFit/>
+              </a:bodyPr>
+              <a:lstStyle/>
+              <a:p>
+                <a:pPr/>
+                <a14:m>
+                  <m:oMathPara xmlns:m="http://schemas.openxmlformats.org/officeDocument/2006/math">
+                    <m:oMath>
+                      <m:sSub>
+                        <m:sSubPr>
+                          <m:ctrlPr>
+                            <a:rPr lang="fr-CH" sz="2400" b="0" i="1" smtClean="0">
+                              <a:latin typeface="Cambria Math" panose="02040503050406030204" pitchFamily="18" charset="0"/>
+                            </a:rPr>
+                          </m:ctrlPr>
+                        </m:sSubPr>
+                        <m:e>
+                          <m:r>
+                            <a:rPr lang="fr-CH" sz="2400" b="0" i="1" smtClean="0">
+                              <a:latin typeface="Cambria Math" panose="02040503050406030204" pitchFamily="18" charset="0"/>
+                            </a:rPr>
+                            <m:t>ℎ</m:t>
+                          </m:r>
+                        </m:e>
+                        <m:sub>
+                          <m:r>
+                            <a:rPr lang="fr-CH" sz="2400" b="0" i="1" smtClean="0">
+                              <a:latin typeface="Cambria Math" panose="02040503050406030204" pitchFamily="18" charset="0"/>
+                            </a:rPr>
+                            <m:t>𝑒𝑝𝑖</m:t>
+                          </m:r>
+                        </m:sub>
+                      </m:sSub>
+                      <m:r>
+                        <a:rPr lang="fr-CH" sz="2400" b="0" i="1" smtClean="0">
+                          <a:latin typeface="Cambria Math" panose="02040503050406030204" pitchFamily="18" charset="0"/>
+                        </a:rPr>
+                        <m:t>(</m:t>
+                      </m:r>
+                      <m:r>
+                        <a:rPr lang="fr-CH" sz="2400" b="0" i="1" smtClean="0">
+                          <a:latin typeface="Cambria Math" panose="02040503050406030204" pitchFamily="18" charset="0"/>
+                        </a:rPr>
+                        <m:t>𝑡</m:t>
+                      </m:r>
+                      <m:r>
+                        <a:rPr lang="fr-CH" sz="2400" b="0" i="1" smtClean="0">
+                          <a:latin typeface="Cambria Math" panose="02040503050406030204" pitchFamily="18" charset="0"/>
+                        </a:rPr>
+                        <m:t>)</m:t>
+                      </m:r>
+                    </m:oMath>
+                  </m:oMathPara>
+                </a14:m>
+                <a:endParaRPr lang="en-US" sz="2400" dirty="0"/>
+              </a:p>
+            </p:txBody>
+          </p:sp>
+        </mc:Choice>
+        <mc:Fallback>
+          <p:sp>
+            <p:nvSpPr>
+              <p:cNvPr id="9" name="TextBox 8">
+                <a:extLst>
+                  <a:ext uri="{FF2B5EF4-FFF2-40B4-BE49-F238E27FC236}">
+                    <a16:creationId xmlns:a16="http://schemas.microsoft.com/office/drawing/2014/main" id="{57C3FD58-40D9-8A9F-7934-AA17ACC4FDFD}"/>
+                  </a:ext>
+                </a:extLst>
+              </p:cNvPr>
+              <p:cNvSpPr txBox="1">
+                <a:spLocks noRot="1" noChangeAspect="1" noMove="1" noResize="1" noEditPoints="1" noAdjustHandles="1" noChangeArrowheads="1" noChangeShapeType="1" noTextEdit="1"/>
+              </p:cNvSpPr>
+              <p:nvPr/>
+            </p:nvSpPr>
+            <p:spPr>
+              <a:xfrm rot="16200000">
+                <a:off x="5827109" y="1659135"/>
+                <a:ext cx="3272527" cy="490199"/>
+              </a:xfrm>
+              <a:prstGeom prst="rect">
+                <a:avLst/>
+              </a:prstGeom>
+              <a:blipFill>
+                <a:blip r:embed="rId10"/>
+                <a:stretch>
+                  <a:fillRect r="-11111"/>
+                </a:stretch>
+              </a:blipFill>
+            </p:spPr>
+            <p:txBody>
+              <a:bodyPr/>
+              <a:lstStyle/>
+              <a:p>
+                <a:r>
+                  <a:rPr lang="en-US">
+                    <a:noFill/>
+                  </a:rPr>
+                  <a:t> </a:t>
+                </a:r>
+              </a:p>
+            </p:txBody>
+          </p:sp>
+        </mc:Fallback>
+      </mc:AlternateContent>
+      <mc:AlternateContent xmlns:mc="http://schemas.openxmlformats.org/markup-compatibility/2006">
+        <mc:Choice xmlns:a14="http://schemas.microsoft.com/office/drawing/2010/main" Requires="a14">
+          <p:sp>
+            <p:nvSpPr>
+              <p:cNvPr id="11" name="TextBox 10">
+                <a:extLst>
+                  <a:ext uri="{FF2B5EF4-FFF2-40B4-BE49-F238E27FC236}">
+                    <a16:creationId xmlns:a16="http://schemas.microsoft.com/office/drawing/2014/main" id="{20618B63-DF31-4F30-FDFD-1D879E91495D}"/>
+                  </a:ext>
+                </a:extLst>
+              </p:cNvPr>
+              <p:cNvSpPr txBox="1"/>
+              <p:nvPr/>
+            </p:nvSpPr>
+            <p:spPr>
+              <a:xfrm>
+                <a:off x="548612" y="1273598"/>
+                <a:ext cx="6269175" cy="1757148"/>
+              </a:xfrm>
+              <a:prstGeom prst="rect">
+                <a:avLst/>
+              </a:prstGeom>
+              <a:noFill/>
+            </p:spPr>
+            <p:txBody>
+              <a:bodyPr wrap="square" rtlCol="0">
+                <a:spAutoFit/>
+              </a:bodyPr>
+              <a:lstStyle/>
+              <a:p>
+                <a:pPr/>
+                <a14:m>
+                  <m:oMathPara xmlns:m="http://schemas.openxmlformats.org/officeDocument/2006/math">
+                    <m:oMath>
+                      <m:sSub>
+                        <m:sSubPr>
+                          <m:ctrlPr>
+                            <a:rPr lang="fr-CH" sz="2400" i="1">
+                              <a:solidFill>
+                                <a:schemeClr val="accent4"/>
+                              </a:solidFill>
+                              <a:latin typeface="Cambria Math" panose="02040503050406030204" pitchFamily="18" charset="0"/>
+                            </a:rPr>
+                          </m:ctrlPr>
+                        </m:sSubPr>
+                        <m:e>
+                          <m:r>
+                            <a:rPr lang="fr-CH" sz="2400" i="1">
+                              <a:solidFill>
+                                <a:schemeClr val="accent4"/>
+                              </a:solidFill>
+                              <a:latin typeface="Cambria Math" panose="02040503050406030204" pitchFamily="18" charset="0"/>
+                            </a:rPr>
+                            <m:t>𝑀</m:t>
+                          </m:r>
+                        </m:e>
+                        <m:sub>
+                          <m:r>
+                            <a:rPr lang="fr-CH" sz="2400" i="1">
+                              <a:solidFill>
+                                <a:schemeClr val="accent4"/>
+                              </a:solidFill>
+                              <a:latin typeface="Cambria Math" panose="02040503050406030204" pitchFamily="18" charset="0"/>
+                            </a:rPr>
+                            <m:t>𝑚𝑖𝑥</m:t>
+                          </m:r>
+                          <m:r>
+                            <a:rPr lang="fr-CH" sz="2400" b="0" i="1" smtClean="0">
+                              <a:solidFill>
+                                <a:schemeClr val="accent4"/>
+                              </a:solidFill>
+                              <a:latin typeface="Cambria Math" panose="02040503050406030204" pitchFamily="18" charset="0"/>
+                            </a:rPr>
+                            <m:t>,</m:t>
+                          </m:r>
+                          <m:r>
+                            <a:rPr lang="fr-CH" sz="2400" b="0" i="1" smtClean="0">
+                              <a:solidFill>
+                                <a:schemeClr val="accent4"/>
+                              </a:solidFill>
+                              <a:latin typeface="Cambria Math" panose="02040503050406030204" pitchFamily="18" charset="0"/>
+                            </a:rPr>
+                            <m:t>𝑒𝑝𝑖</m:t>
+                          </m:r>
+                        </m:sub>
+                      </m:sSub>
+                      <m:d>
+                        <m:dPr>
+                          <m:ctrlPr>
+                            <a:rPr lang="fr-CH" sz="2400" i="1">
+                              <a:solidFill>
+                                <a:schemeClr val="accent4"/>
+                              </a:solidFill>
+                              <a:latin typeface="Cambria Math" panose="02040503050406030204" pitchFamily="18" charset="0"/>
+                            </a:rPr>
+                          </m:ctrlPr>
+                        </m:dPr>
+                        <m:e>
+                          <m:r>
+                            <a:rPr lang="fr-CH" sz="2400" i="1">
+                              <a:solidFill>
+                                <a:schemeClr val="accent4"/>
+                              </a:solidFill>
+                              <a:latin typeface="Cambria Math" panose="02040503050406030204" pitchFamily="18" charset="0"/>
+                            </a:rPr>
+                            <m:t>𝑡</m:t>
+                          </m:r>
+                        </m:e>
+                      </m:d>
+                      <m:r>
+                        <a:rPr lang="fr-CH" sz="2400" i="1">
+                          <a:solidFill>
+                            <a:schemeClr val="accent4"/>
+                          </a:solidFill>
+                          <a:latin typeface="Cambria Math" panose="02040503050406030204" pitchFamily="18" charset="0"/>
+                        </a:rPr>
+                        <m:t>=</m:t>
+                      </m:r>
+                      <m:d>
+                        <m:dPr>
+                          <m:begChr m:val="{"/>
+                          <m:endChr m:val=""/>
+                          <m:ctrlPr>
+                            <a:rPr lang="en-US" sz="2400" i="1" smtClean="0">
+                              <a:solidFill>
+                                <a:schemeClr val="accent4"/>
+                              </a:solidFill>
+                              <a:latin typeface="Cambria Math" panose="02040503050406030204" pitchFamily="18" charset="0"/>
+                            </a:rPr>
+                          </m:ctrlPr>
+                        </m:dPr>
+                        <m:e>
+                          <m:eqArr>
+                            <m:eqArrPr>
+                              <m:ctrlPr>
+                                <a:rPr lang="en-US" sz="2400" i="1" smtClean="0">
+                                  <a:solidFill>
+                                    <a:schemeClr val="accent4"/>
+                                  </a:solidFill>
+                                  <a:latin typeface="Cambria Math" panose="02040503050406030204" pitchFamily="18" charset="0"/>
+                                </a:rPr>
+                              </m:ctrlPr>
+                            </m:eqArrPr>
+                            <m:e>
+                              <m:f>
+                                <m:fPr>
+                                  <m:ctrlPr>
+                                    <a:rPr lang="fr-CH" sz="2400" b="0" i="1" smtClean="0">
+                                      <a:solidFill>
+                                        <a:schemeClr val="accent4"/>
+                                      </a:solidFill>
+                                      <a:latin typeface="Cambria Math" panose="02040503050406030204" pitchFamily="18" charset="0"/>
+                                    </a:rPr>
+                                  </m:ctrlPr>
+                                </m:fPr>
+                                <m:num>
+                                  <m:r>
+                                    <a:rPr lang="fr-CH" sz="2400" b="0" i="1" smtClean="0">
+                                      <a:solidFill>
+                                        <a:schemeClr val="accent4"/>
+                                      </a:solidFill>
+                                      <a:latin typeface="Cambria Math" panose="02040503050406030204" pitchFamily="18" charset="0"/>
+                                    </a:rPr>
+                                    <m:t>𝑑</m:t>
+                                  </m:r>
+                                  <m:sSub>
+                                    <m:sSubPr>
+                                      <m:ctrlPr>
+                                        <a:rPr lang="fr-CH" sz="2400" b="0" i="1" smtClean="0">
+                                          <a:solidFill>
+                                            <a:schemeClr val="accent4"/>
+                                          </a:solidFill>
+                                          <a:latin typeface="Cambria Math" panose="02040503050406030204" pitchFamily="18" charset="0"/>
+                                        </a:rPr>
+                                      </m:ctrlPr>
+                                    </m:sSubPr>
+                                    <m:e>
+                                      <m:r>
+                                        <a:rPr lang="fr-CH" sz="2400" b="0" i="1" smtClean="0">
+                                          <a:solidFill>
+                                            <a:schemeClr val="accent4"/>
+                                          </a:solidFill>
+                                          <a:latin typeface="Cambria Math" panose="02040503050406030204" pitchFamily="18" charset="0"/>
+                                        </a:rPr>
+                                        <m:t>𝑉</m:t>
+                                      </m:r>
+                                    </m:e>
+                                    <m:sub>
+                                      <m:r>
+                                        <a:rPr lang="fr-CH" sz="2400" b="0" i="1" smtClean="0">
+                                          <a:solidFill>
+                                            <a:schemeClr val="accent4"/>
+                                          </a:solidFill>
+                                          <a:latin typeface="Cambria Math" panose="02040503050406030204" pitchFamily="18" charset="0"/>
+                                        </a:rPr>
+                                        <m:t>𝑒𝑝𝑖</m:t>
+                                      </m:r>
+                                    </m:sub>
+                                  </m:sSub>
+                                </m:num>
+                                <m:den>
+                                  <m:r>
+                                    <a:rPr lang="fr-CH" sz="2400" b="0" i="1" smtClean="0">
+                                      <a:solidFill>
+                                        <a:schemeClr val="accent4"/>
+                                      </a:solidFill>
+                                      <a:latin typeface="Cambria Math" panose="02040503050406030204" pitchFamily="18" charset="0"/>
+                                    </a:rPr>
+                                    <m:t>𝑑𝑡</m:t>
+                                  </m:r>
+                                </m:den>
+                              </m:f>
+                              <m:sSub>
+                                <m:sSubPr>
+                                  <m:ctrlPr>
+                                    <a:rPr lang="fr-CH" sz="2400" b="0" i="1" smtClean="0">
+                                      <a:solidFill>
+                                        <a:schemeClr val="accent4"/>
+                                      </a:solidFill>
+                                      <a:latin typeface="Cambria Math" panose="02040503050406030204" pitchFamily="18" charset="0"/>
+                                    </a:rPr>
+                                  </m:ctrlPr>
+                                </m:sSubPr>
+                                <m:e>
+                                  <m:r>
+                                    <a:rPr lang="fr-CH" sz="2400" b="0" i="1" smtClean="0">
+                                      <a:solidFill>
+                                        <a:schemeClr val="accent4"/>
+                                      </a:solidFill>
+                                      <a:latin typeface="Cambria Math" panose="02040503050406030204" pitchFamily="18" charset="0"/>
+                                    </a:rPr>
+                                    <m:t>𝐶</m:t>
+                                  </m:r>
+                                </m:e>
+                                <m:sub>
+                                  <m:r>
+                                    <a:rPr lang="fr-CH" sz="2400" b="0" i="1" smtClean="0">
+                                      <a:solidFill>
+                                        <a:schemeClr val="accent4"/>
+                                      </a:solidFill>
+                                      <a:latin typeface="Cambria Math" panose="02040503050406030204" pitchFamily="18" charset="0"/>
+                                    </a:rPr>
+                                    <m:t>ℎ𝑦𝑝𝑜</m:t>
+                                  </m:r>
+                                </m:sub>
+                              </m:sSub>
+                              <m:d>
+                                <m:dPr>
+                                  <m:ctrlPr>
+                                    <a:rPr lang="fr-CH" sz="2400" b="0" i="1" smtClean="0">
+                                      <a:solidFill>
+                                        <a:schemeClr val="accent4"/>
+                                      </a:solidFill>
+                                      <a:latin typeface="Cambria Math" panose="02040503050406030204" pitchFamily="18" charset="0"/>
+                                    </a:rPr>
+                                  </m:ctrlPr>
+                                </m:dPr>
+                                <m:e>
+                                  <m:r>
+                                    <a:rPr lang="fr-CH" sz="2400" b="0" i="1" smtClean="0">
+                                      <a:solidFill>
+                                        <a:schemeClr val="accent4"/>
+                                      </a:solidFill>
+                                      <a:latin typeface="Cambria Math" panose="02040503050406030204" pitchFamily="18" charset="0"/>
+                                    </a:rPr>
+                                    <m:t>𝑡</m:t>
+                                  </m:r>
+                                </m:e>
+                              </m:d>
+                              <m:r>
+                                <a:rPr lang="fr-CH" sz="2400" b="0" i="0" smtClean="0">
+                                  <a:solidFill>
+                                    <a:schemeClr val="accent4"/>
+                                  </a:solidFill>
+                                  <a:latin typeface="Cambria Math" panose="02040503050406030204" pitchFamily="18" charset="0"/>
+                                </a:rPr>
+                                <m:t>, </m:t>
+                              </m:r>
+                              <m:r>
+                                <m:rPr>
+                                  <m:sty m:val="p"/>
+                                </m:rPr>
+                                <a:rPr lang="fr-CH" sz="2400" b="0" i="0" smtClean="0">
+                                  <a:solidFill>
+                                    <a:schemeClr val="accent4"/>
+                                  </a:solidFill>
+                                  <a:latin typeface="Cambria Math" panose="02040503050406030204" pitchFamily="18" charset="0"/>
+                                </a:rPr>
+                                <m:t>if</m:t>
+                              </m:r>
+                              <m:r>
+                                <a:rPr lang="fr-CH" sz="2400" b="0" i="0" smtClean="0">
+                                  <a:solidFill>
+                                    <a:schemeClr val="accent4"/>
+                                  </a:solidFill>
+                                  <a:latin typeface="Cambria Math" panose="02040503050406030204" pitchFamily="18" charset="0"/>
+                                </a:rPr>
+                                <m:t> </m:t>
+                              </m:r>
+                              <m:f>
+                                <m:fPr>
+                                  <m:ctrlPr>
+                                    <a:rPr lang="fr-CH" sz="2400" b="0" i="1" smtClean="0">
+                                      <a:solidFill>
+                                        <a:schemeClr val="accent4"/>
+                                      </a:solidFill>
+                                      <a:latin typeface="Cambria Math" panose="02040503050406030204" pitchFamily="18" charset="0"/>
+                                    </a:rPr>
+                                  </m:ctrlPr>
+                                </m:fPr>
+                                <m:num>
+                                  <m:r>
+                                    <a:rPr lang="fr-CH" sz="2400" b="0" i="1" smtClean="0">
+                                      <a:solidFill>
+                                        <a:schemeClr val="accent4"/>
+                                      </a:solidFill>
+                                      <a:latin typeface="Cambria Math" panose="02040503050406030204" pitchFamily="18" charset="0"/>
+                                    </a:rPr>
+                                    <m:t>𝑑</m:t>
+                                  </m:r>
+                                  <m:sSub>
+                                    <m:sSubPr>
+                                      <m:ctrlPr>
+                                        <a:rPr lang="fr-CH" sz="2400" b="0" i="1" smtClean="0">
+                                          <a:solidFill>
+                                            <a:schemeClr val="accent4"/>
+                                          </a:solidFill>
+                                          <a:latin typeface="Cambria Math" panose="02040503050406030204" pitchFamily="18" charset="0"/>
+                                        </a:rPr>
+                                      </m:ctrlPr>
+                                    </m:sSubPr>
+                                    <m:e>
+                                      <m:r>
+                                        <a:rPr lang="fr-CH" sz="2400" b="0" i="1" smtClean="0">
+                                          <a:solidFill>
+                                            <a:schemeClr val="accent4"/>
+                                          </a:solidFill>
+                                          <a:latin typeface="Cambria Math" panose="02040503050406030204" pitchFamily="18" charset="0"/>
+                                        </a:rPr>
+                                        <m:t>ℎ</m:t>
+                                      </m:r>
+                                    </m:e>
+                                    <m:sub>
+                                      <m:r>
+                                        <a:rPr lang="fr-CH" sz="2400" b="0" i="1" smtClean="0">
+                                          <a:solidFill>
+                                            <a:schemeClr val="accent4"/>
+                                          </a:solidFill>
+                                          <a:latin typeface="Cambria Math" panose="02040503050406030204" pitchFamily="18" charset="0"/>
+                                        </a:rPr>
+                                        <m:t>𝑒𝑝𝑖</m:t>
+                                      </m:r>
+                                    </m:sub>
+                                  </m:sSub>
+                                </m:num>
+                                <m:den>
+                                  <m:r>
+                                    <a:rPr lang="fr-CH" sz="2400" b="0" i="1" smtClean="0">
+                                      <a:solidFill>
+                                        <a:schemeClr val="accent4"/>
+                                      </a:solidFill>
+                                      <a:latin typeface="Cambria Math" panose="02040503050406030204" pitchFamily="18" charset="0"/>
+                                    </a:rPr>
+                                    <m:t>𝑑𝑡</m:t>
+                                  </m:r>
+                                </m:den>
+                              </m:f>
+                              <m:r>
+                                <a:rPr lang="fr-CH" sz="2400" b="0" i="1" smtClean="0">
+                                  <a:solidFill>
+                                    <a:schemeClr val="accent4"/>
+                                  </a:solidFill>
+                                  <a:latin typeface="Cambria Math" panose="02040503050406030204" pitchFamily="18" charset="0"/>
+                                </a:rPr>
+                                <m:t>&gt;0</m:t>
+                              </m:r>
+                            </m:e>
+                            <m:e>
+                              <m:f>
+                                <m:fPr>
+                                  <m:ctrlPr>
+                                    <a:rPr lang="fr-CH" sz="2400" i="1">
+                                      <a:solidFill>
+                                        <a:schemeClr val="accent4"/>
+                                      </a:solidFill>
+                                      <a:latin typeface="Cambria Math" panose="02040503050406030204" pitchFamily="18" charset="0"/>
+                                    </a:rPr>
+                                  </m:ctrlPr>
+                                </m:fPr>
+                                <m:num>
+                                  <m:r>
+                                    <a:rPr lang="fr-CH" sz="2400" i="1">
+                                      <a:solidFill>
+                                        <a:schemeClr val="accent4"/>
+                                      </a:solidFill>
+                                      <a:latin typeface="Cambria Math" panose="02040503050406030204" pitchFamily="18" charset="0"/>
+                                    </a:rPr>
+                                    <m:t>𝑑</m:t>
+                                  </m:r>
+                                  <m:sSub>
+                                    <m:sSubPr>
+                                      <m:ctrlPr>
+                                        <a:rPr lang="fr-CH" sz="2400" i="1">
+                                          <a:solidFill>
+                                            <a:schemeClr val="accent4"/>
+                                          </a:solidFill>
+                                          <a:latin typeface="Cambria Math" panose="02040503050406030204" pitchFamily="18" charset="0"/>
+                                        </a:rPr>
+                                      </m:ctrlPr>
+                                    </m:sSubPr>
+                                    <m:e>
+                                      <m:r>
+                                        <a:rPr lang="fr-CH" sz="2400" i="1">
+                                          <a:solidFill>
+                                            <a:schemeClr val="accent4"/>
+                                          </a:solidFill>
+                                          <a:latin typeface="Cambria Math" panose="02040503050406030204" pitchFamily="18" charset="0"/>
+                                        </a:rPr>
+                                        <m:t>𝑉</m:t>
+                                      </m:r>
+                                    </m:e>
+                                    <m:sub>
+                                      <m:r>
+                                        <a:rPr lang="fr-CH" sz="2400" i="1">
+                                          <a:solidFill>
+                                            <a:schemeClr val="accent4"/>
+                                          </a:solidFill>
+                                          <a:latin typeface="Cambria Math" panose="02040503050406030204" pitchFamily="18" charset="0"/>
+                                        </a:rPr>
+                                        <m:t>𝑒𝑝𝑖</m:t>
+                                      </m:r>
+                                    </m:sub>
+                                  </m:sSub>
+                                </m:num>
+                                <m:den>
+                                  <m:r>
+                                    <a:rPr lang="fr-CH" sz="2400" i="1">
+                                      <a:solidFill>
+                                        <a:schemeClr val="accent4"/>
+                                      </a:solidFill>
+                                      <a:latin typeface="Cambria Math" panose="02040503050406030204" pitchFamily="18" charset="0"/>
+                                    </a:rPr>
+                                    <m:t>𝑑𝑡</m:t>
+                                  </m:r>
+                                </m:den>
+                              </m:f>
+                              <m:sSub>
+                                <m:sSubPr>
+                                  <m:ctrlPr>
+                                    <a:rPr lang="fr-CH" sz="2400" i="1">
+                                      <a:solidFill>
+                                        <a:schemeClr val="accent4"/>
+                                      </a:solidFill>
+                                      <a:latin typeface="Cambria Math" panose="02040503050406030204" pitchFamily="18" charset="0"/>
+                                    </a:rPr>
+                                  </m:ctrlPr>
+                                </m:sSubPr>
+                                <m:e>
+                                  <m:r>
+                                    <a:rPr lang="fr-CH" sz="2400" i="1">
+                                      <a:solidFill>
+                                        <a:schemeClr val="accent4"/>
+                                      </a:solidFill>
+                                      <a:latin typeface="Cambria Math" panose="02040503050406030204" pitchFamily="18" charset="0"/>
+                                    </a:rPr>
+                                    <m:t>𝐶</m:t>
+                                  </m:r>
+                                </m:e>
+                                <m:sub>
+                                  <m:r>
+                                    <a:rPr lang="fr-CH" sz="2400" b="0" i="1" smtClean="0">
+                                      <a:solidFill>
+                                        <a:schemeClr val="accent4"/>
+                                      </a:solidFill>
+                                      <a:latin typeface="Cambria Math" panose="02040503050406030204" pitchFamily="18" charset="0"/>
+                                    </a:rPr>
+                                    <m:t>𝑒𝑝𝑖</m:t>
+                                  </m:r>
+                                </m:sub>
+                              </m:sSub>
+                              <m:d>
+                                <m:dPr>
+                                  <m:ctrlPr>
+                                    <a:rPr lang="fr-CH" sz="2400" i="1">
+                                      <a:solidFill>
+                                        <a:schemeClr val="accent4"/>
+                                      </a:solidFill>
+                                      <a:latin typeface="Cambria Math" panose="02040503050406030204" pitchFamily="18" charset="0"/>
+                                    </a:rPr>
+                                  </m:ctrlPr>
+                                </m:dPr>
+                                <m:e>
+                                  <m:r>
+                                    <a:rPr lang="fr-CH" sz="2400" i="1">
+                                      <a:solidFill>
+                                        <a:schemeClr val="accent4"/>
+                                      </a:solidFill>
+                                      <a:latin typeface="Cambria Math" panose="02040503050406030204" pitchFamily="18" charset="0"/>
+                                    </a:rPr>
+                                    <m:t>𝑡</m:t>
+                                  </m:r>
+                                </m:e>
+                              </m:d>
+                              <m:r>
+                                <a:rPr lang="fr-CH" sz="2400" b="0" i="1" smtClean="0">
+                                  <a:solidFill>
+                                    <a:schemeClr val="accent4"/>
+                                  </a:solidFill>
+                                  <a:latin typeface="Cambria Math" panose="02040503050406030204" pitchFamily="18" charset="0"/>
+                                </a:rPr>
+                                <m:t>,</m:t>
+                              </m:r>
+                              <m:r>
+                                <a:rPr lang="fr-CH" sz="2400" b="0" i="0" smtClean="0">
+                                  <a:solidFill>
+                                    <a:schemeClr val="accent4"/>
+                                  </a:solidFill>
+                                  <a:latin typeface="Cambria Math" panose="02040503050406030204" pitchFamily="18" charset="0"/>
+                                </a:rPr>
+                                <m:t> </m:t>
+                              </m:r>
+                              <m:r>
+                                <m:rPr>
+                                  <m:sty m:val="p"/>
+                                </m:rPr>
+                                <a:rPr lang="fr-CH" sz="2400" b="0" i="0" smtClean="0">
+                                  <a:solidFill>
+                                    <a:schemeClr val="accent4"/>
+                                  </a:solidFill>
+                                  <a:latin typeface="Cambria Math" panose="02040503050406030204" pitchFamily="18" charset="0"/>
+                                </a:rPr>
+                                <m:t>if</m:t>
+                              </m:r>
+                              <m:r>
+                                <a:rPr lang="fr-CH" sz="2400" b="0" i="0" smtClean="0">
+                                  <a:solidFill>
+                                    <a:schemeClr val="accent4"/>
+                                  </a:solidFill>
+                                  <a:latin typeface="Cambria Math" panose="02040503050406030204" pitchFamily="18" charset="0"/>
+                                </a:rPr>
+                                <m:t> </m:t>
+                              </m:r>
+                              <m:f>
+                                <m:fPr>
+                                  <m:ctrlPr>
+                                    <a:rPr lang="fr-CH" sz="2400" b="0" i="1" smtClean="0">
+                                      <a:solidFill>
+                                        <a:schemeClr val="accent4"/>
+                                      </a:solidFill>
+                                      <a:latin typeface="Cambria Math" panose="02040503050406030204" pitchFamily="18" charset="0"/>
+                                    </a:rPr>
+                                  </m:ctrlPr>
+                                </m:fPr>
+                                <m:num>
+                                  <m:r>
+                                    <a:rPr lang="fr-CH" sz="2400" b="0" i="1" smtClean="0">
+                                      <a:solidFill>
+                                        <a:schemeClr val="accent4"/>
+                                      </a:solidFill>
+                                      <a:latin typeface="Cambria Math" panose="02040503050406030204" pitchFamily="18" charset="0"/>
+                                    </a:rPr>
+                                    <m:t>𝑑</m:t>
+                                  </m:r>
+                                  <m:sSub>
+                                    <m:sSubPr>
+                                      <m:ctrlPr>
+                                        <a:rPr lang="fr-CH" sz="2400" b="0" i="1" smtClean="0">
+                                          <a:solidFill>
+                                            <a:schemeClr val="accent4"/>
+                                          </a:solidFill>
+                                          <a:latin typeface="Cambria Math" panose="02040503050406030204" pitchFamily="18" charset="0"/>
+                                        </a:rPr>
+                                      </m:ctrlPr>
+                                    </m:sSubPr>
+                                    <m:e>
+                                      <m:r>
+                                        <a:rPr lang="fr-CH" sz="2400" b="0" i="1" smtClean="0">
+                                          <a:solidFill>
+                                            <a:schemeClr val="accent4"/>
+                                          </a:solidFill>
+                                          <a:latin typeface="Cambria Math" panose="02040503050406030204" pitchFamily="18" charset="0"/>
+                                        </a:rPr>
+                                        <m:t>ℎ</m:t>
+                                      </m:r>
+                                    </m:e>
+                                    <m:sub>
+                                      <m:r>
+                                        <a:rPr lang="fr-CH" sz="2400" b="0" i="1" smtClean="0">
+                                          <a:solidFill>
+                                            <a:schemeClr val="accent4"/>
+                                          </a:solidFill>
+                                          <a:latin typeface="Cambria Math" panose="02040503050406030204" pitchFamily="18" charset="0"/>
+                                        </a:rPr>
+                                        <m:t>𝑒𝑝𝑖</m:t>
+                                      </m:r>
+                                    </m:sub>
+                                  </m:sSub>
+                                </m:num>
+                                <m:den>
+                                  <m:r>
+                                    <a:rPr lang="fr-CH" sz="2400" b="0" i="1" smtClean="0">
+                                      <a:solidFill>
+                                        <a:schemeClr val="accent4"/>
+                                      </a:solidFill>
+                                      <a:latin typeface="Cambria Math" panose="02040503050406030204" pitchFamily="18" charset="0"/>
+                                    </a:rPr>
+                                    <m:t>𝑑𝑡</m:t>
+                                  </m:r>
+                                </m:den>
+                              </m:f>
+                              <m:r>
+                                <a:rPr lang="fr-CH" sz="2400" b="0" i="1" smtClean="0">
+                                  <a:solidFill>
+                                    <a:schemeClr val="accent4"/>
+                                  </a:solidFill>
+                                  <a:latin typeface="Cambria Math" panose="02040503050406030204" pitchFamily="18" charset="0"/>
+                                </a:rPr>
+                                <m:t>&lt;0</m:t>
+                              </m:r>
+                            </m:e>
+                          </m:eqArr>
+                        </m:e>
+                      </m:d>
+                    </m:oMath>
+                  </m:oMathPara>
+                </a14:m>
+                <a:endParaRPr lang="en-US" sz="2400" dirty="0">
+                  <a:solidFill>
+                    <a:schemeClr val="accent4"/>
+                  </a:solidFill>
+                </a:endParaRPr>
+              </a:p>
+            </p:txBody>
+          </p:sp>
+        </mc:Choice>
+        <mc:Fallback>
+          <p:sp>
+            <p:nvSpPr>
+              <p:cNvPr id="11" name="TextBox 10">
+                <a:extLst>
+                  <a:ext uri="{FF2B5EF4-FFF2-40B4-BE49-F238E27FC236}">
+                    <a16:creationId xmlns:a16="http://schemas.microsoft.com/office/drawing/2014/main" id="{20618B63-DF31-4F30-FDFD-1D879E91495D}"/>
+                  </a:ext>
+                </a:extLst>
+              </p:cNvPr>
+              <p:cNvSpPr txBox="1">
+                <a:spLocks noRot="1" noChangeAspect="1" noMove="1" noResize="1" noEditPoints="1" noAdjustHandles="1" noChangeArrowheads="1" noChangeShapeType="1" noTextEdit="1"/>
+              </p:cNvSpPr>
+              <p:nvPr/>
+            </p:nvSpPr>
+            <p:spPr>
+              <a:xfrm>
+                <a:off x="548612" y="1273598"/>
+                <a:ext cx="6269175" cy="1757148"/>
+              </a:xfrm>
+              <a:prstGeom prst="rect">
+                <a:avLst/>
+              </a:prstGeom>
+              <a:blipFill>
+                <a:blip r:embed="rId11"/>
+                <a:stretch>
+                  <a:fillRect/>
+                </a:stretch>
+              </a:blipFill>
+            </p:spPr>
+            <p:txBody>
+              <a:bodyPr/>
+              <a:lstStyle/>
+              <a:p>
+                <a:r>
+                  <a:rPr lang="en-US">
+                    <a:noFill/>
+                  </a:rPr>
+                  <a:t> </a:t>
+                </a:r>
+              </a:p>
+            </p:txBody>
+          </p:sp>
+        </mc:Fallback>
+      </mc:AlternateContent>
     </p:spTree>
     <p:extLst>
       <p:ext uri="{BB962C8B-B14F-4D97-AF65-F5344CB8AC3E}">
         <p14:creationId xmlns:p14="http://schemas.microsoft.com/office/powerpoint/2010/main" val="983911713"/>
+      </p:ext>
+    </p:extLst>
+  </p:cSld>
+  <p:clrMapOvr>
+    <a:masterClrMapping/>
+  </p:clrMapOvr>
+</p:sld>
+</file>
+
+<file path=ppt/slides/slide2.xml><?xml version="1.0" encoding="utf-8"?>
+<p:sld xmlns:a="http://schemas.openxmlformats.org/drawingml/2006/main" xmlns:r="http://schemas.openxmlformats.org/officeDocument/2006/relationships" xmlns:p="http://schemas.openxmlformats.org/presentationml/2006/main">
+  <p:cSld>
+    <p:spTree>
+      <p:nvGrpSpPr>
+        <p:cNvPr id="1" name="">
+          <a:extLst>
+            <a:ext uri="{FF2B5EF4-FFF2-40B4-BE49-F238E27FC236}">
+              <a16:creationId xmlns:a16="http://schemas.microsoft.com/office/drawing/2014/main" id="{96085020-0D18-B64F-74B5-618AA27B4044}"/>
+            </a:ext>
+          </a:extLst>
+        </p:cNvPr>
+        <p:cNvGrpSpPr/>
+        <p:nvPr/>
+      </p:nvGrpSpPr>
+      <p:grpSpPr>
+        <a:xfrm>
+          <a:off x="0" y="0"/>
+          <a:ext cx="0" cy="0"/>
+          <a:chOff x="0" y="0"/>
+          <a:chExt cx="0" cy="0"/>
+        </a:xfrm>
+      </p:grpSpPr>
+      <p:sp>
+        <p:nvSpPr>
+          <p:cNvPr id="3" name="Rectangle 3">
+            <a:extLst>
+              <a:ext uri="{FF2B5EF4-FFF2-40B4-BE49-F238E27FC236}">
+                <a16:creationId xmlns:a16="http://schemas.microsoft.com/office/drawing/2014/main" id="{C5F28E61-3FDB-B6B3-E692-ED37B4E47952}"/>
+              </a:ext>
+            </a:extLst>
+          </p:cNvPr>
+          <p:cNvSpPr>
+            <a:spLocks noChangeArrowheads="1"/>
+          </p:cNvSpPr>
+          <p:nvPr/>
+        </p:nvSpPr>
+        <p:spPr bwMode="auto">
+          <a:xfrm>
+            <a:off x="-884185" y="1191597"/>
+            <a:ext cx="184731" cy="461665"/>
+          </a:xfrm>
+          <a:prstGeom prst="rect">
+            <a:avLst/>
+          </a:prstGeom>
+          <a:noFill/>
+          <a:ln>
+            <a:noFill/>
+          </a:ln>
+          <a:effectLst/>
+          <a:extLst>
+            <a:ext uri="{909E8E84-426E-40DD-AFC4-6F175D3DCCD1}">
+              <a14:hiddenFill xmlns:a14="http://schemas.microsoft.com/office/drawing/2010/main">
+                <a:solidFill>
+                  <a:schemeClr val="accent1"/>
+                </a:solidFill>
+              </a14:hiddenFill>
+            </a:ext>
+            <a:ext uri="{91240B29-F687-4F45-9708-019B960494DF}">
+              <a14:hiddenLine xmlns:a14="http://schemas.microsoft.com/office/drawing/2010/main" w="9525">
+                <a:solidFill>
+                  <a:schemeClr val="tx1"/>
+                </a:solidFill>
+                <a:miter lim="800000"/>
+                <a:headEnd/>
+                <a:tailEnd/>
+              </a14:hiddenLine>
+            </a:ext>
+            <a:ext uri="{AF507438-7753-43E0-B8FC-AC1667EBCBE1}">
+              <a14:hiddenEffects xmlns:a14="http://schemas.microsoft.com/office/drawing/2010/main">
+                <a:effectLst>
+                  <a:outerShdw dist="35921" dir="2700000" algn="ctr" rotWithShape="0">
+                    <a:schemeClr val="bg2"/>
+                  </a:outerShdw>
+                </a:effectLst>
+              </a14:hiddenEffects>
+            </a:ext>
+          </a:extLst>
+        </p:spPr>
+        <p:txBody>
+          <a:bodyPr vert="horz" wrap="none" lIns="91440" tIns="45720" rIns="91440" bIns="45720" numCol="1" anchor="ctr" anchorCtr="0" compatLnSpc="1">
+            <a:prstTxWarp prst="textNoShape">
+              <a:avLst/>
+            </a:prstTxWarp>
+            <a:spAutoFit/>
+          </a:bodyPr>
+          <a:lstStyle/>
+          <a:p>
+            <a:pPr marL="0" marR="0" lvl="0" indent="0" algn="l" defTabSz="914400" rtl="0" eaLnBrk="1" fontAlgn="auto" latinLnBrk="0" hangingPunct="1">
+              <a:lnSpc>
+                <a:spcPct val="100000"/>
+              </a:lnSpc>
+              <a:spcBef>
+                <a:spcPts val="0"/>
+              </a:spcBef>
+              <a:spcAft>
+                <a:spcPts val="0"/>
+              </a:spcAft>
+              <a:buClrTx/>
+              <a:buSzTx/>
+              <a:buFontTx/>
+              <a:buNone/>
+              <a:tabLst/>
+              <a:defRPr/>
+            </a:pPr>
+            <a:endParaRPr kumimoji="0" lang="en-US" sz="2400" b="0" i="0" u="none" strike="noStrike" kern="1200" cap="none" spc="0" normalizeH="0" baseline="0" noProof="0">
+              <a:ln>
+                <a:noFill/>
+              </a:ln>
+              <a:solidFill>
+                <a:prstClr val="black"/>
+              </a:solidFill>
+              <a:effectLst/>
+              <a:uLnTx/>
+              <a:uFillTx/>
+              <a:latin typeface="Calibri" panose="020F0502020204030204"/>
+              <a:ea typeface="+mn-ea"/>
+              <a:cs typeface="+mn-cs"/>
+            </a:endParaRPr>
+          </a:p>
+        </p:txBody>
+      </p:sp>
+      <p:sp>
+        <p:nvSpPr>
+          <p:cNvPr id="5" name="Rectangle 4">
+            <a:extLst>
+              <a:ext uri="{FF2B5EF4-FFF2-40B4-BE49-F238E27FC236}">
+                <a16:creationId xmlns:a16="http://schemas.microsoft.com/office/drawing/2014/main" id="{C6C731E9-8E13-DA1F-B998-D2B70D884E46}"/>
+              </a:ext>
+            </a:extLst>
+          </p:cNvPr>
+          <p:cNvSpPr>
+            <a:spLocks noChangeArrowheads="1"/>
+          </p:cNvSpPr>
+          <p:nvPr/>
+        </p:nvSpPr>
+        <p:spPr bwMode="auto">
+          <a:xfrm>
+            <a:off x="131815" y="10493521"/>
+            <a:ext cx="184731" cy="461665"/>
+          </a:xfrm>
+          <a:prstGeom prst="rect">
+            <a:avLst/>
+          </a:prstGeom>
+          <a:noFill/>
+          <a:ln>
+            <a:noFill/>
+          </a:ln>
+          <a:effectLst/>
+          <a:extLst>
+            <a:ext uri="{909E8E84-426E-40DD-AFC4-6F175D3DCCD1}">
+              <a14:hiddenFill xmlns:a14="http://schemas.microsoft.com/office/drawing/2010/main">
+                <a:solidFill>
+                  <a:schemeClr val="accent1"/>
+                </a:solidFill>
+              </a14:hiddenFill>
+            </a:ext>
+            <a:ext uri="{91240B29-F687-4F45-9708-019B960494DF}">
+              <a14:hiddenLine xmlns:a14="http://schemas.microsoft.com/office/drawing/2010/main" w="9525">
+                <a:solidFill>
+                  <a:schemeClr val="tx1"/>
+                </a:solidFill>
+                <a:miter lim="800000"/>
+                <a:headEnd/>
+                <a:tailEnd/>
+              </a14:hiddenLine>
+            </a:ext>
+            <a:ext uri="{AF507438-7753-43E0-B8FC-AC1667EBCBE1}">
+              <a14:hiddenEffects xmlns:a14="http://schemas.microsoft.com/office/drawing/2010/main">
+                <a:effectLst>
+                  <a:outerShdw dist="35921" dir="2700000" algn="ctr" rotWithShape="0">
+                    <a:schemeClr val="bg2"/>
+                  </a:outerShdw>
+                </a:effectLst>
+              </a14:hiddenEffects>
+            </a:ext>
+          </a:extLst>
+        </p:spPr>
+        <p:txBody>
+          <a:bodyPr vert="horz" wrap="none" lIns="91440" tIns="45720" rIns="91440" bIns="45720" numCol="1" anchor="ctr" anchorCtr="0" compatLnSpc="1">
+            <a:prstTxWarp prst="textNoShape">
+              <a:avLst/>
+            </a:prstTxWarp>
+            <a:spAutoFit/>
+          </a:bodyPr>
+          <a:lstStyle/>
+          <a:p>
+            <a:pPr marL="0" marR="0" lvl="0" indent="0" algn="l" defTabSz="914400" rtl="0" eaLnBrk="1" fontAlgn="auto" latinLnBrk="0" hangingPunct="1">
+              <a:lnSpc>
+                <a:spcPct val="100000"/>
+              </a:lnSpc>
+              <a:spcBef>
+                <a:spcPts val="0"/>
+              </a:spcBef>
+              <a:spcAft>
+                <a:spcPts val="0"/>
+              </a:spcAft>
+              <a:buClrTx/>
+              <a:buSzTx/>
+              <a:buFontTx/>
+              <a:buNone/>
+              <a:tabLst/>
+              <a:defRPr/>
+            </a:pPr>
+            <a:endParaRPr kumimoji="0" lang="en-US" sz="2400" b="0" i="0" u="none" strike="noStrike" kern="1200" cap="none" spc="0" normalizeH="0" baseline="0" noProof="0">
+              <a:ln>
+                <a:noFill/>
+              </a:ln>
+              <a:solidFill>
+                <a:prstClr val="black"/>
+              </a:solidFill>
+              <a:effectLst/>
+              <a:uLnTx/>
+              <a:uFillTx/>
+              <a:latin typeface="Calibri" panose="020F0502020204030204"/>
+              <a:ea typeface="+mn-ea"/>
+              <a:cs typeface="+mn-cs"/>
+            </a:endParaRPr>
+          </a:p>
+        </p:txBody>
+      </p:sp>
+      <p:sp>
+        <p:nvSpPr>
+          <p:cNvPr id="2" name="Rectangle 1">
+            <a:extLst>
+              <a:ext uri="{FF2B5EF4-FFF2-40B4-BE49-F238E27FC236}">
+                <a16:creationId xmlns:a16="http://schemas.microsoft.com/office/drawing/2014/main" id="{9AC73BAD-E9E8-B86B-68C4-D3E9FBFC8286}"/>
+              </a:ext>
+            </a:extLst>
+          </p:cNvPr>
+          <p:cNvSpPr/>
+          <p:nvPr/>
+        </p:nvSpPr>
+        <p:spPr>
+          <a:xfrm>
+            <a:off x="435634" y="3540722"/>
+            <a:ext cx="8284867" cy="2520126"/>
+          </a:xfrm>
+          <a:prstGeom prst="rect">
+            <a:avLst/>
+          </a:prstGeom>
+        </p:spPr>
+        <p:style>
+          <a:lnRef idx="2">
+            <a:schemeClr val="accent5">
+              <a:shade val="15000"/>
+            </a:schemeClr>
+          </a:lnRef>
+          <a:fillRef idx="1">
+            <a:schemeClr val="accent5"/>
+          </a:fillRef>
+          <a:effectRef idx="0">
+            <a:schemeClr val="accent5"/>
+          </a:effectRef>
+          <a:fontRef idx="minor">
+            <a:schemeClr val="lt1"/>
+          </a:fontRef>
+        </p:style>
+        <p:txBody>
+          <a:bodyPr rtlCol="0" anchor="ctr"/>
+          <a:lstStyle/>
+          <a:p>
+            <a:pPr algn="ctr"/>
+            <a:endParaRPr lang="en-US" sz="2400"/>
+          </a:p>
+        </p:txBody>
+      </p:sp>
+      <p:sp>
+        <p:nvSpPr>
+          <p:cNvPr id="4" name="Rectangle 3">
+            <a:extLst>
+              <a:ext uri="{FF2B5EF4-FFF2-40B4-BE49-F238E27FC236}">
+                <a16:creationId xmlns:a16="http://schemas.microsoft.com/office/drawing/2014/main" id="{FB8EEAA7-523C-D32F-5CEE-4A5C573F7B7F}"/>
+              </a:ext>
+            </a:extLst>
+          </p:cNvPr>
+          <p:cNvSpPr/>
+          <p:nvPr/>
+        </p:nvSpPr>
+        <p:spPr>
+          <a:xfrm>
+            <a:off x="435634" y="208225"/>
+            <a:ext cx="8284867" cy="3382844"/>
+          </a:xfrm>
+          <a:prstGeom prst="rect">
+            <a:avLst/>
+          </a:prstGeom>
+          <a:solidFill>
+            <a:schemeClr val="accent1">
+              <a:lumMod val="60000"/>
+              <a:lumOff val="40000"/>
+            </a:schemeClr>
+          </a:solidFill>
+        </p:spPr>
+        <p:style>
+          <a:lnRef idx="2">
+            <a:schemeClr val="accent1">
+              <a:shade val="15000"/>
+            </a:schemeClr>
+          </a:lnRef>
+          <a:fillRef idx="1">
+            <a:schemeClr val="accent1"/>
+          </a:fillRef>
+          <a:effectRef idx="0">
+            <a:schemeClr val="accent1"/>
+          </a:effectRef>
+          <a:fontRef idx="minor">
+            <a:schemeClr val="lt1"/>
+          </a:fontRef>
+        </p:style>
+        <p:txBody>
+          <a:bodyPr rtlCol="0" anchor="ctr"/>
+          <a:lstStyle/>
+          <a:p>
+            <a:pPr algn="ctr"/>
+            <a:endParaRPr lang="en-US" sz="2400"/>
+          </a:p>
+        </p:txBody>
+      </p:sp>
+      <p:sp>
+        <p:nvSpPr>
+          <p:cNvPr id="6" name="Arrow: Left 5">
+            <a:extLst>
+              <a:ext uri="{FF2B5EF4-FFF2-40B4-BE49-F238E27FC236}">
+                <a16:creationId xmlns:a16="http://schemas.microsoft.com/office/drawing/2014/main" id="{0DAF2F6F-0958-BBA7-C187-B1D5F6BC5F4B}"/>
+              </a:ext>
+            </a:extLst>
+          </p:cNvPr>
+          <p:cNvSpPr/>
+          <p:nvPr/>
+        </p:nvSpPr>
+        <p:spPr>
+          <a:xfrm>
+            <a:off x="8104894" y="5182913"/>
+            <a:ext cx="1283287" cy="581822"/>
+          </a:xfrm>
+          <a:prstGeom prst="leftArrow">
+            <a:avLst/>
+          </a:prstGeom>
+        </p:spPr>
+        <p:style>
+          <a:lnRef idx="2">
+            <a:schemeClr val="dk1">
+              <a:shade val="15000"/>
+            </a:schemeClr>
+          </a:lnRef>
+          <a:fillRef idx="1">
+            <a:schemeClr val="dk1"/>
+          </a:fillRef>
+          <a:effectRef idx="0">
+            <a:schemeClr val="dk1"/>
+          </a:effectRef>
+          <a:fontRef idx="minor">
+            <a:schemeClr val="lt1"/>
+          </a:fontRef>
+        </p:style>
+        <p:txBody>
+          <a:bodyPr rtlCol="0" anchor="ctr"/>
+          <a:lstStyle/>
+          <a:p>
+            <a:pPr algn="ctr"/>
+            <a:endParaRPr lang="en-US" sz="2400"/>
+          </a:p>
+        </p:txBody>
+      </p:sp>
+      <p:sp>
+        <p:nvSpPr>
+          <p:cNvPr id="13" name="Arrow: Left 12">
+            <a:extLst>
+              <a:ext uri="{FF2B5EF4-FFF2-40B4-BE49-F238E27FC236}">
+                <a16:creationId xmlns:a16="http://schemas.microsoft.com/office/drawing/2014/main" id="{B551CE49-2FEC-3F5C-6B8F-D24ED8FDF3E1}"/>
+              </a:ext>
+            </a:extLst>
+          </p:cNvPr>
+          <p:cNvSpPr/>
+          <p:nvPr/>
+        </p:nvSpPr>
+        <p:spPr>
+          <a:xfrm>
+            <a:off x="19052" y="953784"/>
+            <a:ext cx="1268098" cy="581822"/>
+          </a:xfrm>
+          <a:prstGeom prst="leftArrow">
+            <a:avLst/>
+          </a:prstGeom>
+          <a:solidFill>
+            <a:schemeClr val="tx1"/>
+          </a:solidFill>
+        </p:spPr>
+        <p:style>
+          <a:lnRef idx="2">
+            <a:schemeClr val="dk1">
+              <a:shade val="15000"/>
+            </a:schemeClr>
+          </a:lnRef>
+          <a:fillRef idx="1">
+            <a:schemeClr val="dk1"/>
+          </a:fillRef>
+          <a:effectRef idx="0">
+            <a:schemeClr val="dk1"/>
+          </a:effectRef>
+          <a:fontRef idx="minor">
+            <a:schemeClr val="lt1"/>
+          </a:fontRef>
+        </p:style>
+        <p:txBody>
+          <a:bodyPr rtlCol="0" anchor="ctr"/>
+          <a:lstStyle/>
+          <a:p>
+            <a:pPr algn="ctr"/>
+            <a:endParaRPr lang="en-US" sz="2400"/>
+          </a:p>
+        </p:txBody>
+      </p:sp>
+      <mc:AlternateContent xmlns:mc="http://schemas.openxmlformats.org/markup-compatibility/2006">
+        <mc:Choice xmlns:a14="http://schemas.microsoft.com/office/drawing/2010/main" Requires="a14">
+          <p:sp>
+            <p:nvSpPr>
+              <p:cNvPr id="16" name="TextBox 15">
+                <a:extLst>
+                  <a:ext uri="{FF2B5EF4-FFF2-40B4-BE49-F238E27FC236}">
+                    <a16:creationId xmlns:a16="http://schemas.microsoft.com/office/drawing/2014/main" id="{F3A1FD79-DDAE-A062-AD9E-1014CAB0C2D2}"/>
+                  </a:ext>
+                </a:extLst>
+              </p:cNvPr>
+              <p:cNvSpPr txBox="1"/>
+              <p:nvPr/>
+            </p:nvSpPr>
+            <p:spPr>
+              <a:xfrm>
+                <a:off x="9054246" y="1124777"/>
+                <a:ext cx="3272525" cy="888064"/>
+              </a:xfrm>
+              <a:prstGeom prst="rect">
+                <a:avLst/>
+              </a:prstGeom>
+              <a:noFill/>
+            </p:spPr>
+            <p:txBody>
+              <a:bodyPr wrap="square" rtlCol="0">
+                <a:spAutoFit/>
+              </a:bodyPr>
+              <a:lstStyle/>
+              <a:p>
+                <a:pPr/>
+                <a14:m>
+                  <m:oMathPara xmlns:m="http://schemas.openxmlformats.org/officeDocument/2006/math">
+                    <m:oMath>
+                      <m:sSub>
+                        <m:sSubPr>
+                          <m:ctrlPr>
+                            <a:rPr lang="fr-CH" sz="2400" b="0" i="1" smtClean="0">
+                              <a:latin typeface="Cambria Math" panose="02040503050406030204" pitchFamily="18" charset="0"/>
+                            </a:rPr>
+                          </m:ctrlPr>
+                        </m:sSubPr>
+                        <m:e>
+                          <m:r>
+                            <a:rPr lang="fr-CH" sz="2400" b="0" i="1" smtClean="0">
+                              <a:latin typeface="Cambria Math" panose="02040503050406030204" pitchFamily="18" charset="0"/>
+                            </a:rPr>
+                            <m:t>𝑄</m:t>
+                          </m:r>
+                        </m:e>
+                        <m:sub>
+                          <m:r>
+                            <a:rPr lang="fr-CH" sz="2400" b="0" i="1" smtClean="0">
+                              <a:latin typeface="Cambria Math" panose="02040503050406030204" pitchFamily="18" charset="0"/>
+                            </a:rPr>
+                            <m:t>𝑒𝑝𝑖</m:t>
+                          </m:r>
+                        </m:sub>
+                      </m:sSub>
+                      <m:d>
+                        <m:dPr>
+                          <m:ctrlPr>
+                            <a:rPr lang="fr-CH" sz="2400" b="0" i="1" smtClean="0">
+                              <a:latin typeface="Cambria Math" panose="02040503050406030204" pitchFamily="18" charset="0"/>
+                            </a:rPr>
+                          </m:ctrlPr>
+                        </m:dPr>
+                        <m:e>
+                          <m:r>
+                            <a:rPr lang="fr-CH" sz="2400" b="0" i="1" smtClean="0">
+                              <a:latin typeface="Cambria Math" panose="02040503050406030204" pitchFamily="18" charset="0"/>
+                            </a:rPr>
+                            <m:t>𝑡</m:t>
+                          </m:r>
+                        </m:e>
+                      </m:d>
+                      <m:r>
+                        <a:rPr lang="fr-CH" sz="2400" b="0" i="1" smtClean="0">
+                          <a:latin typeface="Cambria Math" panose="02040503050406030204" pitchFamily="18" charset="0"/>
+                        </a:rPr>
+                        <m:t>=</m:t>
+                      </m:r>
+                      <m:r>
+                        <a:rPr lang="fr-CH" sz="2400" b="0" i="1" smtClean="0">
+                          <a:latin typeface="Cambria Math" panose="02040503050406030204" pitchFamily="18" charset="0"/>
+                        </a:rPr>
+                        <m:t>𝛼</m:t>
+                      </m:r>
+                      <m:d>
+                        <m:dPr>
+                          <m:ctrlPr>
+                            <a:rPr lang="fr-CH" sz="2400" b="0" i="1" smtClean="0">
+                              <a:latin typeface="Cambria Math" panose="02040503050406030204" pitchFamily="18" charset="0"/>
+                            </a:rPr>
+                          </m:ctrlPr>
+                        </m:dPr>
+                        <m:e>
+                          <m:r>
+                            <a:rPr lang="fr-CH" sz="2400" b="0" i="1" smtClean="0">
+                              <a:latin typeface="Cambria Math" panose="02040503050406030204" pitchFamily="18" charset="0"/>
+                            </a:rPr>
+                            <m:t>𝑡</m:t>
+                          </m:r>
+                        </m:e>
+                      </m:d>
+                      <m:sSub>
+                        <m:sSubPr>
+                          <m:ctrlPr>
+                            <a:rPr lang="fr-CH" sz="2400" b="0" i="1" smtClean="0">
+                              <a:latin typeface="Cambria Math" panose="02040503050406030204" pitchFamily="18" charset="0"/>
+                            </a:rPr>
+                          </m:ctrlPr>
+                        </m:sSubPr>
+                        <m:e>
+                          <m:r>
+                            <a:rPr lang="fr-CH" sz="2400" b="0" i="1" smtClean="0">
+                              <a:latin typeface="Cambria Math" panose="02040503050406030204" pitchFamily="18" charset="0"/>
+                            </a:rPr>
+                            <m:t>𝑄</m:t>
+                          </m:r>
+                        </m:e>
+                        <m:sub>
+                          <m:r>
+                            <a:rPr lang="fr-CH" sz="2400" b="0" i="1" smtClean="0">
+                              <a:latin typeface="Cambria Math" panose="02040503050406030204" pitchFamily="18" charset="0"/>
+                            </a:rPr>
+                            <m:t>𝑡𝑜𝑡</m:t>
+                          </m:r>
+                        </m:sub>
+                      </m:sSub>
+                    </m:oMath>
+                  </m:oMathPara>
+                </a14:m>
+                <a:endParaRPr lang="fr-CH" sz="2400" b="0" i="1" dirty="0">
+                  <a:latin typeface="Cambria Math" panose="02040503050406030204" pitchFamily="18" charset="0"/>
+                </a:endParaRPr>
+              </a:p>
+              <a:p>
+                <a:pPr/>
+                <a14:m>
+                  <m:oMathPara xmlns:m="http://schemas.openxmlformats.org/officeDocument/2006/math">
+                    <m:oMath>
+                      <m:sSub>
+                        <m:sSubPr>
+                          <m:ctrlPr>
+                            <a:rPr lang="fr-CH" sz="2400" b="0" i="1" smtClean="0">
+                              <a:latin typeface="Cambria Math" panose="02040503050406030204" pitchFamily="18" charset="0"/>
+                            </a:rPr>
+                          </m:ctrlPr>
+                        </m:sSubPr>
+                        <m:e>
+                          <m:r>
+                            <a:rPr lang="fr-CH" sz="2400" b="0" i="1" smtClean="0">
+                              <a:latin typeface="Cambria Math" panose="02040503050406030204" pitchFamily="18" charset="0"/>
+                            </a:rPr>
+                            <m:t>𝐶</m:t>
+                          </m:r>
+                        </m:e>
+                        <m:sub>
+                          <m:r>
+                            <a:rPr lang="fr-CH" sz="2400" b="0" i="1" smtClean="0">
+                              <a:latin typeface="Cambria Math" panose="02040503050406030204" pitchFamily="18" charset="0"/>
+                            </a:rPr>
+                            <m:t>𝑖𝑛</m:t>
+                          </m:r>
+                          <m:r>
+                            <a:rPr lang="fr-CH" sz="2400" b="0" i="1" smtClean="0">
+                              <a:latin typeface="Cambria Math" panose="02040503050406030204" pitchFamily="18" charset="0"/>
+                            </a:rPr>
+                            <m:t>,</m:t>
+                          </m:r>
+                          <m:r>
+                            <a:rPr lang="fr-CH" sz="2400" b="0" i="1" smtClean="0">
+                              <a:latin typeface="Cambria Math" panose="02040503050406030204" pitchFamily="18" charset="0"/>
+                            </a:rPr>
+                            <m:t>𝑒𝑝𝑖</m:t>
+                          </m:r>
+                        </m:sub>
+                      </m:sSub>
+                      <m:r>
+                        <a:rPr lang="fr-CH" sz="2400" b="0" i="0" smtClean="0">
+                          <a:latin typeface="Cambria Math" panose="02040503050406030204" pitchFamily="18" charset="0"/>
+                        </a:rPr>
+                        <m:t>=0</m:t>
+                      </m:r>
+                    </m:oMath>
+                  </m:oMathPara>
+                </a14:m>
+                <a:endParaRPr lang="en-US" sz="2400" dirty="0"/>
+              </a:p>
+            </p:txBody>
+          </p:sp>
+        </mc:Choice>
+        <mc:Fallback>
+          <p:sp>
+            <p:nvSpPr>
+              <p:cNvPr id="16" name="TextBox 15">
+                <a:extLst>
+                  <a:ext uri="{FF2B5EF4-FFF2-40B4-BE49-F238E27FC236}">
+                    <a16:creationId xmlns:a16="http://schemas.microsoft.com/office/drawing/2014/main" id="{F3A1FD79-DDAE-A062-AD9E-1014CAB0C2D2}"/>
+                  </a:ext>
+                </a:extLst>
+              </p:cNvPr>
+              <p:cNvSpPr txBox="1">
+                <a:spLocks noRot="1" noChangeAspect="1" noMove="1" noResize="1" noEditPoints="1" noAdjustHandles="1" noChangeArrowheads="1" noChangeShapeType="1" noTextEdit="1"/>
+              </p:cNvSpPr>
+              <p:nvPr/>
+            </p:nvSpPr>
+            <p:spPr>
+              <a:xfrm>
+                <a:off x="9054246" y="1124777"/>
+                <a:ext cx="3272525" cy="888064"/>
+              </a:xfrm>
+              <a:prstGeom prst="rect">
+                <a:avLst/>
+              </a:prstGeom>
+              <a:blipFill>
+                <a:blip r:embed="rId3"/>
+                <a:stretch>
+                  <a:fillRect b="-5517"/>
+                </a:stretch>
+              </a:blipFill>
+            </p:spPr>
+            <p:txBody>
+              <a:bodyPr/>
+              <a:lstStyle/>
+              <a:p>
+                <a:r>
+                  <a:rPr lang="en-US">
+                    <a:noFill/>
+                  </a:rPr>
+                  <a:t> </a:t>
+                </a:r>
+              </a:p>
+            </p:txBody>
+          </p:sp>
+        </mc:Fallback>
+      </mc:AlternateContent>
+      <mc:AlternateContent xmlns:mc="http://schemas.openxmlformats.org/markup-compatibility/2006">
+        <mc:Choice xmlns:a14="http://schemas.microsoft.com/office/drawing/2010/main" Requires="a14">
+          <p:sp>
+            <p:nvSpPr>
+              <p:cNvPr id="17" name="TextBox 16">
+                <a:extLst>
+                  <a:ext uri="{FF2B5EF4-FFF2-40B4-BE49-F238E27FC236}">
+                    <a16:creationId xmlns:a16="http://schemas.microsoft.com/office/drawing/2014/main" id="{A5F54D80-17BA-665E-117D-8F45AE5850D8}"/>
+                  </a:ext>
+                </a:extLst>
+              </p:cNvPr>
+              <p:cNvSpPr txBox="1"/>
+              <p:nvPr/>
+            </p:nvSpPr>
+            <p:spPr>
+              <a:xfrm>
+                <a:off x="316546" y="575886"/>
+                <a:ext cx="3366654" cy="490199"/>
+              </a:xfrm>
+              <a:prstGeom prst="rect">
+                <a:avLst/>
+              </a:prstGeom>
+              <a:noFill/>
+            </p:spPr>
+            <p:txBody>
+              <a:bodyPr wrap="square" rtlCol="0">
+                <a:spAutoFit/>
+              </a:bodyPr>
+              <a:lstStyle/>
+              <a:p>
+                <a:pPr/>
+                <a14:m>
+                  <m:oMathPara xmlns:m="http://schemas.openxmlformats.org/officeDocument/2006/math">
+                    <m:oMath>
+                      <m:sSub>
+                        <m:sSubPr>
+                          <m:ctrlPr>
+                            <a:rPr lang="fr-CH" sz="2400" b="0" i="1" smtClean="0">
+                              <a:solidFill>
+                                <a:schemeClr val="tx1"/>
+                              </a:solidFill>
+                              <a:latin typeface="Cambria Math" panose="02040503050406030204" pitchFamily="18" charset="0"/>
+                            </a:rPr>
+                          </m:ctrlPr>
+                        </m:sSubPr>
+                        <m:e>
+                          <m:r>
+                            <a:rPr lang="fr-CH" sz="2400" b="0" i="1" smtClean="0">
+                              <a:solidFill>
+                                <a:schemeClr val="tx1"/>
+                              </a:solidFill>
+                              <a:latin typeface="Cambria Math" panose="02040503050406030204" pitchFamily="18" charset="0"/>
+                            </a:rPr>
+                            <m:t>𝑀</m:t>
+                          </m:r>
+                        </m:e>
+                        <m:sub>
+                          <m:r>
+                            <a:rPr lang="fr-CH" sz="2400" b="0" i="1" smtClean="0">
+                              <a:solidFill>
+                                <a:schemeClr val="tx1"/>
+                              </a:solidFill>
+                              <a:latin typeface="Cambria Math" panose="02040503050406030204" pitchFamily="18" charset="0"/>
+                            </a:rPr>
+                            <m:t>𝑜𝑢𝑡</m:t>
+                          </m:r>
+                        </m:sub>
+                      </m:sSub>
+                      <m:d>
+                        <m:dPr>
+                          <m:ctrlPr>
+                            <a:rPr lang="fr-CH" sz="2400" b="0" i="1" smtClean="0">
+                              <a:solidFill>
+                                <a:schemeClr val="tx1"/>
+                              </a:solidFill>
+                              <a:latin typeface="Cambria Math" panose="02040503050406030204" pitchFamily="18" charset="0"/>
+                            </a:rPr>
+                          </m:ctrlPr>
+                        </m:dPr>
+                        <m:e>
+                          <m:r>
+                            <a:rPr lang="fr-CH" sz="2400" b="0" i="1" smtClean="0">
+                              <a:solidFill>
+                                <a:schemeClr val="tx1"/>
+                              </a:solidFill>
+                              <a:latin typeface="Cambria Math" panose="02040503050406030204" pitchFamily="18" charset="0"/>
+                            </a:rPr>
+                            <m:t>𝑡</m:t>
+                          </m:r>
+                        </m:e>
+                      </m:d>
+                      <m:r>
+                        <a:rPr lang="fr-CH" sz="2400" b="0" i="1" smtClean="0">
+                          <a:solidFill>
+                            <a:schemeClr val="tx1"/>
+                          </a:solidFill>
+                          <a:latin typeface="Cambria Math" panose="02040503050406030204" pitchFamily="18" charset="0"/>
+                        </a:rPr>
+                        <m:t>=</m:t>
+                      </m:r>
+                      <m:sSub>
+                        <m:sSubPr>
+                          <m:ctrlPr>
+                            <a:rPr lang="fr-CH" sz="2400" b="0" i="1" smtClean="0">
+                              <a:solidFill>
+                                <a:schemeClr val="tx1"/>
+                              </a:solidFill>
+                              <a:latin typeface="Cambria Math" panose="02040503050406030204" pitchFamily="18" charset="0"/>
+                            </a:rPr>
+                          </m:ctrlPr>
+                        </m:sSubPr>
+                        <m:e>
+                          <m:r>
+                            <a:rPr lang="fr-CH" sz="2400" b="0" i="1" smtClean="0">
+                              <a:solidFill>
+                                <a:schemeClr val="tx1"/>
+                              </a:solidFill>
+                              <a:latin typeface="Cambria Math" panose="02040503050406030204" pitchFamily="18" charset="0"/>
+                            </a:rPr>
+                            <m:t>𝑄</m:t>
+                          </m:r>
+                        </m:e>
+                        <m:sub>
+                          <m:r>
+                            <a:rPr lang="fr-CH" sz="2400" b="0" i="1" smtClean="0">
+                              <a:solidFill>
+                                <a:schemeClr val="tx1"/>
+                              </a:solidFill>
+                              <a:latin typeface="Cambria Math" panose="02040503050406030204" pitchFamily="18" charset="0"/>
+                            </a:rPr>
+                            <m:t>𝑡𝑜𝑡</m:t>
+                          </m:r>
+                        </m:sub>
+                      </m:sSub>
+                      <m:sSub>
+                        <m:sSubPr>
+                          <m:ctrlPr>
+                            <a:rPr lang="fr-CH" sz="2400" b="0" i="1" smtClean="0">
+                              <a:solidFill>
+                                <a:schemeClr val="tx1"/>
+                              </a:solidFill>
+                              <a:latin typeface="Cambria Math" panose="02040503050406030204" pitchFamily="18" charset="0"/>
+                            </a:rPr>
+                          </m:ctrlPr>
+                        </m:sSubPr>
+                        <m:e>
+                          <m:r>
+                            <a:rPr lang="fr-CH" sz="2400" b="0" i="1" smtClean="0">
+                              <a:solidFill>
+                                <a:schemeClr val="tx1"/>
+                              </a:solidFill>
+                              <a:latin typeface="Cambria Math" panose="02040503050406030204" pitchFamily="18" charset="0"/>
+                            </a:rPr>
+                            <m:t>𝐶</m:t>
+                          </m:r>
+                        </m:e>
+                        <m:sub>
+                          <m:r>
+                            <a:rPr lang="fr-CH" sz="2400" b="0" i="1" smtClean="0">
+                              <a:solidFill>
+                                <a:schemeClr val="tx1"/>
+                              </a:solidFill>
+                              <a:latin typeface="Cambria Math" panose="02040503050406030204" pitchFamily="18" charset="0"/>
+                            </a:rPr>
+                            <m:t>𝑒𝑝𝑖</m:t>
+                          </m:r>
+                        </m:sub>
+                      </m:sSub>
+                      <m:r>
+                        <a:rPr lang="fr-CH" sz="2400" b="0" i="1" smtClean="0">
+                          <a:solidFill>
+                            <a:schemeClr val="tx1"/>
+                          </a:solidFill>
+                          <a:latin typeface="Cambria Math" panose="02040503050406030204" pitchFamily="18" charset="0"/>
+                        </a:rPr>
+                        <m:t>(</m:t>
+                      </m:r>
+                      <m:r>
+                        <a:rPr lang="fr-CH" sz="2400" b="0" i="1" smtClean="0">
+                          <a:solidFill>
+                            <a:schemeClr val="tx1"/>
+                          </a:solidFill>
+                          <a:latin typeface="Cambria Math" panose="02040503050406030204" pitchFamily="18" charset="0"/>
+                        </a:rPr>
+                        <m:t>𝑡</m:t>
+                      </m:r>
+                      <m:r>
+                        <a:rPr lang="fr-CH" sz="2400" b="0" i="1" smtClean="0">
+                          <a:solidFill>
+                            <a:schemeClr val="tx1"/>
+                          </a:solidFill>
+                          <a:latin typeface="Cambria Math" panose="02040503050406030204" pitchFamily="18" charset="0"/>
+                        </a:rPr>
+                        <m:t>)</m:t>
+                      </m:r>
+                    </m:oMath>
+                  </m:oMathPara>
+                </a14:m>
+                <a:endParaRPr lang="en-US" sz="2400" i="1" dirty="0">
+                  <a:solidFill>
+                    <a:schemeClr val="tx1"/>
+                  </a:solidFill>
+                </a:endParaRPr>
+              </a:p>
+            </p:txBody>
+          </p:sp>
+        </mc:Choice>
+        <mc:Fallback>
+          <p:sp>
+            <p:nvSpPr>
+              <p:cNvPr id="17" name="TextBox 16">
+                <a:extLst>
+                  <a:ext uri="{FF2B5EF4-FFF2-40B4-BE49-F238E27FC236}">
+                    <a16:creationId xmlns:a16="http://schemas.microsoft.com/office/drawing/2014/main" id="{A5F54D80-17BA-665E-117D-8F45AE5850D8}"/>
+                  </a:ext>
+                </a:extLst>
+              </p:cNvPr>
+              <p:cNvSpPr txBox="1">
+                <a:spLocks noRot="1" noChangeAspect="1" noMove="1" noResize="1" noEditPoints="1" noAdjustHandles="1" noChangeArrowheads="1" noChangeShapeType="1" noTextEdit="1"/>
+              </p:cNvSpPr>
+              <p:nvPr/>
+            </p:nvSpPr>
+            <p:spPr>
+              <a:xfrm>
+                <a:off x="316546" y="575886"/>
+                <a:ext cx="3366654" cy="490199"/>
+              </a:xfrm>
+              <a:prstGeom prst="rect">
+                <a:avLst/>
+              </a:prstGeom>
+              <a:blipFill>
+                <a:blip r:embed="rId4"/>
+                <a:stretch>
+                  <a:fillRect b="-11111"/>
+                </a:stretch>
+              </a:blipFill>
+            </p:spPr>
+            <p:txBody>
+              <a:bodyPr/>
+              <a:lstStyle/>
+              <a:p>
+                <a:r>
+                  <a:rPr lang="en-US">
+                    <a:noFill/>
+                  </a:rPr>
+                  <a:t> </a:t>
+                </a:r>
+              </a:p>
+            </p:txBody>
+          </p:sp>
+        </mc:Fallback>
+      </mc:AlternateContent>
+      <mc:AlternateContent xmlns:mc="http://schemas.openxmlformats.org/markup-compatibility/2006">
+        <mc:Choice xmlns:a14="http://schemas.microsoft.com/office/drawing/2010/main" Requires="a14">
+          <p:sp>
+            <p:nvSpPr>
+              <p:cNvPr id="19" name="TextBox 18">
+                <a:extLst>
+                  <a:ext uri="{FF2B5EF4-FFF2-40B4-BE49-F238E27FC236}">
+                    <a16:creationId xmlns:a16="http://schemas.microsoft.com/office/drawing/2014/main" id="{E282A3AF-9B88-54D6-BD16-59EDD5E15F99}"/>
+                  </a:ext>
+                </a:extLst>
+              </p:cNvPr>
+              <p:cNvSpPr txBox="1"/>
+              <p:nvPr/>
+            </p:nvSpPr>
+            <p:spPr>
+              <a:xfrm>
+                <a:off x="2745088" y="280633"/>
+                <a:ext cx="3665959" cy="494751"/>
+              </a:xfrm>
+              <a:prstGeom prst="rect">
+                <a:avLst/>
+              </a:prstGeom>
+              <a:noFill/>
+            </p:spPr>
+            <p:txBody>
+              <a:bodyPr wrap="square" rtlCol="0">
+                <a:spAutoFit/>
+              </a:bodyPr>
+              <a:lstStyle/>
+              <a:p>
+                <a:pPr algn="ctr"/>
+                <a:r>
+                  <a:rPr lang="fr-CH" sz="2400" b="1" dirty="0"/>
+                  <a:t>Epilimnion </a:t>
+                </a:r>
+                <a14:m>
+                  <m:oMath xmlns:m="http://schemas.openxmlformats.org/officeDocument/2006/math">
+                    <m:sSub>
+                      <m:sSubPr>
+                        <m:ctrlPr>
+                          <a:rPr lang="fr-CH" sz="2400" b="1" i="1" smtClean="0">
+                            <a:latin typeface="Cambria Math" panose="02040503050406030204" pitchFamily="18" charset="0"/>
+                          </a:rPr>
+                        </m:ctrlPr>
+                      </m:sSubPr>
+                      <m:e>
+                        <m:r>
+                          <a:rPr lang="fr-CH" sz="2400" b="1" i="1" smtClean="0">
+                            <a:latin typeface="Cambria Math" panose="02040503050406030204" pitchFamily="18" charset="0"/>
+                          </a:rPr>
+                          <m:t>𝑪</m:t>
+                        </m:r>
+                      </m:e>
+                      <m:sub>
+                        <m:r>
+                          <a:rPr lang="fr-CH" sz="2400" b="1" i="1" smtClean="0">
+                            <a:latin typeface="Cambria Math" panose="02040503050406030204" pitchFamily="18" charset="0"/>
+                          </a:rPr>
+                          <m:t>𝒆𝒑𝒊</m:t>
+                        </m:r>
+                      </m:sub>
+                    </m:sSub>
+                    <m:r>
+                      <a:rPr lang="fr-CH" sz="2400" b="1" i="1" smtClean="0">
+                        <a:latin typeface="Cambria Math" panose="02040503050406030204" pitchFamily="18" charset="0"/>
+                      </a:rPr>
+                      <m:t>(</m:t>
+                    </m:r>
+                    <m:r>
+                      <a:rPr lang="fr-CH" sz="2400" b="1" i="1" smtClean="0">
+                        <a:latin typeface="Cambria Math" panose="02040503050406030204" pitchFamily="18" charset="0"/>
+                      </a:rPr>
+                      <m:t>𝒕</m:t>
+                    </m:r>
+                    <m:r>
+                      <a:rPr lang="fr-CH" sz="2400" b="1" i="1" smtClean="0">
+                        <a:latin typeface="Cambria Math" panose="02040503050406030204" pitchFamily="18" charset="0"/>
+                      </a:rPr>
+                      <m:t>)</m:t>
+                    </m:r>
+                  </m:oMath>
+                </a14:m>
+                <a:endParaRPr lang="en-US" sz="2400" b="1" i="1" dirty="0"/>
+              </a:p>
+            </p:txBody>
+          </p:sp>
+        </mc:Choice>
+        <mc:Fallback>
+          <p:sp>
+            <p:nvSpPr>
+              <p:cNvPr id="19" name="TextBox 18">
+                <a:extLst>
+                  <a:ext uri="{FF2B5EF4-FFF2-40B4-BE49-F238E27FC236}">
+                    <a16:creationId xmlns:a16="http://schemas.microsoft.com/office/drawing/2014/main" id="{E282A3AF-9B88-54D6-BD16-59EDD5E15F99}"/>
+                  </a:ext>
+                </a:extLst>
+              </p:cNvPr>
+              <p:cNvSpPr txBox="1">
+                <a:spLocks noRot="1" noChangeAspect="1" noMove="1" noResize="1" noEditPoints="1" noAdjustHandles="1" noChangeArrowheads="1" noChangeShapeType="1" noTextEdit="1"/>
+              </p:cNvSpPr>
+              <p:nvPr/>
+            </p:nvSpPr>
+            <p:spPr>
+              <a:xfrm>
+                <a:off x="2745088" y="280633"/>
+                <a:ext cx="3665959" cy="494751"/>
+              </a:xfrm>
+              <a:prstGeom prst="rect">
+                <a:avLst/>
+              </a:prstGeom>
+              <a:blipFill>
+                <a:blip r:embed="rId5"/>
+                <a:stretch>
+                  <a:fillRect t="-8642" b="-22222"/>
+                </a:stretch>
+              </a:blipFill>
+            </p:spPr>
+            <p:txBody>
+              <a:bodyPr/>
+              <a:lstStyle/>
+              <a:p>
+                <a:r>
+                  <a:rPr lang="en-US">
+                    <a:noFill/>
+                  </a:rPr>
+                  <a:t> </a:t>
+                </a:r>
+              </a:p>
+            </p:txBody>
+          </p:sp>
+        </mc:Fallback>
+      </mc:AlternateContent>
+      <mc:AlternateContent xmlns:mc="http://schemas.openxmlformats.org/markup-compatibility/2006">
+        <mc:Choice xmlns:a14="http://schemas.microsoft.com/office/drawing/2010/main" Requires="a14">
+          <p:sp>
+            <p:nvSpPr>
+              <p:cNvPr id="20" name="TextBox 19">
+                <a:extLst>
+                  <a:ext uri="{FF2B5EF4-FFF2-40B4-BE49-F238E27FC236}">
+                    <a16:creationId xmlns:a16="http://schemas.microsoft.com/office/drawing/2014/main" id="{F5611A7D-250F-BD09-B86B-67A2097931B0}"/>
+                  </a:ext>
+                </a:extLst>
+              </p:cNvPr>
+              <p:cNvSpPr txBox="1"/>
+              <p:nvPr/>
+            </p:nvSpPr>
+            <p:spPr>
+              <a:xfrm>
+                <a:off x="2434142" y="5393851"/>
+                <a:ext cx="4287851" cy="495520"/>
+              </a:xfrm>
+              <a:prstGeom prst="rect">
+                <a:avLst/>
+              </a:prstGeom>
+              <a:noFill/>
+            </p:spPr>
+            <p:txBody>
+              <a:bodyPr wrap="square" rtlCol="0">
+                <a:spAutoFit/>
+              </a:bodyPr>
+              <a:lstStyle/>
+              <a:p>
+                <a:pPr algn="ctr"/>
+                <a:r>
+                  <a:rPr lang="fr-CH" sz="2400" b="1" dirty="0"/>
+                  <a:t>Hypolimnion </a:t>
+                </a:r>
+                <a14:m>
+                  <m:oMath xmlns:m="http://schemas.openxmlformats.org/officeDocument/2006/math">
+                    <m:sSub>
+                      <m:sSubPr>
+                        <m:ctrlPr>
+                          <a:rPr lang="fr-CH" sz="2400" b="1" i="1" smtClean="0">
+                            <a:latin typeface="Cambria Math" panose="02040503050406030204" pitchFamily="18" charset="0"/>
+                          </a:rPr>
+                        </m:ctrlPr>
+                      </m:sSubPr>
+                      <m:e>
+                        <m:r>
+                          <a:rPr lang="fr-CH" sz="2400" b="1" i="1" smtClean="0">
+                            <a:latin typeface="Cambria Math" panose="02040503050406030204" pitchFamily="18" charset="0"/>
+                          </a:rPr>
+                          <m:t>𝑪</m:t>
+                        </m:r>
+                      </m:e>
+                      <m:sub>
+                        <m:r>
+                          <a:rPr lang="fr-CH" sz="2400" b="1" i="1" smtClean="0">
+                            <a:latin typeface="Cambria Math" panose="02040503050406030204" pitchFamily="18" charset="0"/>
+                          </a:rPr>
+                          <m:t>𝒉𝒚𝒑𝒐</m:t>
+                        </m:r>
+                      </m:sub>
+                    </m:sSub>
+                    <m:r>
+                      <a:rPr lang="fr-CH" sz="2400" b="1" i="1" smtClean="0">
+                        <a:latin typeface="Cambria Math" panose="02040503050406030204" pitchFamily="18" charset="0"/>
+                      </a:rPr>
+                      <m:t>(</m:t>
+                    </m:r>
+                    <m:r>
+                      <a:rPr lang="fr-CH" sz="2400" b="1" i="1" smtClean="0">
+                        <a:latin typeface="Cambria Math" panose="02040503050406030204" pitchFamily="18" charset="0"/>
+                      </a:rPr>
+                      <m:t>𝒕</m:t>
+                    </m:r>
+                    <m:r>
+                      <a:rPr lang="fr-CH" sz="2400" b="1" i="1" smtClean="0">
+                        <a:latin typeface="Cambria Math" panose="02040503050406030204" pitchFamily="18" charset="0"/>
+                      </a:rPr>
+                      <m:t>)</m:t>
+                    </m:r>
+                  </m:oMath>
+                </a14:m>
+                <a:endParaRPr lang="en-US" sz="2400" b="1" dirty="0"/>
+              </a:p>
+            </p:txBody>
+          </p:sp>
+        </mc:Choice>
+        <mc:Fallback>
+          <p:sp>
+            <p:nvSpPr>
+              <p:cNvPr id="20" name="TextBox 19">
+                <a:extLst>
+                  <a:ext uri="{FF2B5EF4-FFF2-40B4-BE49-F238E27FC236}">
+                    <a16:creationId xmlns:a16="http://schemas.microsoft.com/office/drawing/2014/main" id="{F5611A7D-250F-BD09-B86B-67A2097931B0}"/>
+                  </a:ext>
+                </a:extLst>
+              </p:cNvPr>
+              <p:cNvSpPr txBox="1">
+                <a:spLocks noRot="1" noChangeAspect="1" noMove="1" noResize="1" noEditPoints="1" noAdjustHandles="1" noChangeArrowheads="1" noChangeShapeType="1" noTextEdit="1"/>
+              </p:cNvSpPr>
+              <p:nvPr/>
+            </p:nvSpPr>
+            <p:spPr>
+              <a:xfrm>
+                <a:off x="2434142" y="5393851"/>
+                <a:ext cx="4287851" cy="495520"/>
+              </a:xfrm>
+              <a:prstGeom prst="rect">
+                <a:avLst/>
+              </a:prstGeom>
+              <a:blipFill>
+                <a:blip r:embed="rId6"/>
+                <a:stretch>
+                  <a:fillRect t="-8642" b="-22222"/>
+                </a:stretch>
+              </a:blipFill>
+            </p:spPr>
+            <p:txBody>
+              <a:bodyPr/>
+              <a:lstStyle/>
+              <a:p>
+                <a:r>
+                  <a:rPr lang="en-US">
+                    <a:noFill/>
+                  </a:rPr>
+                  <a:t> </a:t>
+                </a:r>
+              </a:p>
+            </p:txBody>
+          </p:sp>
+        </mc:Fallback>
+      </mc:AlternateContent>
+      <p:cxnSp>
+        <p:nvCxnSpPr>
+          <p:cNvPr id="8" name="Straight Arrow Connector 7">
+            <a:extLst>
+              <a:ext uri="{FF2B5EF4-FFF2-40B4-BE49-F238E27FC236}">
+                <a16:creationId xmlns:a16="http://schemas.microsoft.com/office/drawing/2014/main" id="{8C04AFBF-EE65-0516-A206-72E28D6587BA}"/>
+              </a:ext>
+            </a:extLst>
+          </p:cNvPr>
+          <p:cNvCxnSpPr>
+            <a:cxnSpLocks/>
+          </p:cNvCxnSpPr>
+          <p:nvPr/>
+        </p:nvCxnSpPr>
+        <p:spPr>
+          <a:xfrm>
+            <a:off x="7795950" y="208225"/>
+            <a:ext cx="0" cy="3402723"/>
+          </a:xfrm>
+          <a:prstGeom prst="straightConnector1">
+            <a:avLst/>
+          </a:prstGeom>
+          <a:ln w="38100">
+            <a:headEnd type="triangle"/>
+            <a:tailEnd type="triangle"/>
+          </a:ln>
+        </p:spPr>
+        <p:style>
+          <a:lnRef idx="1">
+            <a:schemeClr val="dk1"/>
+          </a:lnRef>
+          <a:fillRef idx="0">
+            <a:schemeClr val="dk1"/>
+          </a:fillRef>
+          <a:effectRef idx="0">
+            <a:schemeClr val="dk1"/>
+          </a:effectRef>
+          <a:fontRef idx="minor">
+            <a:schemeClr val="tx1"/>
+          </a:fontRef>
+        </p:style>
+      </p:cxnSp>
+      <mc:AlternateContent xmlns:mc="http://schemas.openxmlformats.org/markup-compatibility/2006">
+        <mc:Choice xmlns:a14="http://schemas.microsoft.com/office/drawing/2010/main" Requires="a14">
+          <p:sp>
+            <p:nvSpPr>
+              <p:cNvPr id="22" name="TextBox 21">
+                <a:extLst>
+                  <a:ext uri="{FF2B5EF4-FFF2-40B4-BE49-F238E27FC236}">
+                    <a16:creationId xmlns:a16="http://schemas.microsoft.com/office/drawing/2014/main" id="{4CF577EA-AB38-374D-2A3A-0CC9CCE90789}"/>
+                  </a:ext>
+                </a:extLst>
+              </p:cNvPr>
+              <p:cNvSpPr txBox="1"/>
+              <p:nvPr/>
+            </p:nvSpPr>
+            <p:spPr>
+              <a:xfrm rot="16200000">
+                <a:off x="5827109" y="1659135"/>
+                <a:ext cx="3272527" cy="490199"/>
+              </a:xfrm>
+              <a:prstGeom prst="rect">
+                <a:avLst/>
+              </a:prstGeom>
+              <a:noFill/>
+            </p:spPr>
+            <p:txBody>
+              <a:bodyPr wrap="square" rtlCol="0">
+                <a:spAutoFit/>
+              </a:bodyPr>
+              <a:lstStyle/>
+              <a:p>
+                <a:pPr/>
+                <a14:m>
+                  <m:oMathPara xmlns:m="http://schemas.openxmlformats.org/officeDocument/2006/math">
+                    <m:oMath>
+                      <m:sSub>
+                        <m:sSubPr>
+                          <m:ctrlPr>
+                            <a:rPr lang="fr-CH" sz="2400" b="0" i="1" smtClean="0">
+                              <a:latin typeface="Cambria Math" panose="02040503050406030204" pitchFamily="18" charset="0"/>
+                            </a:rPr>
+                          </m:ctrlPr>
+                        </m:sSubPr>
+                        <m:e>
+                          <m:r>
+                            <a:rPr lang="fr-CH" sz="2400" b="0" i="1" smtClean="0">
+                              <a:latin typeface="Cambria Math" panose="02040503050406030204" pitchFamily="18" charset="0"/>
+                            </a:rPr>
+                            <m:t>ℎ</m:t>
+                          </m:r>
+                        </m:e>
+                        <m:sub>
+                          <m:r>
+                            <a:rPr lang="fr-CH" sz="2400" b="0" i="1" smtClean="0">
+                              <a:latin typeface="Cambria Math" panose="02040503050406030204" pitchFamily="18" charset="0"/>
+                            </a:rPr>
+                            <m:t>𝑒𝑝𝑖</m:t>
+                          </m:r>
+                        </m:sub>
+                      </m:sSub>
+                      <m:r>
+                        <a:rPr lang="fr-CH" sz="2400" b="0" i="1" smtClean="0">
+                          <a:latin typeface="Cambria Math" panose="02040503050406030204" pitchFamily="18" charset="0"/>
+                        </a:rPr>
+                        <m:t>(</m:t>
+                      </m:r>
+                      <m:r>
+                        <a:rPr lang="fr-CH" sz="2400" b="0" i="1" smtClean="0">
+                          <a:latin typeface="Cambria Math" panose="02040503050406030204" pitchFamily="18" charset="0"/>
+                        </a:rPr>
+                        <m:t>𝑡</m:t>
+                      </m:r>
+                      <m:r>
+                        <a:rPr lang="fr-CH" sz="2400" b="0" i="1" smtClean="0">
+                          <a:latin typeface="Cambria Math" panose="02040503050406030204" pitchFamily="18" charset="0"/>
+                        </a:rPr>
+                        <m:t>)</m:t>
+                      </m:r>
+                    </m:oMath>
+                  </m:oMathPara>
+                </a14:m>
+                <a:endParaRPr lang="en-US" sz="2400" dirty="0"/>
+              </a:p>
+            </p:txBody>
+          </p:sp>
+        </mc:Choice>
+        <mc:Fallback>
+          <p:sp>
+            <p:nvSpPr>
+              <p:cNvPr id="22" name="TextBox 21">
+                <a:extLst>
+                  <a:ext uri="{FF2B5EF4-FFF2-40B4-BE49-F238E27FC236}">
+                    <a16:creationId xmlns:a16="http://schemas.microsoft.com/office/drawing/2014/main" id="{4CF577EA-AB38-374D-2A3A-0CC9CCE90789}"/>
+                  </a:ext>
+                </a:extLst>
+              </p:cNvPr>
+              <p:cNvSpPr txBox="1">
+                <a:spLocks noRot="1" noChangeAspect="1" noMove="1" noResize="1" noEditPoints="1" noAdjustHandles="1" noChangeArrowheads="1" noChangeShapeType="1" noTextEdit="1"/>
+              </p:cNvSpPr>
+              <p:nvPr/>
+            </p:nvSpPr>
+            <p:spPr>
+              <a:xfrm rot="16200000">
+                <a:off x="5827109" y="1659135"/>
+                <a:ext cx="3272527" cy="490199"/>
+              </a:xfrm>
+              <a:prstGeom prst="rect">
+                <a:avLst/>
+              </a:prstGeom>
+              <a:blipFill>
+                <a:blip r:embed="rId7"/>
+                <a:stretch>
+                  <a:fillRect r="-11111"/>
+                </a:stretch>
+              </a:blipFill>
+            </p:spPr>
+            <p:txBody>
+              <a:bodyPr/>
+              <a:lstStyle/>
+              <a:p>
+                <a:r>
+                  <a:rPr lang="en-US">
+                    <a:noFill/>
+                  </a:rPr>
+                  <a:t> </a:t>
+                </a:r>
+              </a:p>
+            </p:txBody>
+          </p:sp>
+        </mc:Fallback>
+      </mc:AlternateContent>
+      <p:sp>
+        <p:nvSpPr>
+          <p:cNvPr id="26" name="Arrow: Left 25">
+            <a:extLst>
+              <a:ext uri="{FF2B5EF4-FFF2-40B4-BE49-F238E27FC236}">
+                <a16:creationId xmlns:a16="http://schemas.microsoft.com/office/drawing/2014/main" id="{33E69808-3E0E-AC64-A8AE-F8F59AD439B8}"/>
+              </a:ext>
+            </a:extLst>
+          </p:cNvPr>
+          <p:cNvSpPr/>
+          <p:nvPr/>
+        </p:nvSpPr>
+        <p:spPr>
+          <a:xfrm>
+            <a:off x="8015271" y="1353497"/>
+            <a:ext cx="1341844" cy="581822"/>
+          </a:xfrm>
+          <a:prstGeom prst="leftArrow">
+            <a:avLst/>
+          </a:prstGeom>
+        </p:spPr>
+        <p:style>
+          <a:lnRef idx="2">
+            <a:schemeClr val="dk1">
+              <a:shade val="15000"/>
+            </a:schemeClr>
+          </a:lnRef>
+          <a:fillRef idx="1">
+            <a:schemeClr val="dk1"/>
+          </a:fillRef>
+          <a:effectRef idx="0">
+            <a:schemeClr val="dk1"/>
+          </a:effectRef>
+          <a:fontRef idx="minor">
+            <a:schemeClr val="lt1"/>
+          </a:fontRef>
+        </p:style>
+        <p:txBody>
+          <a:bodyPr rtlCol="0" anchor="ctr"/>
+          <a:lstStyle/>
+          <a:p>
+            <a:pPr algn="ctr"/>
+            <a:endParaRPr lang="en-US" sz="2400"/>
+          </a:p>
+        </p:txBody>
+      </p:sp>
+      <mc:AlternateContent xmlns:mc="http://schemas.openxmlformats.org/markup-compatibility/2006">
+        <mc:Choice xmlns:a14="http://schemas.microsoft.com/office/drawing/2010/main" Requires="a14">
+          <p:sp>
+            <p:nvSpPr>
+              <p:cNvPr id="28" name="TextBox 27">
+                <a:extLst>
+                  <a:ext uri="{FF2B5EF4-FFF2-40B4-BE49-F238E27FC236}">
+                    <a16:creationId xmlns:a16="http://schemas.microsoft.com/office/drawing/2014/main" id="{15FB751E-25C4-1762-F822-721B1D44BB95}"/>
+                  </a:ext>
+                </a:extLst>
+              </p:cNvPr>
+              <p:cNvSpPr txBox="1"/>
+              <p:nvPr/>
+            </p:nvSpPr>
+            <p:spPr>
+              <a:xfrm>
+                <a:off x="8321951" y="4798010"/>
+                <a:ext cx="4307799" cy="915764"/>
+              </a:xfrm>
+              <a:prstGeom prst="rect">
+                <a:avLst/>
+              </a:prstGeom>
+              <a:noFill/>
+            </p:spPr>
+            <p:txBody>
+              <a:bodyPr wrap="square" rtlCol="0">
+                <a:spAutoFit/>
+              </a:bodyPr>
+              <a:lstStyle/>
+              <a:p>
+                <a:pPr/>
+                <a14:m>
+                  <m:oMathPara xmlns:m="http://schemas.openxmlformats.org/officeDocument/2006/math">
+                    <m:oMath>
+                      <m:sSub>
+                        <m:sSubPr>
+                          <m:ctrlPr>
+                            <a:rPr lang="fr-CH" sz="2400" b="0" i="1" smtClean="0">
+                              <a:latin typeface="Cambria Math" panose="02040503050406030204" pitchFamily="18" charset="0"/>
+                            </a:rPr>
+                          </m:ctrlPr>
+                        </m:sSubPr>
+                        <m:e>
+                          <m:r>
+                            <a:rPr lang="fr-CH" sz="2400" b="0" i="1" smtClean="0">
+                              <a:latin typeface="Cambria Math" panose="02040503050406030204" pitchFamily="18" charset="0"/>
+                            </a:rPr>
+                            <m:t>𝑄</m:t>
+                          </m:r>
+                        </m:e>
+                        <m:sub>
+                          <m:r>
+                            <a:rPr lang="fr-CH" sz="2400" b="0" i="1" smtClean="0">
+                              <a:latin typeface="Cambria Math" panose="02040503050406030204" pitchFamily="18" charset="0"/>
+                            </a:rPr>
+                            <m:t>ℎ𝑦𝑝𝑜</m:t>
+                          </m:r>
+                        </m:sub>
+                      </m:sSub>
+                      <m:d>
+                        <m:dPr>
+                          <m:ctrlPr>
+                            <a:rPr lang="fr-CH" sz="2400" b="0" i="1" smtClean="0">
+                              <a:latin typeface="Cambria Math" panose="02040503050406030204" pitchFamily="18" charset="0"/>
+                            </a:rPr>
+                          </m:ctrlPr>
+                        </m:dPr>
+                        <m:e>
+                          <m:r>
+                            <a:rPr lang="fr-CH" sz="2400" b="0" i="1" smtClean="0">
+                              <a:latin typeface="Cambria Math" panose="02040503050406030204" pitchFamily="18" charset="0"/>
+                            </a:rPr>
+                            <m:t>𝑡</m:t>
+                          </m:r>
+                        </m:e>
+                      </m:d>
+                      <m:r>
+                        <a:rPr lang="fr-CH" sz="2400" b="0" i="1" smtClean="0">
+                          <a:latin typeface="Cambria Math" panose="02040503050406030204" pitchFamily="18" charset="0"/>
+                        </a:rPr>
+                        <m:t>=</m:t>
+                      </m:r>
+                      <m:d>
+                        <m:dPr>
+                          <m:ctrlPr>
+                            <a:rPr lang="fr-CH" sz="2400" b="0" i="1" smtClean="0">
+                              <a:latin typeface="Cambria Math" panose="02040503050406030204" pitchFamily="18" charset="0"/>
+                            </a:rPr>
+                          </m:ctrlPr>
+                        </m:dPr>
+                        <m:e>
+                          <m:r>
+                            <a:rPr lang="fr-CH" sz="2400" b="0" i="1" smtClean="0">
+                              <a:latin typeface="Cambria Math" panose="02040503050406030204" pitchFamily="18" charset="0"/>
+                            </a:rPr>
+                            <m:t>1−</m:t>
+                          </m:r>
+                          <m:r>
+                            <a:rPr lang="fr-CH" sz="2400" b="0" i="1" smtClean="0">
+                              <a:latin typeface="Cambria Math" panose="02040503050406030204" pitchFamily="18" charset="0"/>
+                            </a:rPr>
+                            <m:t>𝛼</m:t>
+                          </m:r>
+                          <m:d>
+                            <m:dPr>
+                              <m:ctrlPr>
+                                <a:rPr lang="fr-CH" sz="2400" b="0" i="1" smtClean="0">
+                                  <a:latin typeface="Cambria Math" panose="02040503050406030204" pitchFamily="18" charset="0"/>
+                                </a:rPr>
+                              </m:ctrlPr>
+                            </m:dPr>
+                            <m:e>
+                              <m:r>
+                                <a:rPr lang="fr-CH" sz="2400" b="0" i="1" smtClean="0">
+                                  <a:latin typeface="Cambria Math" panose="02040503050406030204" pitchFamily="18" charset="0"/>
+                                </a:rPr>
+                                <m:t>𝑡</m:t>
+                              </m:r>
+                            </m:e>
+                          </m:d>
+                        </m:e>
+                      </m:d>
+                      <m:sSub>
+                        <m:sSubPr>
+                          <m:ctrlPr>
+                            <a:rPr lang="fr-CH" sz="2400" b="0" i="1" smtClean="0">
+                              <a:latin typeface="Cambria Math" panose="02040503050406030204" pitchFamily="18" charset="0"/>
+                            </a:rPr>
+                          </m:ctrlPr>
+                        </m:sSubPr>
+                        <m:e>
+                          <m:r>
+                            <a:rPr lang="fr-CH" sz="2400" b="0" i="1" smtClean="0">
+                              <a:latin typeface="Cambria Math" panose="02040503050406030204" pitchFamily="18" charset="0"/>
+                            </a:rPr>
+                            <m:t>𝑄</m:t>
+                          </m:r>
+                        </m:e>
+                        <m:sub>
+                          <m:r>
+                            <a:rPr lang="fr-CH" sz="2400" b="0" i="1" smtClean="0">
+                              <a:latin typeface="Cambria Math" panose="02040503050406030204" pitchFamily="18" charset="0"/>
+                            </a:rPr>
+                            <m:t>𝑡𝑜𝑡</m:t>
+                          </m:r>
+                        </m:sub>
+                      </m:sSub>
+                    </m:oMath>
+                  </m:oMathPara>
+                </a14:m>
+                <a:endParaRPr lang="fr-CH" sz="2400" b="0" i="1" dirty="0">
+                  <a:latin typeface="Cambria Math" panose="02040503050406030204" pitchFamily="18" charset="0"/>
+                </a:endParaRPr>
+              </a:p>
+              <a:p>
+                <a:pPr/>
+                <a14:m>
+                  <m:oMathPara xmlns:m="http://schemas.openxmlformats.org/officeDocument/2006/math">
+                    <m:oMath>
+                      <m:r>
+                        <a:rPr lang="fr-CH" sz="2400" b="0" i="1" smtClean="0">
+                          <a:latin typeface="Cambria Math" panose="02040503050406030204" pitchFamily="18" charset="0"/>
+                        </a:rPr>
+                        <m:t> </m:t>
+                      </m:r>
+                      <m:sSub>
+                        <m:sSubPr>
+                          <m:ctrlPr>
+                            <a:rPr lang="fr-CH" sz="2400" b="0" i="1" smtClean="0">
+                              <a:latin typeface="Cambria Math" panose="02040503050406030204" pitchFamily="18" charset="0"/>
+                            </a:rPr>
+                          </m:ctrlPr>
+                        </m:sSubPr>
+                        <m:e>
+                          <m:r>
+                            <a:rPr lang="fr-CH" sz="2400" b="0" i="1" smtClean="0">
+                              <a:latin typeface="Cambria Math" panose="02040503050406030204" pitchFamily="18" charset="0"/>
+                            </a:rPr>
+                            <m:t>𝐶</m:t>
+                          </m:r>
+                        </m:e>
+                        <m:sub>
+                          <m:r>
+                            <a:rPr lang="fr-CH" sz="2400" b="0" i="1" smtClean="0">
+                              <a:latin typeface="Cambria Math" panose="02040503050406030204" pitchFamily="18" charset="0"/>
+                            </a:rPr>
+                            <m:t>𝑖𝑛</m:t>
+                          </m:r>
+                          <m:r>
+                            <a:rPr lang="fr-CH" sz="2400" b="0" i="1" smtClean="0">
+                              <a:latin typeface="Cambria Math" panose="02040503050406030204" pitchFamily="18" charset="0"/>
+                            </a:rPr>
+                            <m:t>,</m:t>
+                          </m:r>
+                          <m:r>
+                            <a:rPr lang="fr-CH" sz="2400" b="0" i="1" smtClean="0">
+                              <a:latin typeface="Cambria Math" panose="02040503050406030204" pitchFamily="18" charset="0"/>
+                            </a:rPr>
+                            <m:t>ℎ𝑦𝑝𝑜</m:t>
+                          </m:r>
+                        </m:sub>
+                      </m:sSub>
+                      <m:r>
+                        <a:rPr lang="fr-CH" sz="2400" b="0" i="0" smtClean="0">
+                          <a:latin typeface="Cambria Math" panose="02040503050406030204" pitchFamily="18" charset="0"/>
+                        </a:rPr>
+                        <m:t>=0</m:t>
+                      </m:r>
+                    </m:oMath>
+                  </m:oMathPara>
+                </a14:m>
+                <a:endParaRPr lang="en-US" sz="2400" dirty="0"/>
+              </a:p>
+            </p:txBody>
+          </p:sp>
+        </mc:Choice>
+        <mc:Fallback>
+          <p:sp>
+            <p:nvSpPr>
+              <p:cNvPr id="28" name="TextBox 27">
+                <a:extLst>
+                  <a:ext uri="{FF2B5EF4-FFF2-40B4-BE49-F238E27FC236}">
+                    <a16:creationId xmlns:a16="http://schemas.microsoft.com/office/drawing/2014/main" id="{15FB751E-25C4-1762-F822-721B1D44BB95}"/>
+                  </a:ext>
+                </a:extLst>
+              </p:cNvPr>
+              <p:cNvSpPr txBox="1">
+                <a:spLocks noRot="1" noChangeAspect="1" noMove="1" noResize="1" noEditPoints="1" noAdjustHandles="1" noChangeArrowheads="1" noChangeShapeType="1" noTextEdit="1"/>
+              </p:cNvSpPr>
+              <p:nvPr/>
+            </p:nvSpPr>
+            <p:spPr>
+              <a:xfrm>
+                <a:off x="8321951" y="4798010"/>
+                <a:ext cx="4307799" cy="915764"/>
+              </a:xfrm>
+              <a:prstGeom prst="rect">
+                <a:avLst/>
+              </a:prstGeom>
+              <a:blipFill>
+                <a:blip r:embed="rId8"/>
+                <a:stretch>
+                  <a:fillRect b="-5333"/>
+                </a:stretch>
+              </a:blipFill>
+            </p:spPr>
+            <p:txBody>
+              <a:bodyPr/>
+              <a:lstStyle/>
+              <a:p>
+                <a:r>
+                  <a:rPr lang="en-US">
+                    <a:noFill/>
+                  </a:rPr>
+                  <a:t> </a:t>
+                </a:r>
+              </a:p>
+            </p:txBody>
+          </p:sp>
+        </mc:Fallback>
+      </mc:AlternateContent>
+      <p:sp>
+        <p:nvSpPr>
+          <p:cNvPr id="30" name="Arrow: Left 29">
+            <a:extLst>
+              <a:ext uri="{FF2B5EF4-FFF2-40B4-BE49-F238E27FC236}">
+                <a16:creationId xmlns:a16="http://schemas.microsoft.com/office/drawing/2014/main" id="{8C45ED13-6F7F-AF31-B868-01F24F67C44A}"/>
+              </a:ext>
+            </a:extLst>
+          </p:cNvPr>
+          <p:cNvSpPr/>
+          <p:nvPr/>
+        </p:nvSpPr>
+        <p:spPr>
+          <a:xfrm rot="5400000">
+            <a:off x="1088118" y="3463721"/>
+            <a:ext cx="1283287" cy="581822"/>
+          </a:xfrm>
+          <a:prstGeom prst="leftArrow">
+            <a:avLst/>
+          </a:prstGeom>
+          <a:solidFill>
+            <a:schemeClr val="accent2"/>
+          </a:solidFill>
+          <a:ln>
+            <a:solidFill>
+              <a:schemeClr val="tx1"/>
+            </a:solidFill>
+          </a:ln>
+        </p:spPr>
+        <p:style>
+          <a:lnRef idx="2">
+            <a:schemeClr val="dk1">
+              <a:shade val="15000"/>
+            </a:schemeClr>
+          </a:lnRef>
+          <a:fillRef idx="1">
+            <a:schemeClr val="dk1"/>
+          </a:fillRef>
+          <a:effectRef idx="0">
+            <a:schemeClr val="dk1"/>
+          </a:effectRef>
+          <a:fontRef idx="minor">
+            <a:schemeClr val="lt1"/>
+          </a:fontRef>
+        </p:style>
+        <p:txBody>
+          <a:bodyPr rtlCol="0" anchor="ctr"/>
+          <a:lstStyle/>
+          <a:p>
+            <a:pPr algn="ctr"/>
+            <a:endParaRPr lang="en-US" sz="2400"/>
+          </a:p>
+        </p:txBody>
+      </p:sp>
+      <mc:AlternateContent xmlns:mc="http://schemas.openxmlformats.org/markup-compatibility/2006">
+        <mc:Choice xmlns:a14="http://schemas.microsoft.com/office/drawing/2010/main" Requires="a14">
+          <p:sp>
+            <p:nvSpPr>
+              <p:cNvPr id="32" name="TextBox 31">
+                <a:extLst>
+                  <a:ext uri="{FF2B5EF4-FFF2-40B4-BE49-F238E27FC236}">
+                    <a16:creationId xmlns:a16="http://schemas.microsoft.com/office/drawing/2014/main" id="{18E192B0-33BE-6A75-DB22-69392121A4F8}"/>
+                  </a:ext>
+                </a:extLst>
+              </p:cNvPr>
+              <p:cNvSpPr txBox="1"/>
+              <p:nvPr/>
+            </p:nvSpPr>
+            <p:spPr>
+              <a:xfrm>
+                <a:off x="316546" y="4392811"/>
+                <a:ext cx="4307799" cy="491288"/>
+              </a:xfrm>
+              <a:prstGeom prst="rect">
+                <a:avLst/>
+              </a:prstGeom>
+              <a:noFill/>
+            </p:spPr>
+            <p:txBody>
+              <a:bodyPr wrap="square" rtlCol="0">
+                <a:spAutoFit/>
+              </a:bodyPr>
+              <a:lstStyle/>
+              <a:p>
+                <a:pPr/>
+                <a14:m>
+                  <m:oMathPara xmlns:m="http://schemas.openxmlformats.org/officeDocument/2006/math">
+                    <m:oMath>
+                      <m:sSub>
+                        <m:sSubPr>
+                          <m:ctrlPr>
+                            <a:rPr lang="fr-CH" sz="2400" b="0" i="1" smtClean="0">
+                              <a:solidFill>
+                                <a:schemeClr val="accent2"/>
+                              </a:solidFill>
+                              <a:latin typeface="Cambria Math" panose="02040503050406030204" pitchFamily="18" charset="0"/>
+                            </a:rPr>
+                          </m:ctrlPr>
+                        </m:sSubPr>
+                        <m:e>
+                          <m:sSub>
+                            <m:sSubPr>
+                              <m:ctrlPr>
+                                <a:rPr lang="fr-CH" sz="2400" b="0" i="1" smtClean="0">
+                                  <a:solidFill>
+                                    <a:schemeClr val="accent2"/>
+                                  </a:solidFill>
+                                  <a:latin typeface="Cambria Math" panose="02040503050406030204" pitchFamily="18" charset="0"/>
+                                </a:rPr>
+                              </m:ctrlPr>
+                            </m:sSubPr>
+                            <m:e>
+                              <m:r>
+                                <a:rPr lang="fr-CH" sz="2400" b="0" i="1" smtClean="0">
+                                  <a:solidFill>
+                                    <a:schemeClr val="accent2"/>
+                                  </a:solidFill>
+                                  <a:latin typeface="Cambria Math" panose="02040503050406030204" pitchFamily="18" charset="0"/>
+                                </a:rPr>
+                                <m:t>𝑀</m:t>
+                              </m:r>
+                            </m:e>
+                            <m:sub>
+                              <m:r>
+                                <a:rPr lang="fr-CH" sz="2400" b="0" i="1" smtClean="0">
+                                  <a:solidFill>
+                                    <a:schemeClr val="accent2"/>
+                                  </a:solidFill>
+                                  <a:latin typeface="Cambria Math" panose="02040503050406030204" pitchFamily="18" charset="0"/>
+                                </a:rPr>
+                                <m:t>𝑑𝑖𝑓𝑓</m:t>
+                              </m:r>
+                            </m:sub>
+                          </m:sSub>
+                          <m:d>
+                            <m:dPr>
+                              <m:ctrlPr>
+                                <a:rPr lang="fr-CH" sz="2400" b="0" i="1" smtClean="0">
+                                  <a:solidFill>
+                                    <a:schemeClr val="accent2"/>
+                                  </a:solidFill>
+                                  <a:latin typeface="Cambria Math" panose="02040503050406030204" pitchFamily="18" charset="0"/>
+                                </a:rPr>
+                              </m:ctrlPr>
+                            </m:dPr>
+                            <m:e>
+                              <m:r>
+                                <a:rPr lang="fr-CH" sz="2400" b="0" i="1" smtClean="0">
+                                  <a:solidFill>
+                                    <a:schemeClr val="accent2"/>
+                                  </a:solidFill>
+                                  <a:latin typeface="Cambria Math" panose="02040503050406030204" pitchFamily="18" charset="0"/>
+                                </a:rPr>
+                                <m:t>𝑡</m:t>
+                              </m:r>
+                            </m:e>
+                          </m:d>
+                          <m:r>
+                            <a:rPr lang="fr-CH" sz="2400" b="0" i="1" smtClean="0">
+                              <a:solidFill>
+                                <a:schemeClr val="accent2"/>
+                              </a:solidFill>
+                              <a:latin typeface="Cambria Math" panose="02040503050406030204" pitchFamily="18" charset="0"/>
+                            </a:rPr>
+                            <m:t>=</m:t>
+                          </m:r>
+                          <m:r>
+                            <a:rPr lang="fr-CH" sz="2400" b="0" i="1" smtClean="0">
+                              <a:solidFill>
+                                <a:schemeClr val="accent2"/>
+                              </a:solidFill>
+                              <a:latin typeface="Cambria Math" panose="02040503050406030204" pitchFamily="18" charset="0"/>
+                            </a:rPr>
+                            <m:t>𝑄</m:t>
+                          </m:r>
+                        </m:e>
+                        <m:sub>
+                          <m:r>
+                            <a:rPr lang="fr-CH" sz="2400" b="0" i="1" smtClean="0">
+                              <a:solidFill>
+                                <a:schemeClr val="accent2"/>
+                              </a:solidFill>
+                              <a:latin typeface="Cambria Math" panose="02040503050406030204" pitchFamily="18" charset="0"/>
+                            </a:rPr>
+                            <m:t>ℎ𝑦𝑝𝑜</m:t>
+                          </m:r>
+                        </m:sub>
+                      </m:sSub>
+                      <m:d>
+                        <m:dPr>
+                          <m:ctrlPr>
+                            <a:rPr lang="fr-CH" sz="2400" b="0" i="1" smtClean="0">
+                              <a:solidFill>
+                                <a:schemeClr val="accent2"/>
+                              </a:solidFill>
+                              <a:latin typeface="Cambria Math" panose="02040503050406030204" pitchFamily="18" charset="0"/>
+                            </a:rPr>
+                          </m:ctrlPr>
+                        </m:dPr>
+                        <m:e>
+                          <m:r>
+                            <a:rPr lang="fr-CH" sz="2400" b="0" i="1" smtClean="0">
+                              <a:solidFill>
+                                <a:schemeClr val="accent2"/>
+                              </a:solidFill>
+                              <a:latin typeface="Cambria Math" panose="02040503050406030204" pitchFamily="18" charset="0"/>
+                            </a:rPr>
+                            <m:t>𝑡</m:t>
+                          </m:r>
+                        </m:e>
+                      </m:d>
+                      <m:sSub>
+                        <m:sSubPr>
+                          <m:ctrlPr>
+                            <a:rPr lang="fr-CH" sz="2400" b="0" i="1" smtClean="0">
+                              <a:solidFill>
+                                <a:schemeClr val="accent2"/>
+                              </a:solidFill>
+                              <a:latin typeface="Cambria Math" panose="02040503050406030204" pitchFamily="18" charset="0"/>
+                            </a:rPr>
+                          </m:ctrlPr>
+                        </m:sSubPr>
+                        <m:e>
+                          <m:r>
+                            <a:rPr lang="fr-CH" sz="2400" b="0" i="1" smtClean="0">
+                              <a:solidFill>
+                                <a:schemeClr val="accent2"/>
+                              </a:solidFill>
+                              <a:latin typeface="Cambria Math" panose="02040503050406030204" pitchFamily="18" charset="0"/>
+                            </a:rPr>
+                            <m:t>𝐶</m:t>
+                          </m:r>
+                        </m:e>
+                        <m:sub>
+                          <m:r>
+                            <a:rPr lang="fr-CH" sz="2400" b="0" i="1" smtClean="0">
+                              <a:solidFill>
+                                <a:schemeClr val="accent2"/>
+                              </a:solidFill>
+                              <a:latin typeface="Cambria Math" panose="02040503050406030204" pitchFamily="18" charset="0"/>
+                            </a:rPr>
+                            <m:t>ℎ𝑦𝑝𝑜</m:t>
+                          </m:r>
+                        </m:sub>
+                      </m:sSub>
+                      <m:r>
+                        <a:rPr lang="fr-CH" sz="2400" b="0" i="1" smtClean="0">
+                          <a:solidFill>
+                            <a:schemeClr val="accent2"/>
+                          </a:solidFill>
+                          <a:latin typeface="Cambria Math" panose="02040503050406030204" pitchFamily="18" charset="0"/>
+                        </a:rPr>
+                        <m:t>(</m:t>
+                      </m:r>
+                      <m:r>
+                        <a:rPr lang="fr-CH" sz="2400" b="0" i="1" smtClean="0">
+                          <a:solidFill>
+                            <a:schemeClr val="accent2"/>
+                          </a:solidFill>
+                          <a:latin typeface="Cambria Math" panose="02040503050406030204" pitchFamily="18" charset="0"/>
+                        </a:rPr>
+                        <m:t>𝑡</m:t>
+                      </m:r>
+                      <m:r>
+                        <a:rPr lang="fr-CH" sz="2400" b="0" i="1" smtClean="0">
+                          <a:solidFill>
+                            <a:schemeClr val="accent2"/>
+                          </a:solidFill>
+                          <a:latin typeface="Cambria Math" panose="02040503050406030204" pitchFamily="18" charset="0"/>
+                        </a:rPr>
+                        <m:t>)</m:t>
+                      </m:r>
+                    </m:oMath>
+                  </m:oMathPara>
+                </a14:m>
+                <a:endParaRPr lang="en-US" sz="2400" dirty="0">
+                  <a:solidFill>
+                    <a:schemeClr val="accent2"/>
+                  </a:solidFill>
+                </a:endParaRPr>
+              </a:p>
+            </p:txBody>
+          </p:sp>
+        </mc:Choice>
+        <mc:Fallback>
+          <p:sp>
+            <p:nvSpPr>
+              <p:cNvPr id="32" name="TextBox 31">
+                <a:extLst>
+                  <a:ext uri="{FF2B5EF4-FFF2-40B4-BE49-F238E27FC236}">
+                    <a16:creationId xmlns:a16="http://schemas.microsoft.com/office/drawing/2014/main" id="{18E192B0-33BE-6A75-DB22-69392121A4F8}"/>
+                  </a:ext>
+                </a:extLst>
+              </p:cNvPr>
+              <p:cNvSpPr txBox="1">
+                <a:spLocks noRot="1" noChangeAspect="1" noMove="1" noResize="1" noEditPoints="1" noAdjustHandles="1" noChangeArrowheads="1" noChangeShapeType="1" noTextEdit="1"/>
+              </p:cNvSpPr>
+              <p:nvPr/>
+            </p:nvSpPr>
+            <p:spPr>
+              <a:xfrm>
+                <a:off x="316546" y="4392811"/>
+                <a:ext cx="4307799" cy="491288"/>
+              </a:xfrm>
+              <a:prstGeom prst="rect">
+                <a:avLst/>
+              </a:prstGeom>
+              <a:blipFill>
+                <a:blip r:embed="rId9"/>
+                <a:stretch>
+                  <a:fillRect b="-12500"/>
+                </a:stretch>
+              </a:blipFill>
+            </p:spPr>
+            <p:txBody>
+              <a:bodyPr/>
+              <a:lstStyle/>
+              <a:p>
+                <a:r>
+                  <a:rPr lang="en-US">
+                    <a:noFill/>
+                  </a:rPr>
+                  <a:t> </a:t>
+                </a:r>
+              </a:p>
+            </p:txBody>
+          </p:sp>
+        </mc:Fallback>
+      </mc:AlternateContent>
+      <mc:AlternateContent xmlns:mc="http://schemas.openxmlformats.org/markup-compatibility/2006">
+        <mc:Choice xmlns:a14="http://schemas.microsoft.com/office/drawing/2010/main" Requires="a14">
+          <p:sp>
+            <p:nvSpPr>
+              <p:cNvPr id="34" name="TextBox 33">
+                <a:extLst>
+                  <a:ext uri="{FF2B5EF4-FFF2-40B4-BE49-F238E27FC236}">
+                    <a16:creationId xmlns:a16="http://schemas.microsoft.com/office/drawing/2014/main" id="{77FDC1F1-37FB-50F0-377E-B173D856DD42}"/>
+                  </a:ext>
+                </a:extLst>
+              </p:cNvPr>
+              <p:cNvSpPr txBox="1"/>
+              <p:nvPr/>
+            </p:nvSpPr>
+            <p:spPr>
+              <a:xfrm>
+                <a:off x="548612" y="1273598"/>
+                <a:ext cx="6269175" cy="1757148"/>
+              </a:xfrm>
+              <a:prstGeom prst="rect">
+                <a:avLst/>
+              </a:prstGeom>
+              <a:noFill/>
+            </p:spPr>
+            <p:txBody>
+              <a:bodyPr wrap="square" rtlCol="0">
+                <a:spAutoFit/>
+              </a:bodyPr>
+              <a:lstStyle/>
+              <a:p>
+                <a:pPr/>
+                <a14:m>
+                  <m:oMathPara xmlns:m="http://schemas.openxmlformats.org/officeDocument/2006/math">
+                    <m:oMath>
+                      <m:sSub>
+                        <m:sSubPr>
+                          <m:ctrlPr>
+                            <a:rPr lang="fr-CH" sz="2400" i="1">
+                              <a:solidFill>
+                                <a:schemeClr val="accent4"/>
+                              </a:solidFill>
+                              <a:latin typeface="Cambria Math" panose="02040503050406030204" pitchFamily="18" charset="0"/>
+                            </a:rPr>
+                          </m:ctrlPr>
+                        </m:sSubPr>
+                        <m:e>
+                          <m:r>
+                            <a:rPr lang="fr-CH" sz="2400" i="1">
+                              <a:solidFill>
+                                <a:schemeClr val="accent4"/>
+                              </a:solidFill>
+                              <a:latin typeface="Cambria Math" panose="02040503050406030204" pitchFamily="18" charset="0"/>
+                            </a:rPr>
+                            <m:t>𝑀</m:t>
+                          </m:r>
+                        </m:e>
+                        <m:sub>
+                          <m:r>
+                            <a:rPr lang="fr-CH" sz="2400" i="1">
+                              <a:solidFill>
+                                <a:schemeClr val="accent4"/>
+                              </a:solidFill>
+                              <a:latin typeface="Cambria Math" panose="02040503050406030204" pitchFamily="18" charset="0"/>
+                            </a:rPr>
+                            <m:t>𝑚𝑖𝑥</m:t>
+                          </m:r>
+                          <m:r>
+                            <a:rPr lang="fr-CH" sz="2400" b="0" i="1" smtClean="0">
+                              <a:solidFill>
+                                <a:schemeClr val="accent4"/>
+                              </a:solidFill>
+                              <a:latin typeface="Cambria Math" panose="02040503050406030204" pitchFamily="18" charset="0"/>
+                            </a:rPr>
+                            <m:t>,</m:t>
+                          </m:r>
+                          <m:r>
+                            <a:rPr lang="fr-CH" sz="2400" b="0" i="1" smtClean="0">
+                              <a:solidFill>
+                                <a:schemeClr val="accent4"/>
+                              </a:solidFill>
+                              <a:latin typeface="Cambria Math" panose="02040503050406030204" pitchFamily="18" charset="0"/>
+                            </a:rPr>
+                            <m:t>𝑒𝑝𝑖</m:t>
+                          </m:r>
+                        </m:sub>
+                      </m:sSub>
+                      <m:d>
+                        <m:dPr>
+                          <m:ctrlPr>
+                            <a:rPr lang="fr-CH" sz="2400" i="1">
+                              <a:solidFill>
+                                <a:schemeClr val="accent4"/>
+                              </a:solidFill>
+                              <a:latin typeface="Cambria Math" panose="02040503050406030204" pitchFamily="18" charset="0"/>
+                            </a:rPr>
+                          </m:ctrlPr>
+                        </m:dPr>
+                        <m:e>
+                          <m:r>
+                            <a:rPr lang="fr-CH" sz="2400" i="1">
+                              <a:solidFill>
+                                <a:schemeClr val="accent4"/>
+                              </a:solidFill>
+                              <a:latin typeface="Cambria Math" panose="02040503050406030204" pitchFamily="18" charset="0"/>
+                            </a:rPr>
+                            <m:t>𝑡</m:t>
+                          </m:r>
+                        </m:e>
+                      </m:d>
+                      <m:r>
+                        <a:rPr lang="fr-CH" sz="2400" i="1">
+                          <a:solidFill>
+                            <a:schemeClr val="accent4"/>
+                          </a:solidFill>
+                          <a:latin typeface="Cambria Math" panose="02040503050406030204" pitchFamily="18" charset="0"/>
+                        </a:rPr>
+                        <m:t>=</m:t>
+                      </m:r>
+                      <m:d>
+                        <m:dPr>
+                          <m:begChr m:val="{"/>
+                          <m:endChr m:val=""/>
+                          <m:ctrlPr>
+                            <a:rPr lang="en-US" sz="2400" i="1" smtClean="0">
+                              <a:solidFill>
+                                <a:schemeClr val="accent4"/>
+                              </a:solidFill>
+                              <a:latin typeface="Cambria Math" panose="02040503050406030204" pitchFamily="18" charset="0"/>
+                            </a:rPr>
+                          </m:ctrlPr>
+                        </m:dPr>
+                        <m:e>
+                          <m:eqArr>
+                            <m:eqArrPr>
+                              <m:ctrlPr>
+                                <a:rPr lang="en-US" sz="2400" i="1" smtClean="0">
+                                  <a:solidFill>
+                                    <a:schemeClr val="accent4"/>
+                                  </a:solidFill>
+                                  <a:latin typeface="Cambria Math" panose="02040503050406030204" pitchFamily="18" charset="0"/>
+                                </a:rPr>
+                              </m:ctrlPr>
+                            </m:eqArrPr>
+                            <m:e>
+                              <m:f>
+                                <m:fPr>
+                                  <m:ctrlPr>
+                                    <a:rPr lang="fr-CH" sz="2400" b="0" i="1" smtClean="0">
+                                      <a:solidFill>
+                                        <a:schemeClr val="accent4"/>
+                                      </a:solidFill>
+                                      <a:latin typeface="Cambria Math" panose="02040503050406030204" pitchFamily="18" charset="0"/>
+                                    </a:rPr>
+                                  </m:ctrlPr>
+                                </m:fPr>
+                                <m:num>
+                                  <m:r>
+                                    <a:rPr lang="fr-CH" sz="2400" b="0" i="1" smtClean="0">
+                                      <a:solidFill>
+                                        <a:schemeClr val="accent4"/>
+                                      </a:solidFill>
+                                      <a:latin typeface="Cambria Math" panose="02040503050406030204" pitchFamily="18" charset="0"/>
+                                    </a:rPr>
+                                    <m:t>𝑑</m:t>
+                                  </m:r>
+                                  <m:sSub>
+                                    <m:sSubPr>
+                                      <m:ctrlPr>
+                                        <a:rPr lang="fr-CH" sz="2400" b="0" i="1" smtClean="0">
+                                          <a:solidFill>
+                                            <a:schemeClr val="accent4"/>
+                                          </a:solidFill>
+                                          <a:latin typeface="Cambria Math" panose="02040503050406030204" pitchFamily="18" charset="0"/>
+                                        </a:rPr>
+                                      </m:ctrlPr>
+                                    </m:sSubPr>
+                                    <m:e>
+                                      <m:r>
+                                        <a:rPr lang="fr-CH" sz="2400" b="0" i="1" smtClean="0">
+                                          <a:solidFill>
+                                            <a:schemeClr val="accent4"/>
+                                          </a:solidFill>
+                                          <a:latin typeface="Cambria Math" panose="02040503050406030204" pitchFamily="18" charset="0"/>
+                                        </a:rPr>
+                                        <m:t>𝑉</m:t>
+                                      </m:r>
+                                    </m:e>
+                                    <m:sub>
+                                      <m:r>
+                                        <a:rPr lang="fr-CH" sz="2400" b="0" i="1" smtClean="0">
+                                          <a:solidFill>
+                                            <a:schemeClr val="accent4"/>
+                                          </a:solidFill>
+                                          <a:latin typeface="Cambria Math" panose="02040503050406030204" pitchFamily="18" charset="0"/>
+                                        </a:rPr>
+                                        <m:t>𝑒𝑝𝑖</m:t>
+                                      </m:r>
+                                    </m:sub>
+                                  </m:sSub>
+                                </m:num>
+                                <m:den>
+                                  <m:r>
+                                    <a:rPr lang="fr-CH" sz="2400" b="0" i="1" smtClean="0">
+                                      <a:solidFill>
+                                        <a:schemeClr val="accent4"/>
+                                      </a:solidFill>
+                                      <a:latin typeface="Cambria Math" panose="02040503050406030204" pitchFamily="18" charset="0"/>
+                                    </a:rPr>
+                                    <m:t>𝑑𝑡</m:t>
+                                  </m:r>
+                                </m:den>
+                              </m:f>
+                              <m:sSub>
+                                <m:sSubPr>
+                                  <m:ctrlPr>
+                                    <a:rPr lang="fr-CH" sz="2400" b="0" i="1" smtClean="0">
+                                      <a:solidFill>
+                                        <a:schemeClr val="accent4"/>
+                                      </a:solidFill>
+                                      <a:latin typeface="Cambria Math" panose="02040503050406030204" pitchFamily="18" charset="0"/>
+                                    </a:rPr>
+                                  </m:ctrlPr>
+                                </m:sSubPr>
+                                <m:e>
+                                  <m:r>
+                                    <a:rPr lang="fr-CH" sz="2400" b="0" i="1" smtClean="0">
+                                      <a:solidFill>
+                                        <a:schemeClr val="accent4"/>
+                                      </a:solidFill>
+                                      <a:latin typeface="Cambria Math" panose="02040503050406030204" pitchFamily="18" charset="0"/>
+                                    </a:rPr>
+                                    <m:t>𝐶</m:t>
+                                  </m:r>
+                                </m:e>
+                                <m:sub>
+                                  <m:r>
+                                    <a:rPr lang="fr-CH" sz="2400" b="0" i="1" smtClean="0">
+                                      <a:solidFill>
+                                        <a:schemeClr val="accent4"/>
+                                      </a:solidFill>
+                                      <a:latin typeface="Cambria Math" panose="02040503050406030204" pitchFamily="18" charset="0"/>
+                                    </a:rPr>
+                                    <m:t>ℎ𝑦𝑝𝑜</m:t>
+                                  </m:r>
+                                </m:sub>
+                              </m:sSub>
+                              <m:d>
+                                <m:dPr>
+                                  <m:ctrlPr>
+                                    <a:rPr lang="fr-CH" sz="2400" b="0" i="1" smtClean="0">
+                                      <a:solidFill>
+                                        <a:schemeClr val="accent4"/>
+                                      </a:solidFill>
+                                      <a:latin typeface="Cambria Math" panose="02040503050406030204" pitchFamily="18" charset="0"/>
+                                    </a:rPr>
+                                  </m:ctrlPr>
+                                </m:dPr>
+                                <m:e>
+                                  <m:r>
+                                    <a:rPr lang="fr-CH" sz="2400" b="0" i="1" smtClean="0">
+                                      <a:solidFill>
+                                        <a:schemeClr val="accent4"/>
+                                      </a:solidFill>
+                                      <a:latin typeface="Cambria Math" panose="02040503050406030204" pitchFamily="18" charset="0"/>
+                                    </a:rPr>
+                                    <m:t>𝑡</m:t>
+                                  </m:r>
+                                </m:e>
+                              </m:d>
+                              <m:r>
+                                <a:rPr lang="fr-CH" sz="2400" b="0" i="0" smtClean="0">
+                                  <a:solidFill>
+                                    <a:schemeClr val="accent4"/>
+                                  </a:solidFill>
+                                  <a:latin typeface="Cambria Math" panose="02040503050406030204" pitchFamily="18" charset="0"/>
+                                </a:rPr>
+                                <m:t>, </m:t>
+                              </m:r>
+                              <m:r>
+                                <m:rPr>
+                                  <m:sty m:val="p"/>
+                                </m:rPr>
+                                <a:rPr lang="fr-CH" sz="2400" b="0" i="0" smtClean="0">
+                                  <a:solidFill>
+                                    <a:schemeClr val="accent4"/>
+                                  </a:solidFill>
+                                  <a:latin typeface="Cambria Math" panose="02040503050406030204" pitchFamily="18" charset="0"/>
+                                </a:rPr>
+                                <m:t>si</m:t>
+                              </m:r>
+                              <m:r>
+                                <a:rPr lang="fr-CH" sz="2400" b="0" i="0" smtClean="0">
+                                  <a:solidFill>
+                                    <a:schemeClr val="accent4"/>
+                                  </a:solidFill>
+                                  <a:latin typeface="Cambria Math" panose="02040503050406030204" pitchFamily="18" charset="0"/>
+                                </a:rPr>
+                                <m:t> </m:t>
+                              </m:r>
+                              <m:f>
+                                <m:fPr>
+                                  <m:ctrlPr>
+                                    <a:rPr lang="fr-CH" sz="2400" b="0" i="1" smtClean="0">
+                                      <a:solidFill>
+                                        <a:schemeClr val="accent4"/>
+                                      </a:solidFill>
+                                      <a:latin typeface="Cambria Math" panose="02040503050406030204" pitchFamily="18" charset="0"/>
+                                    </a:rPr>
+                                  </m:ctrlPr>
+                                </m:fPr>
+                                <m:num>
+                                  <m:r>
+                                    <a:rPr lang="fr-CH" sz="2400" b="0" i="1" smtClean="0">
+                                      <a:solidFill>
+                                        <a:schemeClr val="accent4"/>
+                                      </a:solidFill>
+                                      <a:latin typeface="Cambria Math" panose="02040503050406030204" pitchFamily="18" charset="0"/>
+                                    </a:rPr>
+                                    <m:t>𝑑</m:t>
+                                  </m:r>
+                                  <m:sSub>
+                                    <m:sSubPr>
+                                      <m:ctrlPr>
+                                        <a:rPr lang="fr-CH" sz="2400" b="0" i="1" smtClean="0">
+                                          <a:solidFill>
+                                            <a:schemeClr val="accent4"/>
+                                          </a:solidFill>
+                                          <a:latin typeface="Cambria Math" panose="02040503050406030204" pitchFamily="18" charset="0"/>
+                                        </a:rPr>
+                                      </m:ctrlPr>
+                                    </m:sSubPr>
+                                    <m:e>
+                                      <m:r>
+                                        <a:rPr lang="fr-CH" sz="2400" b="0" i="1" smtClean="0">
+                                          <a:solidFill>
+                                            <a:schemeClr val="accent4"/>
+                                          </a:solidFill>
+                                          <a:latin typeface="Cambria Math" panose="02040503050406030204" pitchFamily="18" charset="0"/>
+                                        </a:rPr>
+                                        <m:t>ℎ</m:t>
+                                      </m:r>
+                                    </m:e>
+                                    <m:sub>
+                                      <m:r>
+                                        <a:rPr lang="fr-CH" sz="2400" b="0" i="1" smtClean="0">
+                                          <a:solidFill>
+                                            <a:schemeClr val="accent4"/>
+                                          </a:solidFill>
+                                          <a:latin typeface="Cambria Math" panose="02040503050406030204" pitchFamily="18" charset="0"/>
+                                        </a:rPr>
+                                        <m:t>𝑒𝑝𝑖</m:t>
+                                      </m:r>
+                                    </m:sub>
+                                  </m:sSub>
+                                </m:num>
+                                <m:den>
+                                  <m:r>
+                                    <a:rPr lang="fr-CH" sz="2400" b="0" i="1" smtClean="0">
+                                      <a:solidFill>
+                                        <a:schemeClr val="accent4"/>
+                                      </a:solidFill>
+                                      <a:latin typeface="Cambria Math" panose="02040503050406030204" pitchFamily="18" charset="0"/>
+                                    </a:rPr>
+                                    <m:t>𝑑𝑡</m:t>
+                                  </m:r>
+                                </m:den>
+                              </m:f>
+                              <m:r>
+                                <a:rPr lang="fr-CH" sz="2400" b="0" i="1" smtClean="0">
+                                  <a:solidFill>
+                                    <a:schemeClr val="accent4"/>
+                                  </a:solidFill>
+                                  <a:latin typeface="Cambria Math" panose="02040503050406030204" pitchFamily="18" charset="0"/>
+                                </a:rPr>
+                                <m:t>&gt;0</m:t>
+                              </m:r>
+                            </m:e>
+                            <m:e>
+                              <m:f>
+                                <m:fPr>
+                                  <m:ctrlPr>
+                                    <a:rPr lang="fr-CH" sz="2400" i="1">
+                                      <a:solidFill>
+                                        <a:schemeClr val="accent4"/>
+                                      </a:solidFill>
+                                      <a:latin typeface="Cambria Math" panose="02040503050406030204" pitchFamily="18" charset="0"/>
+                                    </a:rPr>
+                                  </m:ctrlPr>
+                                </m:fPr>
+                                <m:num>
+                                  <m:r>
+                                    <a:rPr lang="fr-CH" sz="2400" i="1">
+                                      <a:solidFill>
+                                        <a:schemeClr val="accent4"/>
+                                      </a:solidFill>
+                                      <a:latin typeface="Cambria Math" panose="02040503050406030204" pitchFamily="18" charset="0"/>
+                                    </a:rPr>
+                                    <m:t>𝑑</m:t>
+                                  </m:r>
+                                  <m:sSub>
+                                    <m:sSubPr>
+                                      <m:ctrlPr>
+                                        <a:rPr lang="fr-CH" sz="2400" i="1">
+                                          <a:solidFill>
+                                            <a:schemeClr val="accent4"/>
+                                          </a:solidFill>
+                                          <a:latin typeface="Cambria Math" panose="02040503050406030204" pitchFamily="18" charset="0"/>
+                                        </a:rPr>
+                                      </m:ctrlPr>
+                                    </m:sSubPr>
+                                    <m:e>
+                                      <m:r>
+                                        <a:rPr lang="fr-CH" sz="2400" i="1">
+                                          <a:solidFill>
+                                            <a:schemeClr val="accent4"/>
+                                          </a:solidFill>
+                                          <a:latin typeface="Cambria Math" panose="02040503050406030204" pitchFamily="18" charset="0"/>
+                                        </a:rPr>
+                                        <m:t>𝑉</m:t>
+                                      </m:r>
+                                    </m:e>
+                                    <m:sub>
+                                      <m:r>
+                                        <a:rPr lang="fr-CH" sz="2400" i="1">
+                                          <a:solidFill>
+                                            <a:schemeClr val="accent4"/>
+                                          </a:solidFill>
+                                          <a:latin typeface="Cambria Math" panose="02040503050406030204" pitchFamily="18" charset="0"/>
+                                        </a:rPr>
+                                        <m:t>𝑒𝑝𝑖</m:t>
+                                      </m:r>
+                                    </m:sub>
+                                  </m:sSub>
+                                </m:num>
+                                <m:den>
+                                  <m:r>
+                                    <a:rPr lang="fr-CH" sz="2400" i="1">
+                                      <a:solidFill>
+                                        <a:schemeClr val="accent4"/>
+                                      </a:solidFill>
+                                      <a:latin typeface="Cambria Math" panose="02040503050406030204" pitchFamily="18" charset="0"/>
+                                    </a:rPr>
+                                    <m:t>𝑑𝑡</m:t>
+                                  </m:r>
+                                </m:den>
+                              </m:f>
+                              <m:sSub>
+                                <m:sSubPr>
+                                  <m:ctrlPr>
+                                    <a:rPr lang="fr-CH" sz="2400" i="1">
+                                      <a:solidFill>
+                                        <a:schemeClr val="accent4"/>
+                                      </a:solidFill>
+                                      <a:latin typeface="Cambria Math" panose="02040503050406030204" pitchFamily="18" charset="0"/>
+                                    </a:rPr>
+                                  </m:ctrlPr>
+                                </m:sSubPr>
+                                <m:e>
+                                  <m:r>
+                                    <a:rPr lang="fr-CH" sz="2400" i="1">
+                                      <a:solidFill>
+                                        <a:schemeClr val="accent4"/>
+                                      </a:solidFill>
+                                      <a:latin typeface="Cambria Math" panose="02040503050406030204" pitchFamily="18" charset="0"/>
+                                    </a:rPr>
+                                    <m:t>𝐶</m:t>
+                                  </m:r>
+                                </m:e>
+                                <m:sub>
+                                  <m:r>
+                                    <a:rPr lang="fr-CH" sz="2400" b="0" i="1" smtClean="0">
+                                      <a:solidFill>
+                                        <a:schemeClr val="accent4"/>
+                                      </a:solidFill>
+                                      <a:latin typeface="Cambria Math" panose="02040503050406030204" pitchFamily="18" charset="0"/>
+                                    </a:rPr>
+                                    <m:t>𝑒𝑝𝑖</m:t>
+                                  </m:r>
+                                </m:sub>
+                              </m:sSub>
+                              <m:d>
+                                <m:dPr>
+                                  <m:ctrlPr>
+                                    <a:rPr lang="fr-CH" sz="2400" i="1">
+                                      <a:solidFill>
+                                        <a:schemeClr val="accent4"/>
+                                      </a:solidFill>
+                                      <a:latin typeface="Cambria Math" panose="02040503050406030204" pitchFamily="18" charset="0"/>
+                                    </a:rPr>
+                                  </m:ctrlPr>
+                                </m:dPr>
+                                <m:e>
+                                  <m:r>
+                                    <a:rPr lang="fr-CH" sz="2400" i="1">
+                                      <a:solidFill>
+                                        <a:schemeClr val="accent4"/>
+                                      </a:solidFill>
+                                      <a:latin typeface="Cambria Math" panose="02040503050406030204" pitchFamily="18" charset="0"/>
+                                    </a:rPr>
+                                    <m:t>𝑡</m:t>
+                                  </m:r>
+                                </m:e>
+                              </m:d>
+                              <m:r>
+                                <a:rPr lang="fr-CH" sz="2400" b="0" i="1" smtClean="0">
+                                  <a:solidFill>
+                                    <a:schemeClr val="accent4"/>
+                                  </a:solidFill>
+                                  <a:latin typeface="Cambria Math" panose="02040503050406030204" pitchFamily="18" charset="0"/>
+                                </a:rPr>
+                                <m:t>,</m:t>
+                              </m:r>
+                              <m:r>
+                                <a:rPr lang="fr-CH" sz="2400" b="0" i="0" smtClean="0">
+                                  <a:solidFill>
+                                    <a:schemeClr val="accent4"/>
+                                  </a:solidFill>
+                                  <a:latin typeface="Cambria Math" panose="02040503050406030204" pitchFamily="18" charset="0"/>
+                                </a:rPr>
+                                <m:t> </m:t>
+                              </m:r>
+                              <m:r>
+                                <m:rPr>
+                                  <m:sty m:val="p"/>
+                                </m:rPr>
+                                <a:rPr lang="fr-CH" sz="2400" b="0" i="0" smtClean="0">
+                                  <a:solidFill>
+                                    <a:schemeClr val="accent4"/>
+                                  </a:solidFill>
+                                  <a:latin typeface="Cambria Math" panose="02040503050406030204" pitchFamily="18" charset="0"/>
+                                </a:rPr>
+                                <m:t>si</m:t>
+                              </m:r>
+                              <m:r>
+                                <a:rPr lang="fr-CH" sz="2400" b="0" i="0" smtClean="0">
+                                  <a:solidFill>
+                                    <a:schemeClr val="accent4"/>
+                                  </a:solidFill>
+                                  <a:latin typeface="Cambria Math" panose="02040503050406030204" pitchFamily="18" charset="0"/>
+                                </a:rPr>
+                                <m:t> </m:t>
+                              </m:r>
+                              <m:f>
+                                <m:fPr>
+                                  <m:ctrlPr>
+                                    <a:rPr lang="fr-CH" sz="2400" b="0" i="1" smtClean="0">
+                                      <a:solidFill>
+                                        <a:schemeClr val="accent4"/>
+                                      </a:solidFill>
+                                      <a:latin typeface="Cambria Math" panose="02040503050406030204" pitchFamily="18" charset="0"/>
+                                    </a:rPr>
+                                  </m:ctrlPr>
+                                </m:fPr>
+                                <m:num>
+                                  <m:r>
+                                    <a:rPr lang="fr-CH" sz="2400" b="0" i="1" smtClean="0">
+                                      <a:solidFill>
+                                        <a:schemeClr val="accent4"/>
+                                      </a:solidFill>
+                                      <a:latin typeface="Cambria Math" panose="02040503050406030204" pitchFamily="18" charset="0"/>
+                                    </a:rPr>
+                                    <m:t>𝑑</m:t>
+                                  </m:r>
+                                  <m:sSub>
+                                    <m:sSubPr>
+                                      <m:ctrlPr>
+                                        <a:rPr lang="fr-CH" sz="2400" b="0" i="1" smtClean="0">
+                                          <a:solidFill>
+                                            <a:schemeClr val="accent4"/>
+                                          </a:solidFill>
+                                          <a:latin typeface="Cambria Math" panose="02040503050406030204" pitchFamily="18" charset="0"/>
+                                        </a:rPr>
+                                      </m:ctrlPr>
+                                    </m:sSubPr>
+                                    <m:e>
+                                      <m:r>
+                                        <a:rPr lang="fr-CH" sz="2400" b="0" i="1" smtClean="0">
+                                          <a:solidFill>
+                                            <a:schemeClr val="accent4"/>
+                                          </a:solidFill>
+                                          <a:latin typeface="Cambria Math" panose="02040503050406030204" pitchFamily="18" charset="0"/>
+                                        </a:rPr>
+                                        <m:t>ℎ</m:t>
+                                      </m:r>
+                                    </m:e>
+                                    <m:sub>
+                                      <m:r>
+                                        <a:rPr lang="fr-CH" sz="2400" b="0" i="1" smtClean="0">
+                                          <a:solidFill>
+                                            <a:schemeClr val="accent4"/>
+                                          </a:solidFill>
+                                          <a:latin typeface="Cambria Math" panose="02040503050406030204" pitchFamily="18" charset="0"/>
+                                        </a:rPr>
+                                        <m:t>𝑒𝑝𝑖</m:t>
+                                      </m:r>
+                                    </m:sub>
+                                  </m:sSub>
+                                </m:num>
+                                <m:den>
+                                  <m:r>
+                                    <a:rPr lang="fr-CH" sz="2400" b="0" i="1" smtClean="0">
+                                      <a:solidFill>
+                                        <a:schemeClr val="accent4"/>
+                                      </a:solidFill>
+                                      <a:latin typeface="Cambria Math" panose="02040503050406030204" pitchFamily="18" charset="0"/>
+                                    </a:rPr>
+                                    <m:t>𝑑𝑡</m:t>
+                                  </m:r>
+                                </m:den>
+                              </m:f>
+                              <m:r>
+                                <a:rPr lang="fr-CH" sz="2400" b="0" i="1" smtClean="0">
+                                  <a:solidFill>
+                                    <a:schemeClr val="accent4"/>
+                                  </a:solidFill>
+                                  <a:latin typeface="Cambria Math" panose="02040503050406030204" pitchFamily="18" charset="0"/>
+                                </a:rPr>
+                                <m:t>&lt;0</m:t>
+                              </m:r>
+                            </m:e>
+                          </m:eqArr>
+                        </m:e>
+                      </m:d>
+                    </m:oMath>
+                  </m:oMathPara>
+                </a14:m>
+                <a:endParaRPr lang="en-US" sz="2400" dirty="0">
+                  <a:solidFill>
+                    <a:schemeClr val="accent4"/>
+                  </a:solidFill>
+                </a:endParaRPr>
+              </a:p>
+            </p:txBody>
+          </p:sp>
+        </mc:Choice>
+        <mc:Fallback>
+          <p:sp>
+            <p:nvSpPr>
+              <p:cNvPr id="34" name="TextBox 33">
+                <a:extLst>
+                  <a:ext uri="{FF2B5EF4-FFF2-40B4-BE49-F238E27FC236}">
+                    <a16:creationId xmlns:a16="http://schemas.microsoft.com/office/drawing/2014/main" id="{77FDC1F1-37FB-50F0-377E-B173D856DD42}"/>
+                  </a:ext>
+                </a:extLst>
+              </p:cNvPr>
+              <p:cNvSpPr txBox="1">
+                <a:spLocks noRot="1" noChangeAspect="1" noMove="1" noResize="1" noEditPoints="1" noAdjustHandles="1" noChangeArrowheads="1" noChangeShapeType="1" noTextEdit="1"/>
+              </p:cNvSpPr>
+              <p:nvPr/>
+            </p:nvSpPr>
+            <p:spPr>
+              <a:xfrm>
+                <a:off x="548612" y="1273598"/>
+                <a:ext cx="6269175" cy="1757148"/>
+              </a:xfrm>
+              <a:prstGeom prst="rect">
+                <a:avLst/>
+              </a:prstGeom>
+              <a:blipFill>
+                <a:blip r:embed="rId10"/>
+                <a:stretch>
+                  <a:fillRect/>
+                </a:stretch>
+              </a:blipFill>
+            </p:spPr>
+            <p:txBody>
+              <a:bodyPr/>
+              <a:lstStyle/>
+              <a:p>
+                <a:r>
+                  <a:rPr lang="en-US">
+                    <a:noFill/>
+                  </a:rPr>
+                  <a:t> </a:t>
+                </a:r>
+              </a:p>
+            </p:txBody>
+          </p:sp>
+        </mc:Fallback>
+      </mc:AlternateContent>
+      <mc:AlternateContent xmlns:mc="http://schemas.openxmlformats.org/markup-compatibility/2006">
+        <mc:Choice xmlns:a14="http://schemas.microsoft.com/office/drawing/2010/main" Requires="a14">
+          <p:sp>
+            <p:nvSpPr>
+              <p:cNvPr id="36" name="TextBox 35">
+                <a:extLst>
+                  <a:ext uri="{FF2B5EF4-FFF2-40B4-BE49-F238E27FC236}">
+                    <a16:creationId xmlns:a16="http://schemas.microsoft.com/office/drawing/2014/main" id="{7F382096-3049-5894-0C59-1F2B7CE7816F}"/>
+                  </a:ext>
+                </a:extLst>
+              </p:cNvPr>
+              <p:cNvSpPr txBox="1"/>
+              <p:nvPr/>
+            </p:nvSpPr>
+            <p:spPr>
+              <a:xfrm>
+                <a:off x="3708162" y="4393035"/>
+                <a:ext cx="6269175" cy="490840"/>
+              </a:xfrm>
+              <a:prstGeom prst="rect">
+                <a:avLst/>
+              </a:prstGeom>
+              <a:noFill/>
+            </p:spPr>
+            <p:txBody>
+              <a:bodyPr wrap="square" rtlCol="0">
+                <a:spAutoFit/>
+              </a:bodyPr>
+              <a:lstStyle/>
+              <a:p>
+                <a:pPr/>
+                <a14:m>
+                  <m:oMathPara xmlns:m="http://schemas.openxmlformats.org/officeDocument/2006/math">
+                    <m:oMath>
+                      <m:sSub>
+                        <m:sSubPr>
+                          <m:ctrlPr>
+                            <a:rPr lang="fr-CH" sz="2400" i="1">
+                              <a:solidFill>
+                                <a:schemeClr val="accent4"/>
+                              </a:solidFill>
+                              <a:latin typeface="Cambria Math" panose="02040503050406030204" pitchFamily="18" charset="0"/>
+                            </a:rPr>
+                          </m:ctrlPr>
+                        </m:sSubPr>
+                        <m:e>
+                          <m:r>
+                            <a:rPr lang="fr-CH" sz="2400" i="1">
+                              <a:solidFill>
+                                <a:schemeClr val="accent4"/>
+                              </a:solidFill>
+                              <a:latin typeface="Cambria Math" panose="02040503050406030204" pitchFamily="18" charset="0"/>
+                            </a:rPr>
+                            <m:t>𝑀</m:t>
+                          </m:r>
+                        </m:e>
+                        <m:sub>
+                          <m:r>
+                            <a:rPr lang="fr-CH" sz="2400" i="1">
+                              <a:solidFill>
+                                <a:schemeClr val="accent4"/>
+                              </a:solidFill>
+                              <a:latin typeface="Cambria Math" panose="02040503050406030204" pitchFamily="18" charset="0"/>
+                            </a:rPr>
+                            <m:t>𝑚𝑖𝑥</m:t>
+                          </m:r>
+                          <m:r>
+                            <a:rPr lang="fr-CH" sz="2400" b="0" i="1" smtClean="0">
+                              <a:solidFill>
+                                <a:schemeClr val="accent4"/>
+                              </a:solidFill>
+                              <a:latin typeface="Cambria Math" panose="02040503050406030204" pitchFamily="18" charset="0"/>
+                            </a:rPr>
+                            <m:t>,</m:t>
+                          </m:r>
+                          <m:r>
+                            <a:rPr lang="fr-CH" sz="2400" b="0" i="1" smtClean="0">
+                              <a:solidFill>
+                                <a:schemeClr val="accent4"/>
+                              </a:solidFill>
+                              <a:latin typeface="Cambria Math" panose="02040503050406030204" pitchFamily="18" charset="0"/>
+                            </a:rPr>
+                            <m:t>ℎ𝑦𝑝𝑜</m:t>
+                          </m:r>
+                        </m:sub>
+                      </m:sSub>
+                      <m:d>
+                        <m:dPr>
+                          <m:ctrlPr>
+                            <a:rPr lang="fr-CH" sz="2400" i="1">
+                              <a:solidFill>
+                                <a:schemeClr val="accent4"/>
+                              </a:solidFill>
+                              <a:latin typeface="Cambria Math" panose="02040503050406030204" pitchFamily="18" charset="0"/>
+                            </a:rPr>
+                          </m:ctrlPr>
+                        </m:dPr>
+                        <m:e>
+                          <m:r>
+                            <a:rPr lang="fr-CH" sz="2400" i="1">
+                              <a:solidFill>
+                                <a:schemeClr val="accent4"/>
+                              </a:solidFill>
+                              <a:latin typeface="Cambria Math" panose="02040503050406030204" pitchFamily="18" charset="0"/>
+                            </a:rPr>
+                            <m:t>𝑡</m:t>
+                          </m:r>
+                        </m:e>
+                      </m:d>
+                      <m:r>
+                        <a:rPr lang="fr-CH" sz="2400" i="1">
+                          <a:solidFill>
+                            <a:schemeClr val="accent4"/>
+                          </a:solidFill>
+                          <a:latin typeface="Cambria Math" panose="02040503050406030204" pitchFamily="18" charset="0"/>
+                        </a:rPr>
+                        <m:t>=</m:t>
+                      </m:r>
+                      <m:r>
+                        <a:rPr lang="fr-CH" sz="2400" b="0" i="1" smtClean="0">
+                          <a:solidFill>
+                            <a:schemeClr val="accent4"/>
+                          </a:solidFill>
+                          <a:latin typeface="Cambria Math" panose="02040503050406030204" pitchFamily="18" charset="0"/>
+                        </a:rPr>
+                        <m:t>−</m:t>
+                      </m:r>
+                      <m:sSub>
+                        <m:sSubPr>
+                          <m:ctrlPr>
+                            <a:rPr lang="fr-CH" sz="2400" b="0" i="1" smtClean="0">
+                              <a:solidFill>
+                                <a:schemeClr val="accent4"/>
+                              </a:solidFill>
+                              <a:latin typeface="Cambria Math" panose="02040503050406030204" pitchFamily="18" charset="0"/>
+                            </a:rPr>
+                          </m:ctrlPr>
+                        </m:sSubPr>
+                        <m:e>
+                          <m:r>
+                            <a:rPr lang="fr-CH" sz="2400" b="0" i="1" smtClean="0">
+                              <a:solidFill>
+                                <a:schemeClr val="accent4"/>
+                              </a:solidFill>
+                              <a:latin typeface="Cambria Math" panose="02040503050406030204" pitchFamily="18" charset="0"/>
+                            </a:rPr>
+                            <m:t>𝑀</m:t>
+                          </m:r>
+                        </m:e>
+                        <m:sub>
+                          <m:r>
+                            <a:rPr lang="fr-CH" sz="2400" b="0" i="1" smtClean="0">
+                              <a:solidFill>
+                                <a:schemeClr val="accent4"/>
+                              </a:solidFill>
+                              <a:latin typeface="Cambria Math" panose="02040503050406030204" pitchFamily="18" charset="0"/>
+                            </a:rPr>
+                            <m:t>𝑚𝑖𝑥</m:t>
+                          </m:r>
+                          <m:r>
+                            <a:rPr lang="fr-CH" sz="2400" b="0" i="1" smtClean="0">
+                              <a:solidFill>
+                                <a:schemeClr val="accent4"/>
+                              </a:solidFill>
+                              <a:latin typeface="Cambria Math" panose="02040503050406030204" pitchFamily="18" charset="0"/>
+                            </a:rPr>
+                            <m:t>,</m:t>
+                          </m:r>
+                          <m:r>
+                            <a:rPr lang="fr-CH" sz="2400" b="0" i="1" smtClean="0">
+                              <a:solidFill>
+                                <a:schemeClr val="accent4"/>
+                              </a:solidFill>
+                              <a:latin typeface="Cambria Math" panose="02040503050406030204" pitchFamily="18" charset="0"/>
+                            </a:rPr>
+                            <m:t>𝑒𝑝𝑖</m:t>
+                          </m:r>
+                        </m:sub>
+                      </m:sSub>
+                      <m:r>
+                        <a:rPr lang="fr-CH" sz="2400" b="0" i="1" smtClean="0">
+                          <a:solidFill>
+                            <a:schemeClr val="accent4"/>
+                          </a:solidFill>
+                          <a:latin typeface="Cambria Math" panose="02040503050406030204" pitchFamily="18" charset="0"/>
+                        </a:rPr>
+                        <m:t>(</m:t>
+                      </m:r>
+                      <m:r>
+                        <a:rPr lang="fr-CH" sz="2400" b="0" i="1" smtClean="0">
+                          <a:solidFill>
+                            <a:schemeClr val="accent4"/>
+                          </a:solidFill>
+                          <a:latin typeface="Cambria Math" panose="02040503050406030204" pitchFamily="18" charset="0"/>
+                        </a:rPr>
+                        <m:t>𝑡</m:t>
+                      </m:r>
+                      <m:r>
+                        <a:rPr lang="fr-CH" sz="2400" b="0" i="1" smtClean="0">
+                          <a:solidFill>
+                            <a:schemeClr val="accent4"/>
+                          </a:solidFill>
+                          <a:latin typeface="Cambria Math" panose="02040503050406030204" pitchFamily="18" charset="0"/>
+                        </a:rPr>
+                        <m:t>)</m:t>
+                      </m:r>
+                    </m:oMath>
+                  </m:oMathPara>
+                </a14:m>
+                <a:endParaRPr lang="en-US" sz="2400" dirty="0">
+                  <a:solidFill>
+                    <a:schemeClr val="accent4"/>
+                  </a:solidFill>
+                </a:endParaRPr>
+              </a:p>
+            </p:txBody>
+          </p:sp>
+        </mc:Choice>
+        <mc:Fallback>
+          <p:sp>
+            <p:nvSpPr>
+              <p:cNvPr id="36" name="TextBox 35">
+                <a:extLst>
+                  <a:ext uri="{FF2B5EF4-FFF2-40B4-BE49-F238E27FC236}">
+                    <a16:creationId xmlns:a16="http://schemas.microsoft.com/office/drawing/2014/main" id="{7F382096-3049-5894-0C59-1F2B7CE7816F}"/>
+                  </a:ext>
+                </a:extLst>
+              </p:cNvPr>
+              <p:cNvSpPr txBox="1">
+                <a:spLocks noRot="1" noChangeAspect="1" noMove="1" noResize="1" noEditPoints="1" noAdjustHandles="1" noChangeArrowheads="1" noChangeShapeType="1" noTextEdit="1"/>
+              </p:cNvSpPr>
+              <p:nvPr/>
+            </p:nvSpPr>
+            <p:spPr>
+              <a:xfrm>
+                <a:off x="3708162" y="4393035"/>
+                <a:ext cx="6269175" cy="490840"/>
+              </a:xfrm>
+              <a:prstGeom prst="rect">
+                <a:avLst/>
+              </a:prstGeom>
+              <a:blipFill>
+                <a:blip r:embed="rId11"/>
+                <a:stretch>
+                  <a:fillRect b="-12500"/>
+                </a:stretch>
+              </a:blipFill>
+            </p:spPr>
+            <p:txBody>
+              <a:bodyPr/>
+              <a:lstStyle/>
+              <a:p>
+                <a:r>
+                  <a:rPr lang="en-US">
+                    <a:noFill/>
+                  </a:rPr>
+                  <a:t> </a:t>
+                </a:r>
+              </a:p>
+            </p:txBody>
+          </p:sp>
+        </mc:Fallback>
+      </mc:AlternateContent>
+      <p:sp>
+        <p:nvSpPr>
+          <p:cNvPr id="38" name="Arrow: Left 37">
+            <a:extLst>
+              <a:ext uri="{FF2B5EF4-FFF2-40B4-BE49-F238E27FC236}">
+                <a16:creationId xmlns:a16="http://schemas.microsoft.com/office/drawing/2014/main" id="{A7AF334D-7499-C7BA-D844-34A60B446F3C}"/>
+              </a:ext>
+            </a:extLst>
+          </p:cNvPr>
+          <p:cNvSpPr/>
+          <p:nvPr/>
+        </p:nvSpPr>
+        <p:spPr>
+          <a:xfrm rot="5400000">
+            <a:off x="3645512" y="3463721"/>
+            <a:ext cx="1283287" cy="581822"/>
+          </a:xfrm>
+          <a:prstGeom prst="leftArrow">
+            <a:avLst/>
+          </a:prstGeom>
+          <a:solidFill>
+            <a:schemeClr val="accent4"/>
+          </a:solidFill>
+          <a:ln>
+            <a:solidFill>
+              <a:schemeClr val="tx1"/>
+            </a:solidFill>
+          </a:ln>
+        </p:spPr>
+        <p:style>
+          <a:lnRef idx="2">
+            <a:schemeClr val="dk1">
+              <a:shade val="15000"/>
+            </a:schemeClr>
+          </a:lnRef>
+          <a:fillRef idx="1">
+            <a:schemeClr val="dk1"/>
+          </a:fillRef>
+          <a:effectRef idx="0">
+            <a:schemeClr val="dk1"/>
+          </a:effectRef>
+          <a:fontRef idx="minor">
+            <a:schemeClr val="lt1"/>
+          </a:fontRef>
+        </p:style>
+        <p:txBody>
+          <a:bodyPr rtlCol="0" anchor="ctr"/>
+          <a:lstStyle/>
+          <a:p>
+            <a:pPr algn="ctr"/>
+            <a:endParaRPr lang="en-US" sz="2400"/>
+          </a:p>
+        </p:txBody>
+      </p:sp>
+      <p:sp>
+        <p:nvSpPr>
+          <p:cNvPr id="40" name="Arrow: Left 39">
+            <a:extLst>
+              <a:ext uri="{FF2B5EF4-FFF2-40B4-BE49-F238E27FC236}">
+                <a16:creationId xmlns:a16="http://schemas.microsoft.com/office/drawing/2014/main" id="{06640D30-67DC-3DCD-CB49-D01CAB22AE66}"/>
+              </a:ext>
+            </a:extLst>
+          </p:cNvPr>
+          <p:cNvSpPr/>
+          <p:nvPr/>
+        </p:nvSpPr>
+        <p:spPr>
+          <a:xfrm rot="16200000">
+            <a:off x="6558742" y="3463721"/>
+            <a:ext cx="1283287" cy="581822"/>
+          </a:xfrm>
+          <a:prstGeom prst="leftArrow">
+            <a:avLst/>
+          </a:prstGeom>
+          <a:solidFill>
+            <a:schemeClr val="accent4"/>
+          </a:solidFill>
+          <a:ln>
+            <a:solidFill>
+              <a:schemeClr val="tx1"/>
+            </a:solidFill>
+          </a:ln>
+        </p:spPr>
+        <p:style>
+          <a:lnRef idx="2">
+            <a:schemeClr val="dk1">
+              <a:shade val="15000"/>
+            </a:schemeClr>
+          </a:lnRef>
+          <a:fillRef idx="1">
+            <a:schemeClr val="dk1"/>
+          </a:fillRef>
+          <a:effectRef idx="0">
+            <a:schemeClr val="dk1"/>
+          </a:effectRef>
+          <a:fontRef idx="minor">
+            <a:schemeClr val="lt1"/>
+          </a:fontRef>
+        </p:style>
+        <p:txBody>
+          <a:bodyPr rtlCol="0" anchor="ctr"/>
+          <a:lstStyle/>
+          <a:p>
+            <a:pPr algn="ctr"/>
+            <a:endParaRPr lang="en-US" sz="2400"/>
+          </a:p>
+        </p:txBody>
+      </p:sp>
+    </p:spTree>
+    <p:extLst>
+      <p:ext uri="{BB962C8B-B14F-4D97-AF65-F5344CB8AC3E}">
+        <p14:creationId xmlns:p14="http://schemas.microsoft.com/office/powerpoint/2010/main" val="651748214"/>
       </p:ext>
     </p:extLst>
   </p:cSld>

--- a/notebooks/Model_varying_mixing/Schematic.pptx
+++ b/notebooks/Model_varying_mixing/Schematic.pptx
@@ -132,7 +132,7 @@
 <file path=ppt/revisionInfo.xml><?xml version="1.0" encoding="utf-8"?>
 <p1510:revInfo xmlns:a="http://schemas.openxmlformats.org/drawingml/2006/main" xmlns:r="http://schemas.openxmlformats.org/officeDocument/2006/relationships" xmlns:p1510="http://schemas.microsoft.com/office/powerpoint/2015/10/main">
   <p1510:revLst>
-    <p1510:client id="{F9FD2602-ACE2-404E-B12E-A4182221B4C9}" v="393" dt="2026-08-10T15:32:30.322"/>
+    <p1510:client id="{F9FD2602-ACE2-404E-B12E-A4182221B4C9}" v="407" dt="2026-08-11T08:57:33.131"/>
   </p1510:revLst>
 </p1510:revInfo>
 </file>
@@ -142,12 +142,12 @@
   <pc:docChgLst>
     <pc:chgData name="Tomy Doda" userId="023a5e24-f089-4e82-9406-b78528d4275d" providerId="ADAL" clId="{46B57ECA-90EE-4DEE-B7FC-CF6B2BB407ED}"/>
     <pc:docChg chg="undo custSel addSld modSld">
-      <pc:chgData name="Tomy Doda" userId="023a5e24-f089-4e82-9406-b78528d4275d" providerId="ADAL" clId="{46B57ECA-90EE-4DEE-B7FC-CF6B2BB407ED}" dt="2026-08-10T15:32:30.322" v="438" actId="20577"/>
+      <pc:chgData name="Tomy Doda" userId="023a5e24-f089-4e82-9406-b78528d4275d" providerId="ADAL" clId="{46B57ECA-90EE-4DEE-B7FC-CF6B2BB407ED}" dt="2026-08-11T08:57:33.131" v="452" actId="20577"/>
       <pc:docMkLst>
         <pc:docMk/>
       </pc:docMkLst>
       <pc:sldChg chg="addSp delSp modSp mod">
-        <pc:chgData name="Tomy Doda" userId="023a5e24-f089-4e82-9406-b78528d4275d" providerId="ADAL" clId="{46B57ECA-90EE-4DEE-B7FC-CF6B2BB407ED}" dt="2026-08-10T15:32:26.897" v="436" actId="20577"/>
+        <pc:chgData name="Tomy Doda" userId="023a5e24-f089-4e82-9406-b78528d4275d" providerId="ADAL" clId="{46B57ECA-90EE-4DEE-B7FC-CF6B2BB407ED}" dt="2026-08-11T08:57:22.212" v="445" actId="20577"/>
         <pc:sldMkLst>
           <pc:docMk/>
           <pc:sldMk cId="983911713" sldId="421"/>
@@ -273,7 +273,7 @@
           </ac:spMkLst>
         </pc:spChg>
         <pc:spChg chg="mod">
-          <ac:chgData name="Tomy Doda" userId="023a5e24-f089-4e82-9406-b78528d4275d" providerId="ADAL" clId="{46B57ECA-90EE-4DEE-B7FC-CF6B2BB407ED}" dt="2026-08-10T15:26:13.442" v="386" actId="1076"/>
+          <ac:chgData name="Tomy Doda" userId="023a5e24-f089-4e82-9406-b78528d4275d" providerId="ADAL" clId="{46B57ECA-90EE-4DEE-B7FC-CF6B2BB407ED}" dt="2026-08-11T08:57:22.212" v="445" actId="20577"/>
           <ac:spMkLst>
             <pc:docMk/>
             <pc:sldMk cId="983911713" sldId="421"/>
@@ -330,7 +330,7 @@
         </pc:cxnChg>
       </pc:sldChg>
       <pc:sldChg chg="modSp add mod">
-        <pc:chgData name="Tomy Doda" userId="023a5e24-f089-4e82-9406-b78528d4275d" providerId="ADAL" clId="{46B57ECA-90EE-4DEE-B7FC-CF6B2BB407ED}" dt="2026-08-10T15:32:30.322" v="438" actId="20577"/>
+        <pc:chgData name="Tomy Doda" userId="023a5e24-f089-4e82-9406-b78528d4275d" providerId="ADAL" clId="{46B57ECA-90EE-4DEE-B7FC-CF6B2BB407ED}" dt="2026-08-11T08:57:33.131" v="452" actId="20577"/>
         <pc:sldMkLst>
           <pc:docMk/>
           <pc:sldMk cId="651748214" sldId="422"/>
@@ -357,6 +357,14 @@
             <pc:docMk/>
             <pc:sldMk cId="651748214" sldId="422"/>
             <ac:spMk id="22" creationId="{4CF577EA-AB38-374D-2A3A-0CC9CCE90789}"/>
+          </ac:spMkLst>
+        </pc:spChg>
+        <pc:spChg chg="mod">
+          <ac:chgData name="Tomy Doda" userId="023a5e24-f089-4e82-9406-b78528d4275d" providerId="ADAL" clId="{46B57ECA-90EE-4DEE-B7FC-CF6B2BB407ED}" dt="2026-08-11T08:57:33.131" v="452" actId="20577"/>
+          <ac:spMkLst>
+            <pc:docMk/>
+            <pc:sldMk cId="651748214" sldId="422"/>
+            <ac:spMk id="32" creationId="{18E192B0-33BE-6A75-DB22-69392121A4F8}"/>
           </ac:spMkLst>
         </pc:spChg>
         <pc:spChg chg="mod">
@@ -455,7 +463,7 @@
           <a:p>
             <a:fld id="{FB241A62-A1C5-4611-9AB2-09CF3AB05F02}" type="datetimeFigureOut">
               <a:rPr lang="de-DE" smtClean="0"/>
-              <a:t>10.08.2026</a:t>
+              <a:t>11.08.2026</a:t>
             </a:fld>
             <a:endParaRPr lang="de-DE"/>
           </a:p>
@@ -1081,7 +1089,7 @@
           <a:p>
             <a:fld id="{C5ECA247-FE2A-47EF-8DB9-999FBE78D1F7}" type="datetime1">
               <a:rPr lang="de-DE" smtClean="0"/>
-              <a:t>10.08.2026</a:t>
+              <a:t>11.08.2026</a:t>
             </a:fld>
             <a:endParaRPr lang="de-DE"/>
           </a:p>
@@ -1252,7 +1260,7 @@
           <a:p>
             <a:fld id="{E1EA6552-2A29-438B-A2CC-4FF471838D25}" type="datetime1">
               <a:rPr lang="de-DE" smtClean="0"/>
-              <a:t>10.08.2026</a:t>
+              <a:t>11.08.2026</a:t>
             </a:fld>
             <a:endParaRPr lang="de-DE"/>
           </a:p>
@@ -1459,7 +1467,7 @@
           <a:p>
             <a:fld id="{5AFFA005-B143-456C-B43F-4928703E1224}" type="datetime1">
               <a:rPr lang="de-DE" smtClean="0"/>
-              <a:t>10.08.2026</a:t>
+              <a:t>11.08.2026</a:t>
             </a:fld>
             <a:endParaRPr lang="de-DE"/>
           </a:p>
@@ -1678,7 +1686,7 @@
           <a:p>
             <a:fld id="{DD73CA2E-C4EA-4AB7-B564-38A486611F54}" type="datetime1">
               <a:rPr lang="de-DE" smtClean="0"/>
-              <a:t>10.08.2026</a:t>
+              <a:t>11.08.2026</a:t>
             </a:fld>
             <a:endParaRPr lang="de-DE"/>
           </a:p>
@@ -1894,7 +1902,7 @@
           <a:p>
             <a:fld id="{7A934844-F214-4698-8F76-9CE72359EF87}" type="datetime1">
               <a:rPr lang="de-DE" smtClean="0"/>
-              <a:t>10.08.2026</a:t>
+              <a:t>11.08.2026</a:t>
             </a:fld>
             <a:endParaRPr lang="de-DE"/>
           </a:p>
@@ -2171,7 +2179,7 @@
           <a:p>
             <a:fld id="{52B431FC-A9F2-4517-8F6E-C837182E6D38}" type="datetime1">
               <a:rPr lang="de-DE" smtClean="0"/>
-              <a:t>10.08.2026</a:t>
+              <a:t>11.08.2026</a:t>
             </a:fld>
             <a:endParaRPr lang="de-DE"/>
           </a:p>
@@ -2433,7 +2441,7 @@
           <a:p>
             <a:fld id="{47772584-EF26-4D9D-AF97-F592E4AD9E3C}" type="datetime1">
               <a:rPr lang="de-DE" smtClean="0"/>
-              <a:t>10.08.2026</a:t>
+              <a:t>11.08.2026</a:t>
             </a:fld>
             <a:endParaRPr lang="de-DE"/>
           </a:p>
@@ -2836,7 +2844,7 @@
           <a:p>
             <a:fld id="{9D0F93FE-C6FD-4201-A9D9-1B6F0940F469}" type="datetime1">
               <a:rPr lang="de-DE" smtClean="0"/>
-              <a:t>10.08.2026</a:t>
+              <a:t>11.08.2026</a:t>
             </a:fld>
             <a:endParaRPr lang="de-DE"/>
           </a:p>
@@ -2978,7 +2986,7 @@
           <a:p>
             <a:fld id="{11E140BE-9A30-428F-9875-53FA37102F3D}" type="datetime1">
               <a:rPr lang="de-DE" smtClean="0"/>
-              <a:t>10.08.2026</a:t>
+              <a:t>11.08.2026</a:t>
             </a:fld>
             <a:endParaRPr lang="de-DE"/>
           </a:p>
@@ -3097,7 +3105,7 @@
           <a:p>
             <a:fld id="{73ED589F-B4E2-4A4E-A226-7401BDE44768}" type="datetime1">
               <a:rPr lang="de-DE" smtClean="0"/>
-              <a:t>10.08.2026</a:t>
+              <a:t>11.08.2026</a:t>
             </a:fld>
             <a:endParaRPr lang="de-DE"/>
           </a:p>
@@ -3404,7 +3412,7 @@
           <a:p>
             <a:fld id="{028414A4-D98A-43BA-9863-A2EF121B96F9}" type="datetime1">
               <a:rPr lang="de-DE" smtClean="0"/>
-              <a:t>10.08.2026</a:t>
+              <a:t>11.08.2026</a:t>
             </a:fld>
             <a:endParaRPr lang="de-DE"/>
           </a:p>
@@ -3605,7 +3613,7 @@
           <a:p>
             <a:fld id="{C10E3B16-34CF-4AC7-98ED-B1422B31FFB6}" type="datetime1">
               <a:rPr lang="de-DE" smtClean="0"/>
-              <a:t>10.08.2026</a:t>
+              <a:t>11.08.2026</a:t>
             </a:fld>
             <a:endParaRPr lang="de-DE"/>
           </a:p>
@@ -3892,7 +3900,7 @@
           <a:p>
             <a:fld id="{D058E760-9A20-4071-815D-645CCCCC2D83}" type="datetime1">
               <a:rPr lang="de-DE" smtClean="0"/>
-              <a:t>10.08.2026</a:t>
+              <a:t>11.08.2026</a:t>
             </a:fld>
             <a:endParaRPr lang="de-DE"/>
           </a:p>
@@ -4094,7 +4102,7 @@
           <a:p>
             <a:fld id="{8B3EF7F4-A883-4B18-9552-F3C3223DEF14}" type="datetime1">
               <a:rPr lang="de-DE" smtClean="0"/>
-              <a:t>10.08.2026</a:t>
+              <a:t>11.08.2026</a:t>
             </a:fld>
             <a:endParaRPr lang="de-DE"/>
           </a:p>
@@ -4301,7 +4309,7 @@
           <a:p>
             <a:fld id="{F664108E-EA3B-4E54-AEAB-69A79F6B8899}" type="datetime1">
               <a:rPr lang="de-DE" smtClean="0"/>
-              <a:t>10.08.2026</a:t>
+              <a:t>11.08.2026</a:t>
             </a:fld>
             <a:endParaRPr lang="de-DE"/>
           </a:p>
@@ -4574,7 +4582,7 @@
           <a:p>
             <a:fld id="{6DD8A520-B1B0-4EF4-9A43-67432A834EC2}" type="datetime1">
               <a:rPr lang="de-DE" smtClean="0"/>
-              <a:t>10.08.2026</a:t>
+              <a:t>11.08.2026</a:t>
             </a:fld>
             <a:endParaRPr lang="de-DE"/>
           </a:p>
@@ -4836,7 +4844,7 @@
           <a:p>
             <a:fld id="{8AB35BDD-2E7A-4534-A0E5-E526C1F6A616}" type="datetime1">
               <a:rPr lang="de-DE" smtClean="0"/>
-              <a:t>10.08.2026</a:t>
+              <a:t>11.08.2026</a:t>
             </a:fld>
             <a:endParaRPr lang="de-DE"/>
           </a:p>
@@ -5239,7 +5247,7 @@
           <a:p>
             <a:fld id="{600DB9EB-2057-4AD9-A90C-C9132243CB3F}" type="datetime1">
               <a:rPr lang="de-DE" smtClean="0"/>
-              <a:t>10.08.2026</a:t>
+              <a:t>11.08.2026</a:t>
             </a:fld>
             <a:endParaRPr lang="de-DE"/>
           </a:p>
@@ -5381,7 +5389,7 @@
           <a:p>
             <a:fld id="{CE14AEF0-EDF0-4BEB-9ED1-40A762B86015}" type="datetime1">
               <a:rPr lang="de-DE" smtClean="0"/>
-              <a:t>10.08.2026</a:t>
+              <a:t>11.08.2026</a:t>
             </a:fld>
             <a:endParaRPr lang="de-DE"/>
           </a:p>
@@ -5500,7 +5508,7 @@
           <a:p>
             <a:fld id="{1BB8B5A9-28CE-4FED-AA21-DBCD3DE06A78}" type="datetime1">
               <a:rPr lang="de-DE" smtClean="0"/>
-              <a:t>10.08.2026</a:t>
+              <a:t>11.08.2026</a:t>
             </a:fld>
             <a:endParaRPr lang="de-DE"/>
           </a:p>
@@ -5807,7 +5815,7 @@
           <a:p>
             <a:fld id="{F11D34DF-07E7-4DD8-B3FB-908782C071D4}" type="datetime1">
               <a:rPr lang="de-DE" smtClean="0"/>
-              <a:t>10.08.2026</a:t>
+              <a:t>11.08.2026</a:t>
             </a:fld>
             <a:endParaRPr lang="de-DE"/>
           </a:p>
@@ -6090,7 +6098,7 @@
           <a:p>
             <a:fld id="{F1CFE722-D1B0-4086-81BB-7FAE4E573927}" type="datetime1">
               <a:rPr lang="de-DE" smtClean="0"/>
-              <a:t>10.08.2026</a:t>
+              <a:t>11.08.2026</a:t>
             </a:fld>
             <a:endParaRPr lang="de-DE"/>
           </a:p>
@@ -7350,8 +7358,8 @@
           </a:p>
         </p:txBody>
       </p:sp>
-      <mc:AlternateContent xmlns:mc="http://schemas.openxmlformats.org/markup-compatibility/2006">
-        <mc:Choice xmlns:a14="http://schemas.microsoft.com/office/drawing/2010/main" Requires="a14">
+      <mc:AlternateContent xmlns:mc="http://schemas.openxmlformats.org/markup-compatibility/2006" xmlns:a14="http://schemas.microsoft.com/office/drawing/2010/main">
+        <mc:Choice Requires="a14">
           <p:sp>
             <p:nvSpPr>
               <p:cNvPr id="16" name="TextBox 15">
@@ -7543,7 +7551,7 @@
             </p:txBody>
           </p:sp>
         </mc:Choice>
-        <mc:Fallback>
+        <mc:Fallback xmlns="">
           <p:sp>
             <p:nvSpPr>
               <p:cNvPr id="16" name="TextBox 15">
@@ -7588,8 +7596,8 @@
           </p:sp>
         </mc:Fallback>
       </mc:AlternateContent>
-      <mc:AlternateContent xmlns:mc="http://schemas.openxmlformats.org/markup-compatibility/2006">
-        <mc:Choice xmlns:a14="http://schemas.microsoft.com/office/drawing/2010/main" Requires="a14">
+      <mc:AlternateContent xmlns:mc="http://schemas.openxmlformats.org/markup-compatibility/2006" xmlns:a14="http://schemas.microsoft.com/office/drawing/2010/main">
+        <mc:Choice Requires="a14">
           <p:sp>
             <p:nvSpPr>
               <p:cNvPr id="17" name="TextBox 16">
@@ -7795,7 +7803,7 @@
             </p:txBody>
           </p:sp>
         </mc:Choice>
-        <mc:Fallback>
+        <mc:Fallback xmlns="">
           <p:sp>
             <p:nvSpPr>
               <p:cNvPr id="17" name="TextBox 16">
@@ -7840,8 +7848,8 @@
           </p:sp>
         </mc:Fallback>
       </mc:AlternateContent>
-      <mc:AlternateContent xmlns:mc="http://schemas.openxmlformats.org/markup-compatibility/2006">
-        <mc:Choice xmlns:a14="http://schemas.microsoft.com/office/drawing/2010/main" Requires="a14">
+      <mc:AlternateContent xmlns:mc="http://schemas.openxmlformats.org/markup-compatibility/2006" xmlns:a14="http://schemas.microsoft.com/office/drawing/2010/main">
+        <mc:Choice Requires="a14">
           <p:sp>
             <p:nvSpPr>
               <p:cNvPr id="19" name="TextBox 18">
@@ -7927,7 +7935,7 @@
             </p:txBody>
           </p:sp>
         </mc:Choice>
-        <mc:Fallback>
+        <mc:Fallback xmlns="">
           <p:sp>
             <p:nvSpPr>
               <p:cNvPr id="19" name="TextBox 18">
@@ -7972,8 +7980,8 @@
           </p:sp>
         </mc:Fallback>
       </mc:AlternateContent>
-      <mc:AlternateContent xmlns:mc="http://schemas.openxmlformats.org/markup-compatibility/2006">
-        <mc:Choice xmlns:a14="http://schemas.microsoft.com/office/drawing/2010/main" Requires="a14">
+      <mc:AlternateContent xmlns:mc="http://schemas.openxmlformats.org/markup-compatibility/2006" xmlns:a14="http://schemas.microsoft.com/office/drawing/2010/main">
+        <mc:Choice Requires="a14">
           <p:sp>
             <p:nvSpPr>
               <p:cNvPr id="20" name="TextBox 19">
@@ -8059,7 +8067,7 @@
             </p:txBody>
           </p:sp>
         </mc:Choice>
-        <mc:Fallback>
+        <mc:Fallback xmlns="">
           <p:sp>
             <p:nvSpPr>
               <p:cNvPr id="20" name="TextBox 19">
@@ -8150,8 +8158,8 @@
           </a:p>
         </p:txBody>
       </p:sp>
-      <mc:AlternateContent xmlns:mc="http://schemas.openxmlformats.org/markup-compatibility/2006">
-        <mc:Choice xmlns:a14="http://schemas.microsoft.com/office/drawing/2010/main" Requires="a14">
+      <mc:AlternateContent xmlns:mc="http://schemas.openxmlformats.org/markup-compatibility/2006" xmlns:a14="http://schemas.microsoft.com/office/drawing/2010/main">
+        <mc:Choice Requires="a14">
           <p:sp>
             <p:nvSpPr>
               <p:cNvPr id="28" name="TextBox 27">
@@ -8366,7 +8374,7 @@
             </p:txBody>
           </p:sp>
         </mc:Choice>
-        <mc:Fallback>
+        <mc:Fallback xmlns="">
           <p:sp>
             <p:nvSpPr>
               <p:cNvPr id="28" name="TextBox 27">
@@ -8541,7 +8549,7 @@
                                   </a:solidFill>
                                   <a:latin typeface="Cambria Math" panose="02040503050406030204" pitchFamily="18" charset="0"/>
                                 </a:rPr>
-                                <m:t>𝑑𝑖𝑓𝑓</m:t>
+                                <m:t>𝑎𝑑𝑣</m:t>
                               </m:r>
                             </m:sub>
                           </m:sSub>
@@ -8740,8 +8748,8 @@
           </p:sp>
         </mc:Fallback>
       </mc:AlternateContent>
-      <mc:AlternateContent xmlns:mc="http://schemas.openxmlformats.org/markup-compatibility/2006">
-        <mc:Choice xmlns:a14="http://schemas.microsoft.com/office/drawing/2010/main" Requires="a14">
+      <mc:AlternateContent xmlns:mc="http://schemas.openxmlformats.org/markup-compatibility/2006" xmlns:a14="http://schemas.microsoft.com/office/drawing/2010/main">
+        <mc:Choice Requires="a14">
           <p:sp>
             <p:nvSpPr>
               <p:cNvPr id="36" name="TextBox 35">
@@ -8958,7 +8966,7 @@
             </p:txBody>
           </p:sp>
         </mc:Choice>
-        <mc:Fallback>
+        <mc:Fallback xmlns="">
           <p:sp>
             <p:nvSpPr>
               <p:cNvPr id="36" name="TextBox 35">
@@ -9153,8 +9161,8 @@
           </a:fontRef>
         </p:style>
       </p:cxnSp>
-      <mc:AlternateContent xmlns:mc="http://schemas.openxmlformats.org/markup-compatibility/2006">
-        <mc:Choice xmlns:a14="http://schemas.microsoft.com/office/drawing/2010/main" Requires="a14">
+      <mc:AlternateContent xmlns:mc="http://schemas.openxmlformats.org/markup-compatibility/2006" xmlns:a14="http://schemas.microsoft.com/office/drawing/2010/main">
+        <mc:Choice Requires="a14">
           <p:sp>
             <p:nvSpPr>
               <p:cNvPr id="9" name="TextBox 8">
@@ -9238,7 +9246,7 @@
             </p:txBody>
           </p:sp>
         </mc:Choice>
-        <mc:Fallback>
+        <mc:Fallback xmlns="">
           <p:sp>
             <p:nvSpPr>
               <p:cNvPr id="9" name="TextBox 8">
@@ -9283,8 +9291,8 @@
           </p:sp>
         </mc:Fallback>
       </mc:AlternateContent>
-      <mc:AlternateContent xmlns:mc="http://schemas.openxmlformats.org/markup-compatibility/2006">
-        <mc:Choice xmlns:a14="http://schemas.microsoft.com/office/drawing/2010/main" Requires="a14">
+      <mc:AlternateContent xmlns:mc="http://schemas.openxmlformats.org/markup-compatibility/2006" xmlns:a14="http://schemas.microsoft.com/office/drawing/2010/main">
+        <mc:Choice Requires="a14">
           <p:sp>
             <p:nvSpPr>
               <p:cNvPr id="11" name="TextBox 10">
@@ -9918,7 +9926,7 @@
             </p:txBody>
           </p:sp>
         </mc:Choice>
-        <mc:Fallback>
+        <mc:Fallback xmlns="">
           <p:sp>
             <p:nvSpPr>
               <p:cNvPr id="11" name="TextBox 10">
@@ -10390,8 +10398,8 @@
           </a:p>
         </p:txBody>
       </p:sp>
-      <mc:AlternateContent xmlns:mc="http://schemas.openxmlformats.org/markup-compatibility/2006">
-        <mc:Choice xmlns:a14="http://schemas.microsoft.com/office/drawing/2010/main" Requires="a14">
+      <mc:AlternateContent xmlns:mc="http://schemas.openxmlformats.org/markup-compatibility/2006" xmlns:a14="http://schemas.microsoft.com/office/drawing/2010/main">
+        <mc:Choice Requires="a14">
           <p:sp>
             <p:nvSpPr>
               <p:cNvPr id="16" name="TextBox 15">
@@ -10583,7 +10591,7 @@
             </p:txBody>
           </p:sp>
         </mc:Choice>
-        <mc:Fallback>
+        <mc:Fallback xmlns="">
           <p:sp>
             <p:nvSpPr>
               <p:cNvPr id="16" name="TextBox 15">
@@ -10628,8 +10636,8 @@
           </p:sp>
         </mc:Fallback>
       </mc:AlternateContent>
-      <mc:AlternateContent xmlns:mc="http://schemas.openxmlformats.org/markup-compatibility/2006">
-        <mc:Choice xmlns:a14="http://schemas.microsoft.com/office/drawing/2010/main" Requires="a14">
+      <mc:AlternateContent xmlns:mc="http://schemas.openxmlformats.org/markup-compatibility/2006" xmlns:a14="http://schemas.microsoft.com/office/drawing/2010/main">
+        <mc:Choice Requires="a14">
           <p:sp>
             <p:nvSpPr>
               <p:cNvPr id="17" name="TextBox 16">
@@ -10835,7 +10843,7 @@
             </p:txBody>
           </p:sp>
         </mc:Choice>
-        <mc:Fallback>
+        <mc:Fallback xmlns="">
           <p:sp>
             <p:nvSpPr>
               <p:cNvPr id="17" name="TextBox 16">
@@ -10880,8 +10888,8 @@
           </p:sp>
         </mc:Fallback>
       </mc:AlternateContent>
-      <mc:AlternateContent xmlns:mc="http://schemas.openxmlformats.org/markup-compatibility/2006">
-        <mc:Choice xmlns:a14="http://schemas.microsoft.com/office/drawing/2010/main" Requires="a14">
+      <mc:AlternateContent xmlns:mc="http://schemas.openxmlformats.org/markup-compatibility/2006" xmlns:a14="http://schemas.microsoft.com/office/drawing/2010/main">
+        <mc:Choice Requires="a14">
           <p:sp>
             <p:nvSpPr>
               <p:cNvPr id="19" name="TextBox 18">
@@ -10967,7 +10975,7 @@
             </p:txBody>
           </p:sp>
         </mc:Choice>
-        <mc:Fallback>
+        <mc:Fallback xmlns="">
           <p:sp>
             <p:nvSpPr>
               <p:cNvPr id="19" name="TextBox 18">
@@ -11012,8 +11020,8 @@
           </p:sp>
         </mc:Fallback>
       </mc:AlternateContent>
-      <mc:AlternateContent xmlns:mc="http://schemas.openxmlformats.org/markup-compatibility/2006">
-        <mc:Choice xmlns:a14="http://schemas.microsoft.com/office/drawing/2010/main" Requires="a14">
+      <mc:AlternateContent xmlns:mc="http://schemas.openxmlformats.org/markup-compatibility/2006" xmlns:a14="http://schemas.microsoft.com/office/drawing/2010/main">
+        <mc:Choice Requires="a14">
           <p:sp>
             <p:nvSpPr>
               <p:cNvPr id="20" name="TextBox 19">
@@ -11099,7 +11107,7 @@
             </p:txBody>
           </p:sp>
         </mc:Choice>
-        <mc:Fallback>
+        <mc:Fallback xmlns="">
           <p:sp>
             <p:nvSpPr>
               <p:cNvPr id="20" name="TextBox 19">
@@ -11186,8 +11194,8 @@
           </a:fontRef>
         </p:style>
       </p:cxnSp>
-      <mc:AlternateContent xmlns:mc="http://schemas.openxmlformats.org/markup-compatibility/2006">
-        <mc:Choice xmlns:a14="http://schemas.microsoft.com/office/drawing/2010/main" Requires="a14">
+      <mc:AlternateContent xmlns:mc="http://schemas.openxmlformats.org/markup-compatibility/2006" xmlns:a14="http://schemas.microsoft.com/office/drawing/2010/main">
+        <mc:Choice Requires="a14">
           <p:sp>
             <p:nvSpPr>
               <p:cNvPr id="22" name="TextBox 21">
@@ -11271,7 +11279,7 @@
             </p:txBody>
           </p:sp>
         </mc:Choice>
-        <mc:Fallback>
+        <mc:Fallback xmlns="">
           <p:sp>
             <p:nvSpPr>
               <p:cNvPr id="22" name="TextBox 21">
@@ -11362,8 +11370,8 @@
           </a:p>
         </p:txBody>
       </p:sp>
-      <mc:AlternateContent xmlns:mc="http://schemas.openxmlformats.org/markup-compatibility/2006">
-        <mc:Choice xmlns:a14="http://schemas.microsoft.com/office/drawing/2010/main" Requires="a14">
+      <mc:AlternateContent xmlns:mc="http://schemas.openxmlformats.org/markup-compatibility/2006" xmlns:a14="http://schemas.microsoft.com/office/drawing/2010/main">
+        <mc:Choice Requires="a14">
           <p:sp>
             <p:nvSpPr>
               <p:cNvPr id="28" name="TextBox 27">
@@ -11578,7 +11586,7 @@
             </p:txBody>
           </p:sp>
         </mc:Choice>
-        <mc:Fallback>
+        <mc:Fallback xmlns="">
           <p:sp>
             <p:nvSpPr>
               <p:cNvPr id="28" name="TextBox 27">
@@ -11753,7 +11761,7 @@
                                   </a:solidFill>
                                   <a:latin typeface="Cambria Math" panose="02040503050406030204" pitchFamily="18" charset="0"/>
                                 </a:rPr>
-                                <m:t>𝑑𝑖𝑓𝑓</m:t>
+                                <m:t>𝑎𝑑𝑣</m:t>
                               </m:r>
                             </m:sub>
                           </m:sSub>
@@ -11952,8 +11960,8 @@
           </p:sp>
         </mc:Fallback>
       </mc:AlternateContent>
-      <mc:AlternateContent xmlns:mc="http://schemas.openxmlformats.org/markup-compatibility/2006">
-        <mc:Choice xmlns:a14="http://schemas.microsoft.com/office/drawing/2010/main" Requires="a14">
+      <mc:AlternateContent xmlns:mc="http://schemas.openxmlformats.org/markup-compatibility/2006" xmlns:a14="http://schemas.microsoft.com/office/drawing/2010/main">
+        <mc:Choice Requires="a14">
           <p:sp>
             <p:nvSpPr>
               <p:cNvPr id="34" name="TextBox 33">
@@ -12587,7 +12595,7 @@
             </p:txBody>
           </p:sp>
         </mc:Choice>
-        <mc:Fallback>
+        <mc:Fallback xmlns="">
           <p:sp>
             <p:nvSpPr>
               <p:cNvPr id="34" name="TextBox 33">
@@ -12632,8 +12640,8 @@
           </p:sp>
         </mc:Fallback>
       </mc:AlternateContent>
-      <mc:AlternateContent xmlns:mc="http://schemas.openxmlformats.org/markup-compatibility/2006">
-        <mc:Choice xmlns:a14="http://schemas.microsoft.com/office/drawing/2010/main" Requires="a14">
+      <mc:AlternateContent xmlns:mc="http://schemas.openxmlformats.org/markup-compatibility/2006" xmlns:a14="http://schemas.microsoft.com/office/drawing/2010/main">
+        <mc:Choice Requires="a14">
           <p:sp>
             <p:nvSpPr>
               <p:cNvPr id="36" name="TextBox 35">
@@ -12850,7 +12858,7 @@
             </p:txBody>
           </p:sp>
         </mc:Choice>
-        <mc:Fallback>
+        <mc:Fallback xmlns="">
           <p:sp>
             <p:nvSpPr>
               <p:cNvPr id="36" name="TextBox 35">

--- a/notebooks/Model_varying_mixing/Schematic.pptx
+++ b/notebooks/Model_varying_mixing/Schematic.pptx
@@ -6,10 +6,11 @@
     <p:sldMasterId id="2147483720" r:id="rId2"/>
   </p:sldMasterIdLst>
   <p:notesMasterIdLst>
-    <p:notesMasterId r:id="rId4"/>
+    <p:notesMasterId r:id="rId5"/>
   </p:notesMasterIdLst>
   <p:sldIdLst>
     <p:sldId id="421" r:id="rId3"/>
+    <p:sldId id="422" r:id="rId4"/>
   </p:sldIdLst>
   <p:sldSz cx="12192000" cy="6858000"/>
   <p:notesSz cx="6858000" cy="9144000"/>
@@ -131,7 +132,7 @@
 <file path=ppt/revisionInfo.xml><?xml version="1.0" encoding="utf-8"?>
 <p1510:revInfo xmlns:a="http://schemas.openxmlformats.org/drawingml/2006/main" xmlns:r="http://schemas.openxmlformats.org/officeDocument/2006/relationships" xmlns:p1510="http://schemas.microsoft.com/office/powerpoint/2015/10/main">
   <p1510:revLst>
-    <p1510:client id="{F9FD2602-ACE2-404E-B12E-A4182221B4C9}" v="333" dt="2026-08-06T14:29:43.674"/>
+    <p1510:client id="{F9FD2602-ACE2-404E-B12E-A4182221B4C9}" v="407" dt="2026-08-11T08:57:33.131"/>
   </p1510:revLst>
 </p1510:revInfo>
 </file>
@@ -140,19 +141,19 @@
 <pc:chgInfo xmlns:a="http://schemas.openxmlformats.org/drawingml/2006/main" xmlns:r="http://schemas.openxmlformats.org/officeDocument/2006/relationships" xmlns:ac="http://schemas.microsoft.com/office/drawing/2013/main/command" xmlns:pc="http://schemas.microsoft.com/office/powerpoint/2013/main/command">
   <pc:docChgLst>
     <pc:chgData name="Tomy Doda" userId="023a5e24-f089-4e82-9406-b78528d4275d" providerId="ADAL" clId="{46B57ECA-90EE-4DEE-B7FC-CF6B2BB407ED}"/>
-    <pc:docChg chg="modSld">
-      <pc:chgData name="Tomy Doda" userId="023a5e24-f089-4e82-9406-b78528d4275d" providerId="ADAL" clId="{46B57ECA-90EE-4DEE-B7FC-CF6B2BB407ED}" dt="2026-08-06T14:29:52.385" v="334" actId="1076"/>
+    <pc:docChg chg="undo custSel addSld modSld">
+      <pc:chgData name="Tomy Doda" userId="023a5e24-f089-4e82-9406-b78528d4275d" providerId="ADAL" clId="{46B57ECA-90EE-4DEE-B7FC-CF6B2BB407ED}" dt="2026-08-11T08:57:33.131" v="452" actId="20577"/>
       <pc:docMkLst>
         <pc:docMk/>
       </pc:docMkLst>
-      <pc:sldChg chg="delSp modSp mod">
-        <pc:chgData name="Tomy Doda" userId="023a5e24-f089-4e82-9406-b78528d4275d" providerId="ADAL" clId="{46B57ECA-90EE-4DEE-B7FC-CF6B2BB407ED}" dt="2026-08-06T14:29:52.385" v="334" actId="1076"/>
+      <pc:sldChg chg="addSp delSp modSp mod">
+        <pc:chgData name="Tomy Doda" userId="023a5e24-f089-4e82-9406-b78528d4275d" providerId="ADAL" clId="{46B57ECA-90EE-4DEE-B7FC-CF6B2BB407ED}" dt="2026-08-11T08:57:22.212" v="445" actId="20577"/>
         <pc:sldMkLst>
           <pc:docMk/>
           <pc:sldMk cId="983911713" sldId="421"/>
         </pc:sldMkLst>
         <pc:spChg chg="mod topLvl">
-          <ac:chgData name="Tomy Doda" userId="023a5e24-f089-4e82-9406-b78528d4275d" providerId="ADAL" clId="{46B57ECA-90EE-4DEE-B7FC-CF6B2BB407ED}" dt="2026-08-06T09:25:08.951" v="314" actId="165"/>
+          <ac:chgData name="Tomy Doda" userId="023a5e24-f089-4e82-9406-b78528d4275d" providerId="ADAL" clId="{46B57ECA-90EE-4DEE-B7FC-CF6B2BB407ED}" dt="2026-08-10T15:25:59.382" v="383" actId="14100"/>
           <ac:spMkLst>
             <pc:docMk/>
             <pc:sldMk cId="983911713" sldId="421"/>
@@ -168,7 +169,7 @@
           </ac:spMkLst>
         </pc:spChg>
         <pc:spChg chg="mod topLvl">
-          <ac:chgData name="Tomy Doda" userId="023a5e24-f089-4e82-9406-b78528d4275d" providerId="ADAL" clId="{46B57ECA-90EE-4DEE-B7FC-CF6B2BB407ED}" dt="2026-08-06T09:25:08.951" v="314" actId="165"/>
+          <ac:chgData name="Tomy Doda" userId="023a5e24-f089-4e82-9406-b78528d4275d" providerId="ADAL" clId="{46B57ECA-90EE-4DEE-B7FC-CF6B2BB407ED}" dt="2026-08-10T15:25:59.507" v="384" actId="14100"/>
           <ac:spMkLst>
             <pc:docMk/>
             <pc:sldMk cId="983911713" sldId="421"/>
@@ -176,23 +177,31 @@
           </ac:spMkLst>
         </pc:spChg>
         <pc:spChg chg="mod topLvl">
-          <ac:chgData name="Tomy Doda" userId="023a5e24-f089-4e82-9406-b78528d4275d" providerId="ADAL" clId="{46B57ECA-90EE-4DEE-B7FC-CF6B2BB407ED}" dt="2026-08-06T09:25:08.951" v="314" actId="165"/>
+          <ac:chgData name="Tomy Doda" userId="023a5e24-f089-4e82-9406-b78528d4275d" providerId="ADAL" clId="{46B57ECA-90EE-4DEE-B7FC-CF6B2BB407ED}" dt="2026-08-10T15:25:33.804" v="375" actId="1076"/>
           <ac:spMkLst>
             <pc:docMk/>
             <pc:sldMk cId="983911713" sldId="421"/>
             <ac:spMk id="6" creationId="{0E157C3B-8AD3-147A-F83A-5CF1C5A4FA03}"/>
           </ac:spMkLst>
         </pc:spChg>
-        <pc:spChg chg="mod">
-          <ac:chgData name="Tomy Doda" userId="023a5e24-f089-4e82-9406-b78528d4275d" providerId="ADAL" clId="{46B57ECA-90EE-4DEE-B7FC-CF6B2BB407ED}" dt="2026-08-06T09:11:41.125" v="85" actId="1076"/>
+        <pc:spChg chg="add mod">
+          <ac:chgData name="Tomy Doda" userId="023a5e24-f089-4e82-9406-b78528d4275d" providerId="ADAL" clId="{46B57ECA-90EE-4DEE-B7FC-CF6B2BB407ED}" dt="2026-08-10T15:32:11.741" v="429"/>
           <ac:spMkLst>
             <pc:docMk/>
             <pc:sldMk cId="983911713" sldId="421"/>
-            <ac:spMk id="9" creationId="{0CF3EAD8-08CE-C407-B8B6-D1850E1AF9CE}"/>
+            <ac:spMk id="9" creationId="{57C3FD58-40D9-8A9F-7934-AA17ACC4FDFD}"/>
+          </ac:spMkLst>
+        </pc:spChg>
+        <pc:spChg chg="add mod">
+          <ac:chgData name="Tomy Doda" userId="023a5e24-f089-4e82-9406-b78528d4275d" providerId="ADAL" clId="{46B57ECA-90EE-4DEE-B7FC-CF6B2BB407ED}" dt="2026-08-10T15:32:26.897" v="436" actId="20577"/>
+          <ac:spMkLst>
+            <pc:docMk/>
+            <pc:sldMk cId="983911713" sldId="421"/>
+            <ac:spMk id="11" creationId="{20618B63-DF31-4F30-FDFD-1D879E91495D}"/>
           </ac:spMkLst>
         </pc:spChg>
         <pc:spChg chg="mod topLvl">
-          <ac:chgData name="Tomy Doda" userId="023a5e24-f089-4e82-9406-b78528d4275d" providerId="ADAL" clId="{46B57ECA-90EE-4DEE-B7FC-CF6B2BB407ED}" dt="2026-08-06T09:25:08.951" v="314" actId="165"/>
+          <ac:chgData name="Tomy Doda" userId="023a5e24-f089-4e82-9406-b78528d4275d" providerId="ADAL" clId="{46B57ECA-90EE-4DEE-B7FC-CF6B2BB407ED}" dt="2026-08-10T15:24:30.440" v="367" actId="404"/>
           <ac:spMkLst>
             <pc:docMk/>
             <pc:sldMk cId="983911713" sldId="421"/>
@@ -200,7 +209,7 @@
           </ac:spMkLst>
         </pc:spChg>
         <pc:spChg chg="mod">
-          <ac:chgData name="Tomy Doda" userId="023a5e24-f089-4e82-9406-b78528d4275d" providerId="ADAL" clId="{46B57ECA-90EE-4DEE-B7FC-CF6B2BB407ED}" dt="2026-08-06T09:23:58.527" v="311" actId="255"/>
+          <ac:chgData name="Tomy Doda" userId="023a5e24-f089-4e82-9406-b78528d4275d" providerId="ADAL" clId="{46B57ECA-90EE-4DEE-B7FC-CF6B2BB407ED}" dt="2026-08-10T15:25:42.759" v="377" actId="1076"/>
           <ac:spMkLst>
             <pc:docMk/>
             <pc:sldMk cId="983911713" sldId="421"/>
@@ -208,7 +217,7 @@
           </ac:spMkLst>
         </pc:spChg>
         <pc:spChg chg="mod">
-          <ac:chgData name="Tomy Doda" userId="023a5e24-f089-4e82-9406-b78528d4275d" providerId="ADAL" clId="{46B57ECA-90EE-4DEE-B7FC-CF6B2BB407ED}" dt="2026-08-06T14:29:52.385" v="334" actId="1076"/>
+          <ac:chgData name="Tomy Doda" userId="023a5e24-f089-4e82-9406-b78528d4275d" providerId="ADAL" clId="{46B57ECA-90EE-4DEE-B7FC-CF6B2BB407ED}" dt="2026-08-10T15:27:26.015" v="415" actId="14100"/>
           <ac:spMkLst>
             <pc:docMk/>
             <pc:sldMk cId="983911713" sldId="421"/>
@@ -216,15 +225,7 @@
           </ac:spMkLst>
         </pc:spChg>
         <pc:spChg chg="mod">
-          <ac:chgData name="Tomy Doda" userId="023a5e24-f089-4e82-9406-b78528d4275d" providerId="ADAL" clId="{46B57ECA-90EE-4DEE-B7FC-CF6B2BB407ED}" dt="2026-08-06T07:57:18.731" v="26" actId="20577"/>
-          <ac:spMkLst>
-            <pc:docMk/>
-            <pc:sldMk cId="983911713" sldId="421"/>
-            <ac:spMk id="18" creationId="{E27ECA34-1AD6-94DE-9B52-60F43B85C510}"/>
-          </ac:spMkLst>
-        </pc:spChg>
-        <pc:spChg chg="mod">
-          <ac:chgData name="Tomy Doda" userId="023a5e24-f089-4e82-9406-b78528d4275d" providerId="ADAL" clId="{46B57ECA-90EE-4DEE-B7FC-CF6B2BB407ED}" dt="2026-08-06T09:24:04.050" v="312" actId="113"/>
+          <ac:chgData name="Tomy Doda" userId="023a5e24-f089-4e82-9406-b78528d4275d" providerId="ADAL" clId="{46B57ECA-90EE-4DEE-B7FC-CF6B2BB407ED}" dt="2026-08-10T15:24:59.141" v="371" actId="12788"/>
           <ac:spMkLst>
             <pc:docMk/>
             <pc:sldMk cId="983911713" sldId="421"/>
@@ -232,15 +233,15 @@
           </ac:spMkLst>
         </pc:spChg>
         <pc:spChg chg="mod">
-          <ac:chgData name="Tomy Doda" userId="023a5e24-f089-4e82-9406-b78528d4275d" providerId="ADAL" clId="{46B57ECA-90EE-4DEE-B7FC-CF6B2BB407ED}" dt="2026-08-06T09:24:06.316" v="313" actId="113"/>
+          <ac:chgData name="Tomy Doda" userId="023a5e24-f089-4e82-9406-b78528d4275d" providerId="ADAL" clId="{46B57ECA-90EE-4DEE-B7FC-CF6B2BB407ED}" dt="2026-08-10T15:25:33.804" v="375" actId="1076"/>
           <ac:spMkLst>
             <pc:docMk/>
             <pc:sldMk cId="983911713" sldId="421"/>
             <ac:spMk id="20" creationId="{36AFB73E-E3E7-E2E7-34BD-1242A993AF91}"/>
           </ac:spMkLst>
         </pc:spChg>
-        <pc:spChg chg="mod">
-          <ac:chgData name="Tomy Doda" userId="023a5e24-f089-4e82-9406-b78528d4275d" providerId="ADAL" clId="{46B57ECA-90EE-4DEE-B7FC-CF6B2BB407ED}" dt="2026-08-06T09:11:41.125" v="85" actId="1076"/>
+        <pc:spChg chg="del mod">
+          <ac:chgData name="Tomy Doda" userId="023a5e24-f089-4e82-9406-b78528d4275d" providerId="ADAL" clId="{46B57ECA-90EE-4DEE-B7FC-CF6B2BB407ED}" dt="2026-08-10T15:32:08.990" v="426" actId="478"/>
           <ac:spMkLst>
             <pc:docMk/>
             <pc:sldMk cId="983911713" sldId="421"/>
@@ -248,7 +249,7 @@
           </ac:spMkLst>
         </pc:spChg>
         <pc:spChg chg="mod">
-          <ac:chgData name="Tomy Doda" userId="023a5e24-f089-4e82-9406-b78528d4275d" providerId="ADAL" clId="{46B57ECA-90EE-4DEE-B7FC-CF6B2BB407ED}" dt="2026-08-06T09:23:58.527" v="311" actId="255"/>
+          <ac:chgData name="Tomy Doda" userId="023a5e24-f089-4e82-9406-b78528d4275d" providerId="ADAL" clId="{46B57ECA-90EE-4DEE-B7FC-CF6B2BB407ED}" dt="2026-08-10T15:25:33.804" v="375" actId="1076"/>
           <ac:spMkLst>
             <pc:docMk/>
             <pc:sldMk cId="983911713" sldId="421"/>
@@ -256,7 +257,7 @@
           </ac:spMkLst>
         </pc:spChg>
         <pc:spChg chg="mod">
-          <ac:chgData name="Tomy Doda" userId="023a5e24-f089-4e82-9406-b78528d4275d" providerId="ADAL" clId="{46B57ECA-90EE-4DEE-B7FC-CF6B2BB407ED}" dt="2026-08-06T09:23:58.527" v="311" actId="255"/>
+          <ac:chgData name="Tomy Doda" userId="023a5e24-f089-4e82-9406-b78528d4275d" providerId="ADAL" clId="{46B57ECA-90EE-4DEE-B7FC-CF6B2BB407ED}" dt="2026-08-10T15:25:40.556" v="376" actId="1076"/>
           <ac:spMkLst>
             <pc:docMk/>
             <pc:sldMk cId="983911713" sldId="421"/>
@@ -264,15 +265,23 @@
           </ac:spMkLst>
         </pc:spChg>
         <pc:spChg chg="mod">
-          <ac:chgData name="Tomy Doda" userId="023a5e24-f089-4e82-9406-b78528d4275d" providerId="ADAL" clId="{46B57ECA-90EE-4DEE-B7FC-CF6B2BB407ED}" dt="2026-08-06T09:23:53.325" v="310" actId="255"/>
+          <ac:chgData name="Tomy Doda" userId="023a5e24-f089-4e82-9406-b78528d4275d" providerId="ADAL" clId="{46B57ECA-90EE-4DEE-B7FC-CF6B2BB407ED}" dt="2026-08-10T15:26:20.848" v="387" actId="555"/>
+          <ac:spMkLst>
+            <pc:docMk/>
+            <pc:sldMk cId="983911713" sldId="421"/>
+            <ac:spMk id="30" creationId="{B1D5945A-3C95-0A5C-C7B7-BE4551652C77}"/>
+          </ac:spMkLst>
+        </pc:spChg>
+        <pc:spChg chg="mod">
+          <ac:chgData name="Tomy Doda" userId="023a5e24-f089-4e82-9406-b78528d4275d" providerId="ADAL" clId="{46B57ECA-90EE-4DEE-B7FC-CF6B2BB407ED}" dt="2026-08-11T08:57:22.212" v="445" actId="20577"/>
           <ac:spMkLst>
             <pc:docMk/>
             <pc:sldMk cId="983911713" sldId="421"/>
             <ac:spMk id="32" creationId="{64CE0356-183B-D86F-AFB0-030273B0FBB8}"/>
           </ac:spMkLst>
         </pc:spChg>
-        <pc:spChg chg="mod">
-          <ac:chgData name="Tomy Doda" userId="023a5e24-f089-4e82-9406-b78528d4275d" providerId="ADAL" clId="{46B57ECA-90EE-4DEE-B7FC-CF6B2BB407ED}" dt="2026-08-06T09:23:58.527" v="311" actId="255"/>
+        <pc:spChg chg="del mod">
+          <ac:chgData name="Tomy Doda" userId="023a5e24-f089-4e82-9406-b78528d4275d" providerId="ADAL" clId="{46B57ECA-90EE-4DEE-B7FC-CF6B2BB407ED}" dt="2026-08-10T15:32:09.652" v="427" actId="478"/>
           <ac:spMkLst>
             <pc:docMk/>
             <pc:sldMk cId="983911713" sldId="421"/>
@@ -280,7 +289,7 @@
           </ac:spMkLst>
         </pc:spChg>
         <pc:spChg chg="mod">
-          <ac:chgData name="Tomy Doda" userId="023a5e24-f089-4e82-9406-b78528d4275d" providerId="ADAL" clId="{46B57ECA-90EE-4DEE-B7FC-CF6B2BB407ED}" dt="2026-08-06T09:23:58.527" v="311" actId="255"/>
+          <ac:chgData name="Tomy Doda" userId="023a5e24-f089-4e82-9406-b78528d4275d" providerId="ADAL" clId="{46B57ECA-90EE-4DEE-B7FC-CF6B2BB407ED}" dt="2026-08-10T15:26:13.442" v="386" actId="1076"/>
           <ac:spMkLst>
             <pc:docMk/>
             <pc:sldMk cId="983911713" sldId="421"/>
@@ -288,21 +297,84 @@
           </ac:spMkLst>
         </pc:spChg>
         <pc:spChg chg="mod">
-          <ac:chgData name="Tomy Doda" userId="023a5e24-f089-4e82-9406-b78528d4275d" providerId="ADAL" clId="{46B57ECA-90EE-4DEE-B7FC-CF6B2BB407ED}" dt="2026-08-06T09:23:58.527" v="311" actId="255"/>
+          <ac:chgData name="Tomy Doda" userId="023a5e24-f089-4e82-9406-b78528d4275d" providerId="ADAL" clId="{46B57ECA-90EE-4DEE-B7FC-CF6B2BB407ED}" dt="2026-08-10T15:26:20.848" v="387" actId="555"/>
+          <ac:spMkLst>
+            <pc:docMk/>
+            <pc:sldMk cId="983911713" sldId="421"/>
+            <ac:spMk id="38" creationId="{80CC70EA-6B10-A142-98A9-F65AF51CBE98}"/>
+          </ac:spMkLst>
+        </pc:spChg>
+        <pc:spChg chg="mod">
+          <ac:chgData name="Tomy Doda" userId="023a5e24-f089-4e82-9406-b78528d4275d" providerId="ADAL" clId="{46B57ECA-90EE-4DEE-B7FC-CF6B2BB407ED}" dt="2026-08-10T15:26:20.848" v="387" actId="555"/>
           <ac:spMkLst>
             <pc:docMk/>
             <pc:sldMk cId="983911713" sldId="421"/>
             <ac:spMk id="40" creationId="{B5CB3F5B-59CB-1C00-1D50-4DB53FE7AA6C}"/>
           </ac:spMkLst>
         </pc:spChg>
-        <pc:grpChg chg="del">
-          <ac:chgData name="Tomy Doda" userId="023a5e24-f089-4e82-9406-b78528d4275d" providerId="ADAL" clId="{46B57ECA-90EE-4DEE-B7FC-CF6B2BB407ED}" dt="2026-08-06T09:25:08.951" v="314" actId="165"/>
-          <ac:grpSpMkLst>
+        <pc:cxnChg chg="add mod">
+          <ac:chgData name="Tomy Doda" userId="023a5e24-f089-4e82-9406-b78528d4275d" providerId="ADAL" clId="{46B57ECA-90EE-4DEE-B7FC-CF6B2BB407ED}" dt="2026-08-10T15:32:11.741" v="429"/>
+          <ac:cxnSpMkLst>
             <pc:docMk/>
             <pc:sldMk cId="983911713" sldId="421"/>
-            <ac:grpSpMk id="14" creationId="{DA13B47E-3EE9-682A-8148-69C4455D73BF}"/>
-          </ac:grpSpMkLst>
-        </pc:grpChg>
+            <ac:cxnSpMk id="7" creationId="{3C214019-2AA2-7A0C-C791-079A6380053F}"/>
+          </ac:cxnSpMkLst>
+        </pc:cxnChg>
+        <pc:cxnChg chg="del mod">
+          <ac:chgData name="Tomy Doda" userId="023a5e24-f089-4e82-9406-b78528d4275d" providerId="ADAL" clId="{46B57ECA-90EE-4DEE-B7FC-CF6B2BB407ED}" dt="2026-08-10T15:32:10.660" v="428" actId="478"/>
+          <ac:cxnSpMkLst>
+            <pc:docMk/>
+            <pc:sldMk cId="983911713" sldId="421"/>
+            <ac:cxnSpMk id="8" creationId="{C9991C8C-9303-5B2A-E812-7BA9029404BE}"/>
+          </ac:cxnSpMkLst>
+        </pc:cxnChg>
+      </pc:sldChg>
+      <pc:sldChg chg="modSp add mod">
+        <pc:chgData name="Tomy Doda" userId="023a5e24-f089-4e82-9406-b78528d4275d" providerId="ADAL" clId="{46B57ECA-90EE-4DEE-B7FC-CF6B2BB407ED}" dt="2026-08-11T08:57:33.131" v="452" actId="20577"/>
+        <pc:sldMkLst>
+          <pc:docMk/>
+          <pc:sldMk cId="651748214" sldId="422"/>
+        </pc:sldMkLst>
+        <pc:spChg chg="mod">
+          <ac:chgData name="Tomy Doda" userId="023a5e24-f089-4e82-9406-b78528d4275d" providerId="ADAL" clId="{46B57ECA-90EE-4DEE-B7FC-CF6B2BB407ED}" dt="2026-08-10T15:27:56.740" v="419" actId="1038"/>
+          <ac:spMkLst>
+            <pc:docMk/>
+            <pc:sldMk cId="651748214" sldId="422"/>
+            <ac:spMk id="13" creationId="{B551CE49-2FEC-3F5C-6B8F-D24ED8FDF3E1}"/>
+          </ac:spMkLst>
+        </pc:spChg>
+        <pc:spChg chg="mod">
+          <ac:chgData name="Tomy Doda" userId="023a5e24-f089-4e82-9406-b78528d4275d" providerId="ADAL" clId="{46B57ECA-90EE-4DEE-B7FC-CF6B2BB407ED}" dt="2026-08-10T15:27:20.718" v="409" actId="14100"/>
+          <ac:spMkLst>
+            <pc:docMk/>
+            <pc:sldMk cId="651748214" sldId="422"/>
+            <ac:spMk id="17" creationId="{A5F54D80-17BA-665E-117D-8F45AE5850D8}"/>
+          </ac:spMkLst>
+        </pc:spChg>
+        <pc:spChg chg="mod">
+          <ac:chgData name="Tomy Doda" userId="023a5e24-f089-4e82-9406-b78528d4275d" providerId="ADAL" clId="{46B57ECA-90EE-4DEE-B7FC-CF6B2BB407ED}" dt="2026-08-10T15:32:01.598" v="425" actId="1076"/>
+          <ac:spMkLst>
+            <pc:docMk/>
+            <pc:sldMk cId="651748214" sldId="422"/>
+            <ac:spMk id="22" creationId="{4CF577EA-AB38-374D-2A3A-0CC9CCE90789}"/>
+          </ac:spMkLst>
+        </pc:spChg>
+        <pc:spChg chg="mod">
+          <ac:chgData name="Tomy Doda" userId="023a5e24-f089-4e82-9406-b78528d4275d" providerId="ADAL" clId="{46B57ECA-90EE-4DEE-B7FC-CF6B2BB407ED}" dt="2026-08-11T08:57:33.131" v="452" actId="20577"/>
+          <ac:spMkLst>
+            <pc:docMk/>
+            <pc:sldMk cId="651748214" sldId="422"/>
+            <ac:spMk id="32" creationId="{18E192B0-33BE-6A75-DB22-69392121A4F8}"/>
+          </ac:spMkLst>
+        </pc:spChg>
+        <pc:spChg chg="mod">
+          <ac:chgData name="Tomy Doda" userId="023a5e24-f089-4e82-9406-b78528d4275d" providerId="ADAL" clId="{46B57ECA-90EE-4DEE-B7FC-CF6B2BB407ED}" dt="2026-08-10T15:32:30.322" v="438" actId="20577"/>
+          <ac:spMkLst>
+            <pc:docMk/>
+            <pc:sldMk cId="651748214" sldId="422"/>
+            <ac:spMk id="34" creationId="{77FDC1F1-37FB-50F0-377E-B173D856DD42}"/>
+          </ac:spMkLst>
+        </pc:spChg>
       </pc:sldChg>
     </pc:docChg>
   </pc:docChgLst>
@@ -391,7 +463,7 @@
           <a:p>
             <a:fld id="{FB241A62-A1C5-4611-9AB2-09CF3AB05F02}" type="datetimeFigureOut">
               <a:rPr lang="de-DE" smtClean="0"/>
-              <a:t>06.08.2026</a:t>
+              <a:t>11.08.2026</a:t>
             </a:fld>
             <a:endParaRPr lang="de-DE"/>
           </a:p>
@@ -767,6 +839,114 @@
 </p:notes>
 </file>
 
+<file path=ppt/notesSlides/notesSlide2.xml><?xml version="1.0" encoding="utf-8"?>
+<p:notes xmlns:a="http://schemas.openxmlformats.org/drawingml/2006/main" xmlns:r="http://schemas.openxmlformats.org/officeDocument/2006/relationships" xmlns:p="http://schemas.openxmlformats.org/presentationml/2006/main">
+  <p:cSld>
+    <p:spTree>
+      <p:nvGrpSpPr>
+        <p:cNvPr id="1" name="">
+          <a:extLst>
+            <a:ext uri="{FF2B5EF4-FFF2-40B4-BE49-F238E27FC236}">
+              <a16:creationId xmlns:a16="http://schemas.microsoft.com/office/drawing/2014/main" id="{67DC7B59-60B2-17D8-D02E-D35DDB624F0E}"/>
+            </a:ext>
+          </a:extLst>
+        </p:cNvPr>
+        <p:cNvGrpSpPr/>
+        <p:nvPr/>
+      </p:nvGrpSpPr>
+      <p:grpSpPr>
+        <a:xfrm>
+          <a:off x="0" y="0"/>
+          <a:ext cx="0" cy="0"/>
+          <a:chOff x="0" y="0"/>
+          <a:chExt cx="0" cy="0"/>
+        </a:xfrm>
+      </p:grpSpPr>
+      <p:sp>
+        <p:nvSpPr>
+          <p:cNvPr id="2" name="Slide Image Placeholder 1">
+            <a:extLst>
+              <a:ext uri="{FF2B5EF4-FFF2-40B4-BE49-F238E27FC236}">
+                <a16:creationId xmlns:a16="http://schemas.microsoft.com/office/drawing/2014/main" id="{D3BEB6C3-AEF9-098F-E4EC-99E6604AACC1}"/>
+              </a:ext>
+            </a:extLst>
+          </p:cNvPr>
+          <p:cNvSpPr>
+            <a:spLocks noGrp="1" noRot="1" noChangeAspect="1"/>
+          </p:cNvSpPr>
+          <p:nvPr>
+            <p:ph type="sldImg"/>
+          </p:nvPr>
+        </p:nvSpPr>
+        <p:spPr/>
+      </p:sp>
+      <p:sp>
+        <p:nvSpPr>
+          <p:cNvPr id="3" name="Notes Placeholder 2">
+            <a:extLst>
+              <a:ext uri="{FF2B5EF4-FFF2-40B4-BE49-F238E27FC236}">
+                <a16:creationId xmlns:a16="http://schemas.microsoft.com/office/drawing/2014/main" id="{F5036D6C-1488-33A5-08F5-76015212B1B9}"/>
+              </a:ext>
+            </a:extLst>
+          </p:cNvPr>
+          <p:cNvSpPr>
+            <a:spLocks noGrp="1"/>
+          </p:cNvSpPr>
+          <p:nvPr>
+            <p:ph type="body" idx="1"/>
+          </p:nvPr>
+        </p:nvSpPr>
+        <p:spPr/>
+        <p:txBody>
+          <a:bodyPr/>
+          <a:lstStyle/>
+          <a:p>
+            <a:endParaRPr lang="en-US" dirty="0"/>
+          </a:p>
+        </p:txBody>
+      </p:sp>
+      <p:sp>
+        <p:nvSpPr>
+          <p:cNvPr id="4" name="Slide Number Placeholder 3">
+            <a:extLst>
+              <a:ext uri="{FF2B5EF4-FFF2-40B4-BE49-F238E27FC236}">
+                <a16:creationId xmlns:a16="http://schemas.microsoft.com/office/drawing/2014/main" id="{100B2CA6-4F16-DEF9-F482-7FDE9DEC72DF}"/>
+              </a:ext>
+            </a:extLst>
+          </p:cNvPr>
+          <p:cNvSpPr>
+            <a:spLocks noGrp="1"/>
+          </p:cNvSpPr>
+          <p:nvPr>
+            <p:ph type="sldNum" sz="quarter" idx="5"/>
+          </p:nvPr>
+        </p:nvSpPr>
+        <p:spPr/>
+        <p:txBody>
+          <a:bodyPr/>
+          <a:lstStyle/>
+          <a:p>
+            <a:fld id="{6D7F65CB-D416-4D08-A970-3879DDF354C1}" type="slidenum">
+              <a:rPr lang="de-DE" smtClean="0"/>
+              <a:t>2</a:t>
+            </a:fld>
+            <a:endParaRPr lang="de-DE"/>
+          </a:p>
+        </p:txBody>
+      </p:sp>
+    </p:spTree>
+    <p:extLst>
+      <p:ext uri="{BB962C8B-B14F-4D97-AF65-F5344CB8AC3E}">
+        <p14:creationId xmlns:p14="http://schemas.microsoft.com/office/powerpoint/2010/main" val="4138824052"/>
+      </p:ext>
+    </p:extLst>
+  </p:cSld>
+  <p:clrMapOvr>
+    <a:masterClrMapping/>
+  </p:clrMapOvr>
+</p:notes>
+</file>
+
 <file path=ppt/slideLayouts/slideLayout1.xml><?xml version="1.0" encoding="utf-8"?>
 <p:sldLayout xmlns:a="http://schemas.openxmlformats.org/drawingml/2006/main" xmlns:r="http://schemas.openxmlformats.org/officeDocument/2006/relationships" xmlns:p="http://schemas.openxmlformats.org/presentationml/2006/main" type="title" preserve="1">
   <p:cSld name="Title Slide">
@@ -909,7 +1089,7 @@
           <a:p>
             <a:fld id="{C5ECA247-FE2A-47EF-8DB9-999FBE78D1F7}" type="datetime1">
               <a:rPr lang="de-DE" smtClean="0"/>
-              <a:t>06.08.2026</a:t>
+              <a:t>11.08.2026</a:t>
             </a:fld>
             <a:endParaRPr lang="de-DE"/>
           </a:p>
@@ -1080,7 +1260,7 @@
           <a:p>
             <a:fld id="{E1EA6552-2A29-438B-A2CC-4FF471838D25}" type="datetime1">
               <a:rPr lang="de-DE" smtClean="0"/>
-              <a:t>06.08.2026</a:t>
+              <a:t>11.08.2026</a:t>
             </a:fld>
             <a:endParaRPr lang="de-DE"/>
           </a:p>
@@ -1287,7 +1467,7 @@
           <a:p>
             <a:fld id="{5AFFA005-B143-456C-B43F-4928703E1224}" type="datetime1">
               <a:rPr lang="de-DE" smtClean="0"/>
-              <a:t>06.08.2026</a:t>
+              <a:t>11.08.2026</a:t>
             </a:fld>
             <a:endParaRPr lang="de-DE"/>
           </a:p>
@@ -1506,7 +1686,7 @@
           <a:p>
             <a:fld id="{DD73CA2E-C4EA-4AB7-B564-38A486611F54}" type="datetime1">
               <a:rPr lang="de-DE" smtClean="0"/>
-              <a:t>06.08.2026</a:t>
+              <a:t>11.08.2026</a:t>
             </a:fld>
             <a:endParaRPr lang="de-DE"/>
           </a:p>
@@ -1722,7 +1902,7 @@
           <a:p>
             <a:fld id="{7A934844-F214-4698-8F76-9CE72359EF87}" type="datetime1">
               <a:rPr lang="de-DE" smtClean="0"/>
-              <a:t>06.08.2026</a:t>
+              <a:t>11.08.2026</a:t>
             </a:fld>
             <a:endParaRPr lang="de-DE"/>
           </a:p>
@@ -1999,7 +2179,7 @@
           <a:p>
             <a:fld id="{52B431FC-A9F2-4517-8F6E-C837182E6D38}" type="datetime1">
               <a:rPr lang="de-DE" smtClean="0"/>
-              <a:t>06.08.2026</a:t>
+              <a:t>11.08.2026</a:t>
             </a:fld>
             <a:endParaRPr lang="de-DE"/>
           </a:p>
@@ -2261,7 +2441,7 @@
           <a:p>
             <a:fld id="{47772584-EF26-4D9D-AF97-F592E4AD9E3C}" type="datetime1">
               <a:rPr lang="de-DE" smtClean="0"/>
-              <a:t>06.08.2026</a:t>
+              <a:t>11.08.2026</a:t>
             </a:fld>
             <a:endParaRPr lang="de-DE"/>
           </a:p>
@@ -2664,7 +2844,7 @@
           <a:p>
             <a:fld id="{9D0F93FE-C6FD-4201-A9D9-1B6F0940F469}" type="datetime1">
               <a:rPr lang="de-DE" smtClean="0"/>
-              <a:t>06.08.2026</a:t>
+              <a:t>11.08.2026</a:t>
             </a:fld>
             <a:endParaRPr lang="de-DE"/>
           </a:p>
@@ -2806,7 +2986,7 @@
           <a:p>
             <a:fld id="{11E140BE-9A30-428F-9875-53FA37102F3D}" type="datetime1">
               <a:rPr lang="de-DE" smtClean="0"/>
-              <a:t>06.08.2026</a:t>
+              <a:t>11.08.2026</a:t>
             </a:fld>
             <a:endParaRPr lang="de-DE"/>
           </a:p>
@@ -2925,7 +3105,7 @@
           <a:p>
             <a:fld id="{73ED589F-B4E2-4A4E-A226-7401BDE44768}" type="datetime1">
               <a:rPr lang="de-DE" smtClean="0"/>
-              <a:t>06.08.2026</a:t>
+              <a:t>11.08.2026</a:t>
             </a:fld>
             <a:endParaRPr lang="de-DE"/>
           </a:p>
@@ -3232,7 +3412,7 @@
           <a:p>
             <a:fld id="{028414A4-D98A-43BA-9863-A2EF121B96F9}" type="datetime1">
               <a:rPr lang="de-DE" smtClean="0"/>
-              <a:t>06.08.2026</a:t>
+              <a:t>11.08.2026</a:t>
             </a:fld>
             <a:endParaRPr lang="de-DE"/>
           </a:p>
@@ -3433,7 +3613,7 @@
           <a:p>
             <a:fld id="{C10E3B16-34CF-4AC7-98ED-B1422B31FFB6}" type="datetime1">
               <a:rPr lang="de-DE" smtClean="0"/>
-              <a:t>06.08.2026</a:t>
+              <a:t>11.08.2026</a:t>
             </a:fld>
             <a:endParaRPr lang="de-DE"/>
           </a:p>
@@ -3720,7 +3900,7 @@
           <a:p>
             <a:fld id="{D058E760-9A20-4071-815D-645CCCCC2D83}" type="datetime1">
               <a:rPr lang="de-DE" smtClean="0"/>
-              <a:t>06.08.2026</a:t>
+              <a:t>11.08.2026</a:t>
             </a:fld>
             <a:endParaRPr lang="de-DE"/>
           </a:p>
@@ -3922,7 +4102,7 @@
           <a:p>
             <a:fld id="{8B3EF7F4-A883-4B18-9552-F3C3223DEF14}" type="datetime1">
               <a:rPr lang="de-DE" smtClean="0"/>
-              <a:t>06.08.2026</a:t>
+              <a:t>11.08.2026</a:t>
             </a:fld>
             <a:endParaRPr lang="de-DE"/>
           </a:p>
@@ -4129,7 +4309,7 @@
           <a:p>
             <a:fld id="{F664108E-EA3B-4E54-AEAB-69A79F6B8899}" type="datetime1">
               <a:rPr lang="de-DE" smtClean="0"/>
-              <a:t>06.08.2026</a:t>
+              <a:t>11.08.2026</a:t>
             </a:fld>
             <a:endParaRPr lang="de-DE"/>
           </a:p>
@@ -4402,7 +4582,7 @@
           <a:p>
             <a:fld id="{6DD8A520-B1B0-4EF4-9A43-67432A834EC2}" type="datetime1">
               <a:rPr lang="de-DE" smtClean="0"/>
-              <a:t>06.08.2026</a:t>
+              <a:t>11.08.2026</a:t>
             </a:fld>
             <a:endParaRPr lang="de-DE"/>
           </a:p>
@@ -4664,7 +4844,7 @@
           <a:p>
             <a:fld id="{8AB35BDD-2E7A-4534-A0E5-E526C1F6A616}" type="datetime1">
               <a:rPr lang="de-DE" smtClean="0"/>
-              <a:t>06.08.2026</a:t>
+              <a:t>11.08.2026</a:t>
             </a:fld>
             <a:endParaRPr lang="de-DE"/>
           </a:p>
@@ -5067,7 +5247,7 @@
           <a:p>
             <a:fld id="{600DB9EB-2057-4AD9-A90C-C9132243CB3F}" type="datetime1">
               <a:rPr lang="de-DE" smtClean="0"/>
-              <a:t>06.08.2026</a:t>
+              <a:t>11.08.2026</a:t>
             </a:fld>
             <a:endParaRPr lang="de-DE"/>
           </a:p>
@@ -5209,7 +5389,7 @@
           <a:p>
             <a:fld id="{CE14AEF0-EDF0-4BEB-9ED1-40A762B86015}" type="datetime1">
               <a:rPr lang="de-DE" smtClean="0"/>
-              <a:t>06.08.2026</a:t>
+              <a:t>11.08.2026</a:t>
             </a:fld>
             <a:endParaRPr lang="de-DE"/>
           </a:p>
@@ -5328,7 +5508,7 @@
           <a:p>
             <a:fld id="{1BB8B5A9-28CE-4FED-AA21-DBCD3DE06A78}" type="datetime1">
               <a:rPr lang="de-DE" smtClean="0"/>
-              <a:t>06.08.2026</a:t>
+              <a:t>11.08.2026</a:t>
             </a:fld>
             <a:endParaRPr lang="de-DE"/>
           </a:p>
@@ -5635,7 +5815,7 @@
           <a:p>
             <a:fld id="{F11D34DF-07E7-4DD8-B3FB-908782C071D4}" type="datetime1">
               <a:rPr lang="de-DE" smtClean="0"/>
-              <a:t>06.08.2026</a:t>
+              <a:t>11.08.2026</a:t>
             </a:fld>
             <a:endParaRPr lang="de-DE"/>
           </a:p>
@@ -5918,7 +6098,7 @@
           <a:p>
             <a:fld id="{F1CFE722-D1B0-4086-81BB-7FAE4E573927}" type="datetime1">
               <a:rPr lang="de-DE" smtClean="0"/>
-              <a:t>06.08.2026</a:t>
+              <a:t>11.08.2026</a:t>
             </a:fld>
             <a:endParaRPr lang="de-DE"/>
           </a:p>
@@ -6803,8 +6983,8 @@
         </p:nvSpPr>
         <p:spPr bwMode="auto">
           <a:xfrm>
-            <a:off x="-884185" y="1222374"/>
-            <a:ext cx="184731" cy="400110"/>
+            <a:off x="-884185" y="1191597"/>
+            <a:ext cx="184731" cy="461665"/>
           </a:xfrm>
           <a:prstGeom prst="rect">
             <a:avLst/>
@@ -6869,7 +7049,7 @@
               <a:tabLst/>
               <a:defRPr/>
             </a:pPr>
-            <a:endParaRPr kumimoji="0" lang="en-US" sz="2000" b="0" i="0" u="none" strike="noStrike" kern="1200" cap="none" spc="0" normalizeH="0" baseline="0" noProof="0">
+            <a:endParaRPr kumimoji="0" lang="en-US" sz="2400" b="0" i="0" u="none" strike="noStrike" kern="1200" cap="none" spc="0" normalizeH="0" baseline="0" noProof="0">
               <a:ln>
                 <a:noFill/>
               </a:ln>
@@ -6902,8 +7082,8 @@
         </p:nvSpPr>
         <p:spPr bwMode="auto">
           <a:xfrm>
-            <a:off x="131815" y="10524298"/>
-            <a:ext cx="184731" cy="400110"/>
+            <a:off x="131815" y="10493521"/>
+            <a:ext cx="184731" cy="461665"/>
           </a:xfrm>
           <a:prstGeom prst="rect">
             <a:avLst/>
@@ -6968,7 +7148,7 @@
               <a:tabLst/>
               <a:defRPr/>
             </a:pPr>
-            <a:endParaRPr kumimoji="0" lang="en-US" sz="2000" b="0" i="0" u="none" strike="noStrike" kern="1200" cap="none" spc="0" normalizeH="0" baseline="0" noProof="0">
+            <a:endParaRPr kumimoji="0" lang="en-US" sz="2400" b="0" i="0" u="none" strike="noStrike" kern="1200" cap="none" spc="0" normalizeH="0" baseline="0" noProof="0">
               <a:ln>
                 <a:noFill/>
               </a:ln>
@@ -6999,7 +7179,7 @@
         </p:nvSpPr>
         <p:spPr>
           <a:xfrm>
-            <a:off x="1082417" y="3546271"/>
+            <a:off x="435634" y="3540722"/>
             <a:ext cx="8284867" cy="2520126"/>
           </a:xfrm>
           <a:prstGeom prst="rect">
@@ -7027,7 +7207,7 @@
           <a:lstStyle/>
           <a:p>
             <a:pPr algn="ctr"/>
-            <a:endParaRPr lang="en-US" sz="2000"/>
+            <a:endParaRPr lang="en-US" sz="2400"/>
           </a:p>
         </p:txBody>
       </p:sp>
@@ -7045,7 +7225,7 @@
         </p:nvSpPr>
         <p:spPr>
           <a:xfrm>
-            <a:off x="1082417" y="213774"/>
+            <a:off x="435634" y="208225"/>
             <a:ext cx="8284867" cy="3382844"/>
           </a:xfrm>
           <a:prstGeom prst="rect">
@@ -7079,7 +7259,7 @@
           <a:lstStyle/>
           <a:p>
             <a:pPr algn="ctr"/>
-            <a:endParaRPr lang="en-US" sz="2000"/>
+            <a:endParaRPr lang="en-US" sz="2400"/>
           </a:p>
         </p:txBody>
       </p:sp>
@@ -7097,7 +7277,7 @@
         </p:nvSpPr>
         <p:spPr>
           <a:xfrm>
-            <a:off x="8751677" y="5188462"/>
+            <a:off x="8104894" y="5182913"/>
             <a:ext cx="1283287" cy="581822"/>
           </a:xfrm>
           <a:prstGeom prst="leftArrow">
@@ -7125,7 +7305,7 @@
           <a:lstStyle/>
           <a:p>
             <a:pPr algn="ctr"/>
-            <a:endParaRPr lang="en-US" sz="2000"/>
+            <a:endParaRPr lang="en-US" sz="2400"/>
           </a:p>
         </p:txBody>
       </p:sp>
@@ -7143,12 +7323,15 @@
         </p:nvSpPr>
         <p:spPr>
           <a:xfrm>
-            <a:off x="130746" y="938551"/>
+            <a:off x="0" y="953784"/>
             <a:ext cx="1268098" cy="581822"/>
           </a:xfrm>
           <a:prstGeom prst="leftArrow">
             <a:avLst/>
           </a:prstGeom>
+          <a:solidFill>
+            <a:schemeClr val="tx1"/>
+          </a:solidFill>
         </p:spPr>
         <p:style>
           <a:lnRef idx="2">
@@ -7171,7 +7354,7 @@
           <a:lstStyle/>
           <a:p>
             <a:pPr algn="ctr"/>
-            <a:endParaRPr lang="en-US" sz="2000"/>
+            <a:endParaRPr lang="en-US" sz="2400"/>
           </a:p>
         </p:txBody>
       </p:sp>
@@ -7191,8 +7374,8 @@
             </p:nvSpPr>
             <p:spPr>
               <a:xfrm>
-                <a:off x="9355626" y="1053423"/>
-                <a:ext cx="3272525" cy="755207"/>
+                <a:off x="9054246" y="1124777"/>
+                <a:ext cx="3272525" cy="888064"/>
               </a:xfrm>
               <a:prstGeom prst="rect">
                 <a:avLst/>
@@ -7208,21 +7391,18 @@
                 <a:pPr/>
                 <a14:m>
                   <m:oMathPara xmlns:m="http://schemas.openxmlformats.org/officeDocument/2006/math">
-                    <m:oMathParaPr>
-                      <m:jc m:val="centerGroup"/>
-                    </m:oMathParaPr>
-                    <m:oMath xmlns:m="http://schemas.openxmlformats.org/officeDocument/2006/math">
+                    <m:oMath>
                       <m:sSub>
                         <m:sSubPr>
                           <m:ctrlPr>
-                            <a:rPr lang="fr-CH" sz="2000" b="0" i="1" smtClean="0">
+                            <a:rPr lang="fr-CH" sz="2400" b="0" i="1" smtClean="0">
                               <a:latin typeface="Cambria Math" panose="02040503050406030204" pitchFamily="18" charset="0"/>
                             </a:rPr>
                           </m:ctrlPr>
                         </m:sSubPr>
                         <m:e>
                           <m:r>
-                            <a:rPr lang="fr-CH" sz="2000" b="0" i="1" smtClean="0">
+                            <a:rPr lang="fr-CH" sz="2400" b="0" i="1" smtClean="0">
                               <a:latin typeface="Cambria Math" panose="02040503050406030204" pitchFamily="18" charset="0"/>
                             </a:rPr>
                             <m:t>𝑄</m:t>
@@ -7230,7 +7410,7 @@
                         </m:e>
                         <m:sub>
                           <m:r>
-                            <a:rPr lang="fr-CH" sz="2000" b="0" i="1" smtClean="0">
+                            <a:rPr lang="fr-CH" sz="2400" b="0" i="1" smtClean="0">
                               <a:latin typeface="Cambria Math" panose="02040503050406030204" pitchFamily="18" charset="0"/>
                             </a:rPr>
                             <m:t>𝑒𝑝𝑖</m:t>
@@ -7240,14 +7420,14 @@
                       <m:d>
                         <m:dPr>
                           <m:ctrlPr>
-                            <a:rPr lang="fr-CH" sz="2000" b="0" i="1" smtClean="0">
+                            <a:rPr lang="fr-CH" sz="2400" b="0" i="1" smtClean="0">
                               <a:latin typeface="Cambria Math" panose="02040503050406030204" pitchFamily="18" charset="0"/>
                             </a:rPr>
                           </m:ctrlPr>
                         </m:dPr>
                         <m:e>
                           <m:r>
-                            <a:rPr lang="fr-CH" sz="2000" b="0" i="1" smtClean="0">
+                            <a:rPr lang="fr-CH" sz="2400" b="0" i="1" smtClean="0">
                               <a:latin typeface="Cambria Math" panose="02040503050406030204" pitchFamily="18" charset="0"/>
                             </a:rPr>
                             <m:t>𝑡</m:t>
@@ -7255,13 +7435,13 @@
                         </m:e>
                       </m:d>
                       <m:r>
-                        <a:rPr lang="fr-CH" sz="2000" b="0" i="1" smtClean="0">
+                        <a:rPr lang="fr-CH" sz="2400" b="0" i="1" smtClean="0">
                           <a:latin typeface="Cambria Math" panose="02040503050406030204" pitchFamily="18" charset="0"/>
                         </a:rPr>
                         <m:t>=</m:t>
                       </m:r>
                       <m:r>
-                        <a:rPr lang="fr-CH" sz="2000" b="0" i="1" smtClean="0">
+                        <a:rPr lang="fr-CH" sz="2400" b="0" i="1" smtClean="0">
                           <a:latin typeface="Cambria Math" panose="02040503050406030204" pitchFamily="18" charset="0"/>
                         </a:rPr>
                         <m:t>𝛼</m:t>
@@ -7269,30 +7449,49 @@
                       <m:d>
                         <m:dPr>
                           <m:ctrlPr>
-                            <a:rPr lang="fr-CH" sz="2000" b="0" i="1" smtClean="0">
+                            <a:rPr lang="fr-CH" sz="2400" b="0" i="1" smtClean="0">
                               <a:latin typeface="Cambria Math" panose="02040503050406030204" pitchFamily="18" charset="0"/>
                             </a:rPr>
                           </m:ctrlPr>
                         </m:dPr>
                         <m:e>
                           <m:r>
-                            <a:rPr lang="fr-CH" sz="2000" b="0" i="1" smtClean="0">
+                            <a:rPr lang="fr-CH" sz="2400" b="0" i="1" smtClean="0">
                               <a:latin typeface="Cambria Math" panose="02040503050406030204" pitchFamily="18" charset="0"/>
                             </a:rPr>
                             <m:t>𝑡</m:t>
                           </m:r>
                         </m:e>
                       </m:d>
-                      <m:r>
-                        <a:rPr lang="fr-CH" sz="2000" b="0" i="1" smtClean="0">
-                          <a:latin typeface="Cambria Math" panose="02040503050406030204" pitchFamily="18" charset="0"/>
-                        </a:rPr>
-                        <m:t>𝑄</m:t>
-                      </m:r>
+                      <m:sSub>
+                        <m:sSubPr>
+                          <m:ctrlPr>
+                            <a:rPr lang="fr-CH" sz="2400" b="0" i="1" smtClean="0">
+                              <a:latin typeface="Cambria Math" panose="02040503050406030204" pitchFamily="18" charset="0"/>
+                            </a:rPr>
+                          </m:ctrlPr>
+                        </m:sSubPr>
+                        <m:e>
+                          <m:r>
+                            <a:rPr lang="fr-CH" sz="2400" b="0" i="1" smtClean="0">
+                              <a:latin typeface="Cambria Math" panose="02040503050406030204" pitchFamily="18" charset="0"/>
+                            </a:rPr>
+                            <m:t>𝑄</m:t>
+                          </m:r>
+                        </m:e>
+                        <m:sub>
+                          <m:r>
+                            <a:rPr lang="fr-CH" sz="2400" b="0" i="1" smtClean="0">
+                              <a:latin typeface="Cambria Math" panose="02040503050406030204" pitchFamily="18" charset="0"/>
+                            </a:rPr>
+                            <m:t>𝑡𝑜𝑡</m:t>
+                          </m:r>
+                        </m:sub>
+                      </m:sSub>
                     </m:oMath>
                   </m:oMathPara>
                 </a14:m>
-                <a:endParaRPr lang="fr-CH" sz="2000" b="0" i="1" dirty="0">
+                <a:endParaRPr lang="fr-CH" sz="2400" b="0" i="1" dirty="0">
                   <a:latin typeface="Cambria Math" panose="02040503050406030204" pitchFamily="18" charset="0"/>
                 </a:endParaRPr>
               </a:p>
@@ -7300,21 +7499,18 @@
                 <a:pPr/>
                 <a14:m>
                   <m:oMathPara xmlns:m="http://schemas.openxmlformats.org/officeDocument/2006/math">
-                    <m:oMathParaPr>
-                      <m:jc m:val="centerGroup"/>
-                    </m:oMathParaPr>
-                    <m:oMath xmlns:m="http://schemas.openxmlformats.org/officeDocument/2006/math">
+                    <m:oMath>
                       <m:sSub>
                         <m:sSubPr>
                           <m:ctrlPr>
-                            <a:rPr lang="fr-CH" sz="2000" b="0" i="1" smtClean="0">
+                            <a:rPr lang="fr-CH" sz="2400" b="0" i="1" smtClean="0">
                               <a:latin typeface="Cambria Math" panose="02040503050406030204" pitchFamily="18" charset="0"/>
                             </a:rPr>
                           </m:ctrlPr>
                         </m:sSubPr>
                         <m:e>
                           <m:r>
-                            <a:rPr lang="fr-CH" sz="2000" b="0" i="1" smtClean="0">
+                            <a:rPr lang="fr-CH" sz="2400" b="0" i="1" smtClean="0">
                               <a:latin typeface="Cambria Math" panose="02040503050406030204" pitchFamily="18" charset="0"/>
                             </a:rPr>
                             <m:t>𝐶</m:t>
@@ -7322,19 +7518,19 @@
                         </m:e>
                         <m:sub>
                           <m:r>
-                            <a:rPr lang="fr-CH" sz="2000" b="0" i="1" smtClean="0">
+                            <a:rPr lang="fr-CH" sz="2400" b="0" i="1" smtClean="0">
                               <a:latin typeface="Cambria Math" panose="02040503050406030204" pitchFamily="18" charset="0"/>
                             </a:rPr>
                             <m:t>𝑖𝑛</m:t>
                           </m:r>
                           <m:r>
-                            <a:rPr lang="fr-CH" sz="2000" b="0" i="1" smtClean="0">
+                            <a:rPr lang="fr-CH" sz="2400" b="0" i="1" smtClean="0">
                               <a:latin typeface="Cambria Math" panose="02040503050406030204" pitchFamily="18" charset="0"/>
                             </a:rPr>
                             <m:t>,</m:t>
                           </m:r>
                           <m:r>
-                            <a:rPr lang="fr-CH" sz="2000" b="0" i="1" smtClean="0">
+                            <a:rPr lang="fr-CH" sz="2400" b="0" i="1" smtClean="0">
                               <a:latin typeface="Cambria Math" panose="02040503050406030204" pitchFamily="18" charset="0"/>
                             </a:rPr>
                             <m:t>𝑒𝑝𝑖</m:t>
@@ -7342,7 +7538,7 @@
                         </m:sub>
                       </m:sSub>
                       <m:r>
-                        <a:rPr lang="fr-CH" sz="2000" b="0" i="0" smtClean="0">
+                        <a:rPr lang="fr-CH" sz="2400" b="0" i="0" smtClean="0">
                           <a:latin typeface="Cambria Math" panose="02040503050406030204" pitchFamily="18" charset="0"/>
                         </a:rPr>
                         <m:t>=0</m:t>
@@ -7350,7 +7546,7 @@
                     </m:oMath>
                   </m:oMathPara>
                 </a14:m>
-                <a:endParaRPr lang="en-US" sz="2000" dirty="0"/>
+                <a:endParaRPr lang="en-US" sz="2400" dirty="0"/>
               </a:p>
             </p:txBody>
           </p:sp>
@@ -7372,8 +7568,8 @@
             </p:nvSpPr>
             <p:spPr>
               <a:xfrm>
-                <a:off x="9355626" y="1053423"/>
-                <a:ext cx="3272525" cy="755207"/>
+                <a:off x="9054246" y="1124777"/>
+                <a:ext cx="3272525" cy="888064"/>
               </a:xfrm>
               <a:prstGeom prst="rect">
                 <a:avLst/>
@@ -7381,7 +7577,7 @@
               <a:blipFill>
                 <a:blip r:embed="rId3"/>
                 <a:stretch>
-                  <a:fillRect b="-4032"/>
+                  <a:fillRect b="-5517"/>
                 </a:stretch>
               </a:blipFill>
             </p:spPr>
@@ -7400,8 +7596,8 @@
           </p:sp>
         </mc:Fallback>
       </mc:AlternateContent>
-      <mc:AlternateContent xmlns:mc="http://schemas.openxmlformats.org/markup-compatibility/2006">
-        <mc:Choice xmlns:a14="http://schemas.microsoft.com/office/drawing/2010/main" Requires="a14">
+      <mc:AlternateContent xmlns:mc="http://schemas.openxmlformats.org/markup-compatibility/2006" xmlns:a14="http://schemas.microsoft.com/office/drawing/2010/main">
+        <mc:Choice Requires="a14">
           <p:sp>
             <p:nvSpPr>
               <p:cNvPr id="17" name="TextBox 16">
@@ -7416,8 +7612,8 @@
             </p:nvSpPr>
             <p:spPr>
               <a:xfrm>
-                <a:off x="753759" y="570475"/>
-                <a:ext cx="2950570" cy="423770"/>
+                <a:off x="316546" y="575886"/>
+                <a:ext cx="3261006" cy="490199"/>
               </a:xfrm>
               <a:prstGeom prst="rect">
                 <a:avLst/>
@@ -7433,21 +7629,24 @@
                 <a:pPr/>
                 <a14:m>
                   <m:oMathPara xmlns:m="http://schemas.openxmlformats.org/officeDocument/2006/math">
-                    <m:oMathParaPr>
-                      <m:jc m:val="centerGroup"/>
-                    </m:oMathParaPr>
-                    <m:oMath xmlns:m="http://schemas.openxmlformats.org/officeDocument/2006/math">
+                    <m:oMath>
                       <m:sSub>
                         <m:sSubPr>
                           <m:ctrlPr>
-                            <a:rPr lang="fr-CH" sz="2000" b="0" i="1" smtClean="0">
+                            <a:rPr lang="fr-CH" sz="2400" b="0" i="1" smtClean="0">
+                              <a:solidFill>
+                                <a:schemeClr val="tx1"/>
+                              </a:solidFill>
                               <a:latin typeface="Cambria Math" panose="02040503050406030204" pitchFamily="18" charset="0"/>
                             </a:rPr>
                           </m:ctrlPr>
                         </m:sSubPr>
                         <m:e>
                           <m:r>
-                            <a:rPr lang="fr-CH" sz="2000" b="0" i="1" smtClean="0">
+                            <a:rPr lang="fr-CH" sz="2400" b="0" i="1" smtClean="0">
+                              <a:solidFill>
+                                <a:schemeClr val="tx1"/>
+                              </a:solidFill>
                               <a:latin typeface="Cambria Math" panose="02040503050406030204" pitchFamily="18" charset="0"/>
                             </a:rPr>
                             <m:t>𝑀</m:t>
@@ -7455,7 +7654,10 @@
                         </m:e>
                         <m:sub>
                           <m:r>
-                            <a:rPr lang="fr-CH" sz="2000" b="0" i="1" smtClean="0">
+                            <a:rPr lang="fr-CH" sz="2400" b="0" i="1" smtClean="0">
+                              <a:solidFill>
+                                <a:schemeClr val="tx1"/>
+                              </a:solidFill>
                               <a:latin typeface="Cambria Math" panose="02040503050406030204" pitchFamily="18" charset="0"/>
                             </a:rPr>
                             <m:t>𝑜𝑢𝑡</m:t>
@@ -7465,14 +7667,20 @@
                       <m:d>
                         <m:dPr>
                           <m:ctrlPr>
-                            <a:rPr lang="fr-CH" sz="2000" b="0" i="1" smtClean="0">
+                            <a:rPr lang="fr-CH" sz="2400" b="0" i="1" smtClean="0">
+                              <a:solidFill>
+                                <a:schemeClr val="tx1"/>
+                              </a:solidFill>
                               <a:latin typeface="Cambria Math" panose="02040503050406030204" pitchFamily="18" charset="0"/>
                             </a:rPr>
                           </m:ctrlPr>
                         </m:dPr>
                         <m:e>
                           <m:r>
-                            <a:rPr lang="fr-CH" sz="2000" b="0" i="1" smtClean="0">
+                            <a:rPr lang="fr-CH" sz="2400" b="0" i="1" smtClean="0">
+                              <a:solidFill>
+                                <a:schemeClr val="tx1"/>
+                              </a:solidFill>
                               <a:latin typeface="Cambria Math" panose="02040503050406030204" pitchFamily="18" charset="0"/>
                             </a:rPr>
                             <m:t>𝑡</m:t>
@@ -7480,28 +7688,65 @@
                         </m:e>
                       </m:d>
                       <m:r>
-                        <a:rPr lang="fr-CH" sz="2000" b="0" i="1" smtClean="0">
+                        <a:rPr lang="fr-CH" sz="2400" b="0" i="1" smtClean="0">
+                          <a:solidFill>
+                            <a:schemeClr val="tx1"/>
+                          </a:solidFill>
                           <a:latin typeface="Cambria Math" panose="02040503050406030204" pitchFamily="18" charset="0"/>
                         </a:rPr>
                         <m:t>=</m:t>
                       </m:r>
-                      <m:r>
-                        <a:rPr lang="fr-CH" sz="2000" b="0" i="1" smtClean="0">
-                          <a:latin typeface="Cambria Math" panose="02040503050406030204" pitchFamily="18" charset="0"/>
-                        </a:rPr>
-                        <m:t>𝑄</m:t>
-                      </m:r>
                       <m:sSub>
                         <m:sSubPr>
                           <m:ctrlPr>
-                            <a:rPr lang="fr-CH" sz="2000" b="0" i="1" smtClean="0">
+                            <a:rPr lang="fr-CH" sz="2400" b="0" i="1" smtClean="0">
+                              <a:solidFill>
+                                <a:schemeClr val="tx1"/>
+                              </a:solidFill>
                               <a:latin typeface="Cambria Math" panose="02040503050406030204" pitchFamily="18" charset="0"/>
                             </a:rPr>
                           </m:ctrlPr>
                         </m:sSubPr>
                         <m:e>
                           <m:r>
-                            <a:rPr lang="fr-CH" sz="2000" b="0" i="1" smtClean="0">
+                            <a:rPr lang="fr-CH" sz="2400" b="0" i="1" smtClean="0">
+                              <a:solidFill>
+                                <a:schemeClr val="tx1"/>
+                              </a:solidFill>
+                              <a:latin typeface="Cambria Math" panose="02040503050406030204" pitchFamily="18" charset="0"/>
+                            </a:rPr>
+                            <m:t>𝑄</m:t>
+                          </m:r>
+                        </m:e>
+                        <m:sub>
+                          <m:r>
+                            <a:rPr lang="fr-CH" sz="2400" b="0" i="1" smtClean="0">
+                              <a:solidFill>
+                                <a:schemeClr val="tx1"/>
+                              </a:solidFill>
+                              <a:latin typeface="Cambria Math" panose="02040503050406030204" pitchFamily="18" charset="0"/>
+                            </a:rPr>
+                            <m:t>𝑡𝑜𝑡</m:t>
+                          </m:r>
+                        </m:sub>
+                      </m:sSub>
+                      <m:sSub>
+                        <m:sSubPr>
+                          <m:ctrlPr>
+                            <a:rPr lang="fr-CH" sz="2400" b="0" i="1" smtClean="0">
+                              <a:solidFill>
+                                <a:schemeClr val="tx1"/>
+                              </a:solidFill>
+                              <a:latin typeface="Cambria Math" panose="02040503050406030204" pitchFamily="18" charset="0"/>
+                            </a:rPr>
+                          </m:ctrlPr>
+                        </m:sSubPr>
+                        <m:e>
+                          <m:r>
+                            <a:rPr lang="fr-CH" sz="2400" b="0" i="1" smtClean="0">
+                              <a:solidFill>
+                                <a:schemeClr val="tx1"/>
+                              </a:solidFill>
                               <a:latin typeface="Cambria Math" panose="02040503050406030204" pitchFamily="18" charset="0"/>
                             </a:rPr>
                             <m:t>𝐶</m:t>
@@ -7509,7 +7754,10 @@
                         </m:e>
                         <m:sub>
                           <m:r>
-                            <a:rPr lang="fr-CH" sz="2000" b="0" i="1" smtClean="0">
+                            <a:rPr lang="fr-CH" sz="2400" b="0" i="1" smtClean="0">
+                              <a:solidFill>
+                                <a:schemeClr val="tx1"/>
+                              </a:solidFill>
                               <a:latin typeface="Cambria Math" panose="02040503050406030204" pitchFamily="18" charset="0"/>
                             </a:rPr>
                             <m:t>𝑒𝑝𝑖</m:t>
@@ -7517,19 +7765,28 @@
                         </m:sub>
                       </m:sSub>
                       <m:r>
-                        <a:rPr lang="fr-CH" sz="2000" b="0" i="1" smtClean="0">
+                        <a:rPr lang="fr-CH" sz="2400" b="0" i="1" smtClean="0">
+                          <a:solidFill>
+                            <a:schemeClr val="tx1"/>
+                          </a:solidFill>
                           <a:latin typeface="Cambria Math" panose="02040503050406030204" pitchFamily="18" charset="0"/>
                         </a:rPr>
                         <m:t>(</m:t>
                       </m:r>
                       <m:r>
-                        <a:rPr lang="fr-CH" sz="2000" b="0" i="1" smtClean="0">
+                        <a:rPr lang="fr-CH" sz="2400" b="0" i="1" smtClean="0">
+                          <a:solidFill>
+                            <a:schemeClr val="tx1"/>
+                          </a:solidFill>
                           <a:latin typeface="Cambria Math" panose="02040503050406030204" pitchFamily="18" charset="0"/>
                         </a:rPr>
                         <m:t>𝑡</m:t>
                       </m:r>
                       <m:r>
-                        <a:rPr lang="fr-CH" sz="2000" b="0" i="1" smtClean="0">
+                        <a:rPr lang="fr-CH" sz="2400" b="0" i="1" smtClean="0">
+                          <a:solidFill>
+                            <a:schemeClr val="tx1"/>
+                          </a:solidFill>
                           <a:latin typeface="Cambria Math" panose="02040503050406030204" pitchFamily="18" charset="0"/>
                         </a:rPr>
                         <m:t>)</m:t>
@@ -7537,12 +7794,16 @@
                     </m:oMath>
                   </m:oMathPara>
                 </a14:m>
-                <a:endParaRPr lang="en-US" sz="2000" i="1" dirty="0"/>
+                <a:endParaRPr lang="en-US" sz="2400" i="1" dirty="0">
+                  <a:solidFill>
+                    <a:schemeClr val="tx1"/>
+                  </a:solidFill>
+                </a:endParaRPr>
               </a:p>
             </p:txBody>
           </p:sp>
         </mc:Choice>
-        <mc:Fallback>
+        <mc:Fallback xmlns="">
           <p:sp>
             <p:nvSpPr>
               <p:cNvPr id="17" name="TextBox 16">
@@ -7559,8 +7820,8 @@
             </p:nvSpPr>
             <p:spPr>
               <a:xfrm>
-                <a:off x="753759" y="570475"/>
-                <a:ext cx="2950570" cy="423770"/>
+                <a:off x="316546" y="575886"/>
+                <a:ext cx="3261006" cy="490199"/>
               </a:xfrm>
               <a:prstGeom prst="rect">
                 <a:avLst/>
@@ -7568,7 +7829,7 @@
               <a:blipFill>
                 <a:blip r:embed="rId4"/>
                 <a:stretch>
-                  <a:fillRect b="-10145"/>
+                  <a:fillRect b="-11111"/>
                 </a:stretch>
               </a:blipFill>
             </p:spPr>
@@ -7603,8 +7864,8 @@
             </p:nvSpPr>
             <p:spPr>
               <a:xfrm>
-                <a:off x="3685634" y="286182"/>
-                <a:ext cx="3665959" cy="423770"/>
+                <a:off x="2745088" y="280633"/>
+                <a:ext cx="3665959" cy="494751"/>
               </a:xfrm>
               <a:prstGeom prst="rect">
                 <a:avLst/>
@@ -7619,7 +7880,7 @@
               <a:p>
                 <a:pPr algn="ctr"/>
                 <a:r>
-                  <a:rPr lang="fr-CH" sz="2000" b="1" dirty="0"/>
+                  <a:rPr lang="fr-CH" sz="2400" b="1" dirty="0"/>
                   <a:t>Epilimnion </a:t>
                 </a:r>
                 <a14:m>
@@ -7627,14 +7888,14 @@
                     <m:sSub>
                       <m:sSubPr>
                         <m:ctrlPr>
-                          <a:rPr lang="fr-CH" sz="2000" b="1" i="1" smtClean="0">
+                          <a:rPr lang="fr-CH" sz="2400" b="1" i="1" smtClean="0">
                             <a:latin typeface="Cambria Math" panose="02040503050406030204" pitchFamily="18" charset="0"/>
                           </a:rPr>
                         </m:ctrlPr>
                       </m:sSubPr>
                       <m:e>
                         <m:r>
-                          <a:rPr lang="fr-CH" sz="2000" b="1" i="1" smtClean="0">
+                          <a:rPr lang="fr-CH" sz="2400" b="1" i="1" smtClean="0">
                             <a:latin typeface="Cambria Math" panose="02040503050406030204" pitchFamily="18" charset="0"/>
                           </a:rPr>
                           <m:t>𝑪</m:t>
@@ -7642,7 +7903,7 @@
                       </m:e>
                       <m:sub>
                         <m:r>
-                          <a:rPr lang="fr-CH" sz="2000" b="1" i="1" smtClean="0">
+                          <a:rPr lang="fr-CH" sz="2400" b="1" i="1" smtClean="0">
                             <a:latin typeface="Cambria Math" panose="02040503050406030204" pitchFamily="18" charset="0"/>
                           </a:rPr>
                           <m:t>𝒆𝒑𝒊</m:t>
@@ -7650,26 +7911,26 @@
                       </m:sub>
                     </m:sSub>
                     <m:r>
-                      <a:rPr lang="fr-CH" sz="2000" b="1" i="1" smtClean="0">
+                      <a:rPr lang="fr-CH" sz="2400" b="1" i="1" smtClean="0">
                         <a:latin typeface="Cambria Math" panose="02040503050406030204" pitchFamily="18" charset="0"/>
                       </a:rPr>
                       <m:t>(</m:t>
                     </m:r>
                     <m:r>
-                      <a:rPr lang="fr-CH" sz="2000" b="1" i="1" smtClean="0">
+                      <a:rPr lang="fr-CH" sz="2400" b="1" i="1" smtClean="0">
                         <a:latin typeface="Cambria Math" panose="02040503050406030204" pitchFamily="18" charset="0"/>
                       </a:rPr>
                       <m:t>𝒕</m:t>
                     </m:r>
                     <m:r>
-                      <a:rPr lang="fr-CH" sz="2000" b="1" i="1" smtClean="0">
+                      <a:rPr lang="fr-CH" sz="2400" b="1" i="1" smtClean="0">
                         <a:latin typeface="Cambria Math" panose="02040503050406030204" pitchFamily="18" charset="0"/>
                       </a:rPr>
                       <m:t>)</m:t>
                     </m:r>
                   </m:oMath>
                 </a14:m>
-                <a:endParaRPr lang="en-US" sz="2000" b="1" i="1" dirty="0"/>
+                <a:endParaRPr lang="en-US" sz="2400" b="1" i="1" dirty="0"/>
               </a:p>
             </p:txBody>
           </p:sp>
@@ -7691,8 +7952,8 @@
             </p:nvSpPr>
             <p:spPr>
               <a:xfrm>
-                <a:off x="3685634" y="286182"/>
-                <a:ext cx="3665959" cy="423770"/>
+                <a:off x="2745088" y="280633"/>
+                <a:ext cx="3665959" cy="494751"/>
               </a:xfrm>
               <a:prstGeom prst="rect">
                 <a:avLst/>
@@ -7700,7 +7961,7 @@
               <a:blipFill>
                 <a:blip r:embed="rId5"/>
                 <a:stretch>
-                  <a:fillRect t="-7246" b="-21739"/>
+                  <a:fillRect t="-8642" b="-22222"/>
                 </a:stretch>
               </a:blipFill>
             </p:spPr>
@@ -7735,8 +7996,8 @@
             </p:nvSpPr>
             <p:spPr>
               <a:xfrm>
-                <a:off x="3268406" y="5595821"/>
-                <a:ext cx="4287851" cy="424283"/>
+                <a:off x="2434142" y="5393851"/>
+                <a:ext cx="4287851" cy="495520"/>
               </a:xfrm>
               <a:prstGeom prst="rect">
                 <a:avLst/>
@@ -7751,7 +8012,7 @@
               <a:p>
                 <a:pPr algn="ctr"/>
                 <a:r>
-                  <a:rPr lang="fr-CH" sz="2000" b="1" dirty="0"/>
+                  <a:rPr lang="fr-CH" sz="2400" b="1" dirty="0"/>
                   <a:t>Hypolimnion </a:t>
                 </a:r>
                 <a14:m>
@@ -7759,14 +8020,14 @@
                     <m:sSub>
                       <m:sSubPr>
                         <m:ctrlPr>
-                          <a:rPr lang="fr-CH" sz="2000" b="1" i="1" smtClean="0">
+                          <a:rPr lang="fr-CH" sz="2400" b="1" i="1" smtClean="0">
                             <a:latin typeface="Cambria Math" panose="02040503050406030204" pitchFamily="18" charset="0"/>
                           </a:rPr>
                         </m:ctrlPr>
                       </m:sSubPr>
                       <m:e>
                         <m:r>
-                          <a:rPr lang="fr-CH" sz="2000" b="1" i="1" smtClean="0">
+                          <a:rPr lang="fr-CH" sz="2400" b="1" i="1" smtClean="0">
                             <a:latin typeface="Cambria Math" panose="02040503050406030204" pitchFamily="18" charset="0"/>
                           </a:rPr>
                           <m:t>𝑪</m:t>
@@ -7774,7 +8035,7 @@
                       </m:e>
                       <m:sub>
                         <m:r>
-                          <a:rPr lang="fr-CH" sz="2000" b="1" i="1" smtClean="0">
+                          <a:rPr lang="fr-CH" sz="2400" b="1" i="1" smtClean="0">
                             <a:latin typeface="Cambria Math" panose="02040503050406030204" pitchFamily="18" charset="0"/>
                           </a:rPr>
                           <m:t>𝒉𝒚𝒑𝒐</m:t>
@@ -7782,26 +8043,26 @@
                       </m:sub>
                     </m:sSub>
                     <m:r>
-                      <a:rPr lang="fr-CH" sz="2000" b="1" i="1" smtClean="0">
+                      <a:rPr lang="fr-CH" sz="2400" b="1" i="1" smtClean="0">
                         <a:latin typeface="Cambria Math" panose="02040503050406030204" pitchFamily="18" charset="0"/>
                       </a:rPr>
                       <m:t>(</m:t>
                     </m:r>
                     <m:r>
-                      <a:rPr lang="fr-CH" sz="2000" b="1" i="1" smtClean="0">
+                      <a:rPr lang="fr-CH" sz="2400" b="1" i="1" smtClean="0">
                         <a:latin typeface="Cambria Math" panose="02040503050406030204" pitchFamily="18" charset="0"/>
                       </a:rPr>
                       <m:t>𝒕</m:t>
                     </m:r>
                     <m:r>
-                      <a:rPr lang="fr-CH" sz="2000" b="1" i="1" smtClean="0">
+                      <a:rPr lang="fr-CH" sz="2400" b="1" i="1" smtClean="0">
                         <a:latin typeface="Cambria Math" panose="02040503050406030204" pitchFamily="18" charset="0"/>
                       </a:rPr>
                       <m:t>)</m:t>
                     </m:r>
                   </m:oMath>
                 </a14:m>
-                <a:endParaRPr lang="en-US" sz="2000" b="1" dirty="0"/>
+                <a:endParaRPr lang="en-US" sz="2400" b="1" dirty="0"/>
               </a:p>
             </p:txBody>
           </p:sp>
@@ -7823,8 +8084,8 @@
             </p:nvSpPr>
             <p:spPr>
               <a:xfrm>
-                <a:off x="3268406" y="5595821"/>
-                <a:ext cx="4287851" cy="424283"/>
+                <a:off x="2434142" y="5393851"/>
+                <a:ext cx="4287851" cy="495520"/>
               </a:xfrm>
               <a:prstGeom prst="rect">
                 <a:avLst/>
@@ -7832,7 +8093,7 @@
               <a:blipFill>
                 <a:blip r:embed="rId6"/>
                 <a:stretch>
-                  <a:fillRect t="-7143" b="-20000"/>
+                  <a:fillRect t="-8642" b="-22222"/>
                 </a:stretch>
               </a:blipFill>
             </p:spPr>
@@ -7851,181 +8112,6 @@
           </p:sp>
         </mc:Fallback>
       </mc:AlternateContent>
-      <p:cxnSp>
-        <p:nvCxnSpPr>
-          <p:cNvPr id="8" name="Straight Arrow Connector 7">
-            <a:extLst>
-              <a:ext uri="{FF2B5EF4-FFF2-40B4-BE49-F238E27FC236}">
-                <a16:creationId xmlns:a16="http://schemas.microsoft.com/office/drawing/2014/main" id="{C9991C8C-9303-5B2A-E812-7BA9029404BE}"/>
-              </a:ext>
-            </a:extLst>
-          </p:cNvPr>
-          <p:cNvCxnSpPr>
-            <a:cxnSpLocks/>
-          </p:cNvCxnSpPr>
-          <p:nvPr/>
-        </p:nvCxnSpPr>
-        <p:spPr>
-          <a:xfrm>
-            <a:off x="8515469" y="213774"/>
-            <a:ext cx="0" cy="3402723"/>
-          </a:xfrm>
-          <a:prstGeom prst="straightConnector1">
-            <a:avLst/>
-          </a:prstGeom>
-          <a:ln w="38100">
-            <a:headEnd type="triangle"/>
-            <a:tailEnd type="triangle"/>
-          </a:ln>
-        </p:spPr>
-        <p:style>
-          <a:lnRef idx="1">
-            <a:schemeClr val="dk1"/>
-          </a:lnRef>
-          <a:fillRef idx="0">
-            <a:schemeClr val="dk1"/>
-          </a:fillRef>
-          <a:effectRef idx="0">
-            <a:schemeClr val="dk1"/>
-          </a:effectRef>
-          <a:fontRef idx="minor">
-            <a:schemeClr val="tx1"/>
-          </a:fontRef>
-        </p:style>
-      </p:cxnSp>
-      <mc:AlternateContent xmlns:mc="http://schemas.openxmlformats.org/markup-compatibility/2006" xmlns:a14="http://schemas.microsoft.com/office/drawing/2010/main">
-        <mc:Choice Requires="a14">
-          <p:sp>
-            <p:nvSpPr>
-              <p:cNvPr id="22" name="TextBox 21">
-                <a:extLst>
-                  <a:ext uri="{FF2B5EF4-FFF2-40B4-BE49-F238E27FC236}">
-                    <a16:creationId xmlns:a16="http://schemas.microsoft.com/office/drawing/2014/main" id="{64133125-805E-853D-8D7D-9C1E4DF9E30E}"/>
-                  </a:ext>
-                </a:extLst>
-              </p:cNvPr>
-              <p:cNvSpPr txBox="1"/>
-              <p:nvPr/>
-            </p:nvSpPr>
-            <p:spPr>
-              <a:xfrm>
-                <a:off x="7351593" y="380289"/>
-                <a:ext cx="3272527" cy="423770"/>
-              </a:xfrm>
-              <a:prstGeom prst="rect">
-                <a:avLst/>
-              </a:prstGeom>
-              <a:noFill/>
-            </p:spPr>
-            <p:txBody>
-              <a:bodyPr wrap="square" rtlCol="0">
-                <a:spAutoFit/>
-              </a:bodyPr>
-              <a:lstStyle/>
-              <a:p>
-                <a:pPr/>
-                <a14:m>
-                  <m:oMathPara xmlns:m="http://schemas.openxmlformats.org/officeDocument/2006/math">
-                    <m:oMathParaPr>
-                      <m:jc m:val="centerGroup"/>
-                    </m:oMathParaPr>
-                    <m:oMath xmlns:m="http://schemas.openxmlformats.org/officeDocument/2006/math">
-                      <m:sSub>
-                        <m:sSubPr>
-                          <m:ctrlPr>
-                            <a:rPr lang="fr-CH" sz="2000" b="0" i="1" smtClean="0">
-                              <a:latin typeface="Cambria Math" panose="02040503050406030204" pitchFamily="18" charset="0"/>
-                            </a:rPr>
-                          </m:ctrlPr>
-                        </m:sSubPr>
-                        <m:e>
-                          <m:r>
-                            <a:rPr lang="fr-CH" sz="2000" b="0" i="1" smtClean="0">
-                              <a:latin typeface="Cambria Math" panose="02040503050406030204" pitchFamily="18" charset="0"/>
-                            </a:rPr>
-                            <m:t>h</m:t>
-                          </m:r>
-                        </m:e>
-                        <m:sub>
-                          <m:r>
-                            <a:rPr lang="fr-CH" sz="2000" b="0" i="1" smtClean="0">
-                              <a:latin typeface="Cambria Math" panose="02040503050406030204" pitchFamily="18" charset="0"/>
-                            </a:rPr>
-                            <m:t>𝑒𝑝𝑖</m:t>
-                          </m:r>
-                        </m:sub>
-                      </m:sSub>
-                      <m:r>
-                        <a:rPr lang="fr-CH" sz="2000" b="0" i="1" smtClean="0">
-                          <a:latin typeface="Cambria Math" panose="02040503050406030204" pitchFamily="18" charset="0"/>
-                        </a:rPr>
-                        <m:t>(</m:t>
-                      </m:r>
-                      <m:r>
-                        <a:rPr lang="fr-CH" sz="2000" b="0" i="1" smtClean="0">
-                          <a:latin typeface="Cambria Math" panose="02040503050406030204" pitchFamily="18" charset="0"/>
-                        </a:rPr>
-                        <m:t>𝑡</m:t>
-                      </m:r>
-                      <m:r>
-                        <a:rPr lang="fr-CH" sz="2000" b="0" i="1" smtClean="0">
-                          <a:latin typeface="Cambria Math" panose="02040503050406030204" pitchFamily="18" charset="0"/>
-                        </a:rPr>
-                        <m:t>)</m:t>
-                      </m:r>
-                    </m:oMath>
-                  </m:oMathPara>
-                </a14:m>
-                <a:endParaRPr lang="en-US" sz="2000" dirty="0"/>
-              </a:p>
-            </p:txBody>
-          </p:sp>
-        </mc:Choice>
-        <mc:Fallback xmlns="">
-          <p:sp>
-            <p:nvSpPr>
-              <p:cNvPr id="22" name="TextBox 21">
-                <a:extLst>
-                  <a:ext uri="{FF2B5EF4-FFF2-40B4-BE49-F238E27FC236}">
-                    <a16:creationId xmlns:a16="http://schemas.microsoft.com/office/drawing/2014/main" id="{64133125-805E-853D-8D7D-9C1E4DF9E30E}"/>
-                  </a:ext>
-                </a:extLst>
-              </p:cNvPr>
-              <p:cNvSpPr txBox="1">
-                <a:spLocks noRot="1" noChangeAspect="1" noMove="1" noResize="1" noEditPoints="1" noAdjustHandles="1" noChangeArrowheads="1" noChangeShapeType="1" noTextEdit="1"/>
-              </p:cNvSpPr>
-              <p:nvPr/>
-            </p:nvSpPr>
-            <p:spPr>
-              <a:xfrm>
-                <a:off x="7351593" y="380289"/>
-                <a:ext cx="3272527" cy="423770"/>
-              </a:xfrm>
-              <a:prstGeom prst="rect">
-                <a:avLst/>
-              </a:prstGeom>
-              <a:blipFill>
-                <a:blip r:embed="rId7"/>
-                <a:stretch>
-                  <a:fillRect b="-10000"/>
-                </a:stretch>
-              </a:blipFill>
-            </p:spPr>
-            <p:txBody>
-              <a:bodyPr/>
-              <a:lstStyle/>
-              <a:p>
-                <a:r>
-                  <a:rPr lang="en-US">
-                    <a:noFill/>
-                  </a:rPr>
-                  <a:t> </a:t>
-                </a:r>
-              </a:p>
-            </p:txBody>
-          </p:sp>
-        </mc:Fallback>
-      </mc:AlternateContent>
       <p:sp>
         <p:nvSpPr>
           <p:cNvPr id="26" name="Arrow: Left 25">
@@ -8040,7 +8126,7 @@
         </p:nvSpPr>
         <p:spPr>
           <a:xfrm>
-            <a:off x="8662054" y="1359046"/>
+            <a:off x="8015271" y="1353497"/>
             <a:ext cx="1341844" cy="581822"/>
           </a:xfrm>
           <a:prstGeom prst="leftArrow">
@@ -8068,7 +8154,7 @@
           <a:lstStyle/>
           <a:p>
             <a:pPr algn="ctr"/>
-            <a:endParaRPr lang="en-US" sz="2000"/>
+            <a:endParaRPr lang="en-US" sz="2400"/>
           </a:p>
         </p:txBody>
       </p:sp>
@@ -8088,8 +8174,8 @@
             </p:nvSpPr>
             <p:spPr>
               <a:xfrm>
-                <a:off x="8627979" y="4610427"/>
-                <a:ext cx="4307799" cy="778355"/>
+                <a:off x="8321951" y="4798010"/>
+                <a:ext cx="4307799" cy="915764"/>
               </a:xfrm>
               <a:prstGeom prst="rect">
                 <a:avLst/>
@@ -8105,21 +8191,18 @@
                 <a:pPr/>
                 <a14:m>
                   <m:oMathPara xmlns:m="http://schemas.openxmlformats.org/officeDocument/2006/math">
-                    <m:oMathParaPr>
-                      <m:jc m:val="centerGroup"/>
-                    </m:oMathParaPr>
-                    <m:oMath xmlns:m="http://schemas.openxmlformats.org/officeDocument/2006/math">
+                    <m:oMath>
                       <m:sSub>
                         <m:sSubPr>
                           <m:ctrlPr>
-                            <a:rPr lang="fr-CH" sz="2000" b="0" i="1" smtClean="0">
+                            <a:rPr lang="fr-CH" sz="2400" b="0" i="1" smtClean="0">
                               <a:latin typeface="Cambria Math" panose="02040503050406030204" pitchFamily="18" charset="0"/>
                             </a:rPr>
                           </m:ctrlPr>
                         </m:sSubPr>
                         <m:e>
                           <m:r>
-                            <a:rPr lang="fr-CH" sz="2000" b="0" i="1" smtClean="0">
+                            <a:rPr lang="fr-CH" sz="2400" b="0" i="1" smtClean="0">
                               <a:latin typeface="Cambria Math" panose="02040503050406030204" pitchFamily="18" charset="0"/>
                             </a:rPr>
                             <m:t>𝑄</m:t>
@@ -8127,24 +8210,24 @@
                         </m:e>
                         <m:sub>
                           <m:r>
-                            <a:rPr lang="fr-CH" sz="2000" b="0" i="1" smtClean="0">
-                              <a:latin typeface="Cambria Math" panose="02040503050406030204" pitchFamily="18" charset="0"/>
-                            </a:rPr>
-                            <m:t>h𝑦𝑝𝑜</m:t>
+                            <a:rPr lang="fr-CH" sz="2400" b="0" i="1" smtClean="0">
+                              <a:latin typeface="Cambria Math" panose="02040503050406030204" pitchFamily="18" charset="0"/>
+                            </a:rPr>
+                            <m:t>ℎ𝑦𝑝𝑜</m:t>
                           </m:r>
                         </m:sub>
                       </m:sSub>
                       <m:d>
                         <m:dPr>
                           <m:ctrlPr>
-                            <a:rPr lang="fr-CH" sz="2000" b="0" i="1" smtClean="0">
+                            <a:rPr lang="fr-CH" sz="2400" b="0" i="1" smtClean="0">
                               <a:latin typeface="Cambria Math" panose="02040503050406030204" pitchFamily="18" charset="0"/>
                             </a:rPr>
                           </m:ctrlPr>
                         </m:dPr>
                         <m:e>
                           <m:r>
-                            <a:rPr lang="fr-CH" sz="2000" b="0" i="1" smtClean="0">
+                            <a:rPr lang="fr-CH" sz="2400" b="0" i="1" smtClean="0">
                               <a:latin typeface="Cambria Math" panose="02040503050406030204" pitchFamily="18" charset="0"/>
                             </a:rPr>
                             <m:t>𝑡</m:t>
@@ -8152,7 +8235,7 @@
                         </m:e>
                       </m:d>
                       <m:r>
-                        <a:rPr lang="fr-CH" sz="2000" b="0" i="1" smtClean="0">
+                        <a:rPr lang="fr-CH" sz="2400" b="0" i="1" smtClean="0">
                           <a:latin typeface="Cambria Math" panose="02040503050406030204" pitchFamily="18" charset="0"/>
                         </a:rPr>
                         <m:t>=</m:t>
@@ -8160,20 +8243,20 @@
                       <m:d>
                         <m:dPr>
                           <m:ctrlPr>
-                            <a:rPr lang="fr-CH" sz="2000" b="0" i="1" smtClean="0">
+                            <a:rPr lang="fr-CH" sz="2400" b="0" i="1" smtClean="0">
                               <a:latin typeface="Cambria Math" panose="02040503050406030204" pitchFamily="18" charset="0"/>
                             </a:rPr>
                           </m:ctrlPr>
                         </m:dPr>
                         <m:e>
                           <m:r>
-                            <a:rPr lang="fr-CH" sz="2000" b="0" i="1" smtClean="0">
+                            <a:rPr lang="fr-CH" sz="2400" b="0" i="1" smtClean="0">
                               <a:latin typeface="Cambria Math" panose="02040503050406030204" pitchFamily="18" charset="0"/>
                             </a:rPr>
                             <m:t>1−</m:t>
                           </m:r>
                           <m:r>
-                            <a:rPr lang="fr-CH" sz="2000" b="0" i="1" smtClean="0">
+                            <a:rPr lang="fr-CH" sz="2400" b="0" i="1" smtClean="0">
                               <a:latin typeface="Cambria Math" panose="02040503050406030204" pitchFamily="18" charset="0"/>
                             </a:rPr>
                             <m:t>𝛼</m:t>
@@ -8181,14 +8264,14 @@
                           <m:d>
                             <m:dPr>
                               <m:ctrlPr>
-                                <a:rPr lang="fr-CH" sz="2000" b="0" i="1" smtClean="0">
+                                <a:rPr lang="fr-CH" sz="2400" b="0" i="1" smtClean="0">
                                   <a:latin typeface="Cambria Math" panose="02040503050406030204" pitchFamily="18" charset="0"/>
                                 </a:rPr>
                               </m:ctrlPr>
                             </m:dPr>
                             <m:e>
                               <m:r>
-                                <a:rPr lang="fr-CH" sz="2000" b="0" i="1" smtClean="0">
+                                <a:rPr lang="fr-CH" sz="2400" b="0" i="1" smtClean="0">
                                   <a:latin typeface="Cambria Math" panose="02040503050406030204" pitchFamily="18" charset="0"/>
                                 </a:rPr>
                                 <m:t>𝑡</m:t>
@@ -8197,16 +8280,35 @@
                           </m:d>
                         </m:e>
                       </m:d>
-                      <m:r>
-                        <a:rPr lang="fr-CH" sz="2000" b="0" i="1" smtClean="0">
-                          <a:latin typeface="Cambria Math" panose="02040503050406030204" pitchFamily="18" charset="0"/>
-                        </a:rPr>
-                        <m:t>𝑄</m:t>
-                      </m:r>
+                      <m:sSub>
+                        <m:sSubPr>
+                          <m:ctrlPr>
+                            <a:rPr lang="fr-CH" sz="2400" b="0" i="1" smtClean="0">
+                              <a:latin typeface="Cambria Math" panose="02040503050406030204" pitchFamily="18" charset="0"/>
+                            </a:rPr>
+                          </m:ctrlPr>
+                        </m:sSubPr>
+                        <m:e>
+                          <m:r>
+                            <a:rPr lang="fr-CH" sz="2400" b="0" i="1" smtClean="0">
+                              <a:latin typeface="Cambria Math" panose="02040503050406030204" pitchFamily="18" charset="0"/>
+                            </a:rPr>
+                            <m:t>𝑄</m:t>
+                          </m:r>
+                        </m:e>
+                        <m:sub>
+                          <m:r>
+                            <a:rPr lang="fr-CH" sz="2400" b="0" i="1" smtClean="0">
+                              <a:latin typeface="Cambria Math" panose="02040503050406030204" pitchFamily="18" charset="0"/>
+                            </a:rPr>
+                            <m:t>𝑡𝑜𝑡</m:t>
+                          </m:r>
+                        </m:sub>
+                      </m:sSub>
                     </m:oMath>
                   </m:oMathPara>
                 </a14:m>
-                <a:endParaRPr lang="fr-CH" sz="2000" b="0" i="1" dirty="0">
+                <a:endParaRPr lang="fr-CH" sz="2400" b="0" i="1" dirty="0">
                   <a:latin typeface="Cambria Math" panose="02040503050406030204" pitchFamily="18" charset="0"/>
                 </a:endParaRPr>
               </a:p>
@@ -8214,12 +8316,9 @@
                 <a:pPr/>
                 <a14:m>
                   <m:oMathPara xmlns:m="http://schemas.openxmlformats.org/officeDocument/2006/math">
-                    <m:oMathParaPr>
-                      <m:jc m:val="centerGroup"/>
-                    </m:oMathParaPr>
-                    <m:oMath xmlns:m="http://schemas.openxmlformats.org/officeDocument/2006/math">
+                    <m:oMath>
                       <m:r>
-                        <a:rPr lang="fr-CH" sz="2000" b="0" i="1" smtClean="0">
+                        <a:rPr lang="fr-CH" sz="2400" b="0" i="1" smtClean="0">
                           <a:latin typeface="Cambria Math" panose="02040503050406030204" pitchFamily="18" charset="0"/>
                         </a:rPr>
                         <m:t> </m:t>
@@ -8227,14 +8326,14 @@
                       <m:sSub>
                         <m:sSubPr>
                           <m:ctrlPr>
-                            <a:rPr lang="fr-CH" sz="2000" b="0" i="1" smtClean="0">
+                            <a:rPr lang="fr-CH" sz="2400" b="0" i="1" smtClean="0">
                               <a:latin typeface="Cambria Math" panose="02040503050406030204" pitchFamily="18" charset="0"/>
                             </a:rPr>
                           </m:ctrlPr>
                         </m:sSubPr>
                         <m:e>
                           <m:r>
-                            <a:rPr lang="fr-CH" sz="2000" b="0" i="1" smtClean="0">
+                            <a:rPr lang="fr-CH" sz="2400" b="0" i="1" smtClean="0">
                               <a:latin typeface="Cambria Math" panose="02040503050406030204" pitchFamily="18" charset="0"/>
                             </a:rPr>
                             <m:t>𝐶</m:t>
@@ -8242,27 +8341,27 @@
                         </m:e>
                         <m:sub>
                           <m:r>
-                            <a:rPr lang="fr-CH" sz="2000" b="0" i="1" smtClean="0">
+                            <a:rPr lang="fr-CH" sz="2400" b="0" i="1" smtClean="0">
                               <a:latin typeface="Cambria Math" panose="02040503050406030204" pitchFamily="18" charset="0"/>
                             </a:rPr>
                             <m:t>𝑖𝑛</m:t>
                           </m:r>
                           <m:r>
-                            <a:rPr lang="fr-CH" sz="2000" b="0" i="1" smtClean="0">
+                            <a:rPr lang="fr-CH" sz="2400" b="0" i="1" smtClean="0">
                               <a:latin typeface="Cambria Math" panose="02040503050406030204" pitchFamily="18" charset="0"/>
                             </a:rPr>
                             <m:t>,</m:t>
                           </m:r>
                           <m:r>
-                            <a:rPr lang="fr-CH" sz="2000" b="0" i="1" smtClean="0">
-                              <a:latin typeface="Cambria Math" panose="02040503050406030204" pitchFamily="18" charset="0"/>
-                            </a:rPr>
-                            <m:t>h𝑦𝑝𝑜</m:t>
+                            <a:rPr lang="fr-CH" sz="2400" b="0" i="1" smtClean="0">
+                              <a:latin typeface="Cambria Math" panose="02040503050406030204" pitchFamily="18" charset="0"/>
+                            </a:rPr>
+                            <m:t>ℎ𝑦𝑝𝑜</m:t>
                           </m:r>
                         </m:sub>
                       </m:sSub>
                       <m:r>
-                        <a:rPr lang="fr-CH" sz="2000" b="0" i="0" smtClean="0">
+                        <a:rPr lang="fr-CH" sz="2400" b="0" i="0" smtClean="0">
                           <a:latin typeface="Cambria Math" panose="02040503050406030204" pitchFamily="18" charset="0"/>
                         </a:rPr>
                         <m:t>=0</m:t>
@@ -8270,7 +8369,7 @@
                     </m:oMath>
                   </m:oMathPara>
                 </a14:m>
-                <a:endParaRPr lang="en-US" sz="2000" dirty="0"/>
+                <a:endParaRPr lang="en-US" sz="2400" dirty="0"/>
               </a:p>
             </p:txBody>
           </p:sp>
@@ -8292,16 +8391,16 @@
             </p:nvSpPr>
             <p:spPr>
               <a:xfrm>
-                <a:off x="8627979" y="4610427"/>
-                <a:ext cx="4307799" cy="778355"/>
+                <a:off x="8321951" y="4798010"/>
+                <a:ext cx="4307799" cy="915764"/>
               </a:xfrm>
               <a:prstGeom prst="rect">
                 <a:avLst/>
               </a:prstGeom>
               <a:blipFill>
-                <a:blip r:embed="rId8"/>
+                <a:blip r:embed="rId7"/>
                 <a:stretch>
-                  <a:fillRect b="-3906"/>
+                  <a:fillRect b="-5333"/>
                 </a:stretch>
               </a:blipFill>
             </p:spPr>
@@ -8334,7 +8433,7 @@
         </p:nvSpPr>
         <p:spPr>
           <a:xfrm rot="5400000">
-            <a:off x="1734901" y="3170468"/>
+            <a:off x="1088118" y="3463721"/>
             <a:ext cx="1283287" cy="581822"/>
           </a:xfrm>
           <a:prstGeom prst="leftArrow">
@@ -8370,12 +8469,12 @@
           <a:lstStyle/>
           <a:p>
             <a:pPr algn="ctr"/>
-            <a:endParaRPr lang="en-US" sz="2000"/>
-          </a:p>
-        </p:txBody>
-      </p:sp>
-      <mc:AlternateContent xmlns:mc="http://schemas.openxmlformats.org/markup-compatibility/2006" xmlns:a14="http://schemas.microsoft.com/office/drawing/2010/main">
-        <mc:Choice Requires="a14">
+            <a:endParaRPr lang="en-US" sz="2400"/>
+          </a:p>
+        </p:txBody>
+      </p:sp>
+      <mc:AlternateContent xmlns:mc="http://schemas.openxmlformats.org/markup-compatibility/2006">
+        <mc:Choice xmlns:a14="http://schemas.microsoft.com/office/drawing/2010/main" Requires="a14">
           <p:sp>
             <p:nvSpPr>
               <p:cNvPr id="32" name="TextBox 31">
@@ -8390,8 +8489,8 @@
             </p:nvSpPr>
             <p:spPr>
               <a:xfrm>
-                <a:off x="708823" y="4194226"/>
-                <a:ext cx="4307799" cy="424732"/>
+                <a:off x="316546" y="4392811"/>
+                <a:ext cx="4307799" cy="491288"/>
               </a:xfrm>
               <a:prstGeom prst="rect">
                 <a:avLst/>
@@ -8407,14 +8506,11 @@
                 <a:pPr/>
                 <a14:m>
                   <m:oMathPara xmlns:m="http://schemas.openxmlformats.org/officeDocument/2006/math">
-                    <m:oMathParaPr>
-                      <m:jc m:val="centerGroup"/>
-                    </m:oMathParaPr>
-                    <m:oMath xmlns:m="http://schemas.openxmlformats.org/officeDocument/2006/math">
+                    <m:oMath>
                       <m:sSub>
                         <m:sSubPr>
                           <m:ctrlPr>
-                            <a:rPr lang="fr-CH" sz="2000" b="0" i="1" smtClean="0">
+                            <a:rPr lang="fr-CH" sz="2400" b="0" i="1" smtClean="0">
                               <a:solidFill>
                                 <a:schemeClr val="accent2"/>
                               </a:solidFill>
@@ -8426,7 +8522,7 @@
                           <m:sSub>
                             <m:sSubPr>
                               <m:ctrlPr>
-                                <a:rPr lang="fr-CH" sz="2000" b="0" i="1" smtClean="0">
+                                <a:rPr lang="fr-CH" sz="2400" b="0" i="1" smtClean="0">
                                   <a:solidFill>
                                     <a:schemeClr val="accent2"/>
                                   </a:solidFill>
@@ -8436,7 +8532,7 @@
                             </m:sSubPr>
                             <m:e>
                               <m:r>
-                                <a:rPr lang="fr-CH" sz="2000" b="0" i="1" smtClean="0">
+                                <a:rPr lang="fr-CH" sz="2400" b="0" i="1" smtClean="0">
                                   <a:solidFill>
                                     <a:schemeClr val="accent2"/>
                                   </a:solidFill>
@@ -8447,20 +8543,20 @@
                             </m:e>
                             <m:sub>
                               <m:r>
-                                <a:rPr lang="fr-CH" sz="2000" b="0" i="1" smtClean="0">
+                                <a:rPr lang="fr-CH" sz="2400" b="0" i="1" smtClean="0">
                                   <a:solidFill>
                                     <a:schemeClr val="accent2"/>
                                   </a:solidFill>
                                   <a:latin typeface="Cambria Math" panose="02040503050406030204" pitchFamily="18" charset="0"/>
                                 </a:rPr>
-                                <m:t>𝑑𝑖𝑓𝑓</m:t>
+                                <m:t>𝑎𝑑𝑣</m:t>
                               </m:r>
                             </m:sub>
                           </m:sSub>
                           <m:d>
                             <m:dPr>
                               <m:ctrlPr>
-                                <a:rPr lang="fr-CH" sz="2000" b="0" i="1" smtClean="0">
+                                <a:rPr lang="fr-CH" sz="2400" b="0" i="1" smtClean="0">
                                   <a:solidFill>
                                     <a:schemeClr val="accent2"/>
                                   </a:solidFill>
@@ -8470,7 +8566,7 @@
                             </m:dPr>
                             <m:e>
                               <m:r>
-                                <a:rPr lang="fr-CH" sz="2000" b="0" i="1" smtClean="0">
+                                <a:rPr lang="fr-CH" sz="2400" b="0" i="1" smtClean="0">
                                   <a:solidFill>
                                     <a:schemeClr val="accent2"/>
                                   </a:solidFill>
@@ -8481,7 +8577,7 @@
                             </m:e>
                           </m:d>
                           <m:r>
-                            <a:rPr lang="fr-CH" sz="2000" b="0" i="1" smtClean="0">
+                            <a:rPr lang="fr-CH" sz="2400" b="0" i="1" smtClean="0">
                               <a:solidFill>
                                 <a:schemeClr val="accent2"/>
                               </a:solidFill>
@@ -8490,7 +8586,7 @@
                             <m:t>=</m:t>
                           </m:r>
                           <m:r>
-                            <a:rPr lang="fr-CH" sz="2000" b="0" i="1" smtClean="0">
+                            <a:rPr lang="fr-CH" sz="2400" b="0" i="1" smtClean="0">
                               <a:solidFill>
                                 <a:schemeClr val="accent2"/>
                               </a:solidFill>
@@ -8501,20 +8597,20 @@
                         </m:e>
                         <m:sub>
                           <m:r>
-                            <a:rPr lang="fr-CH" sz="2000" b="0" i="1" smtClean="0">
+                            <a:rPr lang="fr-CH" sz="2400" b="0" i="1" smtClean="0">
                               <a:solidFill>
                                 <a:schemeClr val="accent2"/>
                               </a:solidFill>
                               <a:latin typeface="Cambria Math" panose="02040503050406030204" pitchFamily="18" charset="0"/>
                             </a:rPr>
-                            <m:t>h𝑦𝑝𝑜</m:t>
+                            <m:t>ℎ𝑦𝑝𝑜</m:t>
                           </m:r>
                         </m:sub>
                       </m:sSub>
                       <m:d>
                         <m:dPr>
                           <m:ctrlPr>
-                            <a:rPr lang="fr-CH" sz="2000" b="0" i="1" smtClean="0">
+                            <a:rPr lang="fr-CH" sz="2400" b="0" i="1" smtClean="0">
                               <a:solidFill>
                                 <a:schemeClr val="accent2"/>
                               </a:solidFill>
@@ -8524,7 +8620,7 @@
                         </m:dPr>
                         <m:e>
                           <m:r>
-                            <a:rPr lang="fr-CH" sz="2000" b="0" i="1" smtClean="0">
+                            <a:rPr lang="fr-CH" sz="2400" b="0" i="1" smtClean="0">
                               <a:solidFill>
                                 <a:schemeClr val="accent2"/>
                               </a:solidFill>
@@ -8537,7 +8633,7 @@
                       <m:sSub>
                         <m:sSubPr>
                           <m:ctrlPr>
-                            <a:rPr lang="fr-CH" sz="2000" b="0" i="1" smtClean="0">
+                            <a:rPr lang="fr-CH" sz="2400" b="0" i="1" smtClean="0">
                               <a:solidFill>
                                 <a:schemeClr val="accent2"/>
                               </a:solidFill>
@@ -8547,7 +8643,7 @@
                         </m:sSubPr>
                         <m:e>
                           <m:r>
-                            <a:rPr lang="fr-CH" sz="2000" b="0" i="1" smtClean="0">
+                            <a:rPr lang="fr-CH" sz="2400" b="0" i="1" smtClean="0">
                               <a:solidFill>
                                 <a:schemeClr val="accent2"/>
                               </a:solidFill>
@@ -8558,18 +8654,18 @@
                         </m:e>
                         <m:sub>
                           <m:r>
-                            <a:rPr lang="fr-CH" sz="2000" b="0" i="1" smtClean="0">
+                            <a:rPr lang="fr-CH" sz="2400" b="0" i="1" smtClean="0">
                               <a:solidFill>
                                 <a:schemeClr val="accent2"/>
                               </a:solidFill>
                               <a:latin typeface="Cambria Math" panose="02040503050406030204" pitchFamily="18" charset="0"/>
                             </a:rPr>
-                            <m:t>h𝑦𝑝𝑜</m:t>
+                            <m:t>ℎ𝑦𝑝𝑜</m:t>
                           </m:r>
                         </m:sub>
                       </m:sSub>
                       <m:r>
-                        <a:rPr lang="fr-CH" sz="2000" b="0" i="1" smtClean="0">
+                        <a:rPr lang="fr-CH" sz="2400" b="0" i="1" smtClean="0">
                           <a:solidFill>
                             <a:schemeClr val="accent2"/>
                           </a:solidFill>
@@ -8578,7 +8674,7 @@
                         <m:t>(</m:t>
                       </m:r>
                       <m:r>
-                        <a:rPr lang="fr-CH" sz="2000" b="0" i="1" smtClean="0">
+                        <a:rPr lang="fr-CH" sz="2400" b="0" i="1" smtClean="0">
                           <a:solidFill>
                             <a:schemeClr val="accent2"/>
                           </a:solidFill>
@@ -8587,7 +8683,7 @@
                         <m:t>𝑡</m:t>
                       </m:r>
                       <m:r>
-                        <a:rPr lang="fr-CH" sz="2000" b="0" i="1" smtClean="0">
+                        <a:rPr lang="fr-CH" sz="2400" b="0" i="1" smtClean="0">
                           <a:solidFill>
                             <a:schemeClr val="accent2"/>
                           </a:solidFill>
@@ -8598,7 +8694,7 @@
                     </m:oMath>
                   </m:oMathPara>
                 </a14:m>
-                <a:endParaRPr lang="en-US" sz="2000" dirty="0">
+                <a:endParaRPr lang="en-US" sz="2400" dirty="0">
                   <a:solidFill>
                     <a:schemeClr val="accent2"/>
                   </a:solidFill>
@@ -8607,7 +8703,7 @@
             </p:txBody>
           </p:sp>
         </mc:Choice>
-        <mc:Fallback xmlns="">
+        <mc:Fallback>
           <p:sp>
             <p:nvSpPr>
               <p:cNvPr id="32" name="TextBox 31">
@@ -8624,681 +8720,16 @@
             </p:nvSpPr>
             <p:spPr>
               <a:xfrm>
-                <a:off x="708823" y="4194226"/>
-                <a:ext cx="4307799" cy="424732"/>
+                <a:off x="316546" y="4392811"/>
+                <a:ext cx="4307799" cy="491288"/>
               </a:xfrm>
               <a:prstGeom prst="rect">
                 <a:avLst/>
               </a:prstGeom>
               <a:blipFill>
-                <a:blip r:embed="rId9"/>
+                <a:blip r:embed="rId8"/>
                 <a:stretch>
-                  <a:fillRect b="-10000"/>
-                </a:stretch>
-              </a:blipFill>
-            </p:spPr>
-            <p:txBody>
-              <a:bodyPr/>
-              <a:lstStyle/>
-              <a:p>
-                <a:r>
-                  <a:rPr lang="en-US">
-                    <a:noFill/>
-                  </a:rPr>
-                  <a:t> </a:t>
-                </a:r>
-              </a:p>
-            </p:txBody>
-          </p:sp>
-        </mc:Fallback>
-      </mc:AlternateContent>
-      <mc:AlternateContent xmlns:mc="http://schemas.openxmlformats.org/markup-compatibility/2006" xmlns:a14="http://schemas.microsoft.com/office/drawing/2010/main">
-        <mc:Choice Requires="a14">
-          <p:sp>
-            <p:nvSpPr>
-              <p:cNvPr id="34" name="TextBox 33">
-                <a:extLst>
-                  <a:ext uri="{FF2B5EF4-FFF2-40B4-BE49-F238E27FC236}">
-                    <a16:creationId xmlns:a16="http://schemas.microsoft.com/office/drawing/2014/main" id="{41733A3A-7594-7495-B38A-4AC7179145E4}"/>
-                  </a:ext>
-                </a:extLst>
-              </p:cNvPr>
-              <p:cNvSpPr txBox="1"/>
-              <p:nvPr/>
-            </p:nvSpPr>
-            <p:spPr>
-              <a:xfrm>
-                <a:off x="2610615" y="1366171"/>
-                <a:ext cx="6269175" cy="1479764"/>
-              </a:xfrm>
-              <a:prstGeom prst="rect">
-                <a:avLst/>
-              </a:prstGeom>
-              <a:noFill/>
-            </p:spPr>
-            <p:txBody>
-              <a:bodyPr wrap="square" rtlCol="0">
-                <a:spAutoFit/>
-              </a:bodyPr>
-              <a:lstStyle/>
-              <a:p>
-                <a:pPr/>
-                <a14:m>
-                  <m:oMathPara xmlns:m="http://schemas.openxmlformats.org/officeDocument/2006/math">
-                    <m:oMathParaPr>
-                      <m:jc m:val="centerGroup"/>
-                    </m:oMathParaPr>
-                    <m:oMath xmlns:m="http://schemas.openxmlformats.org/officeDocument/2006/math">
-                      <m:sSub>
-                        <m:sSubPr>
-                          <m:ctrlPr>
-                            <a:rPr lang="fr-CH" sz="2000" i="1" smtClean="0">
-                              <a:solidFill>
-                                <a:schemeClr val="accent4"/>
-                              </a:solidFill>
-                              <a:latin typeface="Cambria Math" panose="02040503050406030204" pitchFamily="18" charset="0"/>
-                            </a:rPr>
-                          </m:ctrlPr>
-                        </m:sSubPr>
-                        <m:e>
-                          <m:r>
-                            <a:rPr lang="fr-CH" sz="2000" i="1">
-                              <a:solidFill>
-                                <a:schemeClr val="accent4"/>
-                              </a:solidFill>
-                              <a:latin typeface="Cambria Math" panose="02040503050406030204" pitchFamily="18" charset="0"/>
-                            </a:rPr>
-                            <m:t>𝑀</m:t>
-                          </m:r>
-                        </m:e>
-                        <m:sub>
-                          <m:r>
-                            <a:rPr lang="fr-CH" sz="2000" i="1">
-                              <a:solidFill>
-                                <a:schemeClr val="accent4"/>
-                              </a:solidFill>
-                              <a:latin typeface="Cambria Math" panose="02040503050406030204" pitchFamily="18" charset="0"/>
-                            </a:rPr>
-                            <m:t>𝑚𝑖𝑥</m:t>
-                          </m:r>
-                          <m:r>
-                            <a:rPr lang="fr-CH" sz="2000" b="0" i="1" smtClean="0">
-                              <a:solidFill>
-                                <a:schemeClr val="accent4"/>
-                              </a:solidFill>
-                              <a:latin typeface="Cambria Math" panose="02040503050406030204" pitchFamily="18" charset="0"/>
-                            </a:rPr>
-                            <m:t>,</m:t>
-                          </m:r>
-                          <m:r>
-                            <a:rPr lang="fr-CH" sz="2000" b="0" i="1" smtClean="0">
-                              <a:solidFill>
-                                <a:schemeClr val="accent4"/>
-                              </a:solidFill>
-                              <a:latin typeface="Cambria Math" panose="02040503050406030204" pitchFamily="18" charset="0"/>
-                            </a:rPr>
-                            <m:t>𝑒𝑝𝑖</m:t>
-                          </m:r>
-                        </m:sub>
-                      </m:sSub>
-                      <m:d>
-                        <m:dPr>
-                          <m:ctrlPr>
-                            <a:rPr lang="fr-CH" sz="2000" i="1">
-                              <a:solidFill>
-                                <a:schemeClr val="accent4"/>
-                              </a:solidFill>
-                              <a:latin typeface="Cambria Math" panose="02040503050406030204" pitchFamily="18" charset="0"/>
-                            </a:rPr>
-                          </m:ctrlPr>
-                        </m:dPr>
-                        <m:e>
-                          <m:r>
-                            <a:rPr lang="fr-CH" sz="2000" i="1">
-                              <a:solidFill>
-                                <a:schemeClr val="accent4"/>
-                              </a:solidFill>
-                              <a:latin typeface="Cambria Math" panose="02040503050406030204" pitchFamily="18" charset="0"/>
-                            </a:rPr>
-                            <m:t>𝑡</m:t>
-                          </m:r>
-                        </m:e>
-                      </m:d>
-                      <m:r>
-                        <a:rPr lang="fr-CH" sz="2000" i="1">
-                          <a:solidFill>
-                            <a:schemeClr val="accent4"/>
-                          </a:solidFill>
-                          <a:latin typeface="Cambria Math" panose="02040503050406030204" pitchFamily="18" charset="0"/>
-                        </a:rPr>
-                        <m:t>=</m:t>
-                      </m:r>
-                      <m:d>
-                        <m:dPr>
-                          <m:begChr m:val="{"/>
-                          <m:endChr m:val=""/>
-                          <m:ctrlPr>
-                            <a:rPr lang="en-US" sz="2000" i="1" smtClean="0">
-                              <a:solidFill>
-                                <a:schemeClr val="accent4"/>
-                              </a:solidFill>
-                              <a:latin typeface="Cambria Math" panose="02040503050406030204" pitchFamily="18" charset="0"/>
-                            </a:rPr>
-                          </m:ctrlPr>
-                        </m:dPr>
-                        <m:e>
-                          <m:eqArr>
-                            <m:eqArrPr>
-                              <m:ctrlPr>
-                                <a:rPr lang="en-US" sz="2000" i="1" smtClean="0">
-                                  <a:solidFill>
-                                    <a:schemeClr val="accent4"/>
-                                  </a:solidFill>
-                                  <a:latin typeface="Cambria Math" panose="02040503050406030204" pitchFamily="18" charset="0"/>
-                                </a:rPr>
-                              </m:ctrlPr>
-                            </m:eqArrPr>
-                            <m:e>
-                              <m:f>
-                                <m:fPr>
-                                  <m:ctrlPr>
-                                    <a:rPr lang="fr-CH" sz="2000" b="0" i="1" smtClean="0">
-                                      <a:solidFill>
-                                        <a:schemeClr val="accent4"/>
-                                      </a:solidFill>
-                                      <a:latin typeface="Cambria Math" panose="02040503050406030204" pitchFamily="18" charset="0"/>
-                                    </a:rPr>
-                                  </m:ctrlPr>
-                                </m:fPr>
-                                <m:num>
-                                  <m:r>
-                                    <a:rPr lang="fr-CH" sz="2000" b="0" i="1" smtClean="0">
-                                      <a:solidFill>
-                                        <a:schemeClr val="accent4"/>
-                                      </a:solidFill>
-                                      <a:latin typeface="Cambria Math" panose="02040503050406030204" pitchFamily="18" charset="0"/>
-                                    </a:rPr>
-                                    <m:t>𝑑</m:t>
-                                  </m:r>
-                                  <m:sSub>
-                                    <m:sSubPr>
-                                      <m:ctrlPr>
-                                        <a:rPr lang="fr-CH" sz="2000" b="0" i="1" smtClean="0">
-                                          <a:solidFill>
-                                            <a:schemeClr val="accent4"/>
-                                          </a:solidFill>
-                                          <a:latin typeface="Cambria Math" panose="02040503050406030204" pitchFamily="18" charset="0"/>
-                                        </a:rPr>
-                                      </m:ctrlPr>
-                                    </m:sSubPr>
-                                    <m:e>
-                                      <m:r>
-                                        <a:rPr lang="fr-CH" sz="2000" b="0" i="1" smtClean="0">
-                                          <a:solidFill>
-                                            <a:schemeClr val="accent4"/>
-                                          </a:solidFill>
-                                          <a:latin typeface="Cambria Math" panose="02040503050406030204" pitchFamily="18" charset="0"/>
-                                        </a:rPr>
-                                        <m:t>𝑉</m:t>
-                                      </m:r>
-                                    </m:e>
-                                    <m:sub>
-                                      <m:r>
-                                        <a:rPr lang="fr-CH" sz="2000" b="0" i="1" smtClean="0">
-                                          <a:solidFill>
-                                            <a:schemeClr val="accent4"/>
-                                          </a:solidFill>
-                                          <a:latin typeface="Cambria Math" panose="02040503050406030204" pitchFamily="18" charset="0"/>
-                                        </a:rPr>
-                                        <m:t>𝑒𝑝𝑖</m:t>
-                                      </m:r>
-                                    </m:sub>
-                                  </m:sSub>
-                                </m:num>
-                                <m:den>
-                                  <m:r>
-                                    <a:rPr lang="fr-CH" sz="2000" b="0" i="1" smtClean="0">
-                                      <a:solidFill>
-                                        <a:schemeClr val="accent4"/>
-                                      </a:solidFill>
-                                      <a:latin typeface="Cambria Math" panose="02040503050406030204" pitchFamily="18" charset="0"/>
-                                    </a:rPr>
-                                    <m:t>𝑑𝑡</m:t>
-                                  </m:r>
-                                </m:den>
-                              </m:f>
-                              <m:sSub>
-                                <m:sSubPr>
-                                  <m:ctrlPr>
-                                    <a:rPr lang="fr-CH" sz="2000" b="0" i="1" smtClean="0">
-                                      <a:solidFill>
-                                        <a:schemeClr val="accent4"/>
-                                      </a:solidFill>
-                                      <a:latin typeface="Cambria Math" panose="02040503050406030204" pitchFamily="18" charset="0"/>
-                                    </a:rPr>
-                                  </m:ctrlPr>
-                                </m:sSubPr>
-                                <m:e>
-                                  <m:r>
-                                    <a:rPr lang="fr-CH" sz="2000" b="0" i="1" smtClean="0">
-                                      <a:solidFill>
-                                        <a:schemeClr val="accent4"/>
-                                      </a:solidFill>
-                                      <a:latin typeface="Cambria Math" panose="02040503050406030204" pitchFamily="18" charset="0"/>
-                                    </a:rPr>
-                                    <m:t>𝐶</m:t>
-                                  </m:r>
-                                </m:e>
-                                <m:sub>
-                                  <m:r>
-                                    <a:rPr lang="fr-CH" sz="2000" b="0" i="1" smtClean="0">
-                                      <a:solidFill>
-                                        <a:schemeClr val="accent4"/>
-                                      </a:solidFill>
-                                      <a:latin typeface="Cambria Math" panose="02040503050406030204" pitchFamily="18" charset="0"/>
-                                    </a:rPr>
-                                    <m:t>h𝑦𝑝𝑜</m:t>
-                                  </m:r>
-                                </m:sub>
-                              </m:sSub>
-                              <m:d>
-                                <m:dPr>
-                                  <m:ctrlPr>
-                                    <a:rPr lang="fr-CH" sz="2000" b="0" i="1" smtClean="0">
-                                      <a:solidFill>
-                                        <a:schemeClr val="accent4"/>
-                                      </a:solidFill>
-                                      <a:latin typeface="Cambria Math" panose="02040503050406030204" pitchFamily="18" charset="0"/>
-                                    </a:rPr>
-                                  </m:ctrlPr>
-                                </m:dPr>
-                                <m:e>
-                                  <m:r>
-                                    <a:rPr lang="fr-CH" sz="2000" b="0" i="1" smtClean="0">
-                                      <a:solidFill>
-                                        <a:schemeClr val="accent4"/>
-                                      </a:solidFill>
-                                      <a:latin typeface="Cambria Math" panose="02040503050406030204" pitchFamily="18" charset="0"/>
-                                    </a:rPr>
-                                    <m:t>𝑡</m:t>
-                                  </m:r>
-                                </m:e>
-                              </m:d>
-                              <m:r>
-                                <a:rPr lang="fr-CH" sz="2000" b="0" i="0" smtClean="0">
-                                  <a:solidFill>
-                                    <a:schemeClr val="accent4"/>
-                                  </a:solidFill>
-                                  <a:latin typeface="Cambria Math" panose="02040503050406030204" pitchFamily="18" charset="0"/>
-                                </a:rPr>
-                                <m:t>, </m:t>
-                              </m:r>
-                              <m:r>
-                                <m:rPr>
-                                  <m:sty m:val="p"/>
-                                </m:rPr>
-                                <a:rPr lang="fr-CH" sz="2000" b="0" i="0" smtClean="0">
-                                  <a:solidFill>
-                                    <a:schemeClr val="accent4"/>
-                                  </a:solidFill>
-                                  <a:latin typeface="Cambria Math" panose="02040503050406030204" pitchFamily="18" charset="0"/>
-                                </a:rPr>
-                                <m:t>if</m:t>
-                              </m:r>
-                              <m:f>
-                                <m:fPr>
-                                  <m:ctrlPr>
-                                    <a:rPr lang="fr-CH" sz="2000" b="0" i="1" smtClean="0">
-                                      <a:solidFill>
-                                        <a:schemeClr val="accent4"/>
-                                      </a:solidFill>
-                                      <a:latin typeface="Cambria Math" panose="02040503050406030204" pitchFamily="18" charset="0"/>
-                                    </a:rPr>
-                                  </m:ctrlPr>
-                                </m:fPr>
-                                <m:num>
-                                  <m:r>
-                                    <a:rPr lang="fr-CH" sz="2000" b="0" i="1" smtClean="0">
-                                      <a:solidFill>
-                                        <a:schemeClr val="accent4"/>
-                                      </a:solidFill>
-                                      <a:latin typeface="Cambria Math" panose="02040503050406030204" pitchFamily="18" charset="0"/>
-                                    </a:rPr>
-                                    <m:t>𝑑</m:t>
-                                  </m:r>
-                                  <m:sSub>
-                                    <m:sSubPr>
-                                      <m:ctrlPr>
-                                        <a:rPr lang="fr-CH" sz="2000" b="0" i="1" smtClean="0">
-                                          <a:solidFill>
-                                            <a:schemeClr val="accent4"/>
-                                          </a:solidFill>
-                                          <a:latin typeface="Cambria Math" panose="02040503050406030204" pitchFamily="18" charset="0"/>
-                                        </a:rPr>
-                                      </m:ctrlPr>
-                                    </m:sSubPr>
-                                    <m:e>
-                                      <m:r>
-                                        <a:rPr lang="fr-CH" sz="2000" b="0" i="1" smtClean="0">
-                                          <a:solidFill>
-                                            <a:schemeClr val="accent4"/>
-                                          </a:solidFill>
-                                          <a:latin typeface="Cambria Math" panose="02040503050406030204" pitchFamily="18" charset="0"/>
-                                        </a:rPr>
-                                        <m:t>h</m:t>
-                                      </m:r>
-                                    </m:e>
-                                    <m:sub>
-                                      <m:r>
-                                        <a:rPr lang="fr-CH" sz="2000" b="0" i="1" smtClean="0">
-                                          <a:solidFill>
-                                            <a:schemeClr val="accent4"/>
-                                          </a:solidFill>
-                                          <a:latin typeface="Cambria Math" panose="02040503050406030204" pitchFamily="18" charset="0"/>
-                                        </a:rPr>
-                                        <m:t>𝑒𝑝𝑖</m:t>
-                                      </m:r>
-                                    </m:sub>
-                                  </m:sSub>
-                                </m:num>
-                                <m:den>
-                                  <m:r>
-                                    <a:rPr lang="fr-CH" sz="2000" b="0" i="1" smtClean="0">
-                                      <a:solidFill>
-                                        <a:schemeClr val="accent4"/>
-                                      </a:solidFill>
-                                      <a:latin typeface="Cambria Math" panose="02040503050406030204" pitchFamily="18" charset="0"/>
-                                    </a:rPr>
-                                    <m:t>𝑑𝑡</m:t>
-                                  </m:r>
-                                </m:den>
-                              </m:f>
-                              <m:r>
-                                <a:rPr lang="fr-CH" sz="2000" b="0" i="1" smtClean="0">
-                                  <a:solidFill>
-                                    <a:schemeClr val="accent4"/>
-                                  </a:solidFill>
-                                  <a:latin typeface="Cambria Math" panose="02040503050406030204" pitchFamily="18" charset="0"/>
-                                </a:rPr>
-                                <m:t>&gt;0</m:t>
-                              </m:r>
-                            </m:e>
-                            <m:e>
-                              <m:f>
-                                <m:fPr>
-                                  <m:ctrlPr>
-                                    <a:rPr lang="fr-CH" sz="2000" i="1">
-                                      <a:solidFill>
-                                        <a:schemeClr val="accent4"/>
-                                      </a:solidFill>
-                                      <a:latin typeface="Cambria Math" panose="02040503050406030204" pitchFamily="18" charset="0"/>
-                                    </a:rPr>
-                                  </m:ctrlPr>
-                                </m:fPr>
-                                <m:num>
-                                  <m:r>
-                                    <a:rPr lang="fr-CH" sz="2000" i="1">
-                                      <a:solidFill>
-                                        <a:schemeClr val="accent4"/>
-                                      </a:solidFill>
-                                      <a:latin typeface="Cambria Math" panose="02040503050406030204" pitchFamily="18" charset="0"/>
-                                    </a:rPr>
-                                    <m:t>𝑑</m:t>
-                                  </m:r>
-                                  <m:sSub>
-                                    <m:sSubPr>
-                                      <m:ctrlPr>
-                                        <a:rPr lang="fr-CH" sz="2000" i="1">
-                                          <a:solidFill>
-                                            <a:schemeClr val="accent4"/>
-                                          </a:solidFill>
-                                          <a:latin typeface="Cambria Math" panose="02040503050406030204" pitchFamily="18" charset="0"/>
-                                        </a:rPr>
-                                      </m:ctrlPr>
-                                    </m:sSubPr>
-                                    <m:e>
-                                      <m:r>
-                                        <a:rPr lang="fr-CH" sz="2000" i="1">
-                                          <a:solidFill>
-                                            <a:schemeClr val="accent4"/>
-                                          </a:solidFill>
-                                          <a:latin typeface="Cambria Math" panose="02040503050406030204" pitchFamily="18" charset="0"/>
-                                        </a:rPr>
-                                        <m:t>𝑉</m:t>
-                                      </m:r>
-                                    </m:e>
-                                    <m:sub>
-                                      <m:r>
-                                        <a:rPr lang="fr-CH" sz="2000" i="1">
-                                          <a:solidFill>
-                                            <a:schemeClr val="accent4"/>
-                                          </a:solidFill>
-                                          <a:latin typeface="Cambria Math" panose="02040503050406030204" pitchFamily="18" charset="0"/>
-                                        </a:rPr>
-                                        <m:t>𝑒𝑝𝑖</m:t>
-                                      </m:r>
-                                    </m:sub>
-                                  </m:sSub>
-                                </m:num>
-                                <m:den>
-                                  <m:r>
-                                    <a:rPr lang="fr-CH" sz="2000" i="1">
-                                      <a:solidFill>
-                                        <a:schemeClr val="accent4"/>
-                                      </a:solidFill>
-                                      <a:latin typeface="Cambria Math" panose="02040503050406030204" pitchFamily="18" charset="0"/>
-                                    </a:rPr>
-                                    <m:t>𝑑𝑡</m:t>
-                                  </m:r>
-                                </m:den>
-                              </m:f>
-                              <m:sSub>
-                                <m:sSubPr>
-                                  <m:ctrlPr>
-                                    <a:rPr lang="fr-CH" sz="2000" i="1">
-                                      <a:solidFill>
-                                        <a:schemeClr val="accent4"/>
-                                      </a:solidFill>
-                                      <a:latin typeface="Cambria Math" panose="02040503050406030204" pitchFamily="18" charset="0"/>
-                                    </a:rPr>
-                                  </m:ctrlPr>
-                                </m:sSubPr>
-                                <m:e>
-                                  <m:r>
-                                    <a:rPr lang="fr-CH" sz="2000" i="1">
-                                      <a:solidFill>
-                                        <a:schemeClr val="accent4"/>
-                                      </a:solidFill>
-                                      <a:latin typeface="Cambria Math" panose="02040503050406030204" pitchFamily="18" charset="0"/>
-                                    </a:rPr>
-                                    <m:t>𝐶</m:t>
-                                  </m:r>
-                                </m:e>
-                                <m:sub>
-                                  <m:r>
-                                    <a:rPr lang="fr-CH" sz="2000" b="0" i="1" smtClean="0">
-                                      <a:solidFill>
-                                        <a:schemeClr val="accent4"/>
-                                      </a:solidFill>
-                                      <a:latin typeface="Cambria Math" panose="02040503050406030204" pitchFamily="18" charset="0"/>
-                                    </a:rPr>
-                                    <m:t>𝑒𝑝𝑖</m:t>
-                                  </m:r>
-                                </m:sub>
-                              </m:sSub>
-                              <m:d>
-                                <m:dPr>
-                                  <m:ctrlPr>
-                                    <a:rPr lang="fr-CH" sz="2000" i="1">
-                                      <a:solidFill>
-                                        <a:schemeClr val="accent4"/>
-                                      </a:solidFill>
-                                      <a:latin typeface="Cambria Math" panose="02040503050406030204" pitchFamily="18" charset="0"/>
-                                    </a:rPr>
-                                  </m:ctrlPr>
-                                </m:dPr>
-                                <m:e>
-                                  <m:r>
-                                    <a:rPr lang="fr-CH" sz="2000" i="1">
-                                      <a:solidFill>
-                                        <a:schemeClr val="accent4"/>
-                                      </a:solidFill>
-                                      <a:latin typeface="Cambria Math" panose="02040503050406030204" pitchFamily="18" charset="0"/>
-                                    </a:rPr>
-                                    <m:t>𝑡</m:t>
-                                  </m:r>
-                                </m:e>
-                              </m:d>
-                              <m:r>
-                                <a:rPr lang="fr-CH" sz="2000" b="0" i="1" smtClean="0">
-                                  <a:solidFill>
-                                    <a:schemeClr val="accent4"/>
-                                  </a:solidFill>
-                                  <a:latin typeface="Cambria Math" panose="02040503050406030204" pitchFamily="18" charset="0"/>
-                                </a:rPr>
-                                <m:t>,</m:t>
-                              </m:r>
-                              <m:r>
-                                <a:rPr lang="fr-CH" sz="2000" b="0" i="0" smtClean="0">
-                                  <a:solidFill>
-                                    <a:schemeClr val="accent4"/>
-                                  </a:solidFill>
-                                  <a:latin typeface="Cambria Math" panose="02040503050406030204" pitchFamily="18" charset="0"/>
-                                </a:rPr>
-                                <m:t> </m:t>
-                              </m:r>
-                              <m:r>
-                                <m:rPr>
-                                  <m:sty m:val="p"/>
-                                </m:rPr>
-                                <a:rPr lang="fr-CH" sz="2000" b="0" i="0" smtClean="0">
-                                  <a:solidFill>
-                                    <a:schemeClr val="accent4"/>
-                                  </a:solidFill>
-                                  <a:latin typeface="Cambria Math" panose="02040503050406030204" pitchFamily="18" charset="0"/>
-                                </a:rPr>
-                                <m:t>if</m:t>
-                              </m:r>
-                              <m:f>
-                                <m:fPr>
-                                  <m:ctrlPr>
-                                    <a:rPr lang="fr-CH" sz="2000" b="0" i="1" smtClean="0">
-                                      <a:solidFill>
-                                        <a:schemeClr val="accent4"/>
-                                      </a:solidFill>
-                                      <a:latin typeface="Cambria Math" panose="02040503050406030204" pitchFamily="18" charset="0"/>
-                                    </a:rPr>
-                                  </m:ctrlPr>
-                                </m:fPr>
-                                <m:num>
-                                  <m:r>
-                                    <a:rPr lang="fr-CH" sz="2000" b="0" i="1" smtClean="0">
-                                      <a:solidFill>
-                                        <a:schemeClr val="accent4"/>
-                                      </a:solidFill>
-                                      <a:latin typeface="Cambria Math" panose="02040503050406030204" pitchFamily="18" charset="0"/>
-                                    </a:rPr>
-                                    <m:t>𝑑</m:t>
-                                  </m:r>
-                                  <m:sSub>
-                                    <m:sSubPr>
-                                      <m:ctrlPr>
-                                        <a:rPr lang="fr-CH" sz="2000" b="0" i="1" smtClean="0">
-                                          <a:solidFill>
-                                            <a:schemeClr val="accent4"/>
-                                          </a:solidFill>
-                                          <a:latin typeface="Cambria Math" panose="02040503050406030204" pitchFamily="18" charset="0"/>
-                                        </a:rPr>
-                                      </m:ctrlPr>
-                                    </m:sSubPr>
-                                    <m:e>
-                                      <m:r>
-                                        <a:rPr lang="fr-CH" sz="2000" b="0" i="1" smtClean="0">
-                                          <a:solidFill>
-                                            <a:schemeClr val="accent4"/>
-                                          </a:solidFill>
-                                          <a:latin typeface="Cambria Math" panose="02040503050406030204" pitchFamily="18" charset="0"/>
-                                        </a:rPr>
-                                        <m:t>h</m:t>
-                                      </m:r>
-                                    </m:e>
-                                    <m:sub>
-                                      <m:r>
-                                        <a:rPr lang="fr-CH" sz="2000" b="0" i="1" smtClean="0">
-                                          <a:solidFill>
-                                            <a:schemeClr val="accent4"/>
-                                          </a:solidFill>
-                                          <a:latin typeface="Cambria Math" panose="02040503050406030204" pitchFamily="18" charset="0"/>
-                                        </a:rPr>
-                                        <m:t>𝑒𝑝𝑖</m:t>
-                                      </m:r>
-                                    </m:sub>
-                                  </m:sSub>
-                                </m:num>
-                                <m:den>
-                                  <m:r>
-                                    <a:rPr lang="fr-CH" sz="2000" b="0" i="1" smtClean="0">
-                                      <a:solidFill>
-                                        <a:schemeClr val="accent4"/>
-                                      </a:solidFill>
-                                      <a:latin typeface="Cambria Math" panose="02040503050406030204" pitchFamily="18" charset="0"/>
-                                    </a:rPr>
-                                    <m:t>𝑑𝑡</m:t>
-                                  </m:r>
-                                </m:den>
-                              </m:f>
-                              <m:r>
-                                <a:rPr lang="fr-CH" sz="2000" b="0" i="1" smtClean="0">
-                                  <a:solidFill>
-                                    <a:schemeClr val="accent4"/>
-                                  </a:solidFill>
-                                  <a:latin typeface="Cambria Math" panose="02040503050406030204" pitchFamily="18" charset="0"/>
-                                </a:rPr>
-                                <m:t>&lt;0</m:t>
-                              </m:r>
-                            </m:e>
-                          </m:eqArr>
-                        </m:e>
-                      </m:d>
-                    </m:oMath>
-                  </m:oMathPara>
-                </a14:m>
-                <a:endParaRPr lang="en-US" sz="2000" dirty="0">
-                  <a:solidFill>
-                    <a:schemeClr val="accent2"/>
-                  </a:solidFill>
-                </a:endParaRPr>
-              </a:p>
-            </p:txBody>
-          </p:sp>
-        </mc:Choice>
-        <mc:Fallback xmlns="">
-          <p:sp>
-            <p:nvSpPr>
-              <p:cNvPr id="34" name="TextBox 33">
-                <a:extLst>
-                  <a:ext uri="{FF2B5EF4-FFF2-40B4-BE49-F238E27FC236}">
-                    <a16:creationId xmlns:a16="http://schemas.microsoft.com/office/drawing/2014/main" id="{41733A3A-7594-7495-B38A-4AC7179145E4}"/>
-                  </a:ext>
-                </a:extLst>
-              </p:cNvPr>
-              <p:cNvSpPr txBox="1">
-                <a:spLocks noRot="1" noChangeAspect="1" noMove="1" noResize="1" noEditPoints="1" noAdjustHandles="1" noChangeArrowheads="1" noChangeShapeType="1" noTextEdit="1"/>
-              </p:cNvSpPr>
-              <p:nvPr/>
-            </p:nvSpPr>
-            <p:spPr>
-              <a:xfrm>
-                <a:off x="2610615" y="1366171"/>
-                <a:ext cx="6269175" cy="1479764"/>
-              </a:xfrm>
-              <a:prstGeom prst="rect">
-                <a:avLst/>
-              </a:prstGeom>
-              <a:blipFill>
-                <a:blip r:embed="rId10"/>
-                <a:stretch>
-                  <a:fillRect/>
+                  <a:fillRect b="-12500"/>
                 </a:stretch>
               </a:blipFill>
             </p:spPr>
@@ -9333,8 +8764,8 @@
             </p:nvSpPr>
             <p:spPr>
               <a:xfrm>
-                <a:off x="4532758" y="4609426"/>
-                <a:ext cx="6269175" cy="424283"/>
+                <a:off x="3708162" y="4393035"/>
+                <a:ext cx="6269175" cy="490840"/>
               </a:xfrm>
               <a:prstGeom prst="rect">
                 <a:avLst/>
@@ -9350,14 +8781,11 @@
                 <a:pPr/>
                 <a14:m>
                   <m:oMathPara xmlns:m="http://schemas.openxmlformats.org/officeDocument/2006/math">
-                    <m:oMathParaPr>
-                      <m:jc m:val="centerGroup"/>
-                    </m:oMathParaPr>
-                    <m:oMath xmlns:m="http://schemas.openxmlformats.org/officeDocument/2006/math">
+                    <m:oMath>
                       <m:sSub>
                         <m:sSubPr>
                           <m:ctrlPr>
-                            <a:rPr lang="fr-CH" sz="2000" i="1" smtClean="0">
+                            <a:rPr lang="fr-CH" sz="2400" i="1">
                               <a:solidFill>
                                 <a:schemeClr val="accent4"/>
                               </a:solidFill>
@@ -9367,7 +8795,7 @@
                         </m:sSubPr>
                         <m:e>
                           <m:r>
-                            <a:rPr lang="fr-CH" sz="2000" i="1">
+                            <a:rPr lang="fr-CH" sz="2400" i="1">
                               <a:solidFill>
                                 <a:schemeClr val="accent4"/>
                               </a:solidFill>
@@ -9378,7 +8806,7 @@
                         </m:e>
                         <m:sub>
                           <m:r>
-                            <a:rPr lang="fr-CH" sz="2000" i="1">
+                            <a:rPr lang="fr-CH" sz="2400" i="1">
                               <a:solidFill>
                                 <a:schemeClr val="accent4"/>
                               </a:solidFill>
@@ -9387,7 +8815,7 @@
                             <m:t>𝑚𝑖𝑥</m:t>
                           </m:r>
                           <m:r>
-                            <a:rPr lang="fr-CH" sz="2000" b="0" i="1" smtClean="0">
+                            <a:rPr lang="fr-CH" sz="2400" b="0" i="1" smtClean="0">
                               <a:solidFill>
                                 <a:schemeClr val="accent4"/>
                               </a:solidFill>
@@ -9396,20 +8824,20 @@
                             <m:t>,</m:t>
                           </m:r>
                           <m:r>
-                            <a:rPr lang="fr-CH" sz="2000" b="0" i="1" smtClean="0">
+                            <a:rPr lang="fr-CH" sz="2400" b="0" i="1" smtClean="0">
                               <a:solidFill>
                                 <a:schemeClr val="accent4"/>
                               </a:solidFill>
                               <a:latin typeface="Cambria Math" panose="02040503050406030204" pitchFamily="18" charset="0"/>
                             </a:rPr>
-                            <m:t>h𝑦𝑝𝑜</m:t>
+                            <m:t>ℎ𝑦𝑝𝑜</m:t>
                           </m:r>
                         </m:sub>
                       </m:sSub>
                       <m:d>
                         <m:dPr>
                           <m:ctrlPr>
-                            <a:rPr lang="fr-CH" sz="2000" i="1">
+                            <a:rPr lang="fr-CH" sz="2400" i="1">
                               <a:solidFill>
                                 <a:schemeClr val="accent4"/>
                               </a:solidFill>
@@ -9419,7 +8847,7 @@
                         </m:dPr>
                         <m:e>
                           <m:r>
-                            <a:rPr lang="fr-CH" sz="2000" i="1">
+                            <a:rPr lang="fr-CH" sz="2400" i="1">
                               <a:solidFill>
                                 <a:schemeClr val="accent4"/>
                               </a:solidFill>
@@ -9430,7 +8858,7 @@
                         </m:e>
                       </m:d>
                       <m:r>
-                        <a:rPr lang="fr-CH" sz="2000" i="1">
+                        <a:rPr lang="fr-CH" sz="2400" i="1">
                           <a:solidFill>
                             <a:schemeClr val="accent4"/>
                           </a:solidFill>
@@ -9439,7 +8867,7 @@
                         <m:t>=</m:t>
                       </m:r>
                       <m:r>
-                        <a:rPr lang="fr-CH" sz="2000" b="0" i="1" smtClean="0">
+                        <a:rPr lang="fr-CH" sz="2400" b="0" i="1" smtClean="0">
                           <a:solidFill>
                             <a:schemeClr val="accent4"/>
                           </a:solidFill>
@@ -9450,7 +8878,7 @@
                       <m:sSub>
                         <m:sSubPr>
                           <m:ctrlPr>
-                            <a:rPr lang="fr-CH" sz="2000" b="0" i="1" smtClean="0">
+                            <a:rPr lang="fr-CH" sz="2400" b="0" i="1" smtClean="0">
                               <a:solidFill>
                                 <a:schemeClr val="accent4"/>
                               </a:solidFill>
@@ -9460,7 +8888,7 @@
                         </m:sSubPr>
                         <m:e>
                           <m:r>
-                            <a:rPr lang="fr-CH" sz="2000" b="0" i="1" smtClean="0">
+                            <a:rPr lang="fr-CH" sz="2400" b="0" i="1" smtClean="0">
                               <a:solidFill>
                                 <a:schemeClr val="accent4"/>
                               </a:solidFill>
@@ -9471,7 +8899,7 @@
                         </m:e>
                         <m:sub>
                           <m:r>
-                            <a:rPr lang="fr-CH" sz="2000" b="0" i="1" smtClean="0">
+                            <a:rPr lang="fr-CH" sz="2400" b="0" i="1" smtClean="0">
                               <a:solidFill>
                                 <a:schemeClr val="accent4"/>
                               </a:solidFill>
@@ -9480,7 +8908,7 @@
                             <m:t>𝑚𝑖𝑥</m:t>
                           </m:r>
                           <m:r>
-                            <a:rPr lang="fr-CH" sz="2000" b="0" i="1" smtClean="0">
+                            <a:rPr lang="fr-CH" sz="2400" b="0" i="1" smtClean="0">
                               <a:solidFill>
                                 <a:schemeClr val="accent4"/>
                               </a:solidFill>
@@ -9489,7 +8917,7 @@
                             <m:t>,</m:t>
                           </m:r>
                           <m:r>
-                            <a:rPr lang="fr-CH" sz="2000" b="0" i="1" smtClean="0">
+                            <a:rPr lang="fr-CH" sz="2400" b="0" i="1" smtClean="0">
                               <a:solidFill>
                                 <a:schemeClr val="accent4"/>
                               </a:solidFill>
@@ -9500,7 +8928,7 @@
                         </m:sub>
                       </m:sSub>
                       <m:r>
-                        <a:rPr lang="fr-CH" sz="2000" b="0" i="1" smtClean="0">
+                        <a:rPr lang="fr-CH" sz="2400" b="0" i="1" smtClean="0">
                           <a:solidFill>
                             <a:schemeClr val="accent4"/>
                           </a:solidFill>
@@ -9509,7 +8937,7 @@
                         <m:t>(</m:t>
                       </m:r>
                       <m:r>
-                        <a:rPr lang="fr-CH" sz="2000" b="0" i="1" smtClean="0">
+                        <a:rPr lang="fr-CH" sz="2400" b="0" i="1" smtClean="0">
                           <a:solidFill>
                             <a:schemeClr val="accent4"/>
                           </a:solidFill>
@@ -9518,7 +8946,7 @@
                         <m:t>𝑡</m:t>
                       </m:r>
                       <m:r>
-                        <a:rPr lang="fr-CH" sz="2000" b="0" i="1" smtClean="0">
+                        <a:rPr lang="fr-CH" sz="2400" b="0" i="1" smtClean="0">
                           <a:solidFill>
                             <a:schemeClr val="accent4"/>
                           </a:solidFill>
@@ -9529,7 +8957,7 @@
                     </m:oMath>
                   </m:oMathPara>
                 </a14:m>
-                <a:endParaRPr lang="en-US" sz="2000" dirty="0">
+                <a:endParaRPr lang="en-US" sz="2400" dirty="0">
                   <a:solidFill>
                     <a:schemeClr val="accent4"/>
                   </a:solidFill>
@@ -9555,16 +8983,16 @@
             </p:nvSpPr>
             <p:spPr>
               <a:xfrm>
-                <a:off x="4532758" y="4609426"/>
-                <a:ext cx="6269175" cy="424283"/>
+                <a:off x="3708162" y="4393035"/>
+                <a:ext cx="6269175" cy="490840"/>
               </a:xfrm>
               <a:prstGeom prst="rect">
                 <a:avLst/>
               </a:prstGeom>
               <a:blipFill>
-                <a:blip r:embed="rId11"/>
+                <a:blip r:embed="rId9"/>
                 <a:stretch>
-                  <a:fillRect b="-10000"/>
+                  <a:fillRect b="-12500"/>
                 </a:stretch>
               </a:blipFill>
             </p:spPr>
@@ -9597,7 +9025,7 @@
         </p:nvSpPr>
         <p:spPr>
           <a:xfrm rot="5400000">
-            <a:off x="4292295" y="3294974"/>
+            <a:off x="3645512" y="3463721"/>
             <a:ext cx="1283287" cy="581822"/>
           </a:xfrm>
           <a:prstGeom prst="leftArrow">
@@ -9633,7 +9061,7 @@
           <a:lstStyle/>
           <a:p>
             <a:pPr algn="ctr"/>
-            <a:endParaRPr lang="en-US" sz="2000"/>
+            <a:endParaRPr lang="en-US" sz="2400"/>
           </a:p>
         </p:txBody>
       </p:sp>
@@ -9651,7 +9079,7 @@
         </p:nvSpPr>
         <p:spPr>
           <a:xfrm rot="16200000">
-            <a:off x="7205525" y="3469270"/>
+            <a:off x="6558742" y="3463721"/>
             <a:ext cx="1283287" cy="581822"/>
           </a:xfrm>
           <a:prstGeom prst="leftArrow">
@@ -9687,14 +9115,3906 @@
           <a:lstStyle/>
           <a:p>
             <a:pPr algn="ctr"/>
-            <a:endParaRPr lang="en-US" sz="2000"/>
-          </a:p>
-        </p:txBody>
-      </p:sp>
+            <a:endParaRPr lang="en-US" sz="2400"/>
+          </a:p>
+        </p:txBody>
+      </p:sp>
+      <p:cxnSp>
+        <p:nvCxnSpPr>
+          <p:cNvPr id="7" name="Straight Arrow Connector 6">
+            <a:extLst>
+              <a:ext uri="{FF2B5EF4-FFF2-40B4-BE49-F238E27FC236}">
+                <a16:creationId xmlns:a16="http://schemas.microsoft.com/office/drawing/2014/main" id="{3C214019-2AA2-7A0C-C791-079A6380053F}"/>
+              </a:ext>
+            </a:extLst>
+          </p:cNvPr>
+          <p:cNvCxnSpPr>
+            <a:cxnSpLocks/>
+          </p:cNvCxnSpPr>
+          <p:nvPr/>
+        </p:nvCxnSpPr>
+        <p:spPr>
+          <a:xfrm>
+            <a:off x="7795950" y="208225"/>
+            <a:ext cx="0" cy="3402723"/>
+          </a:xfrm>
+          <a:prstGeom prst="straightConnector1">
+            <a:avLst/>
+          </a:prstGeom>
+          <a:ln w="38100">
+            <a:headEnd type="triangle"/>
+            <a:tailEnd type="triangle"/>
+          </a:ln>
+        </p:spPr>
+        <p:style>
+          <a:lnRef idx="1">
+            <a:schemeClr val="dk1"/>
+          </a:lnRef>
+          <a:fillRef idx="0">
+            <a:schemeClr val="dk1"/>
+          </a:fillRef>
+          <a:effectRef idx="0">
+            <a:schemeClr val="dk1"/>
+          </a:effectRef>
+          <a:fontRef idx="minor">
+            <a:schemeClr val="tx1"/>
+          </a:fontRef>
+        </p:style>
+      </p:cxnSp>
+      <mc:AlternateContent xmlns:mc="http://schemas.openxmlformats.org/markup-compatibility/2006" xmlns:a14="http://schemas.microsoft.com/office/drawing/2010/main">
+        <mc:Choice Requires="a14">
+          <p:sp>
+            <p:nvSpPr>
+              <p:cNvPr id="9" name="TextBox 8">
+                <a:extLst>
+                  <a:ext uri="{FF2B5EF4-FFF2-40B4-BE49-F238E27FC236}">
+                    <a16:creationId xmlns:a16="http://schemas.microsoft.com/office/drawing/2014/main" id="{57C3FD58-40D9-8A9F-7934-AA17ACC4FDFD}"/>
+                  </a:ext>
+                </a:extLst>
+              </p:cNvPr>
+              <p:cNvSpPr txBox="1"/>
+              <p:nvPr/>
+            </p:nvSpPr>
+            <p:spPr>
+              <a:xfrm rot="16200000">
+                <a:off x="5827109" y="1659135"/>
+                <a:ext cx="3272527" cy="490199"/>
+              </a:xfrm>
+              <a:prstGeom prst="rect">
+                <a:avLst/>
+              </a:prstGeom>
+              <a:noFill/>
+            </p:spPr>
+            <p:txBody>
+              <a:bodyPr wrap="square" rtlCol="0">
+                <a:spAutoFit/>
+              </a:bodyPr>
+              <a:lstStyle/>
+              <a:p>
+                <a:pPr/>
+                <a14:m>
+                  <m:oMathPara xmlns:m="http://schemas.openxmlformats.org/officeDocument/2006/math">
+                    <m:oMath>
+                      <m:sSub>
+                        <m:sSubPr>
+                          <m:ctrlPr>
+                            <a:rPr lang="fr-CH" sz="2400" b="0" i="1" smtClean="0">
+                              <a:latin typeface="Cambria Math" panose="02040503050406030204" pitchFamily="18" charset="0"/>
+                            </a:rPr>
+                          </m:ctrlPr>
+                        </m:sSubPr>
+                        <m:e>
+                          <m:r>
+                            <a:rPr lang="fr-CH" sz="2400" b="0" i="1" smtClean="0">
+                              <a:latin typeface="Cambria Math" panose="02040503050406030204" pitchFamily="18" charset="0"/>
+                            </a:rPr>
+                            <m:t>ℎ</m:t>
+                          </m:r>
+                        </m:e>
+                        <m:sub>
+                          <m:r>
+                            <a:rPr lang="fr-CH" sz="2400" b="0" i="1" smtClean="0">
+                              <a:latin typeface="Cambria Math" panose="02040503050406030204" pitchFamily="18" charset="0"/>
+                            </a:rPr>
+                            <m:t>𝑒𝑝𝑖</m:t>
+                          </m:r>
+                        </m:sub>
+                      </m:sSub>
+                      <m:r>
+                        <a:rPr lang="fr-CH" sz="2400" b="0" i="1" smtClean="0">
+                          <a:latin typeface="Cambria Math" panose="02040503050406030204" pitchFamily="18" charset="0"/>
+                        </a:rPr>
+                        <m:t>(</m:t>
+                      </m:r>
+                      <m:r>
+                        <a:rPr lang="fr-CH" sz="2400" b="0" i="1" smtClean="0">
+                          <a:latin typeface="Cambria Math" panose="02040503050406030204" pitchFamily="18" charset="0"/>
+                        </a:rPr>
+                        <m:t>𝑡</m:t>
+                      </m:r>
+                      <m:r>
+                        <a:rPr lang="fr-CH" sz="2400" b="0" i="1" smtClean="0">
+                          <a:latin typeface="Cambria Math" panose="02040503050406030204" pitchFamily="18" charset="0"/>
+                        </a:rPr>
+                        <m:t>)</m:t>
+                      </m:r>
+                    </m:oMath>
+                  </m:oMathPara>
+                </a14:m>
+                <a:endParaRPr lang="en-US" sz="2400" dirty="0"/>
+              </a:p>
+            </p:txBody>
+          </p:sp>
+        </mc:Choice>
+        <mc:Fallback xmlns="">
+          <p:sp>
+            <p:nvSpPr>
+              <p:cNvPr id="9" name="TextBox 8">
+                <a:extLst>
+                  <a:ext uri="{FF2B5EF4-FFF2-40B4-BE49-F238E27FC236}">
+                    <a16:creationId xmlns:a16="http://schemas.microsoft.com/office/drawing/2014/main" id="{57C3FD58-40D9-8A9F-7934-AA17ACC4FDFD}"/>
+                  </a:ext>
+                </a:extLst>
+              </p:cNvPr>
+              <p:cNvSpPr txBox="1">
+                <a:spLocks noRot="1" noChangeAspect="1" noMove="1" noResize="1" noEditPoints="1" noAdjustHandles="1" noChangeArrowheads="1" noChangeShapeType="1" noTextEdit="1"/>
+              </p:cNvSpPr>
+              <p:nvPr/>
+            </p:nvSpPr>
+            <p:spPr>
+              <a:xfrm rot="16200000">
+                <a:off x="5827109" y="1659135"/>
+                <a:ext cx="3272527" cy="490199"/>
+              </a:xfrm>
+              <a:prstGeom prst="rect">
+                <a:avLst/>
+              </a:prstGeom>
+              <a:blipFill>
+                <a:blip r:embed="rId10"/>
+                <a:stretch>
+                  <a:fillRect r="-11111"/>
+                </a:stretch>
+              </a:blipFill>
+            </p:spPr>
+            <p:txBody>
+              <a:bodyPr/>
+              <a:lstStyle/>
+              <a:p>
+                <a:r>
+                  <a:rPr lang="en-US">
+                    <a:noFill/>
+                  </a:rPr>
+                  <a:t> </a:t>
+                </a:r>
+              </a:p>
+            </p:txBody>
+          </p:sp>
+        </mc:Fallback>
+      </mc:AlternateContent>
+      <mc:AlternateContent xmlns:mc="http://schemas.openxmlformats.org/markup-compatibility/2006" xmlns:a14="http://schemas.microsoft.com/office/drawing/2010/main">
+        <mc:Choice Requires="a14">
+          <p:sp>
+            <p:nvSpPr>
+              <p:cNvPr id="11" name="TextBox 10">
+                <a:extLst>
+                  <a:ext uri="{FF2B5EF4-FFF2-40B4-BE49-F238E27FC236}">
+                    <a16:creationId xmlns:a16="http://schemas.microsoft.com/office/drawing/2014/main" id="{20618B63-DF31-4F30-FDFD-1D879E91495D}"/>
+                  </a:ext>
+                </a:extLst>
+              </p:cNvPr>
+              <p:cNvSpPr txBox="1"/>
+              <p:nvPr/>
+            </p:nvSpPr>
+            <p:spPr>
+              <a:xfrm>
+                <a:off x="548612" y="1273598"/>
+                <a:ext cx="6269175" cy="1757148"/>
+              </a:xfrm>
+              <a:prstGeom prst="rect">
+                <a:avLst/>
+              </a:prstGeom>
+              <a:noFill/>
+            </p:spPr>
+            <p:txBody>
+              <a:bodyPr wrap="square" rtlCol="0">
+                <a:spAutoFit/>
+              </a:bodyPr>
+              <a:lstStyle/>
+              <a:p>
+                <a:pPr/>
+                <a14:m>
+                  <m:oMathPara xmlns:m="http://schemas.openxmlformats.org/officeDocument/2006/math">
+                    <m:oMath>
+                      <m:sSub>
+                        <m:sSubPr>
+                          <m:ctrlPr>
+                            <a:rPr lang="fr-CH" sz="2400" i="1">
+                              <a:solidFill>
+                                <a:schemeClr val="accent4"/>
+                              </a:solidFill>
+                              <a:latin typeface="Cambria Math" panose="02040503050406030204" pitchFamily="18" charset="0"/>
+                            </a:rPr>
+                          </m:ctrlPr>
+                        </m:sSubPr>
+                        <m:e>
+                          <m:r>
+                            <a:rPr lang="fr-CH" sz="2400" i="1">
+                              <a:solidFill>
+                                <a:schemeClr val="accent4"/>
+                              </a:solidFill>
+                              <a:latin typeface="Cambria Math" panose="02040503050406030204" pitchFamily="18" charset="0"/>
+                            </a:rPr>
+                            <m:t>𝑀</m:t>
+                          </m:r>
+                        </m:e>
+                        <m:sub>
+                          <m:r>
+                            <a:rPr lang="fr-CH" sz="2400" i="1">
+                              <a:solidFill>
+                                <a:schemeClr val="accent4"/>
+                              </a:solidFill>
+                              <a:latin typeface="Cambria Math" panose="02040503050406030204" pitchFamily="18" charset="0"/>
+                            </a:rPr>
+                            <m:t>𝑚𝑖𝑥</m:t>
+                          </m:r>
+                          <m:r>
+                            <a:rPr lang="fr-CH" sz="2400" b="0" i="1" smtClean="0">
+                              <a:solidFill>
+                                <a:schemeClr val="accent4"/>
+                              </a:solidFill>
+                              <a:latin typeface="Cambria Math" panose="02040503050406030204" pitchFamily="18" charset="0"/>
+                            </a:rPr>
+                            <m:t>,</m:t>
+                          </m:r>
+                          <m:r>
+                            <a:rPr lang="fr-CH" sz="2400" b="0" i="1" smtClean="0">
+                              <a:solidFill>
+                                <a:schemeClr val="accent4"/>
+                              </a:solidFill>
+                              <a:latin typeface="Cambria Math" panose="02040503050406030204" pitchFamily="18" charset="0"/>
+                            </a:rPr>
+                            <m:t>𝑒𝑝𝑖</m:t>
+                          </m:r>
+                        </m:sub>
+                      </m:sSub>
+                      <m:d>
+                        <m:dPr>
+                          <m:ctrlPr>
+                            <a:rPr lang="fr-CH" sz="2400" i="1">
+                              <a:solidFill>
+                                <a:schemeClr val="accent4"/>
+                              </a:solidFill>
+                              <a:latin typeface="Cambria Math" panose="02040503050406030204" pitchFamily="18" charset="0"/>
+                            </a:rPr>
+                          </m:ctrlPr>
+                        </m:dPr>
+                        <m:e>
+                          <m:r>
+                            <a:rPr lang="fr-CH" sz="2400" i="1">
+                              <a:solidFill>
+                                <a:schemeClr val="accent4"/>
+                              </a:solidFill>
+                              <a:latin typeface="Cambria Math" panose="02040503050406030204" pitchFamily="18" charset="0"/>
+                            </a:rPr>
+                            <m:t>𝑡</m:t>
+                          </m:r>
+                        </m:e>
+                      </m:d>
+                      <m:r>
+                        <a:rPr lang="fr-CH" sz="2400" i="1">
+                          <a:solidFill>
+                            <a:schemeClr val="accent4"/>
+                          </a:solidFill>
+                          <a:latin typeface="Cambria Math" panose="02040503050406030204" pitchFamily="18" charset="0"/>
+                        </a:rPr>
+                        <m:t>=</m:t>
+                      </m:r>
+                      <m:d>
+                        <m:dPr>
+                          <m:begChr m:val="{"/>
+                          <m:endChr m:val=""/>
+                          <m:ctrlPr>
+                            <a:rPr lang="en-US" sz="2400" i="1" smtClean="0">
+                              <a:solidFill>
+                                <a:schemeClr val="accent4"/>
+                              </a:solidFill>
+                              <a:latin typeface="Cambria Math" panose="02040503050406030204" pitchFamily="18" charset="0"/>
+                            </a:rPr>
+                          </m:ctrlPr>
+                        </m:dPr>
+                        <m:e>
+                          <m:eqArr>
+                            <m:eqArrPr>
+                              <m:ctrlPr>
+                                <a:rPr lang="en-US" sz="2400" i="1" smtClean="0">
+                                  <a:solidFill>
+                                    <a:schemeClr val="accent4"/>
+                                  </a:solidFill>
+                                  <a:latin typeface="Cambria Math" panose="02040503050406030204" pitchFamily="18" charset="0"/>
+                                </a:rPr>
+                              </m:ctrlPr>
+                            </m:eqArrPr>
+                            <m:e>
+                              <m:f>
+                                <m:fPr>
+                                  <m:ctrlPr>
+                                    <a:rPr lang="fr-CH" sz="2400" b="0" i="1" smtClean="0">
+                                      <a:solidFill>
+                                        <a:schemeClr val="accent4"/>
+                                      </a:solidFill>
+                                      <a:latin typeface="Cambria Math" panose="02040503050406030204" pitchFamily="18" charset="0"/>
+                                    </a:rPr>
+                                  </m:ctrlPr>
+                                </m:fPr>
+                                <m:num>
+                                  <m:r>
+                                    <a:rPr lang="fr-CH" sz="2400" b="0" i="1" smtClean="0">
+                                      <a:solidFill>
+                                        <a:schemeClr val="accent4"/>
+                                      </a:solidFill>
+                                      <a:latin typeface="Cambria Math" panose="02040503050406030204" pitchFamily="18" charset="0"/>
+                                    </a:rPr>
+                                    <m:t>𝑑</m:t>
+                                  </m:r>
+                                  <m:sSub>
+                                    <m:sSubPr>
+                                      <m:ctrlPr>
+                                        <a:rPr lang="fr-CH" sz="2400" b="0" i="1" smtClean="0">
+                                          <a:solidFill>
+                                            <a:schemeClr val="accent4"/>
+                                          </a:solidFill>
+                                          <a:latin typeface="Cambria Math" panose="02040503050406030204" pitchFamily="18" charset="0"/>
+                                        </a:rPr>
+                                      </m:ctrlPr>
+                                    </m:sSubPr>
+                                    <m:e>
+                                      <m:r>
+                                        <a:rPr lang="fr-CH" sz="2400" b="0" i="1" smtClean="0">
+                                          <a:solidFill>
+                                            <a:schemeClr val="accent4"/>
+                                          </a:solidFill>
+                                          <a:latin typeface="Cambria Math" panose="02040503050406030204" pitchFamily="18" charset="0"/>
+                                        </a:rPr>
+                                        <m:t>𝑉</m:t>
+                                      </m:r>
+                                    </m:e>
+                                    <m:sub>
+                                      <m:r>
+                                        <a:rPr lang="fr-CH" sz="2400" b="0" i="1" smtClean="0">
+                                          <a:solidFill>
+                                            <a:schemeClr val="accent4"/>
+                                          </a:solidFill>
+                                          <a:latin typeface="Cambria Math" panose="02040503050406030204" pitchFamily="18" charset="0"/>
+                                        </a:rPr>
+                                        <m:t>𝑒𝑝𝑖</m:t>
+                                      </m:r>
+                                    </m:sub>
+                                  </m:sSub>
+                                </m:num>
+                                <m:den>
+                                  <m:r>
+                                    <a:rPr lang="fr-CH" sz="2400" b="0" i="1" smtClean="0">
+                                      <a:solidFill>
+                                        <a:schemeClr val="accent4"/>
+                                      </a:solidFill>
+                                      <a:latin typeface="Cambria Math" panose="02040503050406030204" pitchFamily="18" charset="0"/>
+                                    </a:rPr>
+                                    <m:t>𝑑𝑡</m:t>
+                                  </m:r>
+                                </m:den>
+                              </m:f>
+                              <m:sSub>
+                                <m:sSubPr>
+                                  <m:ctrlPr>
+                                    <a:rPr lang="fr-CH" sz="2400" b="0" i="1" smtClean="0">
+                                      <a:solidFill>
+                                        <a:schemeClr val="accent4"/>
+                                      </a:solidFill>
+                                      <a:latin typeface="Cambria Math" panose="02040503050406030204" pitchFamily="18" charset="0"/>
+                                    </a:rPr>
+                                  </m:ctrlPr>
+                                </m:sSubPr>
+                                <m:e>
+                                  <m:r>
+                                    <a:rPr lang="fr-CH" sz="2400" b="0" i="1" smtClean="0">
+                                      <a:solidFill>
+                                        <a:schemeClr val="accent4"/>
+                                      </a:solidFill>
+                                      <a:latin typeface="Cambria Math" panose="02040503050406030204" pitchFamily="18" charset="0"/>
+                                    </a:rPr>
+                                    <m:t>𝐶</m:t>
+                                  </m:r>
+                                </m:e>
+                                <m:sub>
+                                  <m:r>
+                                    <a:rPr lang="fr-CH" sz="2400" b="0" i="1" smtClean="0">
+                                      <a:solidFill>
+                                        <a:schemeClr val="accent4"/>
+                                      </a:solidFill>
+                                      <a:latin typeface="Cambria Math" panose="02040503050406030204" pitchFamily="18" charset="0"/>
+                                    </a:rPr>
+                                    <m:t>ℎ𝑦𝑝𝑜</m:t>
+                                  </m:r>
+                                </m:sub>
+                              </m:sSub>
+                              <m:d>
+                                <m:dPr>
+                                  <m:ctrlPr>
+                                    <a:rPr lang="fr-CH" sz="2400" b="0" i="1" smtClean="0">
+                                      <a:solidFill>
+                                        <a:schemeClr val="accent4"/>
+                                      </a:solidFill>
+                                      <a:latin typeface="Cambria Math" panose="02040503050406030204" pitchFamily="18" charset="0"/>
+                                    </a:rPr>
+                                  </m:ctrlPr>
+                                </m:dPr>
+                                <m:e>
+                                  <m:r>
+                                    <a:rPr lang="fr-CH" sz="2400" b="0" i="1" smtClean="0">
+                                      <a:solidFill>
+                                        <a:schemeClr val="accent4"/>
+                                      </a:solidFill>
+                                      <a:latin typeface="Cambria Math" panose="02040503050406030204" pitchFamily="18" charset="0"/>
+                                    </a:rPr>
+                                    <m:t>𝑡</m:t>
+                                  </m:r>
+                                </m:e>
+                              </m:d>
+                              <m:r>
+                                <a:rPr lang="fr-CH" sz="2400" b="0" i="0" smtClean="0">
+                                  <a:solidFill>
+                                    <a:schemeClr val="accent4"/>
+                                  </a:solidFill>
+                                  <a:latin typeface="Cambria Math" panose="02040503050406030204" pitchFamily="18" charset="0"/>
+                                </a:rPr>
+                                <m:t>, </m:t>
+                              </m:r>
+                              <m:r>
+                                <m:rPr>
+                                  <m:sty m:val="p"/>
+                                </m:rPr>
+                                <a:rPr lang="fr-CH" sz="2400" b="0" i="0" smtClean="0">
+                                  <a:solidFill>
+                                    <a:schemeClr val="accent4"/>
+                                  </a:solidFill>
+                                  <a:latin typeface="Cambria Math" panose="02040503050406030204" pitchFamily="18" charset="0"/>
+                                </a:rPr>
+                                <m:t>if</m:t>
+                              </m:r>
+                              <m:r>
+                                <a:rPr lang="fr-CH" sz="2400" b="0" i="0" smtClean="0">
+                                  <a:solidFill>
+                                    <a:schemeClr val="accent4"/>
+                                  </a:solidFill>
+                                  <a:latin typeface="Cambria Math" panose="02040503050406030204" pitchFamily="18" charset="0"/>
+                                </a:rPr>
+                                <m:t> </m:t>
+                              </m:r>
+                              <m:f>
+                                <m:fPr>
+                                  <m:ctrlPr>
+                                    <a:rPr lang="fr-CH" sz="2400" b="0" i="1" smtClean="0">
+                                      <a:solidFill>
+                                        <a:schemeClr val="accent4"/>
+                                      </a:solidFill>
+                                      <a:latin typeface="Cambria Math" panose="02040503050406030204" pitchFamily="18" charset="0"/>
+                                    </a:rPr>
+                                  </m:ctrlPr>
+                                </m:fPr>
+                                <m:num>
+                                  <m:r>
+                                    <a:rPr lang="fr-CH" sz="2400" b="0" i="1" smtClean="0">
+                                      <a:solidFill>
+                                        <a:schemeClr val="accent4"/>
+                                      </a:solidFill>
+                                      <a:latin typeface="Cambria Math" panose="02040503050406030204" pitchFamily="18" charset="0"/>
+                                    </a:rPr>
+                                    <m:t>𝑑</m:t>
+                                  </m:r>
+                                  <m:sSub>
+                                    <m:sSubPr>
+                                      <m:ctrlPr>
+                                        <a:rPr lang="fr-CH" sz="2400" b="0" i="1" smtClean="0">
+                                          <a:solidFill>
+                                            <a:schemeClr val="accent4"/>
+                                          </a:solidFill>
+                                          <a:latin typeface="Cambria Math" panose="02040503050406030204" pitchFamily="18" charset="0"/>
+                                        </a:rPr>
+                                      </m:ctrlPr>
+                                    </m:sSubPr>
+                                    <m:e>
+                                      <m:r>
+                                        <a:rPr lang="fr-CH" sz="2400" b="0" i="1" smtClean="0">
+                                          <a:solidFill>
+                                            <a:schemeClr val="accent4"/>
+                                          </a:solidFill>
+                                          <a:latin typeface="Cambria Math" panose="02040503050406030204" pitchFamily="18" charset="0"/>
+                                        </a:rPr>
+                                        <m:t>ℎ</m:t>
+                                      </m:r>
+                                    </m:e>
+                                    <m:sub>
+                                      <m:r>
+                                        <a:rPr lang="fr-CH" sz="2400" b="0" i="1" smtClean="0">
+                                          <a:solidFill>
+                                            <a:schemeClr val="accent4"/>
+                                          </a:solidFill>
+                                          <a:latin typeface="Cambria Math" panose="02040503050406030204" pitchFamily="18" charset="0"/>
+                                        </a:rPr>
+                                        <m:t>𝑒𝑝𝑖</m:t>
+                                      </m:r>
+                                    </m:sub>
+                                  </m:sSub>
+                                </m:num>
+                                <m:den>
+                                  <m:r>
+                                    <a:rPr lang="fr-CH" sz="2400" b="0" i="1" smtClean="0">
+                                      <a:solidFill>
+                                        <a:schemeClr val="accent4"/>
+                                      </a:solidFill>
+                                      <a:latin typeface="Cambria Math" panose="02040503050406030204" pitchFamily="18" charset="0"/>
+                                    </a:rPr>
+                                    <m:t>𝑑𝑡</m:t>
+                                  </m:r>
+                                </m:den>
+                              </m:f>
+                              <m:r>
+                                <a:rPr lang="fr-CH" sz="2400" b="0" i="1" smtClean="0">
+                                  <a:solidFill>
+                                    <a:schemeClr val="accent4"/>
+                                  </a:solidFill>
+                                  <a:latin typeface="Cambria Math" panose="02040503050406030204" pitchFamily="18" charset="0"/>
+                                </a:rPr>
+                                <m:t>&gt;0</m:t>
+                              </m:r>
+                            </m:e>
+                            <m:e>
+                              <m:f>
+                                <m:fPr>
+                                  <m:ctrlPr>
+                                    <a:rPr lang="fr-CH" sz="2400" i="1">
+                                      <a:solidFill>
+                                        <a:schemeClr val="accent4"/>
+                                      </a:solidFill>
+                                      <a:latin typeface="Cambria Math" panose="02040503050406030204" pitchFamily="18" charset="0"/>
+                                    </a:rPr>
+                                  </m:ctrlPr>
+                                </m:fPr>
+                                <m:num>
+                                  <m:r>
+                                    <a:rPr lang="fr-CH" sz="2400" i="1">
+                                      <a:solidFill>
+                                        <a:schemeClr val="accent4"/>
+                                      </a:solidFill>
+                                      <a:latin typeface="Cambria Math" panose="02040503050406030204" pitchFamily="18" charset="0"/>
+                                    </a:rPr>
+                                    <m:t>𝑑</m:t>
+                                  </m:r>
+                                  <m:sSub>
+                                    <m:sSubPr>
+                                      <m:ctrlPr>
+                                        <a:rPr lang="fr-CH" sz="2400" i="1">
+                                          <a:solidFill>
+                                            <a:schemeClr val="accent4"/>
+                                          </a:solidFill>
+                                          <a:latin typeface="Cambria Math" panose="02040503050406030204" pitchFamily="18" charset="0"/>
+                                        </a:rPr>
+                                      </m:ctrlPr>
+                                    </m:sSubPr>
+                                    <m:e>
+                                      <m:r>
+                                        <a:rPr lang="fr-CH" sz="2400" i="1">
+                                          <a:solidFill>
+                                            <a:schemeClr val="accent4"/>
+                                          </a:solidFill>
+                                          <a:latin typeface="Cambria Math" panose="02040503050406030204" pitchFamily="18" charset="0"/>
+                                        </a:rPr>
+                                        <m:t>𝑉</m:t>
+                                      </m:r>
+                                    </m:e>
+                                    <m:sub>
+                                      <m:r>
+                                        <a:rPr lang="fr-CH" sz="2400" i="1">
+                                          <a:solidFill>
+                                            <a:schemeClr val="accent4"/>
+                                          </a:solidFill>
+                                          <a:latin typeface="Cambria Math" panose="02040503050406030204" pitchFamily="18" charset="0"/>
+                                        </a:rPr>
+                                        <m:t>𝑒𝑝𝑖</m:t>
+                                      </m:r>
+                                    </m:sub>
+                                  </m:sSub>
+                                </m:num>
+                                <m:den>
+                                  <m:r>
+                                    <a:rPr lang="fr-CH" sz="2400" i="1">
+                                      <a:solidFill>
+                                        <a:schemeClr val="accent4"/>
+                                      </a:solidFill>
+                                      <a:latin typeface="Cambria Math" panose="02040503050406030204" pitchFamily="18" charset="0"/>
+                                    </a:rPr>
+                                    <m:t>𝑑𝑡</m:t>
+                                  </m:r>
+                                </m:den>
+                              </m:f>
+                              <m:sSub>
+                                <m:sSubPr>
+                                  <m:ctrlPr>
+                                    <a:rPr lang="fr-CH" sz="2400" i="1">
+                                      <a:solidFill>
+                                        <a:schemeClr val="accent4"/>
+                                      </a:solidFill>
+                                      <a:latin typeface="Cambria Math" panose="02040503050406030204" pitchFamily="18" charset="0"/>
+                                    </a:rPr>
+                                  </m:ctrlPr>
+                                </m:sSubPr>
+                                <m:e>
+                                  <m:r>
+                                    <a:rPr lang="fr-CH" sz="2400" i="1">
+                                      <a:solidFill>
+                                        <a:schemeClr val="accent4"/>
+                                      </a:solidFill>
+                                      <a:latin typeface="Cambria Math" panose="02040503050406030204" pitchFamily="18" charset="0"/>
+                                    </a:rPr>
+                                    <m:t>𝐶</m:t>
+                                  </m:r>
+                                </m:e>
+                                <m:sub>
+                                  <m:r>
+                                    <a:rPr lang="fr-CH" sz="2400" b="0" i="1" smtClean="0">
+                                      <a:solidFill>
+                                        <a:schemeClr val="accent4"/>
+                                      </a:solidFill>
+                                      <a:latin typeface="Cambria Math" panose="02040503050406030204" pitchFamily="18" charset="0"/>
+                                    </a:rPr>
+                                    <m:t>𝑒𝑝𝑖</m:t>
+                                  </m:r>
+                                </m:sub>
+                              </m:sSub>
+                              <m:d>
+                                <m:dPr>
+                                  <m:ctrlPr>
+                                    <a:rPr lang="fr-CH" sz="2400" i="1">
+                                      <a:solidFill>
+                                        <a:schemeClr val="accent4"/>
+                                      </a:solidFill>
+                                      <a:latin typeface="Cambria Math" panose="02040503050406030204" pitchFamily="18" charset="0"/>
+                                    </a:rPr>
+                                  </m:ctrlPr>
+                                </m:dPr>
+                                <m:e>
+                                  <m:r>
+                                    <a:rPr lang="fr-CH" sz="2400" i="1">
+                                      <a:solidFill>
+                                        <a:schemeClr val="accent4"/>
+                                      </a:solidFill>
+                                      <a:latin typeface="Cambria Math" panose="02040503050406030204" pitchFamily="18" charset="0"/>
+                                    </a:rPr>
+                                    <m:t>𝑡</m:t>
+                                  </m:r>
+                                </m:e>
+                              </m:d>
+                              <m:r>
+                                <a:rPr lang="fr-CH" sz="2400" b="0" i="1" smtClean="0">
+                                  <a:solidFill>
+                                    <a:schemeClr val="accent4"/>
+                                  </a:solidFill>
+                                  <a:latin typeface="Cambria Math" panose="02040503050406030204" pitchFamily="18" charset="0"/>
+                                </a:rPr>
+                                <m:t>,</m:t>
+                              </m:r>
+                              <m:r>
+                                <a:rPr lang="fr-CH" sz="2400" b="0" i="0" smtClean="0">
+                                  <a:solidFill>
+                                    <a:schemeClr val="accent4"/>
+                                  </a:solidFill>
+                                  <a:latin typeface="Cambria Math" panose="02040503050406030204" pitchFamily="18" charset="0"/>
+                                </a:rPr>
+                                <m:t> </m:t>
+                              </m:r>
+                              <m:r>
+                                <m:rPr>
+                                  <m:sty m:val="p"/>
+                                </m:rPr>
+                                <a:rPr lang="fr-CH" sz="2400" b="0" i="0" smtClean="0">
+                                  <a:solidFill>
+                                    <a:schemeClr val="accent4"/>
+                                  </a:solidFill>
+                                  <a:latin typeface="Cambria Math" panose="02040503050406030204" pitchFamily="18" charset="0"/>
+                                </a:rPr>
+                                <m:t>if</m:t>
+                              </m:r>
+                              <m:r>
+                                <a:rPr lang="fr-CH" sz="2400" b="0" i="0" smtClean="0">
+                                  <a:solidFill>
+                                    <a:schemeClr val="accent4"/>
+                                  </a:solidFill>
+                                  <a:latin typeface="Cambria Math" panose="02040503050406030204" pitchFamily="18" charset="0"/>
+                                </a:rPr>
+                                <m:t> </m:t>
+                              </m:r>
+                              <m:f>
+                                <m:fPr>
+                                  <m:ctrlPr>
+                                    <a:rPr lang="fr-CH" sz="2400" b="0" i="1" smtClean="0">
+                                      <a:solidFill>
+                                        <a:schemeClr val="accent4"/>
+                                      </a:solidFill>
+                                      <a:latin typeface="Cambria Math" panose="02040503050406030204" pitchFamily="18" charset="0"/>
+                                    </a:rPr>
+                                  </m:ctrlPr>
+                                </m:fPr>
+                                <m:num>
+                                  <m:r>
+                                    <a:rPr lang="fr-CH" sz="2400" b="0" i="1" smtClean="0">
+                                      <a:solidFill>
+                                        <a:schemeClr val="accent4"/>
+                                      </a:solidFill>
+                                      <a:latin typeface="Cambria Math" panose="02040503050406030204" pitchFamily="18" charset="0"/>
+                                    </a:rPr>
+                                    <m:t>𝑑</m:t>
+                                  </m:r>
+                                  <m:sSub>
+                                    <m:sSubPr>
+                                      <m:ctrlPr>
+                                        <a:rPr lang="fr-CH" sz="2400" b="0" i="1" smtClean="0">
+                                          <a:solidFill>
+                                            <a:schemeClr val="accent4"/>
+                                          </a:solidFill>
+                                          <a:latin typeface="Cambria Math" panose="02040503050406030204" pitchFamily="18" charset="0"/>
+                                        </a:rPr>
+                                      </m:ctrlPr>
+                                    </m:sSubPr>
+                                    <m:e>
+                                      <m:r>
+                                        <a:rPr lang="fr-CH" sz="2400" b="0" i="1" smtClean="0">
+                                          <a:solidFill>
+                                            <a:schemeClr val="accent4"/>
+                                          </a:solidFill>
+                                          <a:latin typeface="Cambria Math" panose="02040503050406030204" pitchFamily="18" charset="0"/>
+                                        </a:rPr>
+                                        <m:t>ℎ</m:t>
+                                      </m:r>
+                                    </m:e>
+                                    <m:sub>
+                                      <m:r>
+                                        <a:rPr lang="fr-CH" sz="2400" b="0" i="1" smtClean="0">
+                                          <a:solidFill>
+                                            <a:schemeClr val="accent4"/>
+                                          </a:solidFill>
+                                          <a:latin typeface="Cambria Math" panose="02040503050406030204" pitchFamily="18" charset="0"/>
+                                        </a:rPr>
+                                        <m:t>𝑒𝑝𝑖</m:t>
+                                      </m:r>
+                                    </m:sub>
+                                  </m:sSub>
+                                </m:num>
+                                <m:den>
+                                  <m:r>
+                                    <a:rPr lang="fr-CH" sz="2400" b="0" i="1" smtClean="0">
+                                      <a:solidFill>
+                                        <a:schemeClr val="accent4"/>
+                                      </a:solidFill>
+                                      <a:latin typeface="Cambria Math" panose="02040503050406030204" pitchFamily="18" charset="0"/>
+                                    </a:rPr>
+                                    <m:t>𝑑𝑡</m:t>
+                                  </m:r>
+                                </m:den>
+                              </m:f>
+                              <m:r>
+                                <a:rPr lang="fr-CH" sz="2400" b="0" i="1" smtClean="0">
+                                  <a:solidFill>
+                                    <a:schemeClr val="accent4"/>
+                                  </a:solidFill>
+                                  <a:latin typeface="Cambria Math" panose="02040503050406030204" pitchFamily="18" charset="0"/>
+                                </a:rPr>
+                                <m:t>&lt;0</m:t>
+                              </m:r>
+                            </m:e>
+                          </m:eqArr>
+                        </m:e>
+                      </m:d>
+                    </m:oMath>
+                  </m:oMathPara>
+                </a14:m>
+                <a:endParaRPr lang="en-US" sz="2400" dirty="0">
+                  <a:solidFill>
+                    <a:schemeClr val="accent4"/>
+                  </a:solidFill>
+                </a:endParaRPr>
+              </a:p>
+            </p:txBody>
+          </p:sp>
+        </mc:Choice>
+        <mc:Fallback xmlns="">
+          <p:sp>
+            <p:nvSpPr>
+              <p:cNvPr id="11" name="TextBox 10">
+                <a:extLst>
+                  <a:ext uri="{FF2B5EF4-FFF2-40B4-BE49-F238E27FC236}">
+                    <a16:creationId xmlns:a16="http://schemas.microsoft.com/office/drawing/2014/main" id="{20618B63-DF31-4F30-FDFD-1D879E91495D}"/>
+                  </a:ext>
+                </a:extLst>
+              </p:cNvPr>
+              <p:cNvSpPr txBox="1">
+                <a:spLocks noRot="1" noChangeAspect="1" noMove="1" noResize="1" noEditPoints="1" noAdjustHandles="1" noChangeArrowheads="1" noChangeShapeType="1" noTextEdit="1"/>
+              </p:cNvSpPr>
+              <p:nvPr/>
+            </p:nvSpPr>
+            <p:spPr>
+              <a:xfrm>
+                <a:off x="548612" y="1273598"/>
+                <a:ext cx="6269175" cy="1757148"/>
+              </a:xfrm>
+              <a:prstGeom prst="rect">
+                <a:avLst/>
+              </a:prstGeom>
+              <a:blipFill>
+                <a:blip r:embed="rId11"/>
+                <a:stretch>
+                  <a:fillRect/>
+                </a:stretch>
+              </a:blipFill>
+            </p:spPr>
+            <p:txBody>
+              <a:bodyPr/>
+              <a:lstStyle/>
+              <a:p>
+                <a:r>
+                  <a:rPr lang="en-US">
+                    <a:noFill/>
+                  </a:rPr>
+                  <a:t> </a:t>
+                </a:r>
+              </a:p>
+            </p:txBody>
+          </p:sp>
+        </mc:Fallback>
+      </mc:AlternateContent>
     </p:spTree>
     <p:extLst>
       <p:ext uri="{BB962C8B-B14F-4D97-AF65-F5344CB8AC3E}">
         <p14:creationId xmlns:p14="http://schemas.microsoft.com/office/powerpoint/2010/main" val="983911713"/>
+      </p:ext>
+    </p:extLst>
+  </p:cSld>
+  <p:clrMapOvr>
+    <a:masterClrMapping/>
+  </p:clrMapOvr>
+</p:sld>
+</file>
+
+<file path=ppt/slides/slide2.xml><?xml version="1.0" encoding="utf-8"?>
+<p:sld xmlns:a="http://schemas.openxmlformats.org/drawingml/2006/main" xmlns:r="http://schemas.openxmlformats.org/officeDocument/2006/relationships" xmlns:p="http://schemas.openxmlformats.org/presentationml/2006/main">
+  <p:cSld>
+    <p:spTree>
+      <p:nvGrpSpPr>
+        <p:cNvPr id="1" name="">
+          <a:extLst>
+            <a:ext uri="{FF2B5EF4-FFF2-40B4-BE49-F238E27FC236}">
+              <a16:creationId xmlns:a16="http://schemas.microsoft.com/office/drawing/2014/main" id="{96085020-0D18-B64F-74B5-618AA27B4044}"/>
+            </a:ext>
+          </a:extLst>
+        </p:cNvPr>
+        <p:cNvGrpSpPr/>
+        <p:nvPr/>
+      </p:nvGrpSpPr>
+      <p:grpSpPr>
+        <a:xfrm>
+          <a:off x="0" y="0"/>
+          <a:ext cx="0" cy="0"/>
+          <a:chOff x="0" y="0"/>
+          <a:chExt cx="0" cy="0"/>
+        </a:xfrm>
+      </p:grpSpPr>
+      <p:sp>
+        <p:nvSpPr>
+          <p:cNvPr id="3" name="Rectangle 3">
+            <a:extLst>
+              <a:ext uri="{FF2B5EF4-FFF2-40B4-BE49-F238E27FC236}">
+                <a16:creationId xmlns:a16="http://schemas.microsoft.com/office/drawing/2014/main" id="{C5F28E61-3FDB-B6B3-E692-ED37B4E47952}"/>
+              </a:ext>
+            </a:extLst>
+          </p:cNvPr>
+          <p:cNvSpPr>
+            <a:spLocks noChangeArrowheads="1"/>
+          </p:cNvSpPr>
+          <p:nvPr/>
+        </p:nvSpPr>
+        <p:spPr bwMode="auto">
+          <a:xfrm>
+            <a:off x="-884185" y="1191597"/>
+            <a:ext cx="184731" cy="461665"/>
+          </a:xfrm>
+          <a:prstGeom prst="rect">
+            <a:avLst/>
+          </a:prstGeom>
+          <a:noFill/>
+          <a:ln>
+            <a:noFill/>
+          </a:ln>
+          <a:effectLst/>
+          <a:extLst>
+            <a:ext uri="{909E8E84-426E-40DD-AFC4-6F175D3DCCD1}">
+              <a14:hiddenFill xmlns:a14="http://schemas.microsoft.com/office/drawing/2010/main">
+                <a:solidFill>
+                  <a:schemeClr val="accent1"/>
+                </a:solidFill>
+              </a14:hiddenFill>
+            </a:ext>
+            <a:ext uri="{91240B29-F687-4F45-9708-019B960494DF}">
+              <a14:hiddenLine xmlns:a14="http://schemas.microsoft.com/office/drawing/2010/main" w="9525">
+                <a:solidFill>
+                  <a:schemeClr val="tx1"/>
+                </a:solidFill>
+                <a:miter lim="800000"/>
+                <a:headEnd/>
+                <a:tailEnd/>
+              </a14:hiddenLine>
+            </a:ext>
+            <a:ext uri="{AF507438-7753-43E0-B8FC-AC1667EBCBE1}">
+              <a14:hiddenEffects xmlns:a14="http://schemas.microsoft.com/office/drawing/2010/main">
+                <a:effectLst>
+                  <a:outerShdw dist="35921" dir="2700000" algn="ctr" rotWithShape="0">
+                    <a:schemeClr val="bg2"/>
+                  </a:outerShdw>
+                </a:effectLst>
+              </a14:hiddenEffects>
+            </a:ext>
+          </a:extLst>
+        </p:spPr>
+        <p:txBody>
+          <a:bodyPr vert="horz" wrap="none" lIns="91440" tIns="45720" rIns="91440" bIns="45720" numCol="1" anchor="ctr" anchorCtr="0" compatLnSpc="1">
+            <a:prstTxWarp prst="textNoShape">
+              <a:avLst/>
+            </a:prstTxWarp>
+            <a:spAutoFit/>
+          </a:bodyPr>
+          <a:lstStyle/>
+          <a:p>
+            <a:pPr marL="0" marR="0" lvl="0" indent="0" algn="l" defTabSz="914400" rtl="0" eaLnBrk="1" fontAlgn="auto" latinLnBrk="0" hangingPunct="1">
+              <a:lnSpc>
+                <a:spcPct val="100000"/>
+              </a:lnSpc>
+              <a:spcBef>
+                <a:spcPts val="0"/>
+              </a:spcBef>
+              <a:spcAft>
+                <a:spcPts val="0"/>
+              </a:spcAft>
+              <a:buClrTx/>
+              <a:buSzTx/>
+              <a:buFontTx/>
+              <a:buNone/>
+              <a:tabLst/>
+              <a:defRPr/>
+            </a:pPr>
+            <a:endParaRPr kumimoji="0" lang="en-US" sz="2400" b="0" i="0" u="none" strike="noStrike" kern="1200" cap="none" spc="0" normalizeH="0" baseline="0" noProof="0">
+              <a:ln>
+                <a:noFill/>
+              </a:ln>
+              <a:solidFill>
+                <a:prstClr val="black"/>
+              </a:solidFill>
+              <a:effectLst/>
+              <a:uLnTx/>
+              <a:uFillTx/>
+              <a:latin typeface="Calibri" panose="020F0502020204030204"/>
+              <a:ea typeface="+mn-ea"/>
+              <a:cs typeface="+mn-cs"/>
+            </a:endParaRPr>
+          </a:p>
+        </p:txBody>
+      </p:sp>
+      <p:sp>
+        <p:nvSpPr>
+          <p:cNvPr id="5" name="Rectangle 4">
+            <a:extLst>
+              <a:ext uri="{FF2B5EF4-FFF2-40B4-BE49-F238E27FC236}">
+                <a16:creationId xmlns:a16="http://schemas.microsoft.com/office/drawing/2014/main" id="{C6C731E9-8E13-DA1F-B998-D2B70D884E46}"/>
+              </a:ext>
+            </a:extLst>
+          </p:cNvPr>
+          <p:cNvSpPr>
+            <a:spLocks noChangeArrowheads="1"/>
+          </p:cNvSpPr>
+          <p:nvPr/>
+        </p:nvSpPr>
+        <p:spPr bwMode="auto">
+          <a:xfrm>
+            <a:off x="131815" y="10493521"/>
+            <a:ext cx="184731" cy="461665"/>
+          </a:xfrm>
+          <a:prstGeom prst="rect">
+            <a:avLst/>
+          </a:prstGeom>
+          <a:noFill/>
+          <a:ln>
+            <a:noFill/>
+          </a:ln>
+          <a:effectLst/>
+          <a:extLst>
+            <a:ext uri="{909E8E84-426E-40DD-AFC4-6F175D3DCCD1}">
+              <a14:hiddenFill xmlns:a14="http://schemas.microsoft.com/office/drawing/2010/main">
+                <a:solidFill>
+                  <a:schemeClr val="accent1"/>
+                </a:solidFill>
+              </a14:hiddenFill>
+            </a:ext>
+            <a:ext uri="{91240B29-F687-4F45-9708-019B960494DF}">
+              <a14:hiddenLine xmlns:a14="http://schemas.microsoft.com/office/drawing/2010/main" w="9525">
+                <a:solidFill>
+                  <a:schemeClr val="tx1"/>
+                </a:solidFill>
+                <a:miter lim="800000"/>
+                <a:headEnd/>
+                <a:tailEnd/>
+              </a14:hiddenLine>
+            </a:ext>
+            <a:ext uri="{AF507438-7753-43E0-B8FC-AC1667EBCBE1}">
+              <a14:hiddenEffects xmlns:a14="http://schemas.microsoft.com/office/drawing/2010/main">
+                <a:effectLst>
+                  <a:outerShdw dist="35921" dir="2700000" algn="ctr" rotWithShape="0">
+                    <a:schemeClr val="bg2"/>
+                  </a:outerShdw>
+                </a:effectLst>
+              </a14:hiddenEffects>
+            </a:ext>
+          </a:extLst>
+        </p:spPr>
+        <p:txBody>
+          <a:bodyPr vert="horz" wrap="none" lIns="91440" tIns="45720" rIns="91440" bIns="45720" numCol="1" anchor="ctr" anchorCtr="0" compatLnSpc="1">
+            <a:prstTxWarp prst="textNoShape">
+              <a:avLst/>
+            </a:prstTxWarp>
+            <a:spAutoFit/>
+          </a:bodyPr>
+          <a:lstStyle/>
+          <a:p>
+            <a:pPr marL="0" marR="0" lvl="0" indent="0" algn="l" defTabSz="914400" rtl="0" eaLnBrk="1" fontAlgn="auto" latinLnBrk="0" hangingPunct="1">
+              <a:lnSpc>
+                <a:spcPct val="100000"/>
+              </a:lnSpc>
+              <a:spcBef>
+                <a:spcPts val="0"/>
+              </a:spcBef>
+              <a:spcAft>
+                <a:spcPts val="0"/>
+              </a:spcAft>
+              <a:buClrTx/>
+              <a:buSzTx/>
+              <a:buFontTx/>
+              <a:buNone/>
+              <a:tabLst/>
+              <a:defRPr/>
+            </a:pPr>
+            <a:endParaRPr kumimoji="0" lang="en-US" sz="2400" b="0" i="0" u="none" strike="noStrike" kern="1200" cap="none" spc="0" normalizeH="0" baseline="0" noProof="0">
+              <a:ln>
+                <a:noFill/>
+              </a:ln>
+              <a:solidFill>
+                <a:prstClr val="black"/>
+              </a:solidFill>
+              <a:effectLst/>
+              <a:uLnTx/>
+              <a:uFillTx/>
+              <a:latin typeface="Calibri" panose="020F0502020204030204"/>
+              <a:ea typeface="+mn-ea"/>
+              <a:cs typeface="+mn-cs"/>
+            </a:endParaRPr>
+          </a:p>
+        </p:txBody>
+      </p:sp>
+      <p:sp>
+        <p:nvSpPr>
+          <p:cNvPr id="2" name="Rectangle 1">
+            <a:extLst>
+              <a:ext uri="{FF2B5EF4-FFF2-40B4-BE49-F238E27FC236}">
+                <a16:creationId xmlns:a16="http://schemas.microsoft.com/office/drawing/2014/main" id="{9AC73BAD-E9E8-B86B-68C4-D3E9FBFC8286}"/>
+              </a:ext>
+            </a:extLst>
+          </p:cNvPr>
+          <p:cNvSpPr/>
+          <p:nvPr/>
+        </p:nvSpPr>
+        <p:spPr>
+          <a:xfrm>
+            <a:off x="435634" y="3540722"/>
+            <a:ext cx="8284867" cy="2520126"/>
+          </a:xfrm>
+          <a:prstGeom prst="rect">
+            <a:avLst/>
+          </a:prstGeom>
+        </p:spPr>
+        <p:style>
+          <a:lnRef idx="2">
+            <a:schemeClr val="accent5">
+              <a:shade val="15000"/>
+            </a:schemeClr>
+          </a:lnRef>
+          <a:fillRef idx="1">
+            <a:schemeClr val="accent5"/>
+          </a:fillRef>
+          <a:effectRef idx="0">
+            <a:schemeClr val="accent5"/>
+          </a:effectRef>
+          <a:fontRef idx="minor">
+            <a:schemeClr val="lt1"/>
+          </a:fontRef>
+        </p:style>
+        <p:txBody>
+          <a:bodyPr rtlCol="0" anchor="ctr"/>
+          <a:lstStyle/>
+          <a:p>
+            <a:pPr algn="ctr"/>
+            <a:endParaRPr lang="en-US" sz="2400"/>
+          </a:p>
+        </p:txBody>
+      </p:sp>
+      <p:sp>
+        <p:nvSpPr>
+          <p:cNvPr id="4" name="Rectangle 3">
+            <a:extLst>
+              <a:ext uri="{FF2B5EF4-FFF2-40B4-BE49-F238E27FC236}">
+                <a16:creationId xmlns:a16="http://schemas.microsoft.com/office/drawing/2014/main" id="{FB8EEAA7-523C-D32F-5CEE-4A5C573F7B7F}"/>
+              </a:ext>
+            </a:extLst>
+          </p:cNvPr>
+          <p:cNvSpPr/>
+          <p:nvPr/>
+        </p:nvSpPr>
+        <p:spPr>
+          <a:xfrm>
+            <a:off x="435634" y="208225"/>
+            <a:ext cx="8284867" cy="3382844"/>
+          </a:xfrm>
+          <a:prstGeom prst="rect">
+            <a:avLst/>
+          </a:prstGeom>
+          <a:solidFill>
+            <a:schemeClr val="accent1">
+              <a:lumMod val="60000"/>
+              <a:lumOff val="40000"/>
+            </a:schemeClr>
+          </a:solidFill>
+        </p:spPr>
+        <p:style>
+          <a:lnRef idx="2">
+            <a:schemeClr val="accent1">
+              <a:shade val="15000"/>
+            </a:schemeClr>
+          </a:lnRef>
+          <a:fillRef idx="1">
+            <a:schemeClr val="accent1"/>
+          </a:fillRef>
+          <a:effectRef idx="0">
+            <a:schemeClr val="accent1"/>
+          </a:effectRef>
+          <a:fontRef idx="minor">
+            <a:schemeClr val="lt1"/>
+          </a:fontRef>
+        </p:style>
+        <p:txBody>
+          <a:bodyPr rtlCol="0" anchor="ctr"/>
+          <a:lstStyle/>
+          <a:p>
+            <a:pPr algn="ctr"/>
+            <a:endParaRPr lang="en-US" sz="2400"/>
+          </a:p>
+        </p:txBody>
+      </p:sp>
+      <p:sp>
+        <p:nvSpPr>
+          <p:cNvPr id="6" name="Arrow: Left 5">
+            <a:extLst>
+              <a:ext uri="{FF2B5EF4-FFF2-40B4-BE49-F238E27FC236}">
+                <a16:creationId xmlns:a16="http://schemas.microsoft.com/office/drawing/2014/main" id="{0DAF2F6F-0958-BBA7-C187-B1D5F6BC5F4B}"/>
+              </a:ext>
+            </a:extLst>
+          </p:cNvPr>
+          <p:cNvSpPr/>
+          <p:nvPr/>
+        </p:nvSpPr>
+        <p:spPr>
+          <a:xfrm>
+            <a:off x="8104894" y="5182913"/>
+            <a:ext cx="1283287" cy="581822"/>
+          </a:xfrm>
+          <a:prstGeom prst="leftArrow">
+            <a:avLst/>
+          </a:prstGeom>
+        </p:spPr>
+        <p:style>
+          <a:lnRef idx="2">
+            <a:schemeClr val="dk1">
+              <a:shade val="15000"/>
+            </a:schemeClr>
+          </a:lnRef>
+          <a:fillRef idx="1">
+            <a:schemeClr val="dk1"/>
+          </a:fillRef>
+          <a:effectRef idx="0">
+            <a:schemeClr val="dk1"/>
+          </a:effectRef>
+          <a:fontRef idx="minor">
+            <a:schemeClr val="lt1"/>
+          </a:fontRef>
+        </p:style>
+        <p:txBody>
+          <a:bodyPr rtlCol="0" anchor="ctr"/>
+          <a:lstStyle/>
+          <a:p>
+            <a:pPr algn="ctr"/>
+            <a:endParaRPr lang="en-US" sz="2400"/>
+          </a:p>
+        </p:txBody>
+      </p:sp>
+      <p:sp>
+        <p:nvSpPr>
+          <p:cNvPr id="13" name="Arrow: Left 12">
+            <a:extLst>
+              <a:ext uri="{FF2B5EF4-FFF2-40B4-BE49-F238E27FC236}">
+                <a16:creationId xmlns:a16="http://schemas.microsoft.com/office/drawing/2014/main" id="{B551CE49-2FEC-3F5C-6B8F-D24ED8FDF3E1}"/>
+              </a:ext>
+            </a:extLst>
+          </p:cNvPr>
+          <p:cNvSpPr/>
+          <p:nvPr/>
+        </p:nvSpPr>
+        <p:spPr>
+          <a:xfrm>
+            <a:off x="19052" y="953784"/>
+            <a:ext cx="1268098" cy="581822"/>
+          </a:xfrm>
+          <a:prstGeom prst="leftArrow">
+            <a:avLst/>
+          </a:prstGeom>
+          <a:solidFill>
+            <a:schemeClr val="tx1"/>
+          </a:solidFill>
+        </p:spPr>
+        <p:style>
+          <a:lnRef idx="2">
+            <a:schemeClr val="dk1">
+              <a:shade val="15000"/>
+            </a:schemeClr>
+          </a:lnRef>
+          <a:fillRef idx="1">
+            <a:schemeClr val="dk1"/>
+          </a:fillRef>
+          <a:effectRef idx="0">
+            <a:schemeClr val="dk1"/>
+          </a:effectRef>
+          <a:fontRef idx="minor">
+            <a:schemeClr val="lt1"/>
+          </a:fontRef>
+        </p:style>
+        <p:txBody>
+          <a:bodyPr rtlCol="0" anchor="ctr"/>
+          <a:lstStyle/>
+          <a:p>
+            <a:pPr algn="ctr"/>
+            <a:endParaRPr lang="en-US" sz="2400"/>
+          </a:p>
+        </p:txBody>
+      </p:sp>
+      <mc:AlternateContent xmlns:mc="http://schemas.openxmlformats.org/markup-compatibility/2006" xmlns:a14="http://schemas.microsoft.com/office/drawing/2010/main">
+        <mc:Choice Requires="a14">
+          <p:sp>
+            <p:nvSpPr>
+              <p:cNvPr id="16" name="TextBox 15">
+                <a:extLst>
+                  <a:ext uri="{FF2B5EF4-FFF2-40B4-BE49-F238E27FC236}">
+                    <a16:creationId xmlns:a16="http://schemas.microsoft.com/office/drawing/2014/main" id="{F3A1FD79-DDAE-A062-AD9E-1014CAB0C2D2}"/>
+                  </a:ext>
+                </a:extLst>
+              </p:cNvPr>
+              <p:cNvSpPr txBox="1"/>
+              <p:nvPr/>
+            </p:nvSpPr>
+            <p:spPr>
+              <a:xfrm>
+                <a:off x="9054246" y="1124777"/>
+                <a:ext cx="3272525" cy="888064"/>
+              </a:xfrm>
+              <a:prstGeom prst="rect">
+                <a:avLst/>
+              </a:prstGeom>
+              <a:noFill/>
+            </p:spPr>
+            <p:txBody>
+              <a:bodyPr wrap="square" rtlCol="0">
+                <a:spAutoFit/>
+              </a:bodyPr>
+              <a:lstStyle/>
+              <a:p>
+                <a:pPr/>
+                <a14:m>
+                  <m:oMathPara xmlns:m="http://schemas.openxmlformats.org/officeDocument/2006/math">
+                    <m:oMath>
+                      <m:sSub>
+                        <m:sSubPr>
+                          <m:ctrlPr>
+                            <a:rPr lang="fr-CH" sz="2400" b="0" i="1" smtClean="0">
+                              <a:latin typeface="Cambria Math" panose="02040503050406030204" pitchFamily="18" charset="0"/>
+                            </a:rPr>
+                          </m:ctrlPr>
+                        </m:sSubPr>
+                        <m:e>
+                          <m:r>
+                            <a:rPr lang="fr-CH" sz="2400" b="0" i="1" smtClean="0">
+                              <a:latin typeface="Cambria Math" panose="02040503050406030204" pitchFamily="18" charset="0"/>
+                            </a:rPr>
+                            <m:t>𝑄</m:t>
+                          </m:r>
+                        </m:e>
+                        <m:sub>
+                          <m:r>
+                            <a:rPr lang="fr-CH" sz="2400" b="0" i="1" smtClean="0">
+                              <a:latin typeface="Cambria Math" panose="02040503050406030204" pitchFamily="18" charset="0"/>
+                            </a:rPr>
+                            <m:t>𝑒𝑝𝑖</m:t>
+                          </m:r>
+                        </m:sub>
+                      </m:sSub>
+                      <m:d>
+                        <m:dPr>
+                          <m:ctrlPr>
+                            <a:rPr lang="fr-CH" sz="2400" b="0" i="1" smtClean="0">
+                              <a:latin typeface="Cambria Math" panose="02040503050406030204" pitchFamily="18" charset="0"/>
+                            </a:rPr>
+                          </m:ctrlPr>
+                        </m:dPr>
+                        <m:e>
+                          <m:r>
+                            <a:rPr lang="fr-CH" sz="2400" b="0" i="1" smtClean="0">
+                              <a:latin typeface="Cambria Math" panose="02040503050406030204" pitchFamily="18" charset="0"/>
+                            </a:rPr>
+                            <m:t>𝑡</m:t>
+                          </m:r>
+                        </m:e>
+                      </m:d>
+                      <m:r>
+                        <a:rPr lang="fr-CH" sz="2400" b="0" i="1" smtClean="0">
+                          <a:latin typeface="Cambria Math" panose="02040503050406030204" pitchFamily="18" charset="0"/>
+                        </a:rPr>
+                        <m:t>=</m:t>
+                      </m:r>
+                      <m:r>
+                        <a:rPr lang="fr-CH" sz="2400" b="0" i="1" smtClean="0">
+                          <a:latin typeface="Cambria Math" panose="02040503050406030204" pitchFamily="18" charset="0"/>
+                        </a:rPr>
+                        <m:t>𝛼</m:t>
+                      </m:r>
+                      <m:d>
+                        <m:dPr>
+                          <m:ctrlPr>
+                            <a:rPr lang="fr-CH" sz="2400" b="0" i="1" smtClean="0">
+                              <a:latin typeface="Cambria Math" panose="02040503050406030204" pitchFamily="18" charset="0"/>
+                            </a:rPr>
+                          </m:ctrlPr>
+                        </m:dPr>
+                        <m:e>
+                          <m:r>
+                            <a:rPr lang="fr-CH" sz="2400" b="0" i="1" smtClean="0">
+                              <a:latin typeface="Cambria Math" panose="02040503050406030204" pitchFamily="18" charset="0"/>
+                            </a:rPr>
+                            <m:t>𝑡</m:t>
+                          </m:r>
+                        </m:e>
+                      </m:d>
+                      <m:sSub>
+                        <m:sSubPr>
+                          <m:ctrlPr>
+                            <a:rPr lang="fr-CH" sz="2400" b="0" i="1" smtClean="0">
+                              <a:latin typeface="Cambria Math" panose="02040503050406030204" pitchFamily="18" charset="0"/>
+                            </a:rPr>
+                          </m:ctrlPr>
+                        </m:sSubPr>
+                        <m:e>
+                          <m:r>
+                            <a:rPr lang="fr-CH" sz="2400" b="0" i="1" smtClean="0">
+                              <a:latin typeface="Cambria Math" panose="02040503050406030204" pitchFamily="18" charset="0"/>
+                            </a:rPr>
+                            <m:t>𝑄</m:t>
+                          </m:r>
+                        </m:e>
+                        <m:sub>
+                          <m:r>
+                            <a:rPr lang="fr-CH" sz="2400" b="0" i="1" smtClean="0">
+                              <a:latin typeface="Cambria Math" panose="02040503050406030204" pitchFamily="18" charset="0"/>
+                            </a:rPr>
+                            <m:t>𝑡𝑜𝑡</m:t>
+                          </m:r>
+                        </m:sub>
+                      </m:sSub>
+                    </m:oMath>
+                  </m:oMathPara>
+                </a14:m>
+                <a:endParaRPr lang="fr-CH" sz="2400" b="0" i="1" dirty="0">
+                  <a:latin typeface="Cambria Math" panose="02040503050406030204" pitchFamily="18" charset="0"/>
+                </a:endParaRPr>
+              </a:p>
+              <a:p>
+                <a:pPr/>
+                <a14:m>
+                  <m:oMathPara xmlns:m="http://schemas.openxmlformats.org/officeDocument/2006/math">
+                    <m:oMath>
+                      <m:sSub>
+                        <m:sSubPr>
+                          <m:ctrlPr>
+                            <a:rPr lang="fr-CH" sz="2400" b="0" i="1" smtClean="0">
+                              <a:latin typeface="Cambria Math" panose="02040503050406030204" pitchFamily="18" charset="0"/>
+                            </a:rPr>
+                          </m:ctrlPr>
+                        </m:sSubPr>
+                        <m:e>
+                          <m:r>
+                            <a:rPr lang="fr-CH" sz="2400" b="0" i="1" smtClean="0">
+                              <a:latin typeface="Cambria Math" panose="02040503050406030204" pitchFamily="18" charset="0"/>
+                            </a:rPr>
+                            <m:t>𝐶</m:t>
+                          </m:r>
+                        </m:e>
+                        <m:sub>
+                          <m:r>
+                            <a:rPr lang="fr-CH" sz="2400" b="0" i="1" smtClean="0">
+                              <a:latin typeface="Cambria Math" panose="02040503050406030204" pitchFamily="18" charset="0"/>
+                            </a:rPr>
+                            <m:t>𝑖𝑛</m:t>
+                          </m:r>
+                          <m:r>
+                            <a:rPr lang="fr-CH" sz="2400" b="0" i="1" smtClean="0">
+                              <a:latin typeface="Cambria Math" panose="02040503050406030204" pitchFamily="18" charset="0"/>
+                            </a:rPr>
+                            <m:t>,</m:t>
+                          </m:r>
+                          <m:r>
+                            <a:rPr lang="fr-CH" sz="2400" b="0" i="1" smtClean="0">
+                              <a:latin typeface="Cambria Math" panose="02040503050406030204" pitchFamily="18" charset="0"/>
+                            </a:rPr>
+                            <m:t>𝑒𝑝𝑖</m:t>
+                          </m:r>
+                        </m:sub>
+                      </m:sSub>
+                      <m:r>
+                        <a:rPr lang="fr-CH" sz="2400" b="0" i="0" smtClean="0">
+                          <a:latin typeface="Cambria Math" panose="02040503050406030204" pitchFamily="18" charset="0"/>
+                        </a:rPr>
+                        <m:t>=0</m:t>
+                      </m:r>
+                    </m:oMath>
+                  </m:oMathPara>
+                </a14:m>
+                <a:endParaRPr lang="en-US" sz="2400" dirty="0"/>
+              </a:p>
+            </p:txBody>
+          </p:sp>
+        </mc:Choice>
+        <mc:Fallback xmlns="">
+          <p:sp>
+            <p:nvSpPr>
+              <p:cNvPr id="16" name="TextBox 15">
+                <a:extLst>
+                  <a:ext uri="{FF2B5EF4-FFF2-40B4-BE49-F238E27FC236}">
+                    <a16:creationId xmlns:a16="http://schemas.microsoft.com/office/drawing/2014/main" id="{F3A1FD79-DDAE-A062-AD9E-1014CAB0C2D2}"/>
+                  </a:ext>
+                </a:extLst>
+              </p:cNvPr>
+              <p:cNvSpPr txBox="1">
+                <a:spLocks noRot="1" noChangeAspect="1" noMove="1" noResize="1" noEditPoints="1" noAdjustHandles="1" noChangeArrowheads="1" noChangeShapeType="1" noTextEdit="1"/>
+              </p:cNvSpPr>
+              <p:nvPr/>
+            </p:nvSpPr>
+            <p:spPr>
+              <a:xfrm>
+                <a:off x="9054246" y="1124777"/>
+                <a:ext cx="3272525" cy="888064"/>
+              </a:xfrm>
+              <a:prstGeom prst="rect">
+                <a:avLst/>
+              </a:prstGeom>
+              <a:blipFill>
+                <a:blip r:embed="rId3"/>
+                <a:stretch>
+                  <a:fillRect b="-5517"/>
+                </a:stretch>
+              </a:blipFill>
+            </p:spPr>
+            <p:txBody>
+              <a:bodyPr/>
+              <a:lstStyle/>
+              <a:p>
+                <a:r>
+                  <a:rPr lang="en-US">
+                    <a:noFill/>
+                  </a:rPr>
+                  <a:t> </a:t>
+                </a:r>
+              </a:p>
+            </p:txBody>
+          </p:sp>
+        </mc:Fallback>
+      </mc:AlternateContent>
+      <mc:AlternateContent xmlns:mc="http://schemas.openxmlformats.org/markup-compatibility/2006" xmlns:a14="http://schemas.microsoft.com/office/drawing/2010/main">
+        <mc:Choice Requires="a14">
+          <p:sp>
+            <p:nvSpPr>
+              <p:cNvPr id="17" name="TextBox 16">
+                <a:extLst>
+                  <a:ext uri="{FF2B5EF4-FFF2-40B4-BE49-F238E27FC236}">
+                    <a16:creationId xmlns:a16="http://schemas.microsoft.com/office/drawing/2014/main" id="{A5F54D80-17BA-665E-117D-8F45AE5850D8}"/>
+                  </a:ext>
+                </a:extLst>
+              </p:cNvPr>
+              <p:cNvSpPr txBox="1"/>
+              <p:nvPr/>
+            </p:nvSpPr>
+            <p:spPr>
+              <a:xfrm>
+                <a:off x="316546" y="575886"/>
+                <a:ext cx="3366654" cy="490199"/>
+              </a:xfrm>
+              <a:prstGeom prst="rect">
+                <a:avLst/>
+              </a:prstGeom>
+              <a:noFill/>
+            </p:spPr>
+            <p:txBody>
+              <a:bodyPr wrap="square" rtlCol="0">
+                <a:spAutoFit/>
+              </a:bodyPr>
+              <a:lstStyle/>
+              <a:p>
+                <a:pPr/>
+                <a14:m>
+                  <m:oMathPara xmlns:m="http://schemas.openxmlformats.org/officeDocument/2006/math">
+                    <m:oMath>
+                      <m:sSub>
+                        <m:sSubPr>
+                          <m:ctrlPr>
+                            <a:rPr lang="fr-CH" sz="2400" b="0" i="1" smtClean="0">
+                              <a:solidFill>
+                                <a:schemeClr val="tx1"/>
+                              </a:solidFill>
+                              <a:latin typeface="Cambria Math" panose="02040503050406030204" pitchFamily="18" charset="0"/>
+                            </a:rPr>
+                          </m:ctrlPr>
+                        </m:sSubPr>
+                        <m:e>
+                          <m:r>
+                            <a:rPr lang="fr-CH" sz="2400" b="0" i="1" smtClean="0">
+                              <a:solidFill>
+                                <a:schemeClr val="tx1"/>
+                              </a:solidFill>
+                              <a:latin typeface="Cambria Math" panose="02040503050406030204" pitchFamily="18" charset="0"/>
+                            </a:rPr>
+                            <m:t>𝑀</m:t>
+                          </m:r>
+                        </m:e>
+                        <m:sub>
+                          <m:r>
+                            <a:rPr lang="fr-CH" sz="2400" b="0" i="1" smtClean="0">
+                              <a:solidFill>
+                                <a:schemeClr val="tx1"/>
+                              </a:solidFill>
+                              <a:latin typeface="Cambria Math" panose="02040503050406030204" pitchFamily="18" charset="0"/>
+                            </a:rPr>
+                            <m:t>𝑜𝑢𝑡</m:t>
+                          </m:r>
+                        </m:sub>
+                      </m:sSub>
+                      <m:d>
+                        <m:dPr>
+                          <m:ctrlPr>
+                            <a:rPr lang="fr-CH" sz="2400" b="0" i="1" smtClean="0">
+                              <a:solidFill>
+                                <a:schemeClr val="tx1"/>
+                              </a:solidFill>
+                              <a:latin typeface="Cambria Math" panose="02040503050406030204" pitchFamily="18" charset="0"/>
+                            </a:rPr>
+                          </m:ctrlPr>
+                        </m:dPr>
+                        <m:e>
+                          <m:r>
+                            <a:rPr lang="fr-CH" sz="2400" b="0" i="1" smtClean="0">
+                              <a:solidFill>
+                                <a:schemeClr val="tx1"/>
+                              </a:solidFill>
+                              <a:latin typeface="Cambria Math" panose="02040503050406030204" pitchFamily="18" charset="0"/>
+                            </a:rPr>
+                            <m:t>𝑡</m:t>
+                          </m:r>
+                        </m:e>
+                      </m:d>
+                      <m:r>
+                        <a:rPr lang="fr-CH" sz="2400" b="0" i="1" smtClean="0">
+                          <a:solidFill>
+                            <a:schemeClr val="tx1"/>
+                          </a:solidFill>
+                          <a:latin typeface="Cambria Math" panose="02040503050406030204" pitchFamily="18" charset="0"/>
+                        </a:rPr>
+                        <m:t>=</m:t>
+                      </m:r>
+                      <m:sSub>
+                        <m:sSubPr>
+                          <m:ctrlPr>
+                            <a:rPr lang="fr-CH" sz="2400" b="0" i="1" smtClean="0">
+                              <a:solidFill>
+                                <a:schemeClr val="tx1"/>
+                              </a:solidFill>
+                              <a:latin typeface="Cambria Math" panose="02040503050406030204" pitchFamily="18" charset="0"/>
+                            </a:rPr>
+                          </m:ctrlPr>
+                        </m:sSubPr>
+                        <m:e>
+                          <m:r>
+                            <a:rPr lang="fr-CH" sz="2400" b="0" i="1" smtClean="0">
+                              <a:solidFill>
+                                <a:schemeClr val="tx1"/>
+                              </a:solidFill>
+                              <a:latin typeface="Cambria Math" panose="02040503050406030204" pitchFamily="18" charset="0"/>
+                            </a:rPr>
+                            <m:t>𝑄</m:t>
+                          </m:r>
+                        </m:e>
+                        <m:sub>
+                          <m:r>
+                            <a:rPr lang="fr-CH" sz="2400" b="0" i="1" smtClean="0">
+                              <a:solidFill>
+                                <a:schemeClr val="tx1"/>
+                              </a:solidFill>
+                              <a:latin typeface="Cambria Math" panose="02040503050406030204" pitchFamily="18" charset="0"/>
+                            </a:rPr>
+                            <m:t>𝑡𝑜𝑡</m:t>
+                          </m:r>
+                        </m:sub>
+                      </m:sSub>
+                      <m:sSub>
+                        <m:sSubPr>
+                          <m:ctrlPr>
+                            <a:rPr lang="fr-CH" sz="2400" b="0" i="1" smtClean="0">
+                              <a:solidFill>
+                                <a:schemeClr val="tx1"/>
+                              </a:solidFill>
+                              <a:latin typeface="Cambria Math" panose="02040503050406030204" pitchFamily="18" charset="0"/>
+                            </a:rPr>
+                          </m:ctrlPr>
+                        </m:sSubPr>
+                        <m:e>
+                          <m:r>
+                            <a:rPr lang="fr-CH" sz="2400" b="0" i="1" smtClean="0">
+                              <a:solidFill>
+                                <a:schemeClr val="tx1"/>
+                              </a:solidFill>
+                              <a:latin typeface="Cambria Math" panose="02040503050406030204" pitchFamily="18" charset="0"/>
+                            </a:rPr>
+                            <m:t>𝐶</m:t>
+                          </m:r>
+                        </m:e>
+                        <m:sub>
+                          <m:r>
+                            <a:rPr lang="fr-CH" sz="2400" b="0" i="1" smtClean="0">
+                              <a:solidFill>
+                                <a:schemeClr val="tx1"/>
+                              </a:solidFill>
+                              <a:latin typeface="Cambria Math" panose="02040503050406030204" pitchFamily="18" charset="0"/>
+                            </a:rPr>
+                            <m:t>𝑒𝑝𝑖</m:t>
+                          </m:r>
+                        </m:sub>
+                      </m:sSub>
+                      <m:r>
+                        <a:rPr lang="fr-CH" sz="2400" b="0" i="1" smtClean="0">
+                          <a:solidFill>
+                            <a:schemeClr val="tx1"/>
+                          </a:solidFill>
+                          <a:latin typeface="Cambria Math" panose="02040503050406030204" pitchFamily="18" charset="0"/>
+                        </a:rPr>
+                        <m:t>(</m:t>
+                      </m:r>
+                      <m:r>
+                        <a:rPr lang="fr-CH" sz="2400" b="0" i="1" smtClean="0">
+                          <a:solidFill>
+                            <a:schemeClr val="tx1"/>
+                          </a:solidFill>
+                          <a:latin typeface="Cambria Math" panose="02040503050406030204" pitchFamily="18" charset="0"/>
+                        </a:rPr>
+                        <m:t>𝑡</m:t>
+                      </m:r>
+                      <m:r>
+                        <a:rPr lang="fr-CH" sz="2400" b="0" i="1" smtClean="0">
+                          <a:solidFill>
+                            <a:schemeClr val="tx1"/>
+                          </a:solidFill>
+                          <a:latin typeface="Cambria Math" panose="02040503050406030204" pitchFamily="18" charset="0"/>
+                        </a:rPr>
+                        <m:t>)</m:t>
+                      </m:r>
+                    </m:oMath>
+                  </m:oMathPara>
+                </a14:m>
+                <a:endParaRPr lang="en-US" sz="2400" i="1" dirty="0">
+                  <a:solidFill>
+                    <a:schemeClr val="tx1"/>
+                  </a:solidFill>
+                </a:endParaRPr>
+              </a:p>
+            </p:txBody>
+          </p:sp>
+        </mc:Choice>
+        <mc:Fallback xmlns="">
+          <p:sp>
+            <p:nvSpPr>
+              <p:cNvPr id="17" name="TextBox 16">
+                <a:extLst>
+                  <a:ext uri="{FF2B5EF4-FFF2-40B4-BE49-F238E27FC236}">
+                    <a16:creationId xmlns:a16="http://schemas.microsoft.com/office/drawing/2014/main" id="{A5F54D80-17BA-665E-117D-8F45AE5850D8}"/>
+                  </a:ext>
+                </a:extLst>
+              </p:cNvPr>
+              <p:cNvSpPr txBox="1">
+                <a:spLocks noRot="1" noChangeAspect="1" noMove="1" noResize="1" noEditPoints="1" noAdjustHandles="1" noChangeArrowheads="1" noChangeShapeType="1" noTextEdit="1"/>
+              </p:cNvSpPr>
+              <p:nvPr/>
+            </p:nvSpPr>
+            <p:spPr>
+              <a:xfrm>
+                <a:off x="316546" y="575886"/>
+                <a:ext cx="3366654" cy="490199"/>
+              </a:xfrm>
+              <a:prstGeom prst="rect">
+                <a:avLst/>
+              </a:prstGeom>
+              <a:blipFill>
+                <a:blip r:embed="rId4"/>
+                <a:stretch>
+                  <a:fillRect b="-11111"/>
+                </a:stretch>
+              </a:blipFill>
+            </p:spPr>
+            <p:txBody>
+              <a:bodyPr/>
+              <a:lstStyle/>
+              <a:p>
+                <a:r>
+                  <a:rPr lang="en-US">
+                    <a:noFill/>
+                  </a:rPr>
+                  <a:t> </a:t>
+                </a:r>
+              </a:p>
+            </p:txBody>
+          </p:sp>
+        </mc:Fallback>
+      </mc:AlternateContent>
+      <mc:AlternateContent xmlns:mc="http://schemas.openxmlformats.org/markup-compatibility/2006" xmlns:a14="http://schemas.microsoft.com/office/drawing/2010/main">
+        <mc:Choice Requires="a14">
+          <p:sp>
+            <p:nvSpPr>
+              <p:cNvPr id="19" name="TextBox 18">
+                <a:extLst>
+                  <a:ext uri="{FF2B5EF4-FFF2-40B4-BE49-F238E27FC236}">
+                    <a16:creationId xmlns:a16="http://schemas.microsoft.com/office/drawing/2014/main" id="{E282A3AF-9B88-54D6-BD16-59EDD5E15F99}"/>
+                  </a:ext>
+                </a:extLst>
+              </p:cNvPr>
+              <p:cNvSpPr txBox="1"/>
+              <p:nvPr/>
+            </p:nvSpPr>
+            <p:spPr>
+              <a:xfrm>
+                <a:off x="2745088" y="280633"/>
+                <a:ext cx="3665959" cy="494751"/>
+              </a:xfrm>
+              <a:prstGeom prst="rect">
+                <a:avLst/>
+              </a:prstGeom>
+              <a:noFill/>
+            </p:spPr>
+            <p:txBody>
+              <a:bodyPr wrap="square" rtlCol="0">
+                <a:spAutoFit/>
+              </a:bodyPr>
+              <a:lstStyle/>
+              <a:p>
+                <a:pPr algn="ctr"/>
+                <a:r>
+                  <a:rPr lang="fr-CH" sz="2400" b="1" dirty="0"/>
+                  <a:t>Epilimnion </a:t>
+                </a:r>
+                <a14:m>
+                  <m:oMath xmlns:m="http://schemas.openxmlformats.org/officeDocument/2006/math">
+                    <m:sSub>
+                      <m:sSubPr>
+                        <m:ctrlPr>
+                          <a:rPr lang="fr-CH" sz="2400" b="1" i="1" smtClean="0">
+                            <a:latin typeface="Cambria Math" panose="02040503050406030204" pitchFamily="18" charset="0"/>
+                          </a:rPr>
+                        </m:ctrlPr>
+                      </m:sSubPr>
+                      <m:e>
+                        <m:r>
+                          <a:rPr lang="fr-CH" sz="2400" b="1" i="1" smtClean="0">
+                            <a:latin typeface="Cambria Math" panose="02040503050406030204" pitchFamily="18" charset="0"/>
+                          </a:rPr>
+                          <m:t>𝑪</m:t>
+                        </m:r>
+                      </m:e>
+                      <m:sub>
+                        <m:r>
+                          <a:rPr lang="fr-CH" sz="2400" b="1" i="1" smtClean="0">
+                            <a:latin typeface="Cambria Math" panose="02040503050406030204" pitchFamily="18" charset="0"/>
+                          </a:rPr>
+                          <m:t>𝒆𝒑𝒊</m:t>
+                        </m:r>
+                      </m:sub>
+                    </m:sSub>
+                    <m:r>
+                      <a:rPr lang="fr-CH" sz="2400" b="1" i="1" smtClean="0">
+                        <a:latin typeface="Cambria Math" panose="02040503050406030204" pitchFamily="18" charset="0"/>
+                      </a:rPr>
+                      <m:t>(</m:t>
+                    </m:r>
+                    <m:r>
+                      <a:rPr lang="fr-CH" sz="2400" b="1" i="1" smtClean="0">
+                        <a:latin typeface="Cambria Math" panose="02040503050406030204" pitchFamily="18" charset="0"/>
+                      </a:rPr>
+                      <m:t>𝒕</m:t>
+                    </m:r>
+                    <m:r>
+                      <a:rPr lang="fr-CH" sz="2400" b="1" i="1" smtClean="0">
+                        <a:latin typeface="Cambria Math" panose="02040503050406030204" pitchFamily="18" charset="0"/>
+                      </a:rPr>
+                      <m:t>)</m:t>
+                    </m:r>
+                  </m:oMath>
+                </a14:m>
+                <a:endParaRPr lang="en-US" sz="2400" b="1" i="1" dirty="0"/>
+              </a:p>
+            </p:txBody>
+          </p:sp>
+        </mc:Choice>
+        <mc:Fallback xmlns="">
+          <p:sp>
+            <p:nvSpPr>
+              <p:cNvPr id="19" name="TextBox 18">
+                <a:extLst>
+                  <a:ext uri="{FF2B5EF4-FFF2-40B4-BE49-F238E27FC236}">
+                    <a16:creationId xmlns:a16="http://schemas.microsoft.com/office/drawing/2014/main" id="{E282A3AF-9B88-54D6-BD16-59EDD5E15F99}"/>
+                  </a:ext>
+                </a:extLst>
+              </p:cNvPr>
+              <p:cNvSpPr txBox="1">
+                <a:spLocks noRot="1" noChangeAspect="1" noMove="1" noResize="1" noEditPoints="1" noAdjustHandles="1" noChangeArrowheads="1" noChangeShapeType="1" noTextEdit="1"/>
+              </p:cNvSpPr>
+              <p:nvPr/>
+            </p:nvSpPr>
+            <p:spPr>
+              <a:xfrm>
+                <a:off x="2745088" y="280633"/>
+                <a:ext cx="3665959" cy="494751"/>
+              </a:xfrm>
+              <a:prstGeom prst="rect">
+                <a:avLst/>
+              </a:prstGeom>
+              <a:blipFill>
+                <a:blip r:embed="rId5"/>
+                <a:stretch>
+                  <a:fillRect t="-8642" b="-22222"/>
+                </a:stretch>
+              </a:blipFill>
+            </p:spPr>
+            <p:txBody>
+              <a:bodyPr/>
+              <a:lstStyle/>
+              <a:p>
+                <a:r>
+                  <a:rPr lang="en-US">
+                    <a:noFill/>
+                  </a:rPr>
+                  <a:t> </a:t>
+                </a:r>
+              </a:p>
+            </p:txBody>
+          </p:sp>
+        </mc:Fallback>
+      </mc:AlternateContent>
+      <mc:AlternateContent xmlns:mc="http://schemas.openxmlformats.org/markup-compatibility/2006" xmlns:a14="http://schemas.microsoft.com/office/drawing/2010/main">
+        <mc:Choice Requires="a14">
+          <p:sp>
+            <p:nvSpPr>
+              <p:cNvPr id="20" name="TextBox 19">
+                <a:extLst>
+                  <a:ext uri="{FF2B5EF4-FFF2-40B4-BE49-F238E27FC236}">
+                    <a16:creationId xmlns:a16="http://schemas.microsoft.com/office/drawing/2014/main" id="{F5611A7D-250F-BD09-B86B-67A2097931B0}"/>
+                  </a:ext>
+                </a:extLst>
+              </p:cNvPr>
+              <p:cNvSpPr txBox="1"/>
+              <p:nvPr/>
+            </p:nvSpPr>
+            <p:spPr>
+              <a:xfrm>
+                <a:off x="2434142" y="5393851"/>
+                <a:ext cx="4287851" cy="495520"/>
+              </a:xfrm>
+              <a:prstGeom prst="rect">
+                <a:avLst/>
+              </a:prstGeom>
+              <a:noFill/>
+            </p:spPr>
+            <p:txBody>
+              <a:bodyPr wrap="square" rtlCol="0">
+                <a:spAutoFit/>
+              </a:bodyPr>
+              <a:lstStyle/>
+              <a:p>
+                <a:pPr algn="ctr"/>
+                <a:r>
+                  <a:rPr lang="fr-CH" sz="2400" b="1" dirty="0"/>
+                  <a:t>Hypolimnion </a:t>
+                </a:r>
+                <a14:m>
+                  <m:oMath xmlns:m="http://schemas.openxmlformats.org/officeDocument/2006/math">
+                    <m:sSub>
+                      <m:sSubPr>
+                        <m:ctrlPr>
+                          <a:rPr lang="fr-CH" sz="2400" b="1" i="1" smtClean="0">
+                            <a:latin typeface="Cambria Math" panose="02040503050406030204" pitchFamily="18" charset="0"/>
+                          </a:rPr>
+                        </m:ctrlPr>
+                      </m:sSubPr>
+                      <m:e>
+                        <m:r>
+                          <a:rPr lang="fr-CH" sz="2400" b="1" i="1" smtClean="0">
+                            <a:latin typeface="Cambria Math" panose="02040503050406030204" pitchFamily="18" charset="0"/>
+                          </a:rPr>
+                          <m:t>𝑪</m:t>
+                        </m:r>
+                      </m:e>
+                      <m:sub>
+                        <m:r>
+                          <a:rPr lang="fr-CH" sz="2400" b="1" i="1" smtClean="0">
+                            <a:latin typeface="Cambria Math" panose="02040503050406030204" pitchFamily="18" charset="0"/>
+                          </a:rPr>
+                          <m:t>𝒉𝒚𝒑𝒐</m:t>
+                        </m:r>
+                      </m:sub>
+                    </m:sSub>
+                    <m:r>
+                      <a:rPr lang="fr-CH" sz="2400" b="1" i="1" smtClean="0">
+                        <a:latin typeface="Cambria Math" panose="02040503050406030204" pitchFamily="18" charset="0"/>
+                      </a:rPr>
+                      <m:t>(</m:t>
+                    </m:r>
+                    <m:r>
+                      <a:rPr lang="fr-CH" sz="2400" b="1" i="1" smtClean="0">
+                        <a:latin typeface="Cambria Math" panose="02040503050406030204" pitchFamily="18" charset="0"/>
+                      </a:rPr>
+                      <m:t>𝒕</m:t>
+                    </m:r>
+                    <m:r>
+                      <a:rPr lang="fr-CH" sz="2400" b="1" i="1" smtClean="0">
+                        <a:latin typeface="Cambria Math" panose="02040503050406030204" pitchFamily="18" charset="0"/>
+                      </a:rPr>
+                      <m:t>)</m:t>
+                    </m:r>
+                  </m:oMath>
+                </a14:m>
+                <a:endParaRPr lang="en-US" sz="2400" b="1" dirty="0"/>
+              </a:p>
+            </p:txBody>
+          </p:sp>
+        </mc:Choice>
+        <mc:Fallback xmlns="">
+          <p:sp>
+            <p:nvSpPr>
+              <p:cNvPr id="20" name="TextBox 19">
+                <a:extLst>
+                  <a:ext uri="{FF2B5EF4-FFF2-40B4-BE49-F238E27FC236}">
+                    <a16:creationId xmlns:a16="http://schemas.microsoft.com/office/drawing/2014/main" id="{F5611A7D-250F-BD09-B86B-67A2097931B0}"/>
+                  </a:ext>
+                </a:extLst>
+              </p:cNvPr>
+              <p:cNvSpPr txBox="1">
+                <a:spLocks noRot="1" noChangeAspect="1" noMove="1" noResize="1" noEditPoints="1" noAdjustHandles="1" noChangeArrowheads="1" noChangeShapeType="1" noTextEdit="1"/>
+              </p:cNvSpPr>
+              <p:nvPr/>
+            </p:nvSpPr>
+            <p:spPr>
+              <a:xfrm>
+                <a:off x="2434142" y="5393851"/>
+                <a:ext cx="4287851" cy="495520"/>
+              </a:xfrm>
+              <a:prstGeom prst="rect">
+                <a:avLst/>
+              </a:prstGeom>
+              <a:blipFill>
+                <a:blip r:embed="rId6"/>
+                <a:stretch>
+                  <a:fillRect t="-8642" b="-22222"/>
+                </a:stretch>
+              </a:blipFill>
+            </p:spPr>
+            <p:txBody>
+              <a:bodyPr/>
+              <a:lstStyle/>
+              <a:p>
+                <a:r>
+                  <a:rPr lang="en-US">
+                    <a:noFill/>
+                  </a:rPr>
+                  <a:t> </a:t>
+                </a:r>
+              </a:p>
+            </p:txBody>
+          </p:sp>
+        </mc:Fallback>
+      </mc:AlternateContent>
+      <p:cxnSp>
+        <p:nvCxnSpPr>
+          <p:cNvPr id="8" name="Straight Arrow Connector 7">
+            <a:extLst>
+              <a:ext uri="{FF2B5EF4-FFF2-40B4-BE49-F238E27FC236}">
+                <a16:creationId xmlns:a16="http://schemas.microsoft.com/office/drawing/2014/main" id="{8C04AFBF-EE65-0516-A206-72E28D6587BA}"/>
+              </a:ext>
+            </a:extLst>
+          </p:cNvPr>
+          <p:cNvCxnSpPr>
+            <a:cxnSpLocks/>
+          </p:cNvCxnSpPr>
+          <p:nvPr/>
+        </p:nvCxnSpPr>
+        <p:spPr>
+          <a:xfrm>
+            <a:off x="7795950" y="208225"/>
+            <a:ext cx="0" cy="3402723"/>
+          </a:xfrm>
+          <a:prstGeom prst="straightConnector1">
+            <a:avLst/>
+          </a:prstGeom>
+          <a:ln w="38100">
+            <a:headEnd type="triangle"/>
+            <a:tailEnd type="triangle"/>
+          </a:ln>
+        </p:spPr>
+        <p:style>
+          <a:lnRef idx="1">
+            <a:schemeClr val="dk1"/>
+          </a:lnRef>
+          <a:fillRef idx="0">
+            <a:schemeClr val="dk1"/>
+          </a:fillRef>
+          <a:effectRef idx="0">
+            <a:schemeClr val="dk1"/>
+          </a:effectRef>
+          <a:fontRef idx="minor">
+            <a:schemeClr val="tx1"/>
+          </a:fontRef>
+        </p:style>
+      </p:cxnSp>
+      <mc:AlternateContent xmlns:mc="http://schemas.openxmlformats.org/markup-compatibility/2006" xmlns:a14="http://schemas.microsoft.com/office/drawing/2010/main">
+        <mc:Choice Requires="a14">
+          <p:sp>
+            <p:nvSpPr>
+              <p:cNvPr id="22" name="TextBox 21">
+                <a:extLst>
+                  <a:ext uri="{FF2B5EF4-FFF2-40B4-BE49-F238E27FC236}">
+                    <a16:creationId xmlns:a16="http://schemas.microsoft.com/office/drawing/2014/main" id="{4CF577EA-AB38-374D-2A3A-0CC9CCE90789}"/>
+                  </a:ext>
+                </a:extLst>
+              </p:cNvPr>
+              <p:cNvSpPr txBox="1"/>
+              <p:nvPr/>
+            </p:nvSpPr>
+            <p:spPr>
+              <a:xfrm rot="16200000">
+                <a:off x="5827109" y="1659135"/>
+                <a:ext cx="3272527" cy="490199"/>
+              </a:xfrm>
+              <a:prstGeom prst="rect">
+                <a:avLst/>
+              </a:prstGeom>
+              <a:noFill/>
+            </p:spPr>
+            <p:txBody>
+              <a:bodyPr wrap="square" rtlCol="0">
+                <a:spAutoFit/>
+              </a:bodyPr>
+              <a:lstStyle/>
+              <a:p>
+                <a:pPr/>
+                <a14:m>
+                  <m:oMathPara xmlns:m="http://schemas.openxmlformats.org/officeDocument/2006/math">
+                    <m:oMath>
+                      <m:sSub>
+                        <m:sSubPr>
+                          <m:ctrlPr>
+                            <a:rPr lang="fr-CH" sz="2400" b="0" i="1" smtClean="0">
+                              <a:latin typeface="Cambria Math" panose="02040503050406030204" pitchFamily="18" charset="0"/>
+                            </a:rPr>
+                          </m:ctrlPr>
+                        </m:sSubPr>
+                        <m:e>
+                          <m:r>
+                            <a:rPr lang="fr-CH" sz="2400" b="0" i="1" smtClean="0">
+                              <a:latin typeface="Cambria Math" panose="02040503050406030204" pitchFamily="18" charset="0"/>
+                            </a:rPr>
+                            <m:t>ℎ</m:t>
+                          </m:r>
+                        </m:e>
+                        <m:sub>
+                          <m:r>
+                            <a:rPr lang="fr-CH" sz="2400" b="0" i="1" smtClean="0">
+                              <a:latin typeface="Cambria Math" panose="02040503050406030204" pitchFamily="18" charset="0"/>
+                            </a:rPr>
+                            <m:t>𝑒𝑝𝑖</m:t>
+                          </m:r>
+                        </m:sub>
+                      </m:sSub>
+                      <m:r>
+                        <a:rPr lang="fr-CH" sz="2400" b="0" i="1" smtClean="0">
+                          <a:latin typeface="Cambria Math" panose="02040503050406030204" pitchFamily="18" charset="0"/>
+                        </a:rPr>
+                        <m:t>(</m:t>
+                      </m:r>
+                      <m:r>
+                        <a:rPr lang="fr-CH" sz="2400" b="0" i="1" smtClean="0">
+                          <a:latin typeface="Cambria Math" panose="02040503050406030204" pitchFamily="18" charset="0"/>
+                        </a:rPr>
+                        <m:t>𝑡</m:t>
+                      </m:r>
+                      <m:r>
+                        <a:rPr lang="fr-CH" sz="2400" b="0" i="1" smtClean="0">
+                          <a:latin typeface="Cambria Math" panose="02040503050406030204" pitchFamily="18" charset="0"/>
+                        </a:rPr>
+                        <m:t>)</m:t>
+                      </m:r>
+                    </m:oMath>
+                  </m:oMathPara>
+                </a14:m>
+                <a:endParaRPr lang="en-US" sz="2400" dirty="0"/>
+              </a:p>
+            </p:txBody>
+          </p:sp>
+        </mc:Choice>
+        <mc:Fallback xmlns="">
+          <p:sp>
+            <p:nvSpPr>
+              <p:cNvPr id="22" name="TextBox 21">
+                <a:extLst>
+                  <a:ext uri="{FF2B5EF4-FFF2-40B4-BE49-F238E27FC236}">
+                    <a16:creationId xmlns:a16="http://schemas.microsoft.com/office/drawing/2014/main" id="{4CF577EA-AB38-374D-2A3A-0CC9CCE90789}"/>
+                  </a:ext>
+                </a:extLst>
+              </p:cNvPr>
+              <p:cNvSpPr txBox="1">
+                <a:spLocks noRot="1" noChangeAspect="1" noMove="1" noResize="1" noEditPoints="1" noAdjustHandles="1" noChangeArrowheads="1" noChangeShapeType="1" noTextEdit="1"/>
+              </p:cNvSpPr>
+              <p:nvPr/>
+            </p:nvSpPr>
+            <p:spPr>
+              <a:xfrm rot="16200000">
+                <a:off x="5827109" y="1659135"/>
+                <a:ext cx="3272527" cy="490199"/>
+              </a:xfrm>
+              <a:prstGeom prst="rect">
+                <a:avLst/>
+              </a:prstGeom>
+              <a:blipFill>
+                <a:blip r:embed="rId7"/>
+                <a:stretch>
+                  <a:fillRect r="-11111"/>
+                </a:stretch>
+              </a:blipFill>
+            </p:spPr>
+            <p:txBody>
+              <a:bodyPr/>
+              <a:lstStyle/>
+              <a:p>
+                <a:r>
+                  <a:rPr lang="en-US">
+                    <a:noFill/>
+                  </a:rPr>
+                  <a:t> </a:t>
+                </a:r>
+              </a:p>
+            </p:txBody>
+          </p:sp>
+        </mc:Fallback>
+      </mc:AlternateContent>
+      <p:sp>
+        <p:nvSpPr>
+          <p:cNvPr id="26" name="Arrow: Left 25">
+            <a:extLst>
+              <a:ext uri="{FF2B5EF4-FFF2-40B4-BE49-F238E27FC236}">
+                <a16:creationId xmlns:a16="http://schemas.microsoft.com/office/drawing/2014/main" id="{33E69808-3E0E-AC64-A8AE-F8F59AD439B8}"/>
+              </a:ext>
+            </a:extLst>
+          </p:cNvPr>
+          <p:cNvSpPr/>
+          <p:nvPr/>
+        </p:nvSpPr>
+        <p:spPr>
+          <a:xfrm>
+            <a:off x="8015271" y="1353497"/>
+            <a:ext cx="1341844" cy="581822"/>
+          </a:xfrm>
+          <a:prstGeom prst="leftArrow">
+            <a:avLst/>
+          </a:prstGeom>
+        </p:spPr>
+        <p:style>
+          <a:lnRef idx="2">
+            <a:schemeClr val="dk1">
+              <a:shade val="15000"/>
+            </a:schemeClr>
+          </a:lnRef>
+          <a:fillRef idx="1">
+            <a:schemeClr val="dk1"/>
+          </a:fillRef>
+          <a:effectRef idx="0">
+            <a:schemeClr val="dk1"/>
+          </a:effectRef>
+          <a:fontRef idx="minor">
+            <a:schemeClr val="lt1"/>
+          </a:fontRef>
+        </p:style>
+        <p:txBody>
+          <a:bodyPr rtlCol="0" anchor="ctr"/>
+          <a:lstStyle/>
+          <a:p>
+            <a:pPr algn="ctr"/>
+            <a:endParaRPr lang="en-US" sz="2400"/>
+          </a:p>
+        </p:txBody>
+      </p:sp>
+      <mc:AlternateContent xmlns:mc="http://schemas.openxmlformats.org/markup-compatibility/2006" xmlns:a14="http://schemas.microsoft.com/office/drawing/2010/main">
+        <mc:Choice Requires="a14">
+          <p:sp>
+            <p:nvSpPr>
+              <p:cNvPr id="28" name="TextBox 27">
+                <a:extLst>
+                  <a:ext uri="{FF2B5EF4-FFF2-40B4-BE49-F238E27FC236}">
+                    <a16:creationId xmlns:a16="http://schemas.microsoft.com/office/drawing/2014/main" id="{15FB751E-25C4-1762-F822-721B1D44BB95}"/>
+                  </a:ext>
+                </a:extLst>
+              </p:cNvPr>
+              <p:cNvSpPr txBox="1"/>
+              <p:nvPr/>
+            </p:nvSpPr>
+            <p:spPr>
+              <a:xfrm>
+                <a:off x="8321951" y="4798010"/>
+                <a:ext cx="4307799" cy="915764"/>
+              </a:xfrm>
+              <a:prstGeom prst="rect">
+                <a:avLst/>
+              </a:prstGeom>
+              <a:noFill/>
+            </p:spPr>
+            <p:txBody>
+              <a:bodyPr wrap="square" rtlCol="0">
+                <a:spAutoFit/>
+              </a:bodyPr>
+              <a:lstStyle/>
+              <a:p>
+                <a:pPr/>
+                <a14:m>
+                  <m:oMathPara xmlns:m="http://schemas.openxmlformats.org/officeDocument/2006/math">
+                    <m:oMath>
+                      <m:sSub>
+                        <m:sSubPr>
+                          <m:ctrlPr>
+                            <a:rPr lang="fr-CH" sz="2400" b="0" i="1" smtClean="0">
+                              <a:latin typeface="Cambria Math" panose="02040503050406030204" pitchFamily="18" charset="0"/>
+                            </a:rPr>
+                          </m:ctrlPr>
+                        </m:sSubPr>
+                        <m:e>
+                          <m:r>
+                            <a:rPr lang="fr-CH" sz="2400" b="0" i="1" smtClean="0">
+                              <a:latin typeface="Cambria Math" panose="02040503050406030204" pitchFamily="18" charset="0"/>
+                            </a:rPr>
+                            <m:t>𝑄</m:t>
+                          </m:r>
+                        </m:e>
+                        <m:sub>
+                          <m:r>
+                            <a:rPr lang="fr-CH" sz="2400" b="0" i="1" smtClean="0">
+                              <a:latin typeface="Cambria Math" panose="02040503050406030204" pitchFamily="18" charset="0"/>
+                            </a:rPr>
+                            <m:t>ℎ𝑦𝑝𝑜</m:t>
+                          </m:r>
+                        </m:sub>
+                      </m:sSub>
+                      <m:d>
+                        <m:dPr>
+                          <m:ctrlPr>
+                            <a:rPr lang="fr-CH" sz="2400" b="0" i="1" smtClean="0">
+                              <a:latin typeface="Cambria Math" panose="02040503050406030204" pitchFamily="18" charset="0"/>
+                            </a:rPr>
+                          </m:ctrlPr>
+                        </m:dPr>
+                        <m:e>
+                          <m:r>
+                            <a:rPr lang="fr-CH" sz="2400" b="0" i="1" smtClean="0">
+                              <a:latin typeface="Cambria Math" panose="02040503050406030204" pitchFamily="18" charset="0"/>
+                            </a:rPr>
+                            <m:t>𝑡</m:t>
+                          </m:r>
+                        </m:e>
+                      </m:d>
+                      <m:r>
+                        <a:rPr lang="fr-CH" sz="2400" b="0" i="1" smtClean="0">
+                          <a:latin typeface="Cambria Math" panose="02040503050406030204" pitchFamily="18" charset="0"/>
+                        </a:rPr>
+                        <m:t>=</m:t>
+                      </m:r>
+                      <m:d>
+                        <m:dPr>
+                          <m:ctrlPr>
+                            <a:rPr lang="fr-CH" sz="2400" b="0" i="1" smtClean="0">
+                              <a:latin typeface="Cambria Math" panose="02040503050406030204" pitchFamily="18" charset="0"/>
+                            </a:rPr>
+                          </m:ctrlPr>
+                        </m:dPr>
+                        <m:e>
+                          <m:r>
+                            <a:rPr lang="fr-CH" sz="2400" b="0" i="1" smtClean="0">
+                              <a:latin typeface="Cambria Math" panose="02040503050406030204" pitchFamily="18" charset="0"/>
+                            </a:rPr>
+                            <m:t>1−</m:t>
+                          </m:r>
+                          <m:r>
+                            <a:rPr lang="fr-CH" sz="2400" b="0" i="1" smtClean="0">
+                              <a:latin typeface="Cambria Math" panose="02040503050406030204" pitchFamily="18" charset="0"/>
+                            </a:rPr>
+                            <m:t>𝛼</m:t>
+                          </m:r>
+                          <m:d>
+                            <m:dPr>
+                              <m:ctrlPr>
+                                <a:rPr lang="fr-CH" sz="2400" b="0" i="1" smtClean="0">
+                                  <a:latin typeface="Cambria Math" panose="02040503050406030204" pitchFamily="18" charset="0"/>
+                                </a:rPr>
+                              </m:ctrlPr>
+                            </m:dPr>
+                            <m:e>
+                              <m:r>
+                                <a:rPr lang="fr-CH" sz="2400" b="0" i="1" smtClean="0">
+                                  <a:latin typeface="Cambria Math" panose="02040503050406030204" pitchFamily="18" charset="0"/>
+                                </a:rPr>
+                                <m:t>𝑡</m:t>
+                              </m:r>
+                            </m:e>
+                          </m:d>
+                        </m:e>
+                      </m:d>
+                      <m:sSub>
+                        <m:sSubPr>
+                          <m:ctrlPr>
+                            <a:rPr lang="fr-CH" sz="2400" b="0" i="1" smtClean="0">
+                              <a:latin typeface="Cambria Math" panose="02040503050406030204" pitchFamily="18" charset="0"/>
+                            </a:rPr>
+                          </m:ctrlPr>
+                        </m:sSubPr>
+                        <m:e>
+                          <m:r>
+                            <a:rPr lang="fr-CH" sz="2400" b="0" i="1" smtClean="0">
+                              <a:latin typeface="Cambria Math" panose="02040503050406030204" pitchFamily="18" charset="0"/>
+                            </a:rPr>
+                            <m:t>𝑄</m:t>
+                          </m:r>
+                        </m:e>
+                        <m:sub>
+                          <m:r>
+                            <a:rPr lang="fr-CH" sz="2400" b="0" i="1" smtClean="0">
+                              <a:latin typeface="Cambria Math" panose="02040503050406030204" pitchFamily="18" charset="0"/>
+                            </a:rPr>
+                            <m:t>𝑡𝑜𝑡</m:t>
+                          </m:r>
+                        </m:sub>
+                      </m:sSub>
+                    </m:oMath>
+                  </m:oMathPara>
+                </a14:m>
+                <a:endParaRPr lang="fr-CH" sz="2400" b="0" i="1" dirty="0">
+                  <a:latin typeface="Cambria Math" panose="02040503050406030204" pitchFamily="18" charset="0"/>
+                </a:endParaRPr>
+              </a:p>
+              <a:p>
+                <a:pPr/>
+                <a14:m>
+                  <m:oMathPara xmlns:m="http://schemas.openxmlformats.org/officeDocument/2006/math">
+                    <m:oMath>
+                      <m:r>
+                        <a:rPr lang="fr-CH" sz="2400" b="0" i="1" smtClean="0">
+                          <a:latin typeface="Cambria Math" panose="02040503050406030204" pitchFamily="18" charset="0"/>
+                        </a:rPr>
+                        <m:t> </m:t>
+                      </m:r>
+                      <m:sSub>
+                        <m:sSubPr>
+                          <m:ctrlPr>
+                            <a:rPr lang="fr-CH" sz="2400" b="0" i="1" smtClean="0">
+                              <a:latin typeface="Cambria Math" panose="02040503050406030204" pitchFamily="18" charset="0"/>
+                            </a:rPr>
+                          </m:ctrlPr>
+                        </m:sSubPr>
+                        <m:e>
+                          <m:r>
+                            <a:rPr lang="fr-CH" sz="2400" b="0" i="1" smtClean="0">
+                              <a:latin typeface="Cambria Math" panose="02040503050406030204" pitchFamily="18" charset="0"/>
+                            </a:rPr>
+                            <m:t>𝐶</m:t>
+                          </m:r>
+                        </m:e>
+                        <m:sub>
+                          <m:r>
+                            <a:rPr lang="fr-CH" sz="2400" b="0" i="1" smtClean="0">
+                              <a:latin typeface="Cambria Math" panose="02040503050406030204" pitchFamily="18" charset="0"/>
+                            </a:rPr>
+                            <m:t>𝑖𝑛</m:t>
+                          </m:r>
+                          <m:r>
+                            <a:rPr lang="fr-CH" sz="2400" b="0" i="1" smtClean="0">
+                              <a:latin typeface="Cambria Math" panose="02040503050406030204" pitchFamily="18" charset="0"/>
+                            </a:rPr>
+                            <m:t>,</m:t>
+                          </m:r>
+                          <m:r>
+                            <a:rPr lang="fr-CH" sz="2400" b="0" i="1" smtClean="0">
+                              <a:latin typeface="Cambria Math" panose="02040503050406030204" pitchFamily="18" charset="0"/>
+                            </a:rPr>
+                            <m:t>ℎ𝑦𝑝𝑜</m:t>
+                          </m:r>
+                        </m:sub>
+                      </m:sSub>
+                      <m:r>
+                        <a:rPr lang="fr-CH" sz="2400" b="0" i="0" smtClean="0">
+                          <a:latin typeface="Cambria Math" panose="02040503050406030204" pitchFamily="18" charset="0"/>
+                        </a:rPr>
+                        <m:t>=0</m:t>
+                      </m:r>
+                    </m:oMath>
+                  </m:oMathPara>
+                </a14:m>
+                <a:endParaRPr lang="en-US" sz="2400" dirty="0"/>
+              </a:p>
+            </p:txBody>
+          </p:sp>
+        </mc:Choice>
+        <mc:Fallback xmlns="">
+          <p:sp>
+            <p:nvSpPr>
+              <p:cNvPr id="28" name="TextBox 27">
+                <a:extLst>
+                  <a:ext uri="{FF2B5EF4-FFF2-40B4-BE49-F238E27FC236}">
+                    <a16:creationId xmlns:a16="http://schemas.microsoft.com/office/drawing/2014/main" id="{15FB751E-25C4-1762-F822-721B1D44BB95}"/>
+                  </a:ext>
+                </a:extLst>
+              </p:cNvPr>
+              <p:cNvSpPr txBox="1">
+                <a:spLocks noRot="1" noChangeAspect="1" noMove="1" noResize="1" noEditPoints="1" noAdjustHandles="1" noChangeArrowheads="1" noChangeShapeType="1" noTextEdit="1"/>
+              </p:cNvSpPr>
+              <p:nvPr/>
+            </p:nvSpPr>
+            <p:spPr>
+              <a:xfrm>
+                <a:off x="8321951" y="4798010"/>
+                <a:ext cx="4307799" cy="915764"/>
+              </a:xfrm>
+              <a:prstGeom prst="rect">
+                <a:avLst/>
+              </a:prstGeom>
+              <a:blipFill>
+                <a:blip r:embed="rId8"/>
+                <a:stretch>
+                  <a:fillRect b="-5333"/>
+                </a:stretch>
+              </a:blipFill>
+            </p:spPr>
+            <p:txBody>
+              <a:bodyPr/>
+              <a:lstStyle/>
+              <a:p>
+                <a:r>
+                  <a:rPr lang="en-US">
+                    <a:noFill/>
+                  </a:rPr>
+                  <a:t> </a:t>
+                </a:r>
+              </a:p>
+            </p:txBody>
+          </p:sp>
+        </mc:Fallback>
+      </mc:AlternateContent>
+      <p:sp>
+        <p:nvSpPr>
+          <p:cNvPr id="30" name="Arrow: Left 29">
+            <a:extLst>
+              <a:ext uri="{FF2B5EF4-FFF2-40B4-BE49-F238E27FC236}">
+                <a16:creationId xmlns:a16="http://schemas.microsoft.com/office/drawing/2014/main" id="{8C45ED13-6F7F-AF31-B868-01F24F67C44A}"/>
+              </a:ext>
+            </a:extLst>
+          </p:cNvPr>
+          <p:cNvSpPr/>
+          <p:nvPr/>
+        </p:nvSpPr>
+        <p:spPr>
+          <a:xfrm rot="5400000">
+            <a:off x="1088118" y="3463721"/>
+            <a:ext cx="1283287" cy="581822"/>
+          </a:xfrm>
+          <a:prstGeom prst="leftArrow">
+            <a:avLst/>
+          </a:prstGeom>
+          <a:solidFill>
+            <a:schemeClr val="accent2"/>
+          </a:solidFill>
+          <a:ln>
+            <a:solidFill>
+              <a:schemeClr val="tx1"/>
+            </a:solidFill>
+          </a:ln>
+        </p:spPr>
+        <p:style>
+          <a:lnRef idx="2">
+            <a:schemeClr val="dk1">
+              <a:shade val="15000"/>
+            </a:schemeClr>
+          </a:lnRef>
+          <a:fillRef idx="1">
+            <a:schemeClr val="dk1"/>
+          </a:fillRef>
+          <a:effectRef idx="0">
+            <a:schemeClr val="dk1"/>
+          </a:effectRef>
+          <a:fontRef idx="minor">
+            <a:schemeClr val="lt1"/>
+          </a:fontRef>
+        </p:style>
+        <p:txBody>
+          <a:bodyPr rtlCol="0" anchor="ctr"/>
+          <a:lstStyle/>
+          <a:p>
+            <a:pPr algn="ctr"/>
+            <a:endParaRPr lang="en-US" sz="2400"/>
+          </a:p>
+        </p:txBody>
+      </p:sp>
+      <mc:AlternateContent xmlns:mc="http://schemas.openxmlformats.org/markup-compatibility/2006">
+        <mc:Choice xmlns:a14="http://schemas.microsoft.com/office/drawing/2010/main" Requires="a14">
+          <p:sp>
+            <p:nvSpPr>
+              <p:cNvPr id="32" name="TextBox 31">
+                <a:extLst>
+                  <a:ext uri="{FF2B5EF4-FFF2-40B4-BE49-F238E27FC236}">
+                    <a16:creationId xmlns:a16="http://schemas.microsoft.com/office/drawing/2014/main" id="{18E192B0-33BE-6A75-DB22-69392121A4F8}"/>
+                  </a:ext>
+                </a:extLst>
+              </p:cNvPr>
+              <p:cNvSpPr txBox="1"/>
+              <p:nvPr/>
+            </p:nvSpPr>
+            <p:spPr>
+              <a:xfrm>
+                <a:off x="316546" y="4392811"/>
+                <a:ext cx="4307799" cy="491288"/>
+              </a:xfrm>
+              <a:prstGeom prst="rect">
+                <a:avLst/>
+              </a:prstGeom>
+              <a:noFill/>
+            </p:spPr>
+            <p:txBody>
+              <a:bodyPr wrap="square" rtlCol="0">
+                <a:spAutoFit/>
+              </a:bodyPr>
+              <a:lstStyle/>
+              <a:p>
+                <a:pPr/>
+                <a14:m>
+                  <m:oMathPara xmlns:m="http://schemas.openxmlformats.org/officeDocument/2006/math">
+                    <m:oMath>
+                      <m:sSub>
+                        <m:sSubPr>
+                          <m:ctrlPr>
+                            <a:rPr lang="fr-CH" sz="2400" b="0" i="1" smtClean="0">
+                              <a:solidFill>
+                                <a:schemeClr val="accent2"/>
+                              </a:solidFill>
+                              <a:latin typeface="Cambria Math" panose="02040503050406030204" pitchFamily="18" charset="0"/>
+                            </a:rPr>
+                          </m:ctrlPr>
+                        </m:sSubPr>
+                        <m:e>
+                          <m:sSub>
+                            <m:sSubPr>
+                              <m:ctrlPr>
+                                <a:rPr lang="fr-CH" sz="2400" b="0" i="1" smtClean="0">
+                                  <a:solidFill>
+                                    <a:schemeClr val="accent2"/>
+                                  </a:solidFill>
+                                  <a:latin typeface="Cambria Math" panose="02040503050406030204" pitchFamily="18" charset="0"/>
+                                </a:rPr>
+                              </m:ctrlPr>
+                            </m:sSubPr>
+                            <m:e>
+                              <m:r>
+                                <a:rPr lang="fr-CH" sz="2400" b="0" i="1" smtClean="0">
+                                  <a:solidFill>
+                                    <a:schemeClr val="accent2"/>
+                                  </a:solidFill>
+                                  <a:latin typeface="Cambria Math" panose="02040503050406030204" pitchFamily="18" charset="0"/>
+                                </a:rPr>
+                                <m:t>𝑀</m:t>
+                              </m:r>
+                            </m:e>
+                            <m:sub>
+                              <m:r>
+                                <a:rPr lang="fr-CH" sz="2400" b="0" i="1" smtClean="0">
+                                  <a:solidFill>
+                                    <a:schemeClr val="accent2"/>
+                                  </a:solidFill>
+                                  <a:latin typeface="Cambria Math" panose="02040503050406030204" pitchFamily="18" charset="0"/>
+                                </a:rPr>
+                                <m:t>𝑎𝑑𝑣</m:t>
+                              </m:r>
+                            </m:sub>
+                          </m:sSub>
+                          <m:d>
+                            <m:dPr>
+                              <m:ctrlPr>
+                                <a:rPr lang="fr-CH" sz="2400" b="0" i="1" smtClean="0">
+                                  <a:solidFill>
+                                    <a:schemeClr val="accent2"/>
+                                  </a:solidFill>
+                                  <a:latin typeface="Cambria Math" panose="02040503050406030204" pitchFamily="18" charset="0"/>
+                                </a:rPr>
+                              </m:ctrlPr>
+                            </m:dPr>
+                            <m:e>
+                              <m:r>
+                                <a:rPr lang="fr-CH" sz="2400" b="0" i="1" smtClean="0">
+                                  <a:solidFill>
+                                    <a:schemeClr val="accent2"/>
+                                  </a:solidFill>
+                                  <a:latin typeface="Cambria Math" panose="02040503050406030204" pitchFamily="18" charset="0"/>
+                                </a:rPr>
+                                <m:t>𝑡</m:t>
+                              </m:r>
+                            </m:e>
+                          </m:d>
+                          <m:r>
+                            <a:rPr lang="fr-CH" sz="2400" b="0" i="1" smtClean="0">
+                              <a:solidFill>
+                                <a:schemeClr val="accent2"/>
+                              </a:solidFill>
+                              <a:latin typeface="Cambria Math" panose="02040503050406030204" pitchFamily="18" charset="0"/>
+                            </a:rPr>
+                            <m:t>=</m:t>
+                          </m:r>
+                          <m:r>
+                            <a:rPr lang="fr-CH" sz="2400" b="0" i="1" smtClean="0">
+                              <a:solidFill>
+                                <a:schemeClr val="accent2"/>
+                              </a:solidFill>
+                              <a:latin typeface="Cambria Math" panose="02040503050406030204" pitchFamily="18" charset="0"/>
+                            </a:rPr>
+                            <m:t>𝑄</m:t>
+                          </m:r>
+                        </m:e>
+                        <m:sub>
+                          <m:r>
+                            <a:rPr lang="fr-CH" sz="2400" b="0" i="1" smtClean="0">
+                              <a:solidFill>
+                                <a:schemeClr val="accent2"/>
+                              </a:solidFill>
+                              <a:latin typeface="Cambria Math" panose="02040503050406030204" pitchFamily="18" charset="0"/>
+                            </a:rPr>
+                            <m:t>ℎ𝑦𝑝𝑜</m:t>
+                          </m:r>
+                        </m:sub>
+                      </m:sSub>
+                      <m:d>
+                        <m:dPr>
+                          <m:ctrlPr>
+                            <a:rPr lang="fr-CH" sz="2400" b="0" i="1" smtClean="0">
+                              <a:solidFill>
+                                <a:schemeClr val="accent2"/>
+                              </a:solidFill>
+                              <a:latin typeface="Cambria Math" panose="02040503050406030204" pitchFamily="18" charset="0"/>
+                            </a:rPr>
+                          </m:ctrlPr>
+                        </m:dPr>
+                        <m:e>
+                          <m:r>
+                            <a:rPr lang="fr-CH" sz="2400" b="0" i="1" smtClean="0">
+                              <a:solidFill>
+                                <a:schemeClr val="accent2"/>
+                              </a:solidFill>
+                              <a:latin typeface="Cambria Math" panose="02040503050406030204" pitchFamily="18" charset="0"/>
+                            </a:rPr>
+                            <m:t>𝑡</m:t>
+                          </m:r>
+                        </m:e>
+                      </m:d>
+                      <m:sSub>
+                        <m:sSubPr>
+                          <m:ctrlPr>
+                            <a:rPr lang="fr-CH" sz="2400" b="0" i="1" smtClean="0">
+                              <a:solidFill>
+                                <a:schemeClr val="accent2"/>
+                              </a:solidFill>
+                              <a:latin typeface="Cambria Math" panose="02040503050406030204" pitchFamily="18" charset="0"/>
+                            </a:rPr>
+                          </m:ctrlPr>
+                        </m:sSubPr>
+                        <m:e>
+                          <m:r>
+                            <a:rPr lang="fr-CH" sz="2400" b="0" i="1" smtClean="0">
+                              <a:solidFill>
+                                <a:schemeClr val="accent2"/>
+                              </a:solidFill>
+                              <a:latin typeface="Cambria Math" panose="02040503050406030204" pitchFamily="18" charset="0"/>
+                            </a:rPr>
+                            <m:t>𝐶</m:t>
+                          </m:r>
+                        </m:e>
+                        <m:sub>
+                          <m:r>
+                            <a:rPr lang="fr-CH" sz="2400" b="0" i="1" smtClean="0">
+                              <a:solidFill>
+                                <a:schemeClr val="accent2"/>
+                              </a:solidFill>
+                              <a:latin typeface="Cambria Math" panose="02040503050406030204" pitchFamily="18" charset="0"/>
+                            </a:rPr>
+                            <m:t>ℎ𝑦𝑝𝑜</m:t>
+                          </m:r>
+                        </m:sub>
+                      </m:sSub>
+                      <m:r>
+                        <a:rPr lang="fr-CH" sz="2400" b="0" i="1" smtClean="0">
+                          <a:solidFill>
+                            <a:schemeClr val="accent2"/>
+                          </a:solidFill>
+                          <a:latin typeface="Cambria Math" panose="02040503050406030204" pitchFamily="18" charset="0"/>
+                        </a:rPr>
+                        <m:t>(</m:t>
+                      </m:r>
+                      <m:r>
+                        <a:rPr lang="fr-CH" sz="2400" b="0" i="1" smtClean="0">
+                          <a:solidFill>
+                            <a:schemeClr val="accent2"/>
+                          </a:solidFill>
+                          <a:latin typeface="Cambria Math" panose="02040503050406030204" pitchFamily="18" charset="0"/>
+                        </a:rPr>
+                        <m:t>𝑡</m:t>
+                      </m:r>
+                      <m:r>
+                        <a:rPr lang="fr-CH" sz="2400" b="0" i="1" smtClean="0">
+                          <a:solidFill>
+                            <a:schemeClr val="accent2"/>
+                          </a:solidFill>
+                          <a:latin typeface="Cambria Math" panose="02040503050406030204" pitchFamily="18" charset="0"/>
+                        </a:rPr>
+                        <m:t>)</m:t>
+                      </m:r>
+                    </m:oMath>
+                  </m:oMathPara>
+                </a14:m>
+                <a:endParaRPr lang="en-US" sz="2400" dirty="0">
+                  <a:solidFill>
+                    <a:schemeClr val="accent2"/>
+                  </a:solidFill>
+                </a:endParaRPr>
+              </a:p>
+            </p:txBody>
+          </p:sp>
+        </mc:Choice>
+        <mc:Fallback>
+          <p:sp>
+            <p:nvSpPr>
+              <p:cNvPr id="32" name="TextBox 31">
+                <a:extLst>
+                  <a:ext uri="{FF2B5EF4-FFF2-40B4-BE49-F238E27FC236}">
+                    <a16:creationId xmlns:a16="http://schemas.microsoft.com/office/drawing/2014/main" id="{18E192B0-33BE-6A75-DB22-69392121A4F8}"/>
+                  </a:ext>
+                </a:extLst>
+              </p:cNvPr>
+              <p:cNvSpPr txBox="1">
+                <a:spLocks noRot="1" noChangeAspect="1" noMove="1" noResize="1" noEditPoints="1" noAdjustHandles="1" noChangeArrowheads="1" noChangeShapeType="1" noTextEdit="1"/>
+              </p:cNvSpPr>
+              <p:nvPr/>
+            </p:nvSpPr>
+            <p:spPr>
+              <a:xfrm>
+                <a:off x="316546" y="4392811"/>
+                <a:ext cx="4307799" cy="491288"/>
+              </a:xfrm>
+              <a:prstGeom prst="rect">
+                <a:avLst/>
+              </a:prstGeom>
+              <a:blipFill>
+                <a:blip r:embed="rId9"/>
+                <a:stretch>
+                  <a:fillRect b="-12500"/>
+                </a:stretch>
+              </a:blipFill>
+            </p:spPr>
+            <p:txBody>
+              <a:bodyPr/>
+              <a:lstStyle/>
+              <a:p>
+                <a:r>
+                  <a:rPr lang="en-US">
+                    <a:noFill/>
+                  </a:rPr>
+                  <a:t> </a:t>
+                </a:r>
+              </a:p>
+            </p:txBody>
+          </p:sp>
+        </mc:Fallback>
+      </mc:AlternateContent>
+      <mc:AlternateContent xmlns:mc="http://schemas.openxmlformats.org/markup-compatibility/2006" xmlns:a14="http://schemas.microsoft.com/office/drawing/2010/main">
+        <mc:Choice Requires="a14">
+          <p:sp>
+            <p:nvSpPr>
+              <p:cNvPr id="34" name="TextBox 33">
+                <a:extLst>
+                  <a:ext uri="{FF2B5EF4-FFF2-40B4-BE49-F238E27FC236}">
+                    <a16:creationId xmlns:a16="http://schemas.microsoft.com/office/drawing/2014/main" id="{77FDC1F1-37FB-50F0-377E-B173D856DD42}"/>
+                  </a:ext>
+                </a:extLst>
+              </p:cNvPr>
+              <p:cNvSpPr txBox="1"/>
+              <p:nvPr/>
+            </p:nvSpPr>
+            <p:spPr>
+              <a:xfrm>
+                <a:off x="548612" y="1273598"/>
+                <a:ext cx="6269175" cy="1757148"/>
+              </a:xfrm>
+              <a:prstGeom prst="rect">
+                <a:avLst/>
+              </a:prstGeom>
+              <a:noFill/>
+            </p:spPr>
+            <p:txBody>
+              <a:bodyPr wrap="square" rtlCol="0">
+                <a:spAutoFit/>
+              </a:bodyPr>
+              <a:lstStyle/>
+              <a:p>
+                <a:pPr/>
+                <a14:m>
+                  <m:oMathPara xmlns:m="http://schemas.openxmlformats.org/officeDocument/2006/math">
+                    <m:oMath>
+                      <m:sSub>
+                        <m:sSubPr>
+                          <m:ctrlPr>
+                            <a:rPr lang="fr-CH" sz="2400" i="1">
+                              <a:solidFill>
+                                <a:schemeClr val="accent4"/>
+                              </a:solidFill>
+                              <a:latin typeface="Cambria Math" panose="02040503050406030204" pitchFamily="18" charset="0"/>
+                            </a:rPr>
+                          </m:ctrlPr>
+                        </m:sSubPr>
+                        <m:e>
+                          <m:r>
+                            <a:rPr lang="fr-CH" sz="2400" i="1">
+                              <a:solidFill>
+                                <a:schemeClr val="accent4"/>
+                              </a:solidFill>
+                              <a:latin typeface="Cambria Math" panose="02040503050406030204" pitchFamily="18" charset="0"/>
+                            </a:rPr>
+                            <m:t>𝑀</m:t>
+                          </m:r>
+                        </m:e>
+                        <m:sub>
+                          <m:r>
+                            <a:rPr lang="fr-CH" sz="2400" i="1">
+                              <a:solidFill>
+                                <a:schemeClr val="accent4"/>
+                              </a:solidFill>
+                              <a:latin typeface="Cambria Math" panose="02040503050406030204" pitchFamily="18" charset="0"/>
+                            </a:rPr>
+                            <m:t>𝑚𝑖𝑥</m:t>
+                          </m:r>
+                          <m:r>
+                            <a:rPr lang="fr-CH" sz="2400" b="0" i="1" smtClean="0">
+                              <a:solidFill>
+                                <a:schemeClr val="accent4"/>
+                              </a:solidFill>
+                              <a:latin typeface="Cambria Math" panose="02040503050406030204" pitchFamily="18" charset="0"/>
+                            </a:rPr>
+                            <m:t>,</m:t>
+                          </m:r>
+                          <m:r>
+                            <a:rPr lang="fr-CH" sz="2400" b="0" i="1" smtClean="0">
+                              <a:solidFill>
+                                <a:schemeClr val="accent4"/>
+                              </a:solidFill>
+                              <a:latin typeface="Cambria Math" panose="02040503050406030204" pitchFamily="18" charset="0"/>
+                            </a:rPr>
+                            <m:t>𝑒𝑝𝑖</m:t>
+                          </m:r>
+                        </m:sub>
+                      </m:sSub>
+                      <m:d>
+                        <m:dPr>
+                          <m:ctrlPr>
+                            <a:rPr lang="fr-CH" sz="2400" i="1">
+                              <a:solidFill>
+                                <a:schemeClr val="accent4"/>
+                              </a:solidFill>
+                              <a:latin typeface="Cambria Math" panose="02040503050406030204" pitchFamily="18" charset="0"/>
+                            </a:rPr>
+                          </m:ctrlPr>
+                        </m:dPr>
+                        <m:e>
+                          <m:r>
+                            <a:rPr lang="fr-CH" sz="2400" i="1">
+                              <a:solidFill>
+                                <a:schemeClr val="accent4"/>
+                              </a:solidFill>
+                              <a:latin typeface="Cambria Math" panose="02040503050406030204" pitchFamily="18" charset="0"/>
+                            </a:rPr>
+                            <m:t>𝑡</m:t>
+                          </m:r>
+                        </m:e>
+                      </m:d>
+                      <m:r>
+                        <a:rPr lang="fr-CH" sz="2400" i="1">
+                          <a:solidFill>
+                            <a:schemeClr val="accent4"/>
+                          </a:solidFill>
+                          <a:latin typeface="Cambria Math" panose="02040503050406030204" pitchFamily="18" charset="0"/>
+                        </a:rPr>
+                        <m:t>=</m:t>
+                      </m:r>
+                      <m:d>
+                        <m:dPr>
+                          <m:begChr m:val="{"/>
+                          <m:endChr m:val=""/>
+                          <m:ctrlPr>
+                            <a:rPr lang="en-US" sz="2400" i="1" smtClean="0">
+                              <a:solidFill>
+                                <a:schemeClr val="accent4"/>
+                              </a:solidFill>
+                              <a:latin typeface="Cambria Math" panose="02040503050406030204" pitchFamily="18" charset="0"/>
+                            </a:rPr>
+                          </m:ctrlPr>
+                        </m:dPr>
+                        <m:e>
+                          <m:eqArr>
+                            <m:eqArrPr>
+                              <m:ctrlPr>
+                                <a:rPr lang="en-US" sz="2400" i="1" smtClean="0">
+                                  <a:solidFill>
+                                    <a:schemeClr val="accent4"/>
+                                  </a:solidFill>
+                                  <a:latin typeface="Cambria Math" panose="02040503050406030204" pitchFamily="18" charset="0"/>
+                                </a:rPr>
+                              </m:ctrlPr>
+                            </m:eqArrPr>
+                            <m:e>
+                              <m:f>
+                                <m:fPr>
+                                  <m:ctrlPr>
+                                    <a:rPr lang="fr-CH" sz="2400" b="0" i="1" smtClean="0">
+                                      <a:solidFill>
+                                        <a:schemeClr val="accent4"/>
+                                      </a:solidFill>
+                                      <a:latin typeface="Cambria Math" panose="02040503050406030204" pitchFamily="18" charset="0"/>
+                                    </a:rPr>
+                                  </m:ctrlPr>
+                                </m:fPr>
+                                <m:num>
+                                  <m:r>
+                                    <a:rPr lang="fr-CH" sz="2400" b="0" i="1" smtClean="0">
+                                      <a:solidFill>
+                                        <a:schemeClr val="accent4"/>
+                                      </a:solidFill>
+                                      <a:latin typeface="Cambria Math" panose="02040503050406030204" pitchFamily="18" charset="0"/>
+                                    </a:rPr>
+                                    <m:t>𝑑</m:t>
+                                  </m:r>
+                                  <m:sSub>
+                                    <m:sSubPr>
+                                      <m:ctrlPr>
+                                        <a:rPr lang="fr-CH" sz="2400" b="0" i="1" smtClean="0">
+                                          <a:solidFill>
+                                            <a:schemeClr val="accent4"/>
+                                          </a:solidFill>
+                                          <a:latin typeface="Cambria Math" panose="02040503050406030204" pitchFamily="18" charset="0"/>
+                                        </a:rPr>
+                                      </m:ctrlPr>
+                                    </m:sSubPr>
+                                    <m:e>
+                                      <m:r>
+                                        <a:rPr lang="fr-CH" sz="2400" b="0" i="1" smtClean="0">
+                                          <a:solidFill>
+                                            <a:schemeClr val="accent4"/>
+                                          </a:solidFill>
+                                          <a:latin typeface="Cambria Math" panose="02040503050406030204" pitchFamily="18" charset="0"/>
+                                        </a:rPr>
+                                        <m:t>𝑉</m:t>
+                                      </m:r>
+                                    </m:e>
+                                    <m:sub>
+                                      <m:r>
+                                        <a:rPr lang="fr-CH" sz="2400" b="0" i="1" smtClean="0">
+                                          <a:solidFill>
+                                            <a:schemeClr val="accent4"/>
+                                          </a:solidFill>
+                                          <a:latin typeface="Cambria Math" panose="02040503050406030204" pitchFamily="18" charset="0"/>
+                                        </a:rPr>
+                                        <m:t>𝑒𝑝𝑖</m:t>
+                                      </m:r>
+                                    </m:sub>
+                                  </m:sSub>
+                                </m:num>
+                                <m:den>
+                                  <m:r>
+                                    <a:rPr lang="fr-CH" sz="2400" b="0" i="1" smtClean="0">
+                                      <a:solidFill>
+                                        <a:schemeClr val="accent4"/>
+                                      </a:solidFill>
+                                      <a:latin typeface="Cambria Math" panose="02040503050406030204" pitchFamily="18" charset="0"/>
+                                    </a:rPr>
+                                    <m:t>𝑑𝑡</m:t>
+                                  </m:r>
+                                </m:den>
+                              </m:f>
+                              <m:sSub>
+                                <m:sSubPr>
+                                  <m:ctrlPr>
+                                    <a:rPr lang="fr-CH" sz="2400" b="0" i="1" smtClean="0">
+                                      <a:solidFill>
+                                        <a:schemeClr val="accent4"/>
+                                      </a:solidFill>
+                                      <a:latin typeface="Cambria Math" panose="02040503050406030204" pitchFamily="18" charset="0"/>
+                                    </a:rPr>
+                                  </m:ctrlPr>
+                                </m:sSubPr>
+                                <m:e>
+                                  <m:r>
+                                    <a:rPr lang="fr-CH" sz="2400" b="0" i="1" smtClean="0">
+                                      <a:solidFill>
+                                        <a:schemeClr val="accent4"/>
+                                      </a:solidFill>
+                                      <a:latin typeface="Cambria Math" panose="02040503050406030204" pitchFamily="18" charset="0"/>
+                                    </a:rPr>
+                                    <m:t>𝐶</m:t>
+                                  </m:r>
+                                </m:e>
+                                <m:sub>
+                                  <m:r>
+                                    <a:rPr lang="fr-CH" sz="2400" b="0" i="1" smtClean="0">
+                                      <a:solidFill>
+                                        <a:schemeClr val="accent4"/>
+                                      </a:solidFill>
+                                      <a:latin typeface="Cambria Math" panose="02040503050406030204" pitchFamily="18" charset="0"/>
+                                    </a:rPr>
+                                    <m:t>ℎ𝑦𝑝𝑜</m:t>
+                                  </m:r>
+                                </m:sub>
+                              </m:sSub>
+                              <m:d>
+                                <m:dPr>
+                                  <m:ctrlPr>
+                                    <a:rPr lang="fr-CH" sz="2400" b="0" i="1" smtClean="0">
+                                      <a:solidFill>
+                                        <a:schemeClr val="accent4"/>
+                                      </a:solidFill>
+                                      <a:latin typeface="Cambria Math" panose="02040503050406030204" pitchFamily="18" charset="0"/>
+                                    </a:rPr>
+                                  </m:ctrlPr>
+                                </m:dPr>
+                                <m:e>
+                                  <m:r>
+                                    <a:rPr lang="fr-CH" sz="2400" b="0" i="1" smtClean="0">
+                                      <a:solidFill>
+                                        <a:schemeClr val="accent4"/>
+                                      </a:solidFill>
+                                      <a:latin typeface="Cambria Math" panose="02040503050406030204" pitchFamily="18" charset="0"/>
+                                    </a:rPr>
+                                    <m:t>𝑡</m:t>
+                                  </m:r>
+                                </m:e>
+                              </m:d>
+                              <m:r>
+                                <a:rPr lang="fr-CH" sz="2400" b="0" i="0" smtClean="0">
+                                  <a:solidFill>
+                                    <a:schemeClr val="accent4"/>
+                                  </a:solidFill>
+                                  <a:latin typeface="Cambria Math" panose="02040503050406030204" pitchFamily="18" charset="0"/>
+                                </a:rPr>
+                                <m:t>, </m:t>
+                              </m:r>
+                              <m:r>
+                                <m:rPr>
+                                  <m:sty m:val="p"/>
+                                </m:rPr>
+                                <a:rPr lang="fr-CH" sz="2400" b="0" i="0" smtClean="0">
+                                  <a:solidFill>
+                                    <a:schemeClr val="accent4"/>
+                                  </a:solidFill>
+                                  <a:latin typeface="Cambria Math" panose="02040503050406030204" pitchFamily="18" charset="0"/>
+                                </a:rPr>
+                                <m:t>si</m:t>
+                              </m:r>
+                              <m:r>
+                                <a:rPr lang="fr-CH" sz="2400" b="0" i="0" smtClean="0">
+                                  <a:solidFill>
+                                    <a:schemeClr val="accent4"/>
+                                  </a:solidFill>
+                                  <a:latin typeface="Cambria Math" panose="02040503050406030204" pitchFamily="18" charset="0"/>
+                                </a:rPr>
+                                <m:t> </m:t>
+                              </m:r>
+                              <m:f>
+                                <m:fPr>
+                                  <m:ctrlPr>
+                                    <a:rPr lang="fr-CH" sz="2400" b="0" i="1" smtClean="0">
+                                      <a:solidFill>
+                                        <a:schemeClr val="accent4"/>
+                                      </a:solidFill>
+                                      <a:latin typeface="Cambria Math" panose="02040503050406030204" pitchFamily="18" charset="0"/>
+                                    </a:rPr>
+                                  </m:ctrlPr>
+                                </m:fPr>
+                                <m:num>
+                                  <m:r>
+                                    <a:rPr lang="fr-CH" sz="2400" b="0" i="1" smtClean="0">
+                                      <a:solidFill>
+                                        <a:schemeClr val="accent4"/>
+                                      </a:solidFill>
+                                      <a:latin typeface="Cambria Math" panose="02040503050406030204" pitchFamily="18" charset="0"/>
+                                    </a:rPr>
+                                    <m:t>𝑑</m:t>
+                                  </m:r>
+                                  <m:sSub>
+                                    <m:sSubPr>
+                                      <m:ctrlPr>
+                                        <a:rPr lang="fr-CH" sz="2400" b="0" i="1" smtClean="0">
+                                          <a:solidFill>
+                                            <a:schemeClr val="accent4"/>
+                                          </a:solidFill>
+                                          <a:latin typeface="Cambria Math" panose="02040503050406030204" pitchFamily="18" charset="0"/>
+                                        </a:rPr>
+                                      </m:ctrlPr>
+                                    </m:sSubPr>
+                                    <m:e>
+                                      <m:r>
+                                        <a:rPr lang="fr-CH" sz="2400" b="0" i="1" smtClean="0">
+                                          <a:solidFill>
+                                            <a:schemeClr val="accent4"/>
+                                          </a:solidFill>
+                                          <a:latin typeface="Cambria Math" panose="02040503050406030204" pitchFamily="18" charset="0"/>
+                                        </a:rPr>
+                                        <m:t>ℎ</m:t>
+                                      </m:r>
+                                    </m:e>
+                                    <m:sub>
+                                      <m:r>
+                                        <a:rPr lang="fr-CH" sz="2400" b="0" i="1" smtClean="0">
+                                          <a:solidFill>
+                                            <a:schemeClr val="accent4"/>
+                                          </a:solidFill>
+                                          <a:latin typeface="Cambria Math" panose="02040503050406030204" pitchFamily="18" charset="0"/>
+                                        </a:rPr>
+                                        <m:t>𝑒𝑝𝑖</m:t>
+                                      </m:r>
+                                    </m:sub>
+                                  </m:sSub>
+                                </m:num>
+                                <m:den>
+                                  <m:r>
+                                    <a:rPr lang="fr-CH" sz="2400" b="0" i="1" smtClean="0">
+                                      <a:solidFill>
+                                        <a:schemeClr val="accent4"/>
+                                      </a:solidFill>
+                                      <a:latin typeface="Cambria Math" panose="02040503050406030204" pitchFamily="18" charset="0"/>
+                                    </a:rPr>
+                                    <m:t>𝑑𝑡</m:t>
+                                  </m:r>
+                                </m:den>
+                              </m:f>
+                              <m:r>
+                                <a:rPr lang="fr-CH" sz="2400" b="0" i="1" smtClean="0">
+                                  <a:solidFill>
+                                    <a:schemeClr val="accent4"/>
+                                  </a:solidFill>
+                                  <a:latin typeface="Cambria Math" panose="02040503050406030204" pitchFamily="18" charset="0"/>
+                                </a:rPr>
+                                <m:t>&gt;0</m:t>
+                              </m:r>
+                            </m:e>
+                            <m:e>
+                              <m:f>
+                                <m:fPr>
+                                  <m:ctrlPr>
+                                    <a:rPr lang="fr-CH" sz="2400" i="1">
+                                      <a:solidFill>
+                                        <a:schemeClr val="accent4"/>
+                                      </a:solidFill>
+                                      <a:latin typeface="Cambria Math" panose="02040503050406030204" pitchFamily="18" charset="0"/>
+                                    </a:rPr>
+                                  </m:ctrlPr>
+                                </m:fPr>
+                                <m:num>
+                                  <m:r>
+                                    <a:rPr lang="fr-CH" sz="2400" i="1">
+                                      <a:solidFill>
+                                        <a:schemeClr val="accent4"/>
+                                      </a:solidFill>
+                                      <a:latin typeface="Cambria Math" panose="02040503050406030204" pitchFamily="18" charset="0"/>
+                                    </a:rPr>
+                                    <m:t>𝑑</m:t>
+                                  </m:r>
+                                  <m:sSub>
+                                    <m:sSubPr>
+                                      <m:ctrlPr>
+                                        <a:rPr lang="fr-CH" sz="2400" i="1">
+                                          <a:solidFill>
+                                            <a:schemeClr val="accent4"/>
+                                          </a:solidFill>
+                                          <a:latin typeface="Cambria Math" panose="02040503050406030204" pitchFamily="18" charset="0"/>
+                                        </a:rPr>
+                                      </m:ctrlPr>
+                                    </m:sSubPr>
+                                    <m:e>
+                                      <m:r>
+                                        <a:rPr lang="fr-CH" sz="2400" i="1">
+                                          <a:solidFill>
+                                            <a:schemeClr val="accent4"/>
+                                          </a:solidFill>
+                                          <a:latin typeface="Cambria Math" panose="02040503050406030204" pitchFamily="18" charset="0"/>
+                                        </a:rPr>
+                                        <m:t>𝑉</m:t>
+                                      </m:r>
+                                    </m:e>
+                                    <m:sub>
+                                      <m:r>
+                                        <a:rPr lang="fr-CH" sz="2400" i="1">
+                                          <a:solidFill>
+                                            <a:schemeClr val="accent4"/>
+                                          </a:solidFill>
+                                          <a:latin typeface="Cambria Math" panose="02040503050406030204" pitchFamily="18" charset="0"/>
+                                        </a:rPr>
+                                        <m:t>𝑒𝑝𝑖</m:t>
+                                      </m:r>
+                                    </m:sub>
+                                  </m:sSub>
+                                </m:num>
+                                <m:den>
+                                  <m:r>
+                                    <a:rPr lang="fr-CH" sz="2400" i="1">
+                                      <a:solidFill>
+                                        <a:schemeClr val="accent4"/>
+                                      </a:solidFill>
+                                      <a:latin typeface="Cambria Math" panose="02040503050406030204" pitchFamily="18" charset="0"/>
+                                    </a:rPr>
+                                    <m:t>𝑑𝑡</m:t>
+                                  </m:r>
+                                </m:den>
+                              </m:f>
+                              <m:sSub>
+                                <m:sSubPr>
+                                  <m:ctrlPr>
+                                    <a:rPr lang="fr-CH" sz="2400" i="1">
+                                      <a:solidFill>
+                                        <a:schemeClr val="accent4"/>
+                                      </a:solidFill>
+                                      <a:latin typeface="Cambria Math" panose="02040503050406030204" pitchFamily="18" charset="0"/>
+                                    </a:rPr>
+                                  </m:ctrlPr>
+                                </m:sSubPr>
+                                <m:e>
+                                  <m:r>
+                                    <a:rPr lang="fr-CH" sz="2400" i="1">
+                                      <a:solidFill>
+                                        <a:schemeClr val="accent4"/>
+                                      </a:solidFill>
+                                      <a:latin typeface="Cambria Math" panose="02040503050406030204" pitchFamily="18" charset="0"/>
+                                    </a:rPr>
+                                    <m:t>𝐶</m:t>
+                                  </m:r>
+                                </m:e>
+                                <m:sub>
+                                  <m:r>
+                                    <a:rPr lang="fr-CH" sz="2400" b="0" i="1" smtClean="0">
+                                      <a:solidFill>
+                                        <a:schemeClr val="accent4"/>
+                                      </a:solidFill>
+                                      <a:latin typeface="Cambria Math" panose="02040503050406030204" pitchFamily="18" charset="0"/>
+                                    </a:rPr>
+                                    <m:t>𝑒𝑝𝑖</m:t>
+                                  </m:r>
+                                </m:sub>
+                              </m:sSub>
+                              <m:d>
+                                <m:dPr>
+                                  <m:ctrlPr>
+                                    <a:rPr lang="fr-CH" sz="2400" i="1">
+                                      <a:solidFill>
+                                        <a:schemeClr val="accent4"/>
+                                      </a:solidFill>
+                                      <a:latin typeface="Cambria Math" panose="02040503050406030204" pitchFamily="18" charset="0"/>
+                                    </a:rPr>
+                                  </m:ctrlPr>
+                                </m:dPr>
+                                <m:e>
+                                  <m:r>
+                                    <a:rPr lang="fr-CH" sz="2400" i="1">
+                                      <a:solidFill>
+                                        <a:schemeClr val="accent4"/>
+                                      </a:solidFill>
+                                      <a:latin typeface="Cambria Math" panose="02040503050406030204" pitchFamily="18" charset="0"/>
+                                    </a:rPr>
+                                    <m:t>𝑡</m:t>
+                                  </m:r>
+                                </m:e>
+                              </m:d>
+                              <m:r>
+                                <a:rPr lang="fr-CH" sz="2400" b="0" i="1" smtClean="0">
+                                  <a:solidFill>
+                                    <a:schemeClr val="accent4"/>
+                                  </a:solidFill>
+                                  <a:latin typeface="Cambria Math" panose="02040503050406030204" pitchFamily="18" charset="0"/>
+                                </a:rPr>
+                                <m:t>,</m:t>
+                              </m:r>
+                              <m:r>
+                                <a:rPr lang="fr-CH" sz="2400" b="0" i="0" smtClean="0">
+                                  <a:solidFill>
+                                    <a:schemeClr val="accent4"/>
+                                  </a:solidFill>
+                                  <a:latin typeface="Cambria Math" panose="02040503050406030204" pitchFamily="18" charset="0"/>
+                                </a:rPr>
+                                <m:t> </m:t>
+                              </m:r>
+                              <m:r>
+                                <m:rPr>
+                                  <m:sty m:val="p"/>
+                                </m:rPr>
+                                <a:rPr lang="fr-CH" sz="2400" b="0" i="0" smtClean="0">
+                                  <a:solidFill>
+                                    <a:schemeClr val="accent4"/>
+                                  </a:solidFill>
+                                  <a:latin typeface="Cambria Math" panose="02040503050406030204" pitchFamily="18" charset="0"/>
+                                </a:rPr>
+                                <m:t>si</m:t>
+                              </m:r>
+                              <m:r>
+                                <a:rPr lang="fr-CH" sz="2400" b="0" i="0" smtClean="0">
+                                  <a:solidFill>
+                                    <a:schemeClr val="accent4"/>
+                                  </a:solidFill>
+                                  <a:latin typeface="Cambria Math" panose="02040503050406030204" pitchFamily="18" charset="0"/>
+                                </a:rPr>
+                                <m:t> </m:t>
+                              </m:r>
+                              <m:f>
+                                <m:fPr>
+                                  <m:ctrlPr>
+                                    <a:rPr lang="fr-CH" sz="2400" b="0" i="1" smtClean="0">
+                                      <a:solidFill>
+                                        <a:schemeClr val="accent4"/>
+                                      </a:solidFill>
+                                      <a:latin typeface="Cambria Math" panose="02040503050406030204" pitchFamily="18" charset="0"/>
+                                    </a:rPr>
+                                  </m:ctrlPr>
+                                </m:fPr>
+                                <m:num>
+                                  <m:r>
+                                    <a:rPr lang="fr-CH" sz="2400" b="0" i="1" smtClean="0">
+                                      <a:solidFill>
+                                        <a:schemeClr val="accent4"/>
+                                      </a:solidFill>
+                                      <a:latin typeface="Cambria Math" panose="02040503050406030204" pitchFamily="18" charset="0"/>
+                                    </a:rPr>
+                                    <m:t>𝑑</m:t>
+                                  </m:r>
+                                  <m:sSub>
+                                    <m:sSubPr>
+                                      <m:ctrlPr>
+                                        <a:rPr lang="fr-CH" sz="2400" b="0" i="1" smtClean="0">
+                                          <a:solidFill>
+                                            <a:schemeClr val="accent4"/>
+                                          </a:solidFill>
+                                          <a:latin typeface="Cambria Math" panose="02040503050406030204" pitchFamily="18" charset="0"/>
+                                        </a:rPr>
+                                      </m:ctrlPr>
+                                    </m:sSubPr>
+                                    <m:e>
+                                      <m:r>
+                                        <a:rPr lang="fr-CH" sz="2400" b="0" i="1" smtClean="0">
+                                          <a:solidFill>
+                                            <a:schemeClr val="accent4"/>
+                                          </a:solidFill>
+                                          <a:latin typeface="Cambria Math" panose="02040503050406030204" pitchFamily="18" charset="0"/>
+                                        </a:rPr>
+                                        <m:t>ℎ</m:t>
+                                      </m:r>
+                                    </m:e>
+                                    <m:sub>
+                                      <m:r>
+                                        <a:rPr lang="fr-CH" sz="2400" b="0" i="1" smtClean="0">
+                                          <a:solidFill>
+                                            <a:schemeClr val="accent4"/>
+                                          </a:solidFill>
+                                          <a:latin typeface="Cambria Math" panose="02040503050406030204" pitchFamily="18" charset="0"/>
+                                        </a:rPr>
+                                        <m:t>𝑒𝑝𝑖</m:t>
+                                      </m:r>
+                                    </m:sub>
+                                  </m:sSub>
+                                </m:num>
+                                <m:den>
+                                  <m:r>
+                                    <a:rPr lang="fr-CH" sz="2400" b="0" i="1" smtClean="0">
+                                      <a:solidFill>
+                                        <a:schemeClr val="accent4"/>
+                                      </a:solidFill>
+                                      <a:latin typeface="Cambria Math" panose="02040503050406030204" pitchFamily="18" charset="0"/>
+                                    </a:rPr>
+                                    <m:t>𝑑𝑡</m:t>
+                                  </m:r>
+                                </m:den>
+                              </m:f>
+                              <m:r>
+                                <a:rPr lang="fr-CH" sz="2400" b="0" i="1" smtClean="0">
+                                  <a:solidFill>
+                                    <a:schemeClr val="accent4"/>
+                                  </a:solidFill>
+                                  <a:latin typeface="Cambria Math" panose="02040503050406030204" pitchFamily="18" charset="0"/>
+                                </a:rPr>
+                                <m:t>&lt;0</m:t>
+                              </m:r>
+                            </m:e>
+                          </m:eqArr>
+                        </m:e>
+                      </m:d>
+                    </m:oMath>
+                  </m:oMathPara>
+                </a14:m>
+                <a:endParaRPr lang="en-US" sz="2400" dirty="0">
+                  <a:solidFill>
+                    <a:schemeClr val="accent4"/>
+                  </a:solidFill>
+                </a:endParaRPr>
+              </a:p>
+            </p:txBody>
+          </p:sp>
+        </mc:Choice>
+        <mc:Fallback xmlns="">
+          <p:sp>
+            <p:nvSpPr>
+              <p:cNvPr id="34" name="TextBox 33">
+                <a:extLst>
+                  <a:ext uri="{FF2B5EF4-FFF2-40B4-BE49-F238E27FC236}">
+                    <a16:creationId xmlns:a16="http://schemas.microsoft.com/office/drawing/2014/main" id="{77FDC1F1-37FB-50F0-377E-B173D856DD42}"/>
+                  </a:ext>
+                </a:extLst>
+              </p:cNvPr>
+              <p:cNvSpPr txBox="1">
+                <a:spLocks noRot="1" noChangeAspect="1" noMove="1" noResize="1" noEditPoints="1" noAdjustHandles="1" noChangeArrowheads="1" noChangeShapeType="1" noTextEdit="1"/>
+              </p:cNvSpPr>
+              <p:nvPr/>
+            </p:nvSpPr>
+            <p:spPr>
+              <a:xfrm>
+                <a:off x="548612" y="1273598"/>
+                <a:ext cx="6269175" cy="1757148"/>
+              </a:xfrm>
+              <a:prstGeom prst="rect">
+                <a:avLst/>
+              </a:prstGeom>
+              <a:blipFill>
+                <a:blip r:embed="rId10"/>
+                <a:stretch>
+                  <a:fillRect/>
+                </a:stretch>
+              </a:blipFill>
+            </p:spPr>
+            <p:txBody>
+              <a:bodyPr/>
+              <a:lstStyle/>
+              <a:p>
+                <a:r>
+                  <a:rPr lang="en-US">
+                    <a:noFill/>
+                  </a:rPr>
+                  <a:t> </a:t>
+                </a:r>
+              </a:p>
+            </p:txBody>
+          </p:sp>
+        </mc:Fallback>
+      </mc:AlternateContent>
+      <mc:AlternateContent xmlns:mc="http://schemas.openxmlformats.org/markup-compatibility/2006" xmlns:a14="http://schemas.microsoft.com/office/drawing/2010/main">
+        <mc:Choice Requires="a14">
+          <p:sp>
+            <p:nvSpPr>
+              <p:cNvPr id="36" name="TextBox 35">
+                <a:extLst>
+                  <a:ext uri="{FF2B5EF4-FFF2-40B4-BE49-F238E27FC236}">
+                    <a16:creationId xmlns:a16="http://schemas.microsoft.com/office/drawing/2014/main" id="{7F382096-3049-5894-0C59-1F2B7CE7816F}"/>
+                  </a:ext>
+                </a:extLst>
+              </p:cNvPr>
+              <p:cNvSpPr txBox="1"/>
+              <p:nvPr/>
+            </p:nvSpPr>
+            <p:spPr>
+              <a:xfrm>
+                <a:off x="3708162" y="4393035"/>
+                <a:ext cx="6269175" cy="490840"/>
+              </a:xfrm>
+              <a:prstGeom prst="rect">
+                <a:avLst/>
+              </a:prstGeom>
+              <a:noFill/>
+            </p:spPr>
+            <p:txBody>
+              <a:bodyPr wrap="square" rtlCol="0">
+                <a:spAutoFit/>
+              </a:bodyPr>
+              <a:lstStyle/>
+              <a:p>
+                <a:pPr/>
+                <a14:m>
+                  <m:oMathPara xmlns:m="http://schemas.openxmlformats.org/officeDocument/2006/math">
+                    <m:oMath>
+                      <m:sSub>
+                        <m:sSubPr>
+                          <m:ctrlPr>
+                            <a:rPr lang="fr-CH" sz="2400" i="1">
+                              <a:solidFill>
+                                <a:schemeClr val="accent4"/>
+                              </a:solidFill>
+                              <a:latin typeface="Cambria Math" panose="02040503050406030204" pitchFamily="18" charset="0"/>
+                            </a:rPr>
+                          </m:ctrlPr>
+                        </m:sSubPr>
+                        <m:e>
+                          <m:r>
+                            <a:rPr lang="fr-CH" sz="2400" i="1">
+                              <a:solidFill>
+                                <a:schemeClr val="accent4"/>
+                              </a:solidFill>
+                              <a:latin typeface="Cambria Math" panose="02040503050406030204" pitchFamily="18" charset="0"/>
+                            </a:rPr>
+                            <m:t>𝑀</m:t>
+                          </m:r>
+                        </m:e>
+                        <m:sub>
+                          <m:r>
+                            <a:rPr lang="fr-CH" sz="2400" i="1">
+                              <a:solidFill>
+                                <a:schemeClr val="accent4"/>
+                              </a:solidFill>
+                              <a:latin typeface="Cambria Math" panose="02040503050406030204" pitchFamily="18" charset="0"/>
+                            </a:rPr>
+                            <m:t>𝑚𝑖𝑥</m:t>
+                          </m:r>
+                          <m:r>
+                            <a:rPr lang="fr-CH" sz="2400" b="0" i="1" smtClean="0">
+                              <a:solidFill>
+                                <a:schemeClr val="accent4"/>
+                              </a:solidFill>
+                              <a:latin typeface="Cambria Math" panose="02040503050406030204" pitchFamily="18" charset="0"/>
+                            </a:rPr>
+                            <m:t>,</m:t>
+                          </m:r>
+                          <m:r>
+                            <a:rPr lang="fr-CH" sz="2400" b="0" i="1" smtClean="0">
+                              <a:solidFill>
+                                <a:schemeClr val="accent4"/>
+                              </a:solidFill>
+                              <a:latin typeface="Cambria Math" panose="02040503050406030204" pitchFamily="18" charset="0"/>
+                            </a:rPr>
+                            <m:t>ℎ𝑦𝑝𝑜</m:t>
+                          </m:r>
+                        </m:sub>
+                      </m:sSub>
+                      <m:d>
+                        <m:dPr>
+                          <m:ctrlPr>
+                            <a:rPr lang="fr-CH" sz="2400" i="1">
+                              <a:solidFill>
+                                <a:schemeClr val="accent4"/>
+                              </a:solidFill>
+                              <a:latin typeface="Cambria Math" panose="02040503050406030204" pitchFamily="18" charset="0"/>
+                            </a:rPr>
+                          </m:ctrlPr>
+                        </m:dPr>
+                        <m:e>
+                          <m:r>
+                            <a:rPr lang="fr-CH" sz="2400" i="1">
+                              <a:solidFill>
+                                <a:schemeClr val="accent4"/>
+                              </a:solidFill>
+                              <a:latin typeface="Cambria Math" panose="02040503050406030204" pitchFamily="18" charset="0"/>
+                            </a:rPr>
+                            <m:t>𝑡</m:t>
+                          </m:r>
+                        </m:e>
+                      </m:d>
+                      <m:r>
+                        <a:rPr lang="fr-CH" sz="2400" i="1">
+                          <a:solidFill>
+                            <a:schemeClr val="accent4"/>
+                          </a:solidFill>
+                          <a:latin typeface="Cambria Math" panose="02040503050406030204" pitchFamily="18" charset="0"/>
+                        </a:rPr>
+                        <m:t>=</m:t>
+                      </m:r>
+                      <m:r>
+                        <a:rPr lang="fr-CH" sz="2400" b="0" i="1" smtClean="0">
+                          <a:solidFill>
+                            <a:schemeClr val="accent4"/>
+                          </a:solidFill>
+                          <a:latin typeface="Cambria Math" panose="02040503050406030204" pitchFamily="18" charset="0"/>
+                        </a:rPr>
+                        <m:t>−</m:t>
+                      </m:r>
+                      <m:sSub>
+                        <m:sSubPr>
+                          <m:ctrlPr>
+                            <a:rPr lang="fr-CH" sz="2400" b="0" i="1" smtClean="0">
+                              <a:solidFill>
+                                <a:schemeClr val="accent4"/>
+                              </a:solidFill>
+                              <a:latin typeface="Cambria Math" panose="02040503050406030204" pitchFamily="18" charset="0"/>
+                            </a:rPr>
+                          </m:ctrlPr>
+                        </m:sSubPr>
+                        <m:e>
+                          <m:r>
+                            <a:rPr lang="fr-CH" sz="2400" b="0" i="1" smtClean="0">
+                              <a:solidFill>
+                                <a:schemeClr val="accent4"/>
+                              </a:solidFill>
+                              <a:latin typeface="Cambria Math" panose="02040503050406030204" pitchFamily="18" charset="0"/>
+                            </a:rPr>
+                            <m:t>𝑀</m:t>
+                          </m:r>
+                        </m:e>
+                        <m:sub>
+                          <m:r>
+                            <a:rPr lang="fr-CH" sz="2400" b="0" i="1" smtClean="0">
+                              <a:solidFill>
+                                <a:schemeClr val="accent4"/>
+                              </a:solidFill>
+                              <a:latin typeface="Cambria Math" panose="02040503050406030204" pitchFamily="18" charset="0"/>
+                            </a:rPr>
+                            <m:t>𝑚𝑖𝑥</m:t>
+                          </m:r>
+                          <m:r>
+                            <a:rPr lang="fr-CH" sz="2400" b="0" i="1" smtClean="0">
+                              <a:solidFill>
+                                <a:schemeClr val="accent4"/>
+                              </a:solidFill>
+                              <a:latin typeface="Cambria Math" panose="02040503050406030204" pitchFamily="18" charset="0"/>
+                            </a:rPr>
+                            <m:t>,</m:t>
+                          </m:r>
+                          <m:r>
+                            <a:rPr lang="fr-CH" sz="2400" b="0" i="1" smtClean="0">
+                              <a:solidFill>
+                                <a:schemeClr val="accent4"/>
+                              </a:solidFill>
+                              <a:latin typeface="Cambria Math" panose="02040503050406030204" pitchFamily="18" charset="0"/>
+                            </a:rPr>
+                            <m:t>𝑒𝑝𝑖</m:t>
+                          </m:r>
+                        </m:sub>
+                      </m:sSub>
+                      <m:r>
+                        <a:rPr lang="fr-CH" sz="2400" b="0" i="1" smtClean="0">
+                          <a:solidFill>
+                            <a:schemeClr val="accent4"/>
+                          </a:solidFill>
+                          <a:latin typeface="Cambria Math" panose="02040503050406030204" pitchFamily="18" charset="0"/>
+                        </a:rPr>
+                        <m:t>(</m:t>
+                      </m:r>
+                      <m:r>
+                        <a:rPr lang="fr-CH" sz="2400" b="0" i="1" smtClean="0">
+                          <a:solidFill>
+                            <a:schemeClr val="accent4"/>
+                          </a:solidFill>
+                          <a:latin typeface="Cambria Math" panose="02040503050406030204" pitchFamily="18" charset="0"/>
+                        </a:rPr>
+                        <m:t>𝑡</m:t>
+                      </m:r>
+                      <m:r>
+                        <a:rPr lang="fr-CH" sz="2400" b="0" i="1" smtClean="0">
+                          <a:solidFill>
+                            <a:schemeClr val="accent4"/>
+                          </a:solidFill>
+                          <a:latin typeface="Cambria Math" panose="02040503050406030204" pitchFamily="18" charset="0"/>
+                        </a:rPr>
+                        <m:t>)</m:t>
+                      </m:r>
+                    </m:oMath>
+                  </m:oMathPara>
+                </a14:m>
+                <a:endParaRPr lang="en-US" sz="2400" dirty="0">
+                  <a:solidFill>
+                    <a:schemeClr val="accent4"/>
+                  </a:solidFill>
+                </a:endParaRPr>
+              </a:p>
+            </p:txBody>
+          </p:sp>
+        </mc:Choice>
+        <mc:Fallback xmlns="">
+          <p:sp>
+            <p:nvSpPr>
+              <p:cNvPr id="36" name="TextBox 35">
+                <a:extLst>
+                  <a:ext uri="{FF2B5EF4-FFF2-40B4-BE49-F238E27FC236}">
+                    <a16:creationId xmlns:a16="http://schemas.microsoft.com/office/drawing/2014/main" id="{7F382096-3049-5894-0C59-1F2B7CE7816F}"/>
+                  </a:ext>
+                </a:extLst>
+              </p:cNvPr>
+              <p:cNvSpPr txBox="1">
+                <a:spLocks noRot="1" noChangeAspect="1" noMove="1" noResize="1" noEditPoints="1" noAdjustHandles="1" noChangeArrowheads="1" noChangeShapeType="1" noTextEdit="1"/>
+              </p:cNvSpPr>
+              <p:nvPr/>
+            </p:nvSpPr>
+            <p:spPr>
+              <a:xfrm>
+                <a:off x="3708162" y="4393035"/>
+                <a:ext cx="6269175" cy="490840"/>
+              </a:xfrm>
+              <a:prstGeom prst="rect">
+                <a:avLst/>
+              </a:prstGeom>
+              <a:blipFill>
+                <a:blip r:embed="rId11"/>
+                <a:stretch>
+                  <a:fillRect b="-12500"/>
+                </a:stretch>
+              </a:blipFill>
+            </p:spPr>
+            <p:txBody>
+              <a:bodyPr/>
+              <a:lstStyle/>
+              <a:p>
+                <a:r>
+                  <a:rPr lang="en-US">
+                    <a:noFill/>
+                  </a:rPr>
+                  <a:t> </a:t>
+                </a:r>
+              </a:p>
+            </p:txBody>
+          </p:sp>
+        </mc:Fallback>
+      </mc:AlternateContent>
+      <p:sp>
+        <p:nvSpPr>
+          <p:cNvPr id="38" name="Arrow: Left 37">
+            <a:extLst>
+              <a:ext uri="{FF2B5EF4-FFF2-40B4-BE49-F238E27FC236}">
+                <a16:creationId xmlns:a16="http://schemas.microsoft.com/office/drawing/2014/main" id="{A7AF334D-7499-C7BA-D844-34A60B446F3C}"/>
+              </a:ext>
+            </a:extLst>
+          </p:cNvPr>
+          <p:cNvSpPr/>
+          <p:nvPr/>
+        </p:nvSpPr>
+        <p:spPr>
+          <a:xfrm rot="5400000">
+            <a:off x="3645512" y="3463721"/>
+            <a:ext cx="1283287" cy="581822"/>
+          </a:xfrm>
+          <a:prstGeom prst="leftArrow">
+            <a:avLst/>
+          </a:prstGeom>
+          <a:solidFill>
+            <a:schemeClr val="accent4"/>
+          </a:solidFill>
+          <a:ln>
+            <a:solidFill>
+              <a:schemeClr val="tx1"/>
+            </a:solidFill>
+          </a:ln>
+        </p:spPr>
+        <p:style>
+          <a:lnRef idx="2">
+            <a:schemeClr val="dk1">
+              <a:shade val="15000"/>
+            </a:schemeClr>
+          </a:lnRef>
+          <a:fillRef idx="1">
+            <a:schemeClr val="dk1"/>
+          </a:fillRef>
+          <a:effectRef idx="0">
+            <a:schemeClr val="dk1"/>
+          </a:effectRef>
+          <a:fontRef idx="minor">
+            <a:schemeClr val="lt1"/>
+          </a:fontRef>
+        </p:style>
+        <p:txBody>
+          <a:bodyPr rtlCol="0" anchor="ctr"/>
+          <a:lstStyle/>
+          <a:p>
+            <a:pPr algn="ctr"/>
+            <a:endParaRPr lang="en-US" sz="2400"/>
+          </a:p>
+        </p:txBody>
+      </p:sp>
+      <p:sp>
+        <p:nvSpPr>
+          <p:cNvPr id="40" name="Arrow: Left 39">
+            <a:extLst>
+              <a:ext uri="{FF2B5EF4-FFF2-40B4-BE49-F238E27FC236}">
+                <a16:creationId xmlns:a16="http://schemas.microsoft.com/office/drawing/2014/main" id="{06640D30-67DC-3DCD-CB49-D01CAB22AE66}"/>
+              </a:ext>
+            </a:extLst>
+          </p:cNvPr>
+          <p:cNvSpPr/>
+          <p:nvPr/>
+        </p:nvSpPr>
+        <p:spPr>
+          <a:xfrm rot="16200000">
+            <a:off x="6558742" y="3463721"/>
+            <a:ext cx="1283287" cy="581822"/>
+          </a:xfrm>
+          <a:prstGeom prst="leftArrow">
+            <a:avLst/>
+          </a:prstGeom>
+          <a:solidFill>
+            <a:schemeClr val="accent4"/>
+          </a:solidFill>
+          <a:ln>
+            <a:solidFill>
+              <a:schemeClr val="tx1"/>
+            </a:solidFill>
+          </a:ln>
+        </p:spPr>
+        <p:style>
+          <a:lnRef idx="2">
+            <a:schemeClr val="dk1">
+              <a:shade val="15000"/>
+            </a:schemeClr>
+          </a:lnRef>
+          <a:fillRef idx="1">
+            <a:schemeClr val="dk1"/>
+          </a:fillRef>
+          <a:effectRef idx="0">
+            <a:schemeClr val="dk1"/>
+          </a:effectRef>
+          <a:fontRef idx="minor">
+            <a:schemeClr val="lt1"/>
+          </a:fontRef>
+        </p:style>
+        <p:txBody>
+          <a:bodyPr rtlCol="0" anchor="ctr"/>
+          <a:lstStyle/>
+          <a:p>
+            <a:pPr algn="ctr"/>
+            <a:endParaRPr lang="en-US" sz="2400"/>
+          </a:p>
+        </p:txBody>
+      </p:sp>
+    </p:spTree>
+    <p:extLst>
+      <p:ext uri="{BB962C8B-B14F-4D97-AF65-F5344CB8AC3E}">
+        <p14:creationId xmlns:p14="http://schemas.microsoft.com/office/powerpoint/2010/main" val="651748214"/>
       </p:ext>
     </p:extLst>
   </p:cSld>
